--- a/Programacion II/Clases/Clase 8 - Documentacion y QA Javadoc y pruebas/Presentacion.pptx
+++ b/Programacion II/Clases/Clase 8 - Documentacion y QA Javadoc y pruebas/Presentacion.pptx
@@ -18,6 +18,11 @@
     <p:sldId id="266" r:id="rId17"/>
     <p:sldId id="267" r:id="rId18"/>
     <p:sldId id="268" r:id="rId19"/>
+    <p:sldId id="269" r:id="rId20"/>
+    <p:sldId id="270" r:id="rId21"/>
+    <p:sldId id="271" r:id="rId22"/>
+    <p:sldId id="272" r:id="rId23"/>
+    <p:sldId id="273" r:id="rId24"/>
   </p:sldIdLst>
   <p:sldSz cx="12191695" cy="6858000" type="screen4x3"/>
   <p:notesSz cx="6858000" cy="9144000"/>
@@ -3618,7 +3623,7 @@
                 </a:solidFill>
                 <a:latin typeface="Calibri"/>
               </a:rPr>
-              <a:t>Antes de entregar — autochequeo</a:t>
+              <a:t>El contrato documentado y su prueba</a:t>
             </a:r>
           </a:p>
         </p:txBody>
@@ -3632,7 +3637,7 @@
         <p:spPr>
           <a:xfrm>
             <a:off x="457200" y="1261872"/>
-            <a:ext cx="11277295" cy="566928"/>
+            <a:ext cx="11277295" cy="4773168"/>
           </a:xfrm>
           <a:prstGeom prst="roundRect">
             <a:avLst>
@@ -3640,7 +3645,7 @@
             </a:avLst>
           </a:prstGeom>
           <a:solidFill>
-            <a:srgbClr val="F2F2F2"/>
+            <a:srgbClr val="1E2A38"/>
           </a:solidFill>
           <a:ln>
             <a:noFill/>
@@ -3676,19 +3681,17 @@
         </p:nvSpPr>
         <p:spPr>
           <a:xfrm>
-            <a:off x="640080" y="1408175"/>
-            <a:ext cx="274320" cy="274320"/>
+            <a:off x="457200" y="1261872"/>
+            <a:ext cx="11277295" cy="320040"/>
           </a:xfrm>
           <a:prstGeom prst="rect">
             <a:avLst/>
           </a:prstGeom>
           <a:solidFill>
-            <a:srgbClr val="FFFFFF"/>
+            <a:srgbClr val="095292"/>
           </a:solidFill>
           <a:ln>
-            <a:solidFill>
-              <a:srgbClr val="333333"/>
-            </a:solidFill>
+            <a:noFill/>
           </a:ln>
         </p:spPr>
         <p:style>
@@ -3715,44 +3718,33 @@
       </p:sp>
       <p:sp>
         <p:nvSpPr>
-          <p:cNvPr id="7" name="Rectangle 6"/>
-          <p:cNvSpPr/>
-          <p:nvPr/>
-        </p:nvSpPr>
-        <p:spPr>
-          <a:xfrm>
-            <a:off x="640080" y="1408175"/>
-            <a:ext cx="73152" cy="274320"/>
-          </a:xfrm>
-          <a:prstGeom prst="rect">
-            <a:avLst/>
-          </a:prstGeom>
-          <a:solidFill>
-            <a:srgbClr val="269CCB"/>
-          </a:solidFill>
-          <a:ln>
-            <a:noFill/>
-          </a:ln>
-        </p:spPr>
-        <p:style>
-          <a:lnRef idx="1">
-            <a:schemeClr val="accent1"/>
-          </a:lnRef>
-          <a:fillRef idx="3">
-            <a:schemeClr val="accent1"/>
-          </a:fillRef>
-          <a:effectRef idx="2">
-            <a:schemeClr val="accent1"/>
-          </a:effectRef>
-          <a:fontRef idx="minor">
-            <a:schemeClr val="lt1"/>
-          </a:fontRef>
-        </p:style>
-        <p:txBody>
-          <a:bodyPr rtlCol="0" anchor="ctr"/>
-          <a:lstStyle/>
-          <a:p>
-            <a:pPr algn="ctr"/>
+          <p:cNvPr id="7" name="TextBox 6"/>
+          <p:cNvSpPr txBox="1"/>
+          <p:nvPr/>
+        </p:nvSpPr>
+        <p:spPr>
+          <a:xfrm>
+            <a:off x="685800" y="1307592"/>
+            <a:ext cx="10820095" cy="256032"/>
+          </a:xfrm>
+          <a:prstGeom prst="rect">
+            <a:avLst/>
+          </a:prstGeom>
+          <a:noFill/>
+        </p:spPr>
+        <p:txBody>
+          <a:bodyPr wrap="square" anchor="ctr"/>
+          <a:lstStyle/>
+          <a:p>
+            <a:r>
+              <a:rPr sz="1000" b="1" i="0">
+                <a:solidFill>
+                  <a:srgbClr val="269CCB"/>
+                </a:solidFill>
+                <a:latin typeface="Calibri"/>
+              </a:rPr>
+              <a:t>● ● ●</a:t>
+            </a:r>
           </a:p>
         </p:txBody>
       </p:sp>
@@ -3764,8 +3756,8 @@
         </p:nvSpPr>
         <p:spPr>
           <a:xfrm>
-            <a:off x="1097280" y="1353312"/>
-            <a:ext cx="10362895" cy="402336"/>
+            <a:off x="777240" y="1719072"/>
+            <a:ext cx="10637215" cy="4133087"/>
           </a:xfrm>
           <a:prstGeom prst="rect">
             <a:avLst/>
@@ -3773,354 +3765,306 @@
           <a:noFill/>
         </p:spPr>
         <p:txBody>
-          <a:bodyPr wrap="square" anchor="ctr"/>
-          <a:lstStyle/>
-          <a:p>
-            <a:r>
-              <a:rPr sz="1500" b="0" i="0">
-                <a:solidFill>
-                  <a:srgbClr val="333333"/>
-                </a:solidFill>
-                <a:latin typeface="Calibri"/>
-              </a:rPr>
-              <a:t>Si el HTML generado sale vacio o le falta un metodo: con que tres caracteres exactos abre su bloque de comentario y donde esta ubicado respecto al metodo?</a:t>
-            </a:r>
-          </a:p>
-        </p:txBody>
-      </p:sp>
-      <p:sp>
-        <p:nvSpPr>
-          <p:cNvPr id="9" name="Rounded Rectangle 8"/>
-          <p:cNvSpPr/>
-          <p:nvPr/>
-        </p:nvSpPr>
-        <p:spPr>
-          <a:xfrm>
-            <a:off x="457200" y="1938528"/>
-            <a:ext cx="11277295" cy="566928"/>
-          </a:xfrm>
-          <a:prstGeom prst="roundRect">
-            <a:avLst>
-              <a:gd name="adj" fmla="val 12000"/>
-            </a:avLst>
-          </a:prstGeom>
-          <a:solidFill>
-            <a:srgbClr val="F2F2F2"/>
-          </a:solidFill>
-          <a:ln>
-            <a:noFill/>
-          </a:ln>
-        </p:spPr>
-        <p:style>
-          <a:lnRef idx="1">
-            <a:schemeClr val="accent1"/>
-          </a:lnRef>
-          <a:fillRef idx="3">
-            <a:schemeClr val="accent1"/>
-          </a:fillRef>
-          <a:effectRef idx="2">
-            <a:schemeClr val="accent1"/>
-          </a:effectRef>
-          <a:fontRef idx="minor">
-            <a:schemeClr val="lt1"/>
-          </a:fontRef>
-        </p:style>
-        <p:txBody>
-          <a:bodyPr rtlCol="0" anchor="ctr"/>
+          <a:bodyPr wrap="square">
+            <a:spAutoFit/>
+          </a:bodyPr>
+          <a:lstStyle/>
+          <a:p>
+            <a:pPr>
+              <a:spcAft>
+                <a:spcPts val="371"/>
+              </a:spcAft>
+            </a:pPr>
+            <a:r>
+              <a:rPr sz="1300" b="0" i="0">
+                <a:solidFill>
+                  <a:srgbClr val="FFFFFF"/>
+                </a:solidFill>
+                <a:latin typeface="Calibri"/>
+              </a:rPr>
+              <a:t>/**</a:t>
+            </a:r>
+          </a:p>
+          <a:p>
+            <a:pPr>
+              <a:spcAft>
+                <a:spcPts val="371"/>
+              </a:spcAft>
+            </a:pPr>
+            <a:r>
+              <a:rPr sz="1300" b="0" i="0">
+                <a:solidFill>
+                  <a:srgbClr val="FFFFFF"/>
+                </a:solidFill>
+                <a:latin typeface="Calibri"/>
+              </a:rPr>
+              <a:t> * Agenda una cita para una mascota registrada y activa.</a:t>
+            </a:r>
+          </a:p>
+          <a:p>
+            <a:pPr>
+              <a:spcAft>
+                <a:spcPts val="371"/>
+              </a:spcAft>
+            </a:pPr>
+            <a:r>
+              <a:rPr sz="1300" b="0" i="0">
+                <a:solidFill>
+                  <a:srgbClr val="FFFFFF"/>
+                </a:solidFill>
+                <a:latin typeface="Calibri"/>
+              </a:rPr>
+              <a:t> * @param idMascota identificador del expediente, por ejemplo {@code M-001}</a:t>
+            </a:r>
+          </a:p>
+          <a:p>
+            <a:pPr>
+              <a:spcAft>
+                <a:spcPts val="371"/>
+              </a:spcAft>
+            </a:pPr>
+            <a:r>
+              <a:rPr sz="1300" b="0" i="0">
+                <a:solidFill>
+                  <a:srgbClr val="FFFFFF"/>
+                </a:solidFill>
+                <a:latin typeface="Calibri"/>
+              </a:rPr>
+              <a:t> * @param fechaHora fecha y hora en formato yyyy-MM-dd HH:mm</a:t>
+            </a:r>
+          </a:p>
+          <a:p>
+            <a:pPr>
+              <a:spcAft>
+                <a:spcPts val="371"/>
+              </a:spcAft>
+            </a:pPr>
+            <a:r>
+              <a:rPr sz="1300" b="0" i="0">
+                <a:solidFill>
+                  <a:srgbClr val="FFFFFF"/>
+                </a:solidFill>
+                <a:latin typeface="Calibri"/>
+              </a:rPr>
+              <a:t> * @return la cita creada</a:t>
+            </a:r>
+          </a:p>
+          <a:p>
+            <a:pPr>
+              <a:spcAft>
+                <a:spcPts val="371"/>
+              </a:spcAft>
+            </a:pPr>
+            <a:r>
+              <a:rPr sz="1300" b="0" i="0">
+                <a:solidFill>
+                  <a:srgbClr val="FFFFFF"/>
+                </a:solidFill>
+                <a:latin typeface="Calibri"/>
+              </a:rPr>
+              <a:t> * @throws IllegalStateException si la mascota esta inactiva</a:t>
+            </a:r>
+          </a:p>
+          <a:p>
+            <a:pPr>
+              <a:spcAft>
+                <a:spcPts val="371"/>
+              </a:spcAft>
+            </a:pPr>
+            <a:r>
+              <a:rPr sz="1300" b="0" i="0">
+                <a:solidFill>
+                  <a:srgbClr val="FFFFFF"/>
+                </a:solidFill>
+                <a:latin typeface="Calibri"/>
+              </a:rPr>
+              <a:t> */</a:t>
+            </a:r>
+          </a:p>
+          <a:p>
+            <a:pPr>
+              <a:spcAft>
+                <a:spcPts val="371"/>
+              </a:spcAft>
+            </a:pPr>
+            <a:r>
+              <a:rPr sz="1300" b="0" i="0">
+                <a:solidFill>
+                  <a:srgbClr val="FFFFFF"/>
+                </a:solidFill>
+                <a:latin typeface="Calibri"/>
+              </a:rPr>
+              <a:t>public Cita agendar(String idMascota, String fechaHora) { /* reglas en AgendaService */ }</a:t>
+            </a:r>
+          </a:p>
+          <a:p>
+            <a:pPr>
+              <a:spcAft>
+                <a:spcPts val="371"/>
+              </a:spcAft>
+            </a:pPr>
+            <a:r>
+              <a:rPr sz="1300" b="0" i="0">
+                <a:solidFill>
+                  <a:srgbClr val="FFFFFF"/>
+                </a:solidFill>
+                <a:latin typeface="Calibri"/>
+              </a:rPr>
+              <a:t/>
+            </a:r>
+          </a:p>
+          <a:p>
+            <a:pPr>
+              <a:spcAft>
+                <a:spcPts val="371"/>
+              </a:spcAft>
+            </a:pPr>
+            <a:r>
+              <a:rPr sz="1300" b="0" i="0">
+                <a:solidFill>
+                  <a:srgbClr val="FFFFFF"/>
+                </a:solidFill>
+                <a:latin typeface="Calibri"/>
+              </a:rPr>
+              <a:t>@Test   // un caso = un metodo cuyo nombre se lee como una frase</a:t>
+            </a:r>
+          </a:p>
+          <a:p>
+            <a:pPr>
+              <a:spcAft>
+                <a:spcPts val="371"/>
+              </a:spcAft>
+            </a:pPr>
+            <a:r>
+              <a:rPr sz="1300" b="0" i="0">
+                <a:solidFill>
+                  <a:srgbClr val="FFFFFF"/>
+                </a:solidFill>
+                <a:latin typeface="Calibri"/>
+              </a:rPr>
+              <a:t>public void agendar_mascotaInactiva_lanzaIllegalStateException() {</a:t>
+            </a:r>
+          </a:p>
+          <a:p>
+            <a:pPr>
+              <a:spcAft>
+                <a:spcPts val="371"/>
+              </a:spcAft>
+            </a:pPr>
+            <a:r>
+              <a:rPr sz="1300" b="0" i="0">
+                <a:solidFill>
+                  <a:srgbClr val="FFFFFF"/>
+                </a:solidFill>
+                <a:latin typeface="Calibri"/>
+              </a:rPr>
+              <a:t>    agenda.registrarMascota(new Mascota("M-009", "Rocky", false));   // Arrange</a:t>
+            </a:r>
+          </a:p>
+          <a:p>
+            <a:pPr>
+              <a:spcAft>
+                <a:spcPts val="371"/>
+              </a:spcAft>
+            </a:pPr>
+            <a:r>
+              <a:rPr sz="1300" b="0" i="0">
+                <a:solidFill>
+                  <a:srgbClr val="FFFFFF"/>
+                </a:solidFill>
+                <a:latin typeface="Calibri"/>
+              </a:rPr>
+              <a:t>    assertThrows(IllegalStateException.class,                         // Act + Assert</a:t>
+            </a:r>
+          </a:p>
+          <a:p>
+            <a:pPr>
+              <a:spcAft>
+                <a:spcPts val="371"/>
+              </a:spcAft>
+            </a:pPr>
+            <a:r>
+              <a:rPr sz="1300" b="0" i="0">
+                <a:solidFill>
+                  <a:srgbClr val="FFFFFF"/>
+                </a:solidFill>
+                <a:latin typeface="Calibri"/>
+              </a:rPr>
+              <a:t>            () -&gt; agenda.agendar("M-009", "2026-09-30 10:00"));</a:t>
+            </a:r>
+          </a:p>
+          <a:p>
+            <a:pPr>
+              <a:spcAft>
+                <a:spcPts val="371"/>
+              </a:spcAft>
+            </a:pPr>
+            <a:r>
+              <a:rPr sz="1300" b="0" i="0">
+                <a:solidFill>
+                  <a:srgbClr val="FFFFFF"/>
+                </a:solidFill>
+                <a:latin typeface="Calibri"/>
+              </a:rPr>
+              <a:t>    assertEquals(0, agenda.totalCitas());   // y ademas no dejo la cita a medias</a:t>
+            </a:r>
+          </a:p>
+          <a:p>
+            <a:pPr>
+              <a:spcAft>
+                <a:spcPts val="371"/>
+              </a:spcAft>
+            </a:pPr>
+            <a:r>
+              <a:rPr sz="1300" b="0" i="0">
+                <a:solidFill>
+                  <a:srgbClr val="FFFFFF"/>
+                </a:solidFill>
+                <a:latin typeface="Calibri"/>
+              </a:rPr>
+              <a:t>}</a:t>
+            </a:r>
+          </a:p>
+        </p:txBody>
+      </p:sp>
+      <p:sp>
+        <p:nvSpPr>
+          <p:cNvPr id="9" name="TextBox 8"/>
+          <p:cNvSpPr txBox="1"/>
+          <p:nvPr/>
+        </p:nvSpPr>
+        <p:spPr>
+          <a:xfrm>
+            <a:off x="457200" y="6080760"/>
+            <a:ext cx="11277295" cy="320040"/>
+          </a:xfrm>
+          <a:prstGeom prst="rect">
+            <a:avLst/>
+          </a:prstGeom>
+          <a:noFill/>
+        </p:spPr>
+        <p:txBody>
+          <a:bodyPr wrap="square">
+            <a:spAutoFit/>
+          </a:bodyPr>
           <a:lstStyle/>
           <a:p>
             <a:pPr algn="ctr"/>
-          </a:p>
-        </p:txBody>
-      </p:sp>
-      <p:sp>
-        <p:nvSpPr>
-          <p:cNvPr id="10" name="Rectangle 9"/>
-          <p:cNvSpPr/>
-          <p:nvPr/>
-        </p:nvSpPr>
-        <p:spPr>
-          <a:xfrm>
-            <a:off x="640080" y="2084832"/>
-            <a:ext cx="274320" cy="274320"/>
-          </a:xfrm>
-          <a:prstGeom prst="rect">
-            <a:avLst/>
-          </a:prstGeom>
-          <a:solidFill>
-            <a:srgbClr val="FFFFFF"/>
-          </a:solidFill>
-          <a:ln>
-            <a:solidFill>
-              <a:srgbClr val="333333"/>
-            </a:solidFill>
-          </a:ln>
-        </p:spPr>
-        <p:style>
-          <a:lnRef idx="1">
-            <a:schemeClr val="accent1"/>
-          </a:lnRef>
-          <a:fillRef idx="3">
-            <a:schemeClr val="accent1"/>
-          </a:fillRef>
-          <a:effectRef idx="2">
-            <a:schemeClr val="accent1"/>
-          </a:effectRef>
-          <a:fontRef idx="minor">
-            <a:schemeClr val="lt1"/>
-          </a:fontRef>
-        </p:style>
-        <p:txBody>
-          <a:bodyPr rtlCol="0" anchor="ctr"/>
-          <a:lstStyle/>
-          <a:p>
-            <a:pPr algn="ctr"/>
-          </a:p>
-        </p:txBody>
-      </p:sp>
-      <p:sp>
-        <p:nvSpPr>
-          <p:cNvPr id="11" name="Rectangle 10"/>
-          <p:cNvSpPr/>
-          <p:nvPr/>
-        </p:nvSpPr>
-        <p:spPr>
-          <a:xfrm>
-            <a:off x="640080" y="2084832"/>
-            <a:ext cx="73152" cy="274320"/>
-          </a:xfrm>
-          <a:prstGeom prst="rect">
-            <a:avLst/>
-          </a:prstGeom>
-          <a:solidFill>
-            <a:srgbClr val="269CCB"/>
-          </a:solidFill>
-          <a:ln>
-            <a:noFill/>
-          </a:ln>
-        </p:spPr>
-        <p:style>
-          <a:lnRef idx="1">
-            <a:schemeClr val="accent1"/>
-          </a:lnRef>
-          <a:fillRef idx="3">
-            <a:schemeClr val="accent1"/>
-          </a:fillRef>
-          <a:effectRef idx="2">
-            <a:schemeClr val="accent1"/>
-          </a:effectRef>
-          <a:fontRef idx="minor">
-            <a:schemeClr val="lt1"/>
-          </a:fontRef>
-        </p:style>
-        <p:txBody>
-          <a:bodyPr rtlCol="0" anchor="ctr"/>
-          <a:lstStyle/>
-          <a:p>
-            <a:pPr algn="ctr"/>
-          </a:p>
-        </p:txBody>
-      </p:sp>
-      <p:sp>
-        <p:nvSpPr>
-          <p:cNvPr id="12" name="TextBox 11"/>
-          <p:cNvSpPr txBox="1"/>
-          <p:nvPr/>
-        </p:nvSpPr>
-        <p:spPr>
-          <a:xfrm>
-            <a:off x="1097280" y="2029968"/>
-            <a:ext cx="10362895" cy="402336"/>
-          </a:xfrm>
-          <a:prstGeom prst="rect">
-            <a:avLst/>
-          </a:prstGeom>
-          <a:noFill/>
-        </p:spPr>
-        <p:txBody>
-          <a:bodyPr wrap="square" anchor="ctr"/>
-          <a:lstStyle/>
-          <a:p>
-            <a:r>
-              <a:rPr sz="1500" b="0" i="0">
-                <a:solidFill>
-                  <a:srgbClr val="333333"/>
-                </a:solidFill>
-                <a:latin typeface="Calibri"/>
-              </a:rPr>
-              <a:t>Si una prueba pasa cuando se corre sola pero falla cuando se corren todas, que estado esta sobreviviendo de un caso al siguiente y quien deberia limpiarlo?</a:t>
-            </a:r>
-          </a:p>
-        </p:txBody>
-      </p:sp>
-      <p:sp>
-        <p:nvSpPr>
-          <p:cNvPr id="13" name="Rounded Rectangle 12"/>
-          <p:cNvSpPr/>
-          <p:nvPr/>
-        </p:nvSpPr>
-        <p:spPr>
-          <a:xfrm>
-            <a:off x="457200" y="2615184"/>
-            <a:ext cx="11277295" cy="566928"/>
-          </a:xfrm>
-          <a:prstGeom prst="roundRect">
-            <a:avLst>
-              <a:gd name="adj" fmla="val 12000"/>
-            </a:avLst>
-          </a:prstGeom>
-          <a:solidFill>
-            <a:srgbClr val="F2F2F2"/>
-          </a:solidFill>
-          <a:ln>
-            <a:noFill/>
-          </a:ln>
-        </p:spPr>
-        <p:style>
-          <a:lnRef idx="1">
-            <a:schemeClr val="accent1"/>
-          </a:lnRef>
-          <a:fillRef idx="3">
-            <a:schemeClr val="accent1"/>
-          </a:fillRef>
-          <a:effectRef idx="2">
-            <a:schemeClr val="accent1"/>
-          </a:effectRef>
-          <a:fontRef idx="minor">
-            <a:schemeClr val="lt1"/>
-          </a:fontRef>
-        </p:style>
-        <p:txBody>
-          <a:bodyPr rtlCol="0" anchor="ctr"/>
-          <a:lstStyle/>
-          <a:p>
-            <a:pPr algn="ctr"/>
-          </a:p>
-        </p:txBody>
-      </p:sp>
-      <p:sp>
-        <p:nvSpPr>
-          <p:cNvPr id="14" name="Rectangle 13"/>
-          <p:cNvSpPr/>
-          <p:nvPr/>
-        </p:nvSpPr>
-        <p:spPr>
-          <a:xfrm>
-            <a:off x="640080" y="2761488"/>
-            <a:ext cx="274320" cy="274320"/>
-          </a:xfrm>
-          <a:prstGeom prst="rect">
-            <a:avLst/>
-          </a:prstGeom>
-          <a:solidFill>
-            <a:srgbClr val="FFFFFF"/>
-          </a:solidFill>
-          <a:ln>
-            <a:solidFill>
-              <a:srgbClr val="333333"/>
-            </a:solidFill>
-          </a:ln>
-        </p:spPr>
-        <p:style>
-          <a:lnRef idx="1">
-            <a:schemeClr val="accent1"/>
-          </a:lnRef>
-          <a:fillRef idx="3">
-            <a:schemeClr val="accent1"/>
-          </a:fillRef>
-          <a:effectRef idx="2">
-            <a:schemeClr val="accent1"/>
-          </a:effectRef>
-          <a:fontRef idx="minor">
-            <a:schemeClr val="lt1"/>
-          </a:fontRef>
-        </p:style>
-        <p:txBody>
-          <a:bodyPr rtlCol="0" anchor="ctr"/>
-          <a:lstStyle/>
-          <a:p>
-            <a:pPr algn="ctr"/>
-          </a:p>
-        </p:txBody>
-      </p:sp>
-      <p:sp>
-        <p:nvSpPr>
-          <p:cNvPr id="15" name="Rectangle 14"/>
-          <p:cNvSpPr/>
-          <p:nvPr/>
-        </p:nvSpPr>
-        <p:spPr>
-          <a:xfrm>
-            <a:off x="640080" y="2761488"/>
-            <a:ext cx="73152" cy="274320"/>
-          </a:xfrm>
-          <a:prstGeom prst="rect">
-            <a:avLst/>
-          </a:prstGeom>
-          <a:solidFill>
-            <a:srgbClr val="269CCB"/>
-          </a:solidFill>
-          <a:ln>
-            <a:noFill/>
-          </a:ln>
-        </p:spPr>
-        <p:style>
-          <a:lnRef idx="1">
-            <a:schemeClr val="accent1"/>
-          </a:lnRef>
-          <a:fillRef idx="3">
-            <a:schemeClr val="accent1"/>
-          </a:fillRef>
-          <a:effectRef idx="2">
-            <a:schemeClr val="accent1"/>
-          </a:effectRef>
-          <a:fontRef idx="minor">
-            <a:schemeClr val="lt1"/>
-          </a:fontRef>
-        </p:style>
-        <p:txBody>
-          <a:bodyPr rtlCol="0" anchor="ctr"/>
-          <a:lstStyle/>
-          <a:p>
-            <a:pPr algn="ctr"/>
-          </a:p>
-        </p:txBody>
-      </p:sp>
-      <p:sp>
-        <p:nvSpPr>
-          <p:cNvPr id="16" name="TextBox 15"/>
-          <p:cNvSpPr txBox="1"/>
-          <p:nvPr/>
-        </p:nvSpPr>
-        <p:spPr>
-          <a:xfrm>
-            <a:off x="1097280" y="2706624"/>
-            <a:ext cx="10362895" cy="402336"/>
-          </a:xfrm>
-          <a:prstGeom prst="rect">
-            <a:avLst/>
-          </a:prstGeom>
-          <a:noFill/>
-        </p:spPr>
-        <p:txBody>
-          <a:bodyPr wrap="square" anchor="ctr"/>
-          <a:lstStyle/>
-          <a:p>
-            <a:r>
-              <a:rPr sz="1500" b="0" i="0">
-                <a:solidFill>
-                  <a:srgbClr val="333333"/>
-                </a:solidFill>
-                <a:latin typeface="Calibri"/>
-              </a:rPr>
-              <a:t>Si para comprobar la regla usted necesita abrir la ventana y oprimir un boton, donde quedo escrita esa regla y donde deberia estar?</a:t>
-            </a:r>
-          </a:p>
-        </p:txBody>
-      </p:sp>
-      <p:sp>
-        <p:nvSpPr>
-          <p:cNvPr id="17" name="TextBox 16"/>
+            <a:r>
+              <a:rPr sz="1200" b="0" i="1">
+                <a:solidFill>
+                  <a:srgbClr val="666666"/>
+                </a:solidFill>
+                <a:latin typeface="Calibri"/>
+              </a:rPr>
+              <a:t>Lo que el Javadoc promete es exactamente lo que la prueba obliga a cumplir.</a:t>
+            </a:r>
+          </a:p>
+        </p:txBody>
+      </p:sp>
+      <p:sp>
+        <p:nvSpPr>
+          <p:cNvPr id="10" name="TextBox 9"/>
           <p:cNvSpPr txBox="1"/>
           <p:nvPr/>
         </p:nvSpPr>
@@ -4294,7 +4238,7 @@
                 </a:solidFill>
                 <a:latin typeface="Calibri"/>
               </a:rPr>
-              <a:t>Criterios de exito / entregable</a:t>
+              <a:t>Demo del dia</a:t>
             </a:r>
           </a:p>
         </p:txBody>
@@ -4342,7 +4286,7 @@
                 </a:solidFill>
                 <a:latin typeface="Calibri"/>
               </a:rPr>
-              <a:t>Entregable:</a:t>
+              <a:t>Herramienta:</a:t>
             </a:r>
             <a:r>
               <a:rPr sz="2000" b="0" i="0">
@@ -4351,7 +4295,7 @@
                 </a:solidFill>
                 <a:latin typeface="Calibri"/>
               </a:rPr>
-              <a:t> Mascota, Cita y AgendaService con Javadoc completo, la carpeta HTML generada y una clase de pruebas con cuatro casos, subidos a la plataforma del curso.</a:t>
+              <a:t> Visual Studio Code (Java)</a:t>
             </a:r>
           </a:p>
           <a:p>
@@ -4376,7 +4320,7 @@
                 </a:solidFill>
                 <a:latin typeface="Calibri"/>
               </a:rPr>
-              <a:t>Exito:</a:t>
+              <a:t>Demo:</a:t>
             </a:r>
             <a:r>
               <a:rPr sz="2000" b="0" i="0">
@@ -4385,7 +4329,7 @@
                 </a:solidFill>
                 <a:latin typeface="Calibri"/>
               </a:rPr>
-              <a:t> El Javadoc de agendar incluye @param de los dos parametros, @return y al menos dos @throws, y la regla de la mascota inactiva queda escrita en palabras.</a:t>
+              <a:t> El docente escribe un bloque Javadoc, genera la documentacion HTML con javadoc desde la terminal integrada y luego corre las pruebas mostrando la barra en rojo, corrige la regla y la muestra en verde.</a:t>
             </a:r>
           </a:p>
           <a:p>
@@ -4401,127 +4345,7 @@
                 </a:solidFill>
                 <a:latin typeface="Calibri"/>
               </a:rPr>
-              <a:t>–   </a:t>
-            </a:r>
-            <a:r>
-              <a:rPr sz="2000" b="1" i="0">
-                <a:solidFill>
-                  <a:srgbClr val="333333"/>
-                </a:solidFill>
-                <a:latin typeface="Calibri"/>
-              </a:rPr>
-              <a:t>Exito:</a:t>
-            </a:r>
-            <a:r>
-              <a:rPr sz="2000" b="0" i="0">
-                <a:solidFill>
-                  <a:srgbClr val="333333"/>
-                </a:solidFill>
-                <a:latin typeface="Calibri"/>
-              </a:rPr>
-              <a:t> La documentacion HTML se genera sin errores y en la ficha de AgendaService se lee el resumen de cada metodo publico.</a:t>
-            </a:r>
-          </a:p>
-          <a:p>
-            <a:pPr>
-              <a:spcAft>
-                <a:spcPts val="800"/>
-              </a:spcAft>
-            </a:pPr>
-            <a:r>
-              <a:rPr sz="2000" b="0" i="0">
-                <a:solidFill>
-                  <a:srgbClr val="333333"/>
-                </a:solidFill>
-                <a:latin typeface="Calibri"/>
-              </a:rPr>
-              <a:t>–   </a:t>
-            </a:r>
-            <a:r>
-              <a:rPr sz="2000" b="1" i="0">
-                <a:solidFill>
-                  <a:srgbClr val="333333"/>
-                </a:solidFill>
-                <a:latin typeface="Calibri"/>
-              </a:rPr>
-              <a:t>Exito:</a:t>
-            </a:r>
-            <a:r>
-              <a:rPr sz="2000" b="0" i="0">
-                <a:solidFill>
-                  <a:srgbClr val="333333"/>
-                </a:solidFill>
-                <a:latin typeface="Calibri"/>
-              </a:rPr>
-              <a:t> Existen cuatro casos de prueba con nombres que describen escenario y resultado esperado, y cada uno funciona sin depender de los otros.</a:t>
-            </a:r>
-          </a:p>
-          <a:p>
-            <a:pPr>
-              <a:spcAft>
-                <a:spcPts val="800"/>
-              </a:spcAft>
-            </a:pPr>
-            <a:r>
-              <a:rPr sz="2000" b="0" i="0">
-                <a:solidFill>
-                  <a:srgbClr val="333333"/>
-                </a:solidFill>
-                <a:latin typeface="Calibri"/>
-              </a:rPr>
-              <a:t>–   </a:t>
-            </a:r>
-            <a:r>
-              <a:rPr sz="2000" b="1" i="0">
-                <a:solidFill>
-                  <a:srgbClr val="333333"/>
-                </a:solidFill>
-                <a:latin typeface="Calibri"/>
-              </a:rPr>
-              <a:t>Exito:</a:t>
-            </a:r>
-            <a:r>
-              <a:rPr sz="2000" b="0" i="0">
-                <a:solidFill>
-                  <a:srgbClr val="333333"/>
-                </a:solidFill>
-                <a:latin typeface="Calibri"/>
-              </a:rPr>
-              <a:t> Al comentar la validacion de mascota inactiva la prueba correspondiente falla, y al restaurarla vuelve a pasar (evidencia de rojo y de verde).</a:t>
-            </a:r>
-          </a:p>
-          <a:p>
-            <a:pPr>
-              <a:spcAft>
-                <a:spcPts val="800"/>
-              </a:spcAft>
-            </a:pPr>
-            <a:r>
-              <a:rPr sz="2000" b="0" i="0">
-                <a:solidFill>
-                  <a:srgbClr val="333333"/>
-                </a:solidFill>
-                <a:latin typeface="Calibri"/>
-              </a:rPr>
-              <a:t>–   </a:t>
-            </a:r>
-            <a:r>
-              <a:rPr sz="2000" b="1" i="0">
-                <a:solidFill>
-                  <a:srgbClr val="333333"/>
-                </a:solidFill>
-                <a:latin typeface="Calibri"/>
-              </a:rPr>
-              <a:t>Entrega en la plataforma del curso</a:t>
-            </a:r>
-            <a:r>
-              <a:rPr sz="2000" b="0" i="0">
-                <a:solidFill>
-                  <a:srgbClr val="333333"/>
-                </a:solidFill>
-                <a:latin typeface="Calibri"/>
-              </a:rPr>
-              <a:t> — en la fecha que indique el docente.</a:t>
+              <a:t>–   Mismo dominio VetCare — no otro ejemplo.</a:t>
             </a:r>
           </a:p>
         </p:txBody>
@@ -4702,109 +4526,21 @@
                 </a:solidFill>
                 <a:latin typeface="Calibri"/>
               </a:rPr>
-              <a:t>Para el PI esta semana</a:t>
-            </a:r>
-          </a:p>
-        </p:txBody>
-      </p:sp>
-      <p:sp>
-        <p:nvSpPr>
-          <p:cNvPr id="5" name="Rounded Rectangle 4"/>
-          <p:cNvSpPr/>
-          <p:nvPr/>
-        </p:nvSpPr>
-        <p:spPr>
-          <a:xfrm>
-            <a:off x="457200" y="1261872"/>
-            <a:ext cx="11277295" cy="1051560"/>
-          </a:xfrm>
-          <a:prstGeom prst="roundRect">
-            <a:avLst>
-              <a:gd name="adj" fmla="val 12000"/>
-            </a:avLst>
-          </a:prstGeom>
-          <a:solidFill>
-            <a:srgbClr val="E8F4FA"/>
-          </a:solidFill>
-          <a:ln>
-            <a:noFill/>
-          </a:ln>
-        </p:spPr>
-        <p:style>
-          <a:lnRef idx="1">
-            <a:schemeClr val="accent1"/>
-          </a:lnRef>
-          <a:fillRef idx="3">
-            <a:schemeClr val="accent1"/>
-          </a:fillRef>
-          <a:effectRef idx="2">
-            <a:schemeClr val="accent1"/>
-          </a:effectRef>
-          <a:fontRef idx="minor">
-            <a:schemeClr val="lt1"/>
-          </a:fontRef>
-        </p:style>
-        <p:txBody>
-          <a:bodyPr rtlCol="0" anchor="ctr"/>
-          <a:lstStyle/>
-          <a:p>
-            <a:pPr algn="ctr"/>
-          </a:p>
-        </p:txBody>
-      </p:sp>
-      <p:sp>
-        <p:nvSpPr>
-          <p:cNvPr id="6" name="Rectangle 5"/>
-          <p:cNvSpPr/>
-          <p:nvPr/>
-        </p:nvSpPr>
-        <p:spPr>
-          <a:xfrm>
-            <a:off x="457200" y="1261872"/>
-            <a:ext cx="128016" cy="1051560"/>
-          </a:xfrm>
-          <a:prstGeom prst="rect">
-            <a:avLst/>
-          </a:prstGeom>
-          <a:solidFill>
-            <a:srgbClr val="269CCB"/>
-          </a:solidFill>
-          <a:ln>
-            <a:noFill/>
-          </a:ln>
-        </p:spPr>
-        <p:style>
-          <a:lnRef idx="1">
-            <a:schemeClr val="accent1"/>
-          </a:lnRef>
-          <a:fillRef idx="3">
-            <a:schemeClr val="accent1"/>
-          </a:fillRef>
-          <a:effectRef idx="2">
-            <a:schemeClr val="accent1"/>
-          </a:effectRef>
-          <a:fontRef idx="minor">
-            <a:schemeClr val="lt1"/>
-          </a:fontRef>
-        </p:style>
-        <p:txBody>
-          <a:bodyPr rtlCol="0" anchor="ctr"/>
-          <a:lstStyle/>
-          <a:p>
-            <a:pPr algn="ctr"/>
-          </a:p>
-        </p:txBody>
-      </p:sp>
-      <p:sp>
-        <p:nvSpPr>
-          <p:cNvPr id="7" name="TextBox 6"/>
+              <a:t>Taller PI — por que importa</a:t>
+            </a:r>
+          </a:p>
+        </p:txBody>
+      </p:sp>
+      <p:sp>
+        <p:nvSpPr>
+          <p:cNvPr id="5" name="TextBox 4"/>
           <p:cNvSpPr txBox="1"/>
           <p:nvPr/>
         </p:nvSpPr>
         <p:spPr>
           <a:xfrm>
-            <a:off x="777240" y="1399031"/>
-            <a:ext cx="10774375" cy="822959"/>
+            <a:off x="457200" y="1170432"/>
+            <a:ext cx="11277295" cy="5230368"/>
           </a:xfrm>
           <a:prstGeom prst="rect">
             <a:avLst/>
@@ -4817,313 +4553,76 @@
           </a:bodyPr>
           <a:lstStyle/>
           <a:p>
-            <a:r>
-              <a:rPr sz="1200" b="1" i="0">
-                <a:solidFill>
-                  <a:srgbClr val="269CCB"/>
-                </a:solidFill>
-                <a:latin typeface="Calibri"/>
-              </a:rPr>
-              <a:t>Info</a:t>
-            </a:r>
-          </a:p>
-          <a:p>
             <a:pPr>
-              <a:spcBef>
-                <a:spcPts val="400"/>
-              </a:spcBef>
+              <a:spcAft>
+                <a:spcPts val="800"/>
+              </a:spcAft>
             </a:pPr>
             <a:r>
-              <a:rPr sz="1400" b="0" i="0">
+              <a:rPr sz="2000" b="0" i="0">
                 <a:solidFill>
                   <a:srgbClr val="333333"/>
                 </a:solidFill>
                 <a:latin typeface="Calibri"/>
               </a:rPr>
-              <a:t>Hito: Las clases del dominio de VetCare quedan documentadas con Javadoc y la regla 'mascota inactiva no agenda' queda respaldada por pruebas que se ejecutan solas.</a:t>
-            </a:r>
-          </a:p>
-        </p:txBody>
-      </p:sp>
-      <p:sp>
-        <p:nvSpPr>
-          <p:cNvPr id="8" name="Rounded Rectangle 7"/>
-          <p:cNvSpPr/>
-          <p:nvPr/>
-        </p:nvSpPr>
-        <p:spPr>
-          <a:xfrm>
-            <a:off x="457200" y="2478024"/>
-            <a:ext cx="11277295" cy="1051560"/>
-          </a:xfrm>
-          <a:prstGeom prst="roundRect">
-            <a:avLst>
-              <a:gd name="adj" fmla="val 12000"/>
-            </a:avLst>
-          </a:prstGeom>
-          <a:solidFill>
-            <a:srgbClr val="FFF8E1"/>
-          </a:solidFill>
-          <a:ln>
-            <a:noFill/>
-          </a:ln>
-        </p:spPr>
-        <p:style>
-          <a:lnRef idx="1">
-            <a:schemeClr val="accent1"/>
-          </a:lnRef>
-          <a:fillRef idx="3">
-            <a:schemeClr val="accent1"/>
-          </a:fillRef>
-          <a:effectRef idx="2">
-            <a:schemeClr val="accent1"/>
-          </a:effectRef>
-          <a:fontRef idx="minor">
-            <a:schemeClr val="lt1"/>
-          </a:fontRef>
-        </p:style>
-        <p:txBody>
-          <a:bodyPr rtlCol="0" anchor="ctr"/>
-          <a:lstStyle/>
-          <a:p>
-            <a:pPr algn="ctr"/>
-          </a:p>
-        </p:txBody>
-      </p:sp>
-      <p:sp>
-        <p:nvSpPr>
-          <p:cNvPr id="9" name="Rectangle 8"/>
-          <p:cNvSpPr/>
-          <p:nvPr/>
-        </p:nvSpPr>
-        <p:spPr>
-          <a:xfrm>
-            <a:off x="457200" y="2478024"/>
-            <a:ext cx="128016" cy="1051560"/>
-          </a:xfrm>
-          <a:prstGeom prst="rect">
-            <a:avLst/>
-          </a:prstGeom>
-          <a:solidFill>
-            <a:srgbClr val="FFD000"/>
-          </a:solidFill>
-          <a:ln>
-            <a:noFill/>
-          </a:ln>
-        </p:spPr>
-        <p:style>
-          <a:lnRef idx="1">
-            <a:schemeClr val="accent1"/>
-          </a:lnRef>
-          <a:fillRef idx="3">
-            <a:schemeClr val="accent1"/>
-          </a:fillRef>
-          <a:effectRef idx="2">
-            <a:schemeClr val="accent1"/>
-          </a:effectRef>
-          <a:fontRef idx="minor">
-            <a:schemeClr val="lt1"/>
-          </a:fontRef>
-        </p:style>
-        <p:txBody>
-          <a:bodyPr rtlCol="0" anchor="ctr"/>
-          <a:lstStyle/>
-          <a:p>
-            <a:pPr algn="ctr"/>
-          </a:p>
-        </p:txBody>
-      </p:sp>
-      <p:sp>
-        <p:nvSpPr>
-          <p:cNvPr id="10" name="TextBox 9"/>
-          <p:cNvSpPr txBox="1"/>
-          <p:nvPr/>
-        </p:nvSpPr>
-        <p:spPr>
-          <a:xfrm>
-            <a:off x="777240" y="2615184"/>
-            <a:ext cx="10774375" cy="822959"/>
-          </a:xfrm>
-          <a:prstGeom prst="rect">
-            <a:avLst/>
-          </a:prstGeom>
-          <a:noFill/>
-        </p:spPr>
-        <p:txBody>
-          <a:bodyPr wrap="square">
-            <a:spAutoFit/>
-          </a:bodyPr>
-          <a:lstStyle/>
-          <a:p>
-            <a:r>
-              <a:rPr sz="1200" b="1" i="0">
-                <a:solidFill>
-                  <a:srgbClr val="FFD000"/>
-                </a:solidFill>
-                <a:latin typeface="Calibri"/>
-              </a:rPr>
-              <a:t>Aclaración</a:t>
+              <a:t>–   </a:t>
+            </a:r>
+            <a:r>
+              <a:rPr sz="2000" b="1" i="0">
+                <a:solidFill>
+                  <a:srgbClr val="333333"/>
+                </a:solidFill>
+                <a:latin typeface="Calibri"/>
+              </a:rPr>
+              <a:t>Por que importa al PI:</a:t>
+            </a:r>
+            <a:r>
+              <a:rPr sz="2000" b="0" i="0">
+                <a:solidFill>
+                  <a:srgbClr val="333333"/>
+                </a:solidFill>
+                <a:latin typeface="Calibri"/>
+              </a:rPr>
+              <a:t> el PI se entrega y se sustenta, y un evaluador no puede confiar en lo que no esta documentado ni comprobado; hoy VetCare pasa de 'a mi me funciono' a 'aqui esta la evidencia'.</a:t>
             </a:r>
           </a:p>
           <a:p>
             <a:pPr>
-              <a:spcBef>
-                <a:spcPts val="400"/>
-              </a:spcBef>
+              <a:spcAft>
+                <a:spcPts val="800"/>
+              </a:spcAft>
             </a:pPr>
             <a:r>
-              <a:rPr sz="1400" b="0" i="0">
+              <a:rPr sz="2000" b="0" i="0">
                 <a:solidFill>
                   <a:srgbClr val="333333"/>
                 </a:solidFill>
                 <a:latin typeface="Calibri"/>
               </a:rPr>
-              <a:t>Enunciado completo: Clases/Proyecto Integrador/ (VetCare).</a:t>
-            </a:r>
-          </a:p>
-        </p:txBody>
-      </p:sp>
-      <p:sp>
-        <p:nvSpPr>
-          <p:cNvPr id="11" name="Rounded Rectangle 10"/>
-          <p:cNvSpPr/>
-          <p:nvPr/>
-        </p:nvSpPr>
-        <p:spPr>
-          <a:xfrm>
-            <a:off x="457200" y="3694176"/>
-            <a:ext cx="11277295" cy="1051560"/>
-          </a:xfrm>
-          <a:prstGeom prst="roundRect">
-            <a:avLst>
-              <a:gd name="adj" fmla="val 12000"/>
-            </a:avLst>
-          </a:prstGeom>
-          <a:solidFill>
-            <a:srgbClr val="FBE4E4"/>
-          </a:solidFill>
-          <a:ln>
-            <a:noFill/>
-          </a:ln>
-        </p:spPr>
-        <p:style>
-          <a:lnRef idx="1">
-            <a:schemeClr val="accent1"/>
-          </a:lnRef>
-          <a:fillRef idx="3">
-            <a:schemeClr val="accent1"/>
-          </a:fillRef>
-          <a:effectRef idx="2">
-            <a:schemeClr val="accent1"/>
-          </a:effectRef>
-          <a:fontRef idx="minor">
-            <a:schemeClr val="lt1"/>
-          </a:fontRef>
-        </p:style>
-        <p:txBody>
-          <a:bodyPr rtlCol="0" anchor="ctr"/>
-          <a:lstStyle/>
-          <a:p>
-            <a:pPr algn="ctr"/>
-          </a:p>
-        </p:txBody>
-      </p:sp>
-      <p:sp>
-        <p:nvSpPr>
-          <p:cNvPr id="12" name="Rectangle 11"/>
-          <p:cNvSpPr/>
-          <p:nvPr/>
-        </p:nvSpPr>
-        <p:spPr>
-          <a:xfrm>
-            <a:off x="457200" y="3694176"/>
-            <a:ext cx="128016" cy="1051560"/>
-          </a:xfrm>
-          <a:prstGeom prst="rect">
-            <a:avLst/>
-          </a:prstGeom>
-          <a:solidFill>
-            <a:srgbClr val="A02030"/>
-          </a:solidFill>
-          <a:ln>
-            <a:noFill/>
-          </a:ln>
-        </p:spPr>
-        <p:style>
-          <a:lnRef idx="1">
-            <a:schemeClr val="accent1"/>
-          </a:lnRef>
-          <a:fillRef idx="3">
-            <a:schemeClr val="accent1"/>
-          </a:fillRef>
-          <a:effectRef idx="2">
-            <a:schemeClr val="accent1"/>
-          </a:effectRef>
-          <a:fontRef idx="minor">
-            <a:schemeClr val="lt1"/>
-          </a:fontRef>
-        </p:style>
-        <p:txBody>
-          <a:bodyPr rtlCol="0" anchor="ctr"/>
-          <a:lstStyle/>
-          <a:p>
-            <a:pPr algn="ctr"/>
-          </a:p>
-        </p:txBody>
-      </p:sp>
-      <p:sp>
-        <p:nvSpPr>
-          <p:cNvPr id="13" name="TextBox 12"/>
-          <p:cNvSpPr txBox="1"/>
-          <p:nvPr/>
-        </p:nvSpPr>
-        <p:spPr>
-          <a:xfrm>
-            <a:off x="777240" y="3831336"/>
-            <a:ext cx="10774375" cy="822959"/>
-          </a:xfrm>
-          <a:prstGeom prst="rect">
-            <a:avLst/>
-          </a:prstGeom>
-          <a:noFill/>
-        </p:spPr>
-        <p:txBody>
-          <a:bodyPr wrap="square">
-            <a:spAutoFit/>
-          </a:bodyPr>
-          <a:lstStyle/>
-          <a:p>
-            <a:r>
-              <a:rPr sz="1200" b="1" i="0">
-                <a:solidFill>
-                  <a:srgbClr val="A02030"/>
-                </a:solidFill>
-                <a:latin typeface="Calibri"/>
-              </a:rPr>
-              <a:t>Atención</a:t>
+              <a:t>–   Las reglas del dominio (mascota inactiva, ID inexistente, horario ocupado) son las que van a fallar en la sustentacion si nadie las prueba antes.</a:t>
             </a:r>
           </a:p>
           <a:p>
             <a:pPr>
-              <a:spcBef>
-                <a:spcPts val="400"/>
-              </a:spcBef>
+              <a:spcAft>
+                <a:spcPts val="800"/>
+              </a:spcAft>
             </a:pPr>
             <a:r>
-              <a:rPr sz="1400" b="0" i="0">
+              <a:rPr sz="2000" b="0" i="0">
                 <a:solidFill>
                   <a:srgbClr val="333333"/>
                 </a:solidFill>
                 <a:latin typeface="Calibri"/>
               </a:rPr>
-              <a:t>Entrega del taller, si el docente lo asigna · en la fecha que indique el docente.</a:t>
-            </a:r>
-          </a:p>
-        </p:txBody>
-      </p:sp>
-      <p:sp>
-        <p:nvSpPr>
-          <p:cNvPr id="14" name="TextBox 13"/>
+              <a:t>–   La documentacion generada hoy es la que permite que otro compañero use AgendaService en la ventana de citas sin leer el codigo por dentro.</a:t>
+            </a:r>
+          </a:p>
+        </p:txBody>
+      </p:sp>
+      <p:sp>
+        <p:nvSpPr>
+          <p:cNvPr id="6" name="TextBox 5"/>
           <p:cNvSpPr txBox="1"/>
           <p:nvPr/>
         </p:nvSpPr>
@@ -5191,6 +4690,2893 @@
         <p:spPr>
           <a:xfrm>
             <a:off x="0" y="0"/>
+            <a:ext cx="12191695" cy="960120"/>
+          </a:xfrm>
+          <a:prstGeom prst="rect">
+            <a:avLst/>
+          </a:prstGeom>
+          <a:solidFill>
+            <a:srgbClr val="095292"/>
+          </a:solidFill>
+          <a:ln>
+            <a:noFill/>
+          </a:ln>
+        </p:spPr>
+        <p:style>
+          <a:lnRef idx="1">
+            <a:schemeClr val="accent1"/>
+          </a:lnRef>
+          <a:fillRef idx="3">
+            <a:schemeClr val="accent1"/>
+          </a:fillRef>
+          <a:effectRef idx="2">
+            <a:schemeClr val="accent1"/>
+          </a:effectRef>
+          <a:fontRef idx="minor">
+            <a:schemeClr val="lt1"/>
+          </a:fontRef>
+        </p:style>
+        <p:txBody>
+          <a:bodyPr rtlCol="0" anchor="ctr"/>
+          <a:lstStyle/>
+          <a:p>
+            <a:pPr algn="ctr"/>
+          </a:p>
+        </p:txBody>
+      </p:sp>
+      <p:sp>
+        <p:nvSpPr>
+          <p:cNvPr id="3" name="Rectangle 2"/>
+          <p:cNvSpPr/>
+          <p:nvPr/>
+        </p:nvSpPr>
+        <p:spPr>
+          <a:xfrm>
+            <a:off x="0" y="960120"/>
+            <a:ext cx="12191695" cy="41148"/>
+          </a:xfrm>
+          <a:prstGeom prst="rect">
+            <a:avLst/>
+          </a:prstGeom>
+          <a:solidFill>
+            <a:srgbClr val="FFD000"/>
+          </a:solidFill>
+          <a:ln>
+            <a:noFill/>
+          </a:ln>
+        </p:spPr>
+        <p:style>
+          <a:lnRef idx="1">
+            <a:schemeClr val="accent1"/>
+          </a:lnRef>
+          <a:fillRef idx="3">
+            <a:schemeClr val="accent1"/>
+          </a:fillRef>
+          <a:effectRef idx="2">
+            <a:schemeClr val="accent1"/>
+          </a:effectRef>
+          <a:fontRef idx="minor">
+            <a:schemeClr val="lt1"/>
+          </a:fontRef>
+        </p:style>
+        <p:txBody>
+          <a:bodyPr rtlCol="0" anchor="ctr"/>
+          <a:lstStyle/>
+          <a:p>
+            <a:pPr algn="ctr"/>
+          </a:p>
+        </p:txBody>
+      </p:sp>
+      <p:sp>
+        <p:nvSpPr>
+          <p:cNvPr id="4" name="TextBox 3"/>
+          <p:cNvSpPr txBox="1"/>
+          <p:nvPr/>
+        </p:nvSpPr>
+        <p:spPr>
+          <a:xfrm>
+            <a:off x="457200" y="164592"/>
+            <a:ext cx="11277295" cy="502920"/>
+          </a:xfrm>
+          <a:prstGeom prst="rect">
+            <a:avLst/>
+          </a:prstGeom>
+          <a:noFill/>
+        </p:spPr>
+        <p:txBody>
+          <a:bodyPr wrap="square">
+            <a:spAutoFit/>
+          </a:bodyPr>
+          <a:lstStyle/>
+          <a:p>
+            <a:r>
+              <a:rPr sz="2600" b="1" i="0">
+                <a:solidFill>
+                  <a:srgbClr val="FFFFFF"/>
+                </a:solidFill>
+                <a:latin typeface="Calibri"/>
+              </a:rPr>
+              <a:t>Taller PI — punto de partida</a:t>
+            </a:r>
+          </a:p>
+        </p:txBody>
+      </p:sp>
+      <p:sp>
+        <p:nvSpPr>
+          <p:cNvPr id="5" name="TextBox 4"/>
+          <p:cNvSpPr txBox="1"/>
+          <p:nvPr/>
+        </p:nvSpPr>
+        <p:spPr>
+          <a:xfrm>
+            <a:off x="457200" y="1170432"/>
+            <a:ext cx="11277295" cy="5230368"/>
+          </a:xfrm>
+          <a:prstGeom prst="rect">
+            <a:avLst/>
+          </a:prstGeom>
+          <a:noFill/>
+        </p:spPr>
+        <p:txBody>
+          <a:bodyPr wrap="square">
+            <a:spAutoFit/>
+          </a:bodyPr>
+          <a:lstStyle/>
+          <a:p>
+            <a:pPr>
+              <a:spcAft>
+                <a:spcPts val="800"/>
+              </a:spcAft>
+            </a:pPr>
+            <a:r>
+              <a:rPr sz="2000" b="0" i="0">
+                <a:solidFill>
+                  <a:srgbClr val="333333"/>
+                </a:solidFill>
+                <a:latin typeface="Calibri"/>
+              </a:rPr>
+              <a:t>–   VetCare ya tiene el dominio (Mascota, Cita), el servicio de agendamiento y la interfaz conectada por eventos, con el repositorio unico de la clase anterior.</a:t>
+            </a:r>
+          </a:p>
+          <a:p>
+            <a:pPr>
+              <a:spcAft>
+                <a:spcPts val="800"/>
+              </a:spcAft>
+            </a:pPr>
+            <a:r>
+              <a:rPr sz="2000" b="0" i="0">
+                <a:solidFill>
+                  <a:srgbClr val="333333"/>
+                </a:solidFill>
+                <a:latin typeface="Calibri"/>
+              </a:rPr>
+              <a:t>–   Las clases estan sin documentar y hay tres metodos con nombres heredados de los primeros borradores: validar, proceso y dato1.</a:t>
+            </a:r>
+          </a:p>
+          <a:p>
+            <a:pPr>
+              <a:spcAft>
+                <a:spcPts val="800"/>
+              </a:spcAft>
+            </a:pPr>
+            <a:r>
+              <a:rPr sz="2000" b="0" i="0">
+                <a:solidFill>
+                  <a:srgbClr val="333333"/>
+                </a:solidFill>
+                <a:latin typeface="Calibri"/>
+              </a:rPr>
+              <a:t>–   Expedientes de partida: M-001 Kira activa, M-002 Michi activa y M-009 Rocky inactiva (dada de baja del servicio).</a:t>
+            </a:r>
+          </a:p>
+        </p:txBody>
+      </p:sp>
+      <p:sp>
+        <p:nvSpPr>
+          <p:cNvPr id="6" name="TextBox 5"/>
+          <p:cNvSpPr txBox="1"/>
+          <p:nvPr/>
+        </p:nvSpPr>
+        <p:spPr>
+          <a:xfrm>
+            <a:off x="11185855" y="6473952"/>
+            <a:ext cx="640080" cy="274320"/>
+          </a:xfrm>
+          <a:prstGeom prst="rect">
+            <a:avLst/>
+          </a:prstGeom>
+          <a:noFill/>
+        </p:spPr>
+        <p:txBody>
+          <a:bodyPr wrap="square">
+            <a:spAutoFit/>
+          </a:bodyPr>
+          <a:lstStyle/>
+          <a:p>
+            <a:pPr algn="r"/>
+            <a:r>
+              <a:rPr sz="1100" b="0" i="0">
+                <a:solidFill>
+                  <a:srgbClr val="666666"/>
+                </a:solidFill>
+                <a:latin typeface="Calibri"/>
+              </a:rPr>
+              <a:t>13</a:t>
+            </a:r>
+          </a:p>
+        </p:txBody>
+      </p:sp>
+    </p:spTree>
+  </p:cSld>
+  <p:clrMapOvr>
+    <a:masterClrMapping/>
+  </p:clrMapOvr>
+</p:sld>
+</file>
+
+<file path=ppt/slides/slide14.xml><?xml version="1.0" encoding="utf-8"?>
+<p:sld xmlns:a="http://schemas.openxmlformats.org/drawingml/2006/main" xmlns:p="http://schemas.openxmlformats.org/presentationml/2006/main" xmlns:r="http://schemas.openxmlformats.org/officeDocument/2006/relationships">
+  <p:cSld>
+    <p:bg>
+      <p:bgPr>
+        <a:solidFill>
+          <a:srgbClr val="FFFFFF"/>
+        </a:solidFill>
+        <a:effectLst/>
+      </p:bgPr>
+    </p:bg>
+    <p:spTree>
+      <p:nvGrpSpPr>
+        <p:cNvPr id="1" name=""/>
+        <p:cNvGrpSpPr/>
+        <p:nvPr/>
+      </p:nvGrpSpPr>
+      <p:grpSpPr/>
+      <p:sp>
+        <p:nvSpPr>
+          <p:cNvPr id="2" name="Rectangle 1"/>
+          <p:cNvSpPr/>
+          <p:nvPr/>
+        </p:nvSpPr>
+        <p:spPr>
+          <a:xfrm>
+            <a:off x="0" y="0"/>
+            <a:ext cx="12191695" cy="960120"/>
+          </a:xfrm>
+          <a:prstGeom prst="rect">
+            <a:avLst/>
+          </a:prstGeom>
+          <a:solidFill>
+            <a:srgbClr val="095292"/>
+          </a:solidFill>
+          <a:ln>
+            <a:noFill/>
+          </a:ln>
+        </p:spPr>
+        <p:style>
+          <a:lnRef idx="1">
+            <a:schemeClr val="accent1"/>
+          </a:lnRef>
+          <a:fillRef idx="3">
+            <a:schemeClr val="accent1"/>
+          </a:fillRef>
+          <a:effectRef idx="2">
+            <a:schemeClr val="accent1"/>
+          </a:effectRef>
+          <a:fontRef idx="minor">
+            <a:schemeClr val="lt1"/>
+          </a:fontRef>
+        </p:style>
+        <p:txBody>
+          <a:bodyPr rtlCol="0" anchor="ctr"/>
+          <a:lstStyle/>
+          <a:p>
+            <a:pPr algn="ctr"/>
+          </a:p>
+        </p:txBody>
+      </p:sp>
+      <p:sp>
+        <p:nvSpPr>
+          <p:cNvPr id="3" name="Rectangle 2"/>
+          <p:cNvSpPr/>
+          <p:nvPr/>
+        </p:nvSpPr>
+        <p:spPr>
+          <a:xfrm>
+            <a:off x="0" y="960120"/>
+            <a:ext cx="12191695" cy="41148"/>
+          </a:xfrm>
+          <a:prstGeom prst="rect">
+            <a:avLst/>
+          </a:prstGeom>
+          <a:solidFill>
+            <a:srgbClr val="FFD000"/>
+          </a:solidFill>
+          <a:ln>
+            <a:noFill/>
+          </a:ln>
+        </p:spPr>
+        <p:style>
+          <a:lnRef idx="1">
+            <a:schemeClr val="accent1"/>
+          </a:lnRef>
+          <a:fillRef idx="3">
+            <a:schemeClr val="accent1"/>
+          </a:fillRef>
+          <a:effectRef idx="2">
+            <a:schemeClr val="accent1"/>
+          </a:effectRef>
+          <a:fontRef idx="minor">
+            <a:schemeClr val="lt1"/>
+          </a:fontRef>
+        </p:style>
+        <p:txBody>
+          <a:bodyPr rtlCol="0" anchor="ctr"/>
+          <a:lstStyle/>
+          <a:p>
+            <a:pPr algn="ctr"/>
+          </a:p>
+        </p:txBody>
+      </p:sp>
+      <p:sp>
+        <p:nvSpPr>
+          <p:cNvPr id="4" name="TextBox 3"/>
+          <p:cNvSpPr txBox="1"/>
+          <p:nvPr/>
+        </p:nvSpPr>
+        <p:spPr>
+          <a:xfrm>
+            <a:off x="457200" y="164592"/>
+            <a:ext cx="11277295" cy="502920"/>
+          </a:xfrm>
+          <a:prstGeom prst="rect">
+            <a:avLst/>
+          </a:prstGeom>
+          <a:noFill/>
+        </p:spPr>
+        <p:txBody>
+          <a:bodyPr wrap="square">
+            <a:spAutoFit/>
+          </a:bodyPr>
+          <a:lstStyle/>
+          <a:p>
+            <a:r>
+              <a:rPr sz="2600" b="1" i="0">
+                <a:solidFill>
+                  <a:srgbClr val="FFFFFF"/>
+                </a:solidFill>
+                <a:latin typeface="Calibri"/>
+              </a:rPr>
+              <a:t>Taller PI — pasos guiados</a:t>
+            </a:r>
+          </a:p>
+        </p:txBody>
+      </p:sp>
+      <p:sp>
+        <p:nvSpPr>
+          <p:cNvPr id="5" name="Rounded Rectangle 4"/>
+          <p:cNvSpPr/>
+          <p:nvPr/>
+        </p:nvSpPr>
+        <p:spPr>
+          <a:xfrm>
+            <a:off x="457200" y="1234440"/>
+            <a:ext cx="11277295" cy="950976"/>
+          </a:xfrm>
+          <a:prstGeom prst="roundRect">
+            <a:avLst>
+              <a:gd name="adj" fmla="val 12000"/>
+            </a:avLst>
+          </a:prstGeom>
+          <a:solidFill>
+            <a:srgbClr val="F2F2F2"/>
+          </a:solidFill>
+          <a:ln>
+            <a:noFill/>
+          </a:ln>
+        </p:spPr>
+        <p:style>
+          <a:lnRef idx="1">
+            <a:schemeClr val="accent1"/>
+          </a:lnRef>
+          <a:fillRef idx="3">
+            <a:schemeClr val="accent1"/>
+          </a:fillRef>
+          <a:effectRef idx="2">
+            <a:schemeClr val="accent1"/>
+          </a:effectRef>
+          <a:fontRef idx="minor">
+            <a:schemeClr val="lt1"/>
+          </a:fontRef>
+        </p:style>
+        <p:txBody>
+          <a:bodyPr rtlCol="0" anchor="ctr"/>
+          <a:lstStyle/>
+          <a:p>
+            <a:pPr algn="ctr"/>
+          </a:p>
+        </p:txBody>
+      </p:sp>
+      <p:sp>
+        <p:nvSpPr>
+          <p:cNvPr id="6" name="Rounded Rectangle 5"/>
+          <p:cNvSpPr/>
+          <p:nvPr/>
+        </p:nvSpPr>
+        <p:spPr>
+          <a:xfrm>
+            <a:off x="594360" y="1490472"/>
+            <a:ext cx="438912" cy="438912"/>
+          </a:xfrm>
+          <a:prstGeom prst="roundRect">
+            <a:avLst>
+              <a:gd name="adj" fmla="val 12000"/>
+            </a:avLst>
+          </a:prstGeom>
+          <a:solidFill>
+            <a:srgbClr val="095292"/>
+          </a:solidFill>
+          <a:ln>
+            <a:noFill/>
+          </a:ln>
+        </p:spPr>
+        <p:style>
+          <a:lnRef idx="1">
+            <a:schemeClr val="accent1"/>
+          </a:lnRef>
+          <a:fillRef idx="3">
+            <a:schemeClr val="accent1"/>
+          </a:fillRef>
+          <a:effectRef idx="2">
+            <a:schemeClr val="accent1"/>
+          </a:effectRef>
+          <a:fontRef idx="minor">
+            <a:schemeClr val="lt1"/>
+          </a:fontRef>
+        </p:style>
+        <p:txBody>
+          <a:bodyPr rtlCol="0" anchor="ctr"/>
+          <a:lstStyle/>
+          <a:p>
+            <a:pPr algn="ctr"/>
+          </a:p>
+        </p:txBody>
+      </p:sp>
+      <p:sp>
+        <p:nvSpPr>
+          <p:cNvPr id="7" name="TextBox 6"/>
+          <p:cNvSpPr txBox="1"/>
+          <p:nvPr/>
+        </p:nvSpPr>
+        <p:spPr>
+          <a:xfrm>
+            <a:off x="594360" y="1490472"/>
+            <a:ext cx="438912" cy="438912"/>
+          </a:xfrm>
+          <a:prstGeom prst="rect">
+            <a:avLst/>
+          </a:prstGeom>
+          <a:noFill/>
+        </p:spPr>
+        <p:txBody>
+          <a:bodyPr wrap="square" anchor="ctr"/>
+          <a:lstStyle/>
+          <a:p>
+            <a:pPr algn="ctr"/>
+            <a:r>
+              <a:rPr sz="1600" b="1" i="0">
+                <a:solidFill>
+                  <a:srgbClr val="FFFFFF"/>
+                </a:solidFill>
+                <a:latin typeface="Calibri"/>
+              </a:rPr>
+              <a:t>1</a:t>
+            </a:r>
+          </a:p>
+        </p:txBody>
+      </p:sp>
+      <p:sp>
+        <p:nvSpPr>
+          <p:cNvPr id="8" name="TextBox 7"/>
+          <p:cNvSpPr txBox="1"/>
+          <p:nvPr/>
+        </p:nvSpPr>
+        <p:spPr>
+          <a:xfrm>
+            <a:off x="1188720" y="1325880"/>
+            <a:ext cx="10271455" cy="786384"/>
+          </a:xfrm>
+          <a:prstGeom prst="rect">
+            <a:avLst/>
+          </a:prstGeom>
+          <a:noFill/>
+        </p:spPr>
+        <p:txBody>
+          <a:bodyPr wrap="square" anchor="ctr"/>
+          <a:lstStyle/>
+          <a:p>
+            <a:r>
+              <a:rPr sz="1400" b="1" i="0">
+                <a:solidFill>
+                  <a:srgbClr val="095292"/>
+                </a:solidFill>
+                <a:latin typeface="Calibri"/>
+              </a:rPr>
+              <a:t>Documente con Javadoc las clases Mascota y Cita y el servicio AgendaService: bloque de clase con resumen y @author, y en cada metodo publico @param por parametro, @return si aplica y @throws por cada excepcion; el metodo agendar debe dejar escrita la regla 'una mascota inactiva no puede agendar'.</a:t>
+            </a:r>
+          </a:p>
+        </p:txBody>
+      </p:sp>
+      <p:sp>
+        <p:nvSpPr>
+          <p:cNvPr id="9" name="Rounded Rectangle 8"/>
+          <p:cNvSpPr/>
+          <p:nvPr/>
+        </p:nvSpPr>
+        <p:spPr>
+          <a:xfrm>
+            <a:off x="457200" y="2276856"/>
+            <a:ext cx="11277295" cy="950976"/>
+          </a:xfrm>
+          <a:prstGeom prst="roundRect">
+            <a:avLst>
+              <a:gd name="adj" fmla="val 12000"/>
+            </a:avLst>
+          </a:prstGeom>
+          <a:solidFill>
+            <a:srgbClr val="E8F4FA"/>
+          </a:solidFill>
+          <a:ln>
+            <a:noFill/>
+          </a:ln>
+        </p:spPr>
+        <p:style>
+          <a:lnRef idx="1">
+            <a:schemeClr val="accent1"/>
+          </a:lnRef>
+          <a:fillRef idx="3">
+            <a:schemeClr val="accent1"/>
+          </a:fillRef>
+          <a:effectRef idx="2">
+            <a:schemeClr val="accent1"/>
+          </a:effectRef>
+          <a:fontRef idx="minor">
+            <a:schemeClr val="lt1"/>
+          </a:fontRef>
+        </p:style>
+        <p:txBody>
+          <a:bodyPr rtlCol="0" anchor="ctr"/>
+          <a:lstStyle/>
+          <a:p>
+            <a:pPr algn="ctr"/>
+          </a:p>
+        </p:txBody>
+      </p:sp>
+      <p:sp>
+        <p:nvSpPr>
+          <p:cNvPr id="10" name="Rounded Rectangle 9"/>
+          <p:cNvSpPr/>
+          <p:nvPr/>
+        </p:nvSpPr>
+        <p:spPr>
+          <a:xfrm>
+            <a:off x="594360" y="2532888"/>
+            <a:ext cx="438912" cy="438912"/>
+          </a:xfrm>
+          <a:prstGeom prst="roundRect">
+            <a:avLst>
+              <a:gd name="adj" fmla="val 12000"/>
+            </a:avLst>
+          </a:prstGeom>
+          <a:solidFill>
+            <a:srgbClr val="095292"/>
+          </a:solidFill>
+          <a:ln>
+            <a:noFill/>
+          </a:ln>
+        </p:spPr>
+        <p:style>
+          <a:lnRef idx="1">
+            <a:schemeClr val="accent1"/>
+          </a:lnRef>
+          <a:fillRef idx="3">
+            <a:schemeClr val="accent1"/>
+          </a:fillRef>
+          <a:effectRef idx="2">
+            <a:schemeClr val="accent1"/>
+          </a:effectRef>
+          <a:fontRef idx="minor">
+            <a:schemeClr val="lt1"/>
+          </a:fontRef>
+        </p:style>
+        <p:txBody>
+          <a:bodyPr rtlCol="0" anchor="ctr"/>
+          <a:lstStyle/>
+          <a:p>
+            <a:pPr algn="ctr"/>
+          </a:p>
+        </p:txBody>
+      </p:sp>
+      <p:sp>
+        <p:nvSpPr>
+          <p:cNvPr id="11" name="TextBox 10"/>
+          <p:cNvSpPr txBox="1"/>
+          <p:nvPr/>
+        </p:nvSpPr>
+        <p:spPr>
+          <a:xfrm>
+            <a:off x="594360" y="2532888"/>
+            <a:ext cx="438912" cy="438912"/>
+          </a:xfrm>
+          <a:prstGeom prst="rect">
+            <a:avLst/>
+          </a:prstGeom>
+          <a:noFill/>
+        </p:spPr>
+        <p:txBody>
+          <a:bodyPr wrap="square" anchor="ctr"/>
+          <a:lstStyle/>
+          <a:p>
+            <a:pPr algn="ctr"/>
+            <a:r>
+              <a:rPr sz="1600" b="1" i="0">
+                <a:solidFill>
+                  <a:srgbClr val="FFFFFF"/>
+                </a:solidFill>
+                <a:latin typeface="Calibri"/>
+              </a:rPr>
+              <a:t>2</a:t>
+            </a:r>
+          </a:p>
+        </p:txBody>
+      </p:sp>
+      <p:sp>
+        <p:nvSpPr>
+          <p:cNvPr id="12" name="TextBox 11"/>
+          <p:cNvSpPr txBox="1"/>
+          <p:nvPr/>
+        </p:nvSpPr>
+        <p:spPr>
+          <a:xfrm>
+            <a:off x="1188720" y="2368296"/>
+            <a:ext cx="10271455" cy="786384"/>
+          </a:xfrm>
+          <a:prstGeom prst="rect">
+            <a:avLst/>
+          </a:prstGeom>
+          <a:noFill/>
+        </p:spPr>
+        <p:txBody>
+          <a:bodyPr wrap="square" anchor="ctr"/>
+          <a:lstStyle/>
+          <a:p>
+            <a:r>
+              <a:rPr sz="1500" b="1" i="0">
+                <a:solidFill>
+                  <a:srgbClr val="095292"/>
+                </a:solidFill>
+                <a:latin typeface="Calibri"/>
+              </a:rPr>
+              <a:t>Renombre al menos tres identificadores pobres del proyecto (por ejemplo validar por agendar, b por mascotaActiva, dato1 por idMascota) usando Rename Symbol (F2) de VS Code para que el cambio se propague sin romper nada.</a:t>
+            </a:r>
+          </a:p>
+        </p:txBody>
+      </p:sp>
+      <p:sp>
+        <p:nvSpPr>
+          <p:cNvPr id="13" name="Rounded Rectangle 12"/>
+          <p:cNvSpPr/>
+          <p:nvPr/>
+        </p:nvSpPr>
+        <p:spPr>
+          <a:xfrm>
+            <a:off x="457200" y="3319272"/>
+            <a:ext cx="11277295" cy="950976"/>
+          </a:xfrm>
+          <a:prstGeom prst="roundRect">
+            <a:avLst>
+              <a:gd name="adj" fmla="val 12000"/>
+            </a:avLst>
+          </a:prstGeom>
+          <a:solidFill>
+            <a:srgbClr val="F2F2F2"/>
+          </a:solidFill>
+          <a:ln>
+            <a:noFill/>
+          </a:ln>
+        </p:spPr>
+        <p:style>
+          <a:lnRef idx="1">
+            <a:schemeClr val="accent1"/>
+          </a:lnRef>
+          <a:fillRef idx="3">
+            <a:schemeClr val="accent1"/>
+          </a:fillRef>
+          <a:effectRef idx="2">
+            <a:schemeClr val="accent1"/>
+          </a:effectRef>
+          <a:fontRef idx="minor">
+            <a:schemeClr val="lt1"/>
+          </a:fontRef>
+        </p:style>
+        <p:txBody>
+          <a:bodyPr rtlCol="0" anchor="ctr"/>
+          <a:lstStyle/>
+          <a:p>
+            <a:pPr algn="ctr"/>
+          </a:p>
+        </p:txBody>
+      </p:sp>
+      <p:sp>
+        <p:nvSpPr>
+          <p:cNvPr id="14" name="Rounded Rectangle 13"/>
+          <p:cNvSpPr/>
+          <p:nvPr/>
+        </p:nvSpPr>
+        <p:spPr>
+          <a:xfrm>
+            <a:off x="594360" y="3575304"/>
+            <a:ext cx="438912" cy="438912"/>
+          </a:xfrm>
+          <a:prstGeom prst="roundRect">
+            <a:avLst>
+              <a:gd name="adj" fmla="val 12000"/>
+            </a:avLst>
+          </a:prstGeom>
+          <a:solidFill>
+            <a:srgbClr val="095292"/>
+          </a:solidFill>
+          <a:ln>
+            <a:noFill/>
+          </a:ln>
+        </p:spPr>
+        <p:style>
+          <a:lnRef idx="1">
+            <a:schemeClr val="accent1"/>
+          </a:lnRef>
+          <a:fillRef idx="3">
+            <a:schemeClr val="accent1"/>
+          </a:fillRef>
+          <a:effectRef idx="2">
+            <a:schemeClr val="accent1"/>
+          </a:effectRef>
+          <a:fontRef idx="minor">
+            <a:schemeClr val="lt1"/>
+          </a:fontRef>
+        </p:style>
+        <p:txBody>
+          <a:bodyPr rtlCol="0" anchor="ctr"/>
+          <a:lstStyle/>
+          <a:p>
+            <a:pPr algn="ctr"/>
+          </a:p>
+        </p:txBody>
+      </p:sp>
+      <p:sp>
+        <p:nvSpPr>
+          <p:cNvPr id="15" name="TextBox 14"/>
+          <p:cNvSpPr txBox="1"/>
+          <p:nvPr/>
+        </p:nvSpPr>
+        <p:spPr>
+          <a:xfrm>
+            <a:off x="594360" y="3575304"/>
+            <a:ext cx="438912" cy="438912"/>
+          </a:xfrm>
+          <a:prstGeom prst="rect">
+            <a:avLst/>
+          </a:prstGeom>
+          <a:noFill/>
+        </p:spPr>
+        <p:txBody>
+          <a:bodyPr wrap="square" anchor="ctr"/>
+          <a:lstStyle/>
+          <a:p>
+            <a:pPr algn="ctr"/>
+            <a:r>
+              <a:rPr sz="1600" b="1" i="0">
+                <a:solidFill>
+                  <a:srgbClr val="FFFFFF"/>
+                </a:solidFill>
+                <a:latin typeface="Calibri"/>
+              </a:rPr>
+              <a:t>3</a:t>
+            </a:r>
+          </a:p>
+        </p:txBody>
+      </p:sp>
+      <p:sp>
+        <p:nvSpPr>
+          <p:cNvPr id="16" name="TextBox 15"/>
+          <p:cNvSpPr txBox="1"/>
+          <p:nvPr/>
+        </p:nvSpPr>
+        <p:spPr>
+          <a:xfrm>
+            <a:off x="1188720" y="3410712"/>
+            <a:ext cx="10271455" cy="786384"/>
+          </a:xfrm>
+          <a:prstGeom prst="rect">
+            <a:avLst/>
+          </a:prstGeom>
+          <a:noFill/>
+        </p:spPr>
+        <p:txBody>
+          <a:bodyPr wrap="square" anchor="ctr"/>
+          <a:lstStyle/>
+          <a:p>
+            <a:r>
+              <a:rPr sz="1500" b="1" i="0">
+                <a:solidFill>
+                  <a:srgbClr val="095292"/>
+                </a:solidFill>
+                <a:latin typeface="Calibri"/>
+              </a:rPr>
+              <a:t>Genere la documentacion con clic derecho sobre el proyecto y Generate Javadoc, abra el HTML y verifique que en la ficha de AgendaService se lee la regla de negocio y las tres excepciones documentadas; guarde una captura.</a:t>
+            </a:r>
+          </a:p>
+        </p:txBody>
+      </p:sp>
+      <p:sp>
+        <p:nvSpPr>
+          <p:cNvPr id="17" name="Rounded Rectangle 16"/>
+          <p:cNvSpPr/>
+          <p:nvPr/>
+        </p:nvSpPr>
+        <p:spPr>
+          <a:xfrm>
+            <a:off x="457200" y="4361688"/>
+            <a:ext cx="11277295" cy="950976"/>
+          </a:xfrm>
+          <a:prstGeom prst="roundRect">
+            <a:avLst>
+              <a:gd name="adj" fmla="val 12000"/>
+            </a:avLst>
+          </a:prstGeom>
+          <a:solidFill>
+            <a:srgbClr val="E8F4FA"/>
+          </a:solidFill>
+          <a:ln>
+            <a:noFill/>
+          </a:ln>
+        </p:spPr>
+        <p:style>
+          <a:lnRef idx="1">
+            <a:schemeClr val="accent1"/>
+          </a:lnRef>
+          <a:fillRef idx="3">
+            <a:schemeClr val="accent1"/>
+          </a:fillRef>
+          <a:effectRef idx="2">
+            <a:schemeClr val="accent1"/>
+          </a:effectRef>
+          <a:fontRef idx="minor">
+            <a:schemeClr val="lt1"/>
+          </a:fontRef>
+        </p:style>
+        <p:txBody>
+          <a:bodyPr rtlCol="0" anchor="ctr"/>
+          <a:lstStyle/>
+          <a:p>
+            <a:pPr algn="ctr"/>
+          </a:p>
+        </p:txBody>
+      </p:sp>
+      <p:sp>
+        <p:nvSpPr>
+          <p:cNvPr id="18" name="Rounded Rectangle 17"/>
+          <p:cNvSpPr/>
+          <p:nvPr/>
+        </p:nvSpPr>
+        <p:spPr>
+          <a:xfrm>
+            <a:off x="594360" y="4617720"/>
+            <a:ext cx="438912" cy="438912"/>
+          </a:xfrm>
+          <a:prstGeom prst="roundRect">
+            <a:avLst>
+              <a:gd name="adj" fmla="val 12000"/>
+            </a:avLst>
+          </a:prstGeom>
+          <a:solidFill>
+            <a:srgbClr val="095292"/>
+          </a:solidFill>
+          <a:ln>
+            <a:noFill/>
+          </a:ln>
+        </p:spPr>
+        <p:style>
+          <a:lnRef idx="1">
+            <a:schemeClr val="accent1"/>
+          </a:lnRef>
+          <a:fillRef idx="3">
+            <a:schemeClr val="accent1"/>
+          </a:fillRef>
+          <a:effectRef idx="2">
+            <a:schemeClr val="accent1"/>
+          </a:effectRef>
+          <a:fontRef idx="minor">
+            <a:schemeClr val="lt1"/>
+          </a:fontRef>
+        </p:style>
+        <p:txBody>
+          <a:bodyPr rtlCol="0" anchor="ctr"/>
+          <a:lstStyle/>
+          <a:p>
+            <a:pPr algn="ctr"/>
+          </a:p>
+        </p:txBody>
+      </p:sp>
+      <p:sp>
+        <p:nvSpPr>
+          <p:cNvPr id="19" name="TextBox 18"/>
+          <p:cNvSpPr txBox="1"/>
+          <p:nvPr/>
+        </p:nvSpPr>
+        <p:spPr>
+          <a:xfrm>
+            <a:off x="594360" y="4617720"/>
+            <a:ext cx="438912" cy="438912"/>
+          </a:xfrm>
+          <a:prstGeom prst="rect">
+            <a:avLst/>
+          </a:prstGeom>
+          <a:noFill/>
+        </p:spPr>
+        <p:txBody>
+          <a:bodyPr wrap="square" anchor="ctr"/>
+          <a:lstStyle/>
+          <a:p>
+            <a:pPr algn="ctr"/>
+            <a:r>
+              <a:rPr sz="1600" b="1" i="0">
+                <a:solidFill>
+                  <a:srgbClr val="FFFFFF"/>
+                </a:solidFill>
+                <a:latin typeface="Calibri"/>
+              </a:rPr>
+              <a:t>4</a:t>
+            </a:r>
+          </a:p>
+        </p:txBody>
+      </p:sp>
+      <p:sp>
+        <p:nvSpPr>
+          <p:cNvPr id="20" name="TextBox 19"/>
+          <p:cNvSpPr txBox="1"/>
+          <p:nvPr/>
+        </p:nvSpPr>
+        <p:spPr>
+          <a:xfrm>
+            <a:off x="1188720" y="4453128"/>
+            <a:ext cx="10271455" cy="786384"/>
+          </a:xfrm>
+          <a:prstGeom prst="rect">
+            <a:avLst/>
+          </a:prstGeom>
+          <a:noFill/>
+        </p:spPr>
+        <p:txBody>
+          <a:bodyPr wrap="square" anchor="ctr"/>
+          <a:lstStyle/>
+          <a:p>
+            <a:r>
+              <a:rPr sz="1400" b="1" i="0">
+                <a:solidFill>
+                  <a:srgbClr val="095292"/>
+                </a:solidFill>
+                <a:latin typeface="Calibri"/>
+              </a:rPr>
+              <a:t>Cree en Test Packages la clase AgendaServiceTest con un metodo de preparacion que registre M-001 Kira activa, M-002 Michi activa y M-009 Rocky inactiva, y escriba cuatro casos: mascota activa agenda, mascota inactiva lanza IllegalStateException, ID inexistente lanza NoSuchElementException y horario ocupado no duplica la cita.</a:t>
+            </a:r>
+          </a:p>
+        </p:txBody>
+      </p:sp>
+      <p:sp>
+        <p:nvSpPr>
+          <p:cNvPr id="21" name="Rounded Rectangle 20"/>
+          <p:cNvSpPr/>
+          <p:nvPr/>
+        </p:nvSpPr>
+        <p:spPr>
+          <a:xfrm>
+            <a:off x="457200" y="5404104"/>
+            <a:ext cx="11277295" cy="950976"/>
+          </a:xfrm>
+          <a:prstGeom prst="roundRect">
+            <a:avLst>
+              <a:gd name="adj" fmla="val 12000"/>
+            </a:avLst>
+          </a:prstGeom>
+          <a:solidFill>
+            <a:srgbClr val="F2F2F2"/>
+          </a:solidFill>
+          <a:ln>
+            <a:noFill/>
+          </a:ln>
+        </p:spPr>
+        <p:style>
+          <a:lnRef idx="1">
+            <a:schemeClr val="accent1"/>
+          </a:lnRef>
+          <a:fillRef idx="3">
+            <a:schemeClr val="accent1"/>
+          </a:fillRef>
+          <a:effectRef idx="2">
+            <a:schemeClr val="accent1"/>
+          </a:effectRef>
+          <a:fontRef idx="minor">
+            <a:schemeClr val="lt1"/>
+          </a:fontRef>
+        </p:style>
+        <p:txBody>
+          <a:bodyPr rtlCol="0" anchor="ctr"/>
+          <a:lstStyle/>
+          <a:p>
+            <a:pPr algn="ctr"/>
+          </a:p>
+        </p:txBody>
+      </p:sp>
+      <p:sp>
+        <p:nvSpPr>
+          <p:cNvPr id="22" name="Rounded Rectangle 21"/>
+          <p:cNvSpPr/>
+          <p:nvPr/>
+        </p:nvSpPr>
+        <p:spPr>
+          <a:xfrm>
+            <a:off x="594360" y="5660136"/>
+            <a:ext cx="438912" cy="438912"/>
+          </a:xfrm>
+          <a:prstGeom prst="roundRect">
+            <a:avLst>
+              <a:gd name="adj" fmla="val 12000"/>
+            </a:avLst>
+          </a:prstGeom>
+          <a:solidFill>
+            <a:srgbClr val="095292"/>
+          </a:solidFill>
+          <a:ln>
+            <a:noFill/>
+          </a:ln>
+        </p:spPr>
+        <p:style>
+          <a:lnRef idx="1">
+            <a:schemeClr val="accent1"/>
+          </a:lnRef>
+          <a:fillRef idx="3">
+            <a:schemeClr val="accent1"/>
+          </a:fillRef>
+          <a:effectRef idx="2">
+            <a:schemeClr val="accent1"/>
+          </a:effectRef>
+          <a:fontRef idx="minor">
+            <a:schemeClr val="lt1"/>
+          </a:fontRef>
+        </p:style>
+        <p:txBody>
+          <a:bodyPr rtlCol="0" anchor="ctr"/>
+          <a:lstStyle/>
+          <a:p>
+            <a:pPr algn="ctr"/>
+          </a:p>
+        </p:txBody>
+      </p:sp>
+      <p:sp>
+        <p:nvSpPr>
+          <p:cNvPr id="23" name="TextBox 22"/>
+          <p:cNvSpPr txBox="1"/>
+          <p:nvPr/>
+        </p:nvSpPr>
+        <p:spPr>
+          <a:xfrm>
+            <a:off x="594360" y="5660136"/>
+            <a:ext cx="438912" cy="438912"/>
+          </a:xfrm>
+          <a:prstGeom prst="rect">
+            <a:avLst/>
+          </a:prstGeom>
+          <a:noFill/>
+        </p:spPr>
+        <p:txBody>
+          <a:bodyPr wrap="square" anchor="ctr"/>
+          <a:lstStyle/>
+          <a:p>
+            <a:pPr algn="ctr"/>
+            <a:r>
+              <a:rPr sz="1600" b="1" i="0">
+                <a:solidFill>
+                  <a:srgbClr val="FFFFFF"/>
+                </a:solidFill>
+                <a:latin typeface="Calibri"/>
+              </a:rPr>
+              <a:t>5</a:t>
+            </a:r>
+          </a:p>
+        </p:txBody>
+      </p:sp>
+      <p:sp>
+        <p:nvSpPr>
+          <p:cNvPr id="24" name="TextBox 23"/>
+          <p:cNvSpPr txBox="1"/>
+          <p:nvPr/>
+        </p:nvSpPr>
+        <p:spPr>
+          <a:xfrm>
+            <a:off x="1188720" y="5495544"/>
+            <a:ext cx="10271455" cy="786384"/>
+          </a:xfrm>
+          <a:prstGeom prst="rect">
+            <a:avLst/>
+          </a:prstGeom>
+          <a:noFill/>
+        </p:spPr>
+        <p:txBody>
+          <a:bodyPr wrap="square" anchor="ctr"/>
+          <a:lstStyle/>
+          <a:p>
+            <a:r>
+              <a:rPr sz="1400" b="1" i="0">
+                <a:solidFill>
+                  <a:srgbClr val="095292"/>
+                </a:solidFill>
+                <a:latin typeface="Calibri"/>
+              </a:rPr>
+              <a:t>Rompa a proposito la regla (comente la validacion de mascota inactiva), corra las pruebas y capture la barra roja; restaure la validacion, corra otra vez y capture la barra verde; escriba ademas dos pruebas manuales que NO se pueden automatizar y suba todo a la plataforma del curso.</a:t>
+            </a:r>
+          </a:p>
+        </p:txBody>
+      </p:sp>
+      <p:sp>
+        <p:nvSpPr>
+          <p:cNvPr id="25" name="TextBox 24"/>
+          <p:cNvSpPr txBox="1"/>
+          <p:nvPr/>
+        </p:nvSpPr>
+        <p:spPr>
+          <a:xfrm>
+            <a:off x="11185855" y="6473952"/>
+            <a:ext cx="640080" cy="274320"/>
+          </a:xfrm>
+          <a:prstGeom prst="rect">
+            <a:avLst/>
+          </a:prstGeom>
+          <a:noFill/>
+        </p:spPr>
+        <p:txBody>
+          <a:bodyPr wrap="square">
+            <a:spAutoFit/>
+          </a:bodyPr>
+          <a:lstStyle/>
+          <a:p>
+            <a:pPr algn="r"/>
+            <a:r>
+              <a:rPr sz="1100" b="0" i="0">
+                <a:solidFill>
+                  <a:srgbClr val="666666"/>
+                </a:solidFill>
+                <a:latin typeface="Calibri"/>
+              </a:rPr>
+              <a:t>14</a:t>
+            </a:r>
+          </a:p>
+        </p:txBody>
+      </p:sp>
+    </p:spTree>
+  </p:cSld>
+  <p:clrMapOvr>
+    <a:masterClrMapping/>
+  </p:clrMapOvr>
+</p:sld>
+</file>
+
+<file path=ppt/slides/slide15.xml><?xml version="1.0" encoding="utf-8"?>
+<p:sld xmlns:a="http://schemas.openxmlformats.org/drawingml/2006/main" xmlns:p="http://schemas.openxmlformats.org/presentationml/2006/main" xmlns:r="http://schemas.openxmlformats.org/officeDocument/2006/relationships">
+  <p:cSld>
+    <p:bg>
+      <p:bgPr>
+        <a:solidFill>
+          <a:srgbClr val="FFFFFF"/>
+        </a:solidFill>
+        <a:effectLst/>
+      </p:bgPr>
+    </p:bg>
+    <p:spTree>
+      <p:nvGrpSpPr>
+        <p:cNvPr id="1" name=""/>
+        <p:cNvGrpSpPr/>
+        <p:nvPr/>
+      </p:nvGrpSpPr>
+      <p:grpSpPr/>
+      <p:sp>
+        <p:nvSpPr>
+          <p:cNvPr id="2" name="Rectangle 1"/>
+          <p:cNvSpPr/>
+          <p:nvPr/>
+        </p:nvSpPr>
+        <p:spPr>
+          <a:xfrm>
+            <a:off x="0" y="0"/>
+            <a:ext cx="12191695" cy="960120"/>
+          </a:xfrm>
+          <a:prstGeom prst="rect">
+            <a:avLst/>
+          </a:prstGeom>
+          <a:solidFill>
+            <a:srgbClr val="095292"/>
+          </a:solidFill>
+          <a:ln>
+            <a:noFill/>
+          </a:ln>
+        </p:spPr>
+        <p:style>
+          <a:lnRef idx="1">
+            <a:schemeClr val="accent1"/>
+          </a:lnRef>
+          <a:fillRef idx="3">
+            <a:schemeClr val="accent1"/>
+          </a:fillRef>
+          <a:effectRef idx="2">
+            <a:schemeClr val="accent1"/>
+          </a:effectRef>
+          <a:fontRef idx="minor">
+            <a:schemeClr val="lt1"/>
+          </a:fontRef>
+        </p:style>
+        <p:txBody>
+          <a:bodyPr rtlCol="0" anchor="ctr"/>
+          <a:lstStyle/>
+          <a:p>
+            <a:pPr algn="ctr"/>
+          </a:p>
+        </p:txBody>
+      </p:sp>
+      <p:sp>
+        <p:nvSpPr>
+          <p:cNvPr id="3" name="Rectangle 2"/>
+          <p:cNvSpPr/>
+          <p:nvPr/>
+        </p:nvSpPr>
+        <p:spPr>
+          <a:xfrm>
+            <a:off x="0" y="960120"/>
+            <a:ext cx="12191695" cy="41148"/>
+          </a:xfrm>
+          <a:prstGeom prst="rect">
+            <a:avLst/>
+          </a:prstGeom>
+          <a:solidFill>
+            <a:srgbClr val="FFD000"/>
+          </a:solidFill>
+          <a:ln>
+            <a:noFill/>
+          </a:ln>
+        </p:spPr>
+        <p:style>
+          <a:lnRef idx="1">
+            <a:schemeClr val="accent1"/>
+          </a:lnRef>
+          <a:fillRef idx="3">
+            <a:schemeClr val="accent1"/>
+          </a:fillRef>
+          <a:effectRef idx="2">
+            <a:schemeClr val="accent1"/>
+          </a:effectRef>
+          <a:fontRef idx="minor">
+            <a:schemeClr val="lt1"/>
+          </a:fontRef>
+        </p:style>
+        <p:txBody>
+          <a:bodyPr rtlCol="0" anchor="ctr"/>
+          <a:lstStyle/>
+          <a:p>
+            <a:pPr algn="ctr"/>
+          </a:p>
+        </p:txBody>
+      </p:sp>
+      <p:sp>
+        <p:nvSpPr>
+          <p:cNvPr id="4" name="TextBox 3"/>
+          <p:cNvSpPr txBox="1"/>
+          <p:nvPr/>
+        </p:nvSpPr>
+        <p:spPr>
+          <a:xfrm>
+            <a:off x="457200" y="164592"/>
+            <a:ext cx="11277295" cy="502920"/>
+          </a:xfrm>
+          <a:prstGeom prst="rect">
+            <a:avLst/>
+          </a:prstGeom>
+          <a:noFill/>
+        </p:spPr>
+        <p:txBody>
+          <a:bodyPr wrap="square">
+            <a:spAutoFit/>
+          </a:bodyPr>
+          <a:lstStyle/>
+          <a:p>
+            <a:r>
+              <a:rPr sz="2600" b="1" i="0">
+                <a:solidFill>
+                  <a:srgbClr val="FFFFFF"/>
+                </a:solidFill>
+                <a:latin typeface="Calibri"/>
+              </a:rPr>
+              <a:t>Antes de entregar — autochequeo</a:t>
+            </a:r>
+          </a:p>
+        </p:txBody>
+      </p:sp>
+      <p:sp>
+        <p:nvSpPr>
+          <p:cNvPr id="5" name="Rounded Rectangle 4"/>
+          <p:cNvSpPr/>
+          <p:nvPr/>
+        </p:nvSpPr>
+        <p:spPr>
+          <a:xfrm>
+            <a:off x="457200" y="1261872"/>
+            <a:ext cx="11277295" cy="566928"/>
+          </a:xfrm>
+          <a:prstGeom prst="roundRect">
+            <a:avLst>
+              <a:gd name="adj" fmla="val 12000"/>
+            </a:avLst>
+          </a:prstGeom>
+          <a:solidFill>
+            <a:srgbClr val="F2F2F2"/>
+          </a:solidFill>
+          <a:ln>
+            <a:noFill/>
+          </a:ln>
+        </p:spPr>
+        <p:style>
+          <a:lnRef idx="1">
+            <a:schemeClr val="accent1"/>
+          </a:lnRef>
+          <a:fillRef idx="3">
+            <a:schemeClr val="accent1"/>
+          </a:fillRef>
+          <a:effectRef idx="2">
+            <a:schemeClr val="accent1"/>
+          </a:effectRef>
+          <a:fontRef idx="minor">
+            <a:schemeClr val="lt1"/>
+          </a:fontRef>
+        </p:style>
+        <p:txBody>
+          <a:bodyPr rtlCol="0" anchor="ctr"/>
+          <a:lstStyle/>
+          <a:p>
+            <a:pPr algn="ctr"/>
+          </a:p>
+        </p:txBody>
+      </p:sp>
+      <p:sp>
+        <p:nvSpPr>
+          <p:cNvPr id="6" name="Rectangle 5"/>
+          <p:cNvSpPr/>
+          <p:nvPr/>
+        </p:nvSpPr>
+        <p:spPr>
+          <a:xfrm>
+            <a:off x="640080" y="1408175"/>
+            <a:ext cx="274320" cy="274320"/>
+          </a:xfrm>
+          <a:prstGeom prst="rect">
+            <a:avLst/>
+          </a:prstGeom>
+          <a:solidFill>
+            <a:srgbClr val="FFFFFF"/>
+          </a:solidFill>
+          <a:ln>
+            <a:solidFill>
+              <a:srgbClr val="333333"/>
+            </a:solidFill>
+          </a:ln>
+        </p:spPr>
+        <p:style>
+          <a:lnRef idx="1">
+            <a:schemeClr val="accent1"/>
+          </a:lnRef>
+          <a:fillRef idx="3">
+            <a:schemeClr val="accent1"/>
+          </a:fillRef>
+          <a:effectRef idx="2">
+            <a:schemeClr val="accent1"/>
+          </a:effectRef>
+          <a:fontRef idx="minor">
+            <a:schemeClr val="lt1"/>
+          </a:fontRef>
+        </p:style>
+        <p:txBody>
+          <a:bodyPr rtlCol="0" anchor="ctr"/>
+          <a:lstStyle/>
+          <a:p>
+            <a:pPr algn="ctr"/>
+          </a:p>
+        </p:txBody>
+      </p:sp>
+      <p:sp>
+        <p:nvSpPr>
+          <p:cNvPr id="7" name="Rectangle 6"/>
+          <p:cNvSpPr/>
+          <p:nvPr/>
+        </p:nvSpPr>
+        <p:spPr>
+          <a:xfrm>
+            <a:off x="640080" y="1408175"/>
+            <a:ext cx="73152" cy="274320"/>
+          </a:xfrm>
+          <a:prstGeom prst="rect">
+            <a:avLst/>
+          </a:prstGeom>
+          <a:solidFill>
+            <a:srgbClr val="269CCB"/>
+          </a:solidFill>
+          <a:ln>
+            <a:noFill/>
+          </a:ln>
+        </p:spPr>
+        <p:style>
+          <a:lnRef idx="1">
+            <a:schemeClr val="accent1"/>
+          </a:lnRef>
+          <a:fillRef idx="3">
+            <a:schemeClr val="accent1"/>
+          </a:fillRef>
+          <a:effectRef idx="2">
+            <a:schemeClr val="accent1"/>
+          </a:effectRef>
+          <a:fontRef idx="minor">
+            <a:schemeClr val="lt1"/>
+          </a:fontRef>
+        </p:style>
+        <p:txBody>
+          <a:bodyPr rtlCol="0" anchor="ctr"/>
+          <a:lstStyle/>
+          <a:p>
+            <a:pPr algn="ctr"/>
+          </a:p>
+        </p:txBody>
+      </p:sp>
+      <p:sp>
+        <p:nvSpPr>
+          <p:cNvPr id="8" name="TextBox 7"/>
+          <p:cNvSpPr txBox="1"/>
+          <p:nvPr/>
+        </p:nvSpPr>
+        <p:spPr>
+          <a:xfrm>
+            <a:off x="1097280" y="1353312"/>
+            <a:ext cx="10362895" cy="402336"/>
+          </a:xfrm>
+          <a:prstGeom prst="rect">
+            <a:avLst/>
+          </a:prstGeom>
+          <a:noFill/>
+        </p:spPr>
+        <p:txBody>
+          <a:bodyPr wrap="square" anchor="ctr"/>
+          <a:lstStyle/>
+          <a:p>
+            <a:r>
+              <a:rPr sz="1500" b="0" i="0">
+                <a:solidFill>
+                  <a:srgbClr val="333333"/>
+                </a:solidFill>
+                <a:latin typeface="Calibri"/>
+              </a:rPr>
+              <a:t>Si el HTML generado sale vacio o le falta un metodo: con que tres caracteres exactos abre su bloque de comentario y donde esta ubicado respecto al metodo?</a:t>
+            </a:r>
+          </a:p>
+        </p:txBody>
+      </p:sp>
+      <p:sp>
+        <p:nvSpPr>
+          <p:cNvPr id="9" name="Rounded Rectangle 8"/>
+          <p:cNvSpPr/>
+          <p:nvPr/>
+        </p:nvSpPr>
+        <p:spPr>
+          <a:xfrm>
+            <a:off x="457200" y="1938528"/>
+            <a:ext cx="11277295" cy="566928"/>
+          </a:xfrm>
+          <a:prstGeom prst="roundRect">
+            <a:avLst>
+              <a:gd name="adj" fmla="val 12000"/>
+            </a:avLst>
+          </a:prstGeom>
+          <a:solidFill>
+            <a:srgbClr val="F2F2F2"/>
+          </a:solidFill>
+          <a:ln>
+            <a:noFill/>
+          </a:ln>
+        </p:spPr>
+        <p:style>
+          <a:lnRef idx="1">
+            <a:schemeClr val="accent1"/>
+          </a:lnRef>
+          <a:fillRef idx="3">
+            <a:schemeClr val="accent1"/>
+          </a:fillRef>
+          <a:effectRef idx="2">
+            <a:schemeClr val="accent1"/>
+          </a:effectRef>
+          <a:fontRef idx="minor">
+            <a:schemeClr val="lt1"/>
+          </a:fontRef>
+        </p:style>
+        <p:txBody>
+          <a:bodyPr rtlCol="0" anchor="ctr"/>
+          <a:lstStyle/>
+          <a:p>
+            <a:pPr algn="ctr"/>
+          </a:p>
+        </p:txBody>
+      </p:sp>
+      <p:sp>
+        <p:nvSpPr>
+          <p:cNvPr id="10" name="Rectangle 9"/>
+          <p:cNvSpPr/>
+          <p:nvPr/>
+        </p:nvSpPr>
+        <p:spPr>
+          <a:xfrm>
+            <a:off x="640080" y="2084832"/>
+            <a:ext cx="274320" cy="274320"/>
+          </a:xfrm>
+          <a:prstGeom prst="rect">
+            <a:avLst/>
+          </a:prstGeom>
+          <a:solidFill>
+            <a:srgbClr val="FFFFFF"/>
+          </a:solidFill>
+          <a:ln>
+            <a:solidFill>
+              <a:srgbClr val="333333"/>
+            </a:solidFill>
+          </a:ln>
+        </p:spPr>
+        <p:style>
+          <a:lnRef idx="1">
+            <a:schemeClr val="accent1"/>
+          </a:lnRef>
+          <a:fillRef idx="3">
+            <a:schemeClr val="accent1"/>
+          </a:fillRef>
+          <a:effectRef idx="2">
+            <a:schemeClr val="accent1"/>
+          </a:effectRef>
+          <a:fontRef idx="minor">
+            <a:schemeClr val="lt1"/>
+          </a:fontRef>
+        </p:style>
+        <p:txBody>
+          <a:bodyPr rtlCol="0" anchor="ctr"/>
+          <a:lstStyle/>
+          <a:p>
+            <a:pPr algn="ctr"/>
+          </a:p>
+        </p:txBody>
+      </p:sp>
+      <p:sp>
+        <p:nvSpPr>
+          <p:cNvPr id="11" name="Rectangle 10"/>
+          <p:cNvSpPr/>
+          <p:nvPr/>
+        </p:nvSpPr>
+        <p:spPr>
+          <a:xfrm>
+            <a:off x="640080" y="2084832"/>
+            <a:ext cx="73152" cy="274320"/>
+          </a:xfrm>
+          <a:prstGeom prst="rect">
+            <a:avLst/>
+          </a:prstGeom>
+          <a:solidFill>
+            <a:srgbClr val="269CCB"/>
+          </a:solidFill>
+          <a:ln>
+            <a:noFill/>
+          </a:ln>
+        </p:spPr>
+        <p:style>
+          <a:lnRef idx="1">
+            <a:schemeClr val="accent1"/>
+          </a:lnRef>
+          <a:fillRef idx="3">
+            <a:schemeClr val="accent1"/>
+          </a:fillRef>
+          <a:effectRef idx="2">
+            <a:schemeClr val="accent1"/>
+          </a:effectRef>
+          <a:fontRef idx="minor">
+            <a:schemeClr val="lt1"/>
+          </a:fontRef>
+        </p:style>
+        <p:txBody>
+          <a:bodyPr rtlCol="0" anchor="ctr"/>
+          <a:lstStyle/>
+          <a:p>
+            <a:pPr algn="ctr"/>
+          </a:p>
+        </p:txBody>
+      </p:sp>
+      <p:sp>
+        <p:nvSpPr>
+          <p:cNvPr id="12" name="TextBox 11"/>
+          <p:cNvSpPr txBox="1"/>
+          <p:nvPr/>
+        </p:nvSpPr>
+        <p:spPr>
+          <a:xfrm>
+            <a:off x="1097280" y="2029968"/>
+            <a:ext cx="10362895" cy="402336"/>
+          </a:xfrm>
+          <a:prstGeom prst="rect">
+            <a:avLst/>
+          </a:prstGeom>
+          <a:noFill/>
+        </p:spPr>
+        <p:txBody>
+          <a:bodyPr wrap="square" anchor="ctr"/>
+          <a:lstStyle/>
+          <a:p>
+            <a:r>
+              <a:rPr sz="1500" b="0" i="0">
+                <a:solidFill>
+                  <a:srgbClr val="333333"/>
+                </a:solidFill>
+                <a:latin typeface="Calibri"/>
+              </a:rPr>
+              <a:t>Si una prueba pasa cuando se corre sola pero falla cuando se corren todas, que estado esta sobreviviendo de un caso al siguiente y quien deberia limpiarlo?</a:t>
+            </a:r>
+          </a:p>
+        </p:txBody>
+      </p:sp>
+      <p:sp>
+        <p:nvSpPr>
+          <p:cNvPr id="13" name="Rounded Rectangle 12"/>
+          <p:cNvSpPr/>
+          <p:nvPr/>
+        </p:nvSpPr>
+        <p:spPr>
+          <a:xfrm>
+            <a:off x="457200" y="2615184"/>
+            <a:ext cx="11277295" cy="566928"/>
+          </a:xfrm>
+          <a:prstGeom prst="roundRect">
+            <a:avLst>
+              <a:gd name="adj" fmla="val 12000"/>
+            </a:avLst>
+          </a:prstGeom>
+          <a:solidFill>
+            <a:srgbClr val="F2F2F2"/>
+          </a:solidFill>
+          <a:ln>
+            <a:noFill/>
+          </a:ln>
+        </p:spPr>
+        <p:style>
+          <a:lnRef idx="1">
+            <a:schemeClr val="accent1"/>
+          </a:lnRef>
+          <a:fillRef idx="3">
+            <a:schemeClr val="accent1"/>
+          </a:fillRef>
+          <a:effectRef idx="2">
+            <a:schemeClr val="accent1"/>
+          </a:effectRef>
+          <a:fontRef idx="minor">
+            <a:schemeClr val="lt1"/>
+          </a:fontRef>
+        </p:style>
+        <p:txBody>
+          <a:bodyPr rtlCol="0" anchor="ctr"/>
+          <a:lstStyle/>
+          <a:p>
+            <a:pPr algn="ctr"/>
+          </a:p>
+        </p:txBody>
+      </p:sp>
+      <p:sp>
+        <p:nvSpPr>
+          <p:cNvPr id="14" name="Rectangle 13"/>
+          <p:cNvSpPr/>
+          <p:nvPr/>
+        </p:nvSpPr>
+        <p:spPr>
+          <a:xfrm>
+            <a:off x="640080" y="2761488"/>
+            <a:ext cx="274320" cy="274320"/>
+          </a:xfrm>
+          <a:prstGeom prst="rect">
+            <a:avLst/>
+          </a:prstGeom>
+          <a:solidFill>
+            <a:srgbClr val="FFFFFF"/>
+          </a:solidFill>
+          <a:ln>
+            <a:solidFill>
+              <a:srgbClr val="333333"/>
+            </a:solidFill>
+          </a:ln>
+        </p:spPr>
+        <p:style>
+          <a:lnRef idx="1">
+            <a:schemeClr val="accent1"/>
+          </a:lnRef>
+          <a:fillRef idx="3">
+            <a:schemeClr val="accent1"/>
+          </a:fillRef>
+          <a:effectRef idx="2">
+            <a:schemeClr val="accent1"/>
+          </a:effectRef>
+          <a:fontRef idx="minor">
+            <a:schemeClr val="lt1"/>
+          </a:fontRef>
+        </p:style>
+        <p:txBody>
+          <a:bodyPr rtlCol="0" anchor="ctr"/>
+          <a:lstStyle/>
+          <a:p>
+            <a:pPr algn="ctr"/>
+          </a:p>
+        </p:txBody>
+      </p:sp>
+      <p:sp>
+        <p:nvSpPr>
+          <p:cNvPr id="15" name="Rectangle 14"/>
+          <p:cNvSpPr/>
+          <p:nvPr/>
+        </p:nvSpPr>
+        <p:spPr>
+          <a:xfrm>
+            <a:off x="640080" y="2761488"/>
+            <a:ext cx="73152" cy="274320"/>
+          </a:xfrm>
+          <a:prstGeom prst="rect">
+            <a:avLst/>
+          </a:prstGeom>
+          <a:solidFill>
+            <a:srgbClr val="269CCB"/>
+          </a:solidFill>
+          <a:ln>
+            <a:noFill/>
+          </a:ln>
+        </p:spPr>
+        <p:style>
+          <a:lnRef idx="1">
+            <a:schemeClr val="accent1"/>
+          </a:lnRef>
+          <a:fillRef idx="3">
+            <a:schemeClr val="accent1"/>
+          </a:fillRef>
+          <a:effectRef idx="2">
+            <a:schemeClr val="accent1"/>
+          </a:effectRef>
+          <a:fontRef idx="minor">
+            <a:schemeClr val="lt1"/>
+          </a:fontRef>
+        </p:style>
+        <p:txBody>
+          <a:bodyPr rtlCol="0" anchor="ctr"/>
+          <a:lstStyle/>
+          <a:p>
+            <a:pPr algn="ctr"/>
+          </a:p>
+        </p:txBody>
+      </p:sp>
+      <p:sp>
+        <p:nvSpPr>
+          <p:cNvPr id="16" name="TextBox 15"/>
+          <p:cNvSpPr txBox="1"/>
+          <p:nvPr/>
+        </p:nvSpPr>
+        <p:spPr>
+          <a:xfrm>
+            <a:off x="1097280" y="2706624"/>
+            <a:ext cx="10362895" cy="402336"/>
+          </a:xfrm>
+          <a:prstGeom prst="rect">
+            <a:avLst/>
+          </a:prstGeom>
+          <a:noFill/>
+        </p:spPr>
+        <p:txBody>
+          <a:bodyPr wrap="square" anchor="ctr"/>
+          <a:lstStyle/>
+          <a:p>
+            <a:r>
+              <a:rPr sz="1500" b="0" i="0">
+                <a:solidFill>
+                  <a:srgbClr val="333333"/>
+                </a:solidFill>
+                <a:latin typeface="Calibri"/>
+              </a:rPr>
+              <a:t>Si para comprobar la regla usted necesita abrir la ventana y oprimir un boton, donde quedo escrita esa regla y donde deberia estar?</a:t>
+            </a:r>
+          </a:p>
+        </p:txBody>
+      </p:sp>
+      <p:sp>
+        <p:nvSpPr>
+          <p:cNvPr id="17" name="TextBox 16"/>
+          <p:cNvSpPr txBox="1"/>
+          <p:nvPr/>
+        </p:nvSpPr>
+        <p:spPr>
+          <a:xfrm>
+            <a:off x="11185855" y="6473952"/>
+            <a:ext cx="640080" cy="274320"/>
+          </a:xfrm>
+          <a:prstGeom prst="rect">
+            <a:avLst/>
+          </a:prstGeom>
+          <a:noFill/>
+        </p:spPr>
+        <p:txBody>
+          <a:bodyPr wrap="square">
+            <a:spAutoFit/>
+          </a:bodyPr>
+          <a:lstStyle/>
+          <a:p>
+            <a:pPr algn="r"/>
+            <a:r>
+              <a:rPr sz="1100" b="0" i="0">
+                <a:solidFill>
+                  <a:srgbClr val="666666"/>
+                </a:solidFill>
+                <a:latin typeface="Calibri"/>
+              </a:rPr>
+              <a:t>15</a:t>
+            </a:r>
+          </a:p>
+        </p:txBody>
+      </p:sp>
+    </p:spTree>
+  </p:cSld>
+  <p:clrMapOvr>
+    <a:masterClrMapping/>
+  </p:clrMapOvr>
+</p:sld>
+</file>
+
+<file path=ppt/slides/slide16.xml><?xml version="1.0" encoding="utf-8"?>
+<p:sld xmlns:a="http://schemas.openxmlformats.org/drawingml/2006/main" xmlns:p="http://schemas.openxmlformats.org/presentationml/2006/main" xmlns:r="http://schemas.openxmlformats.org/officeDocument/2006/relationships">
+  <p:cSld>
+    <p:bg>
+      <p:bgPr>
+        <a:solidFill>
+          <a:srgbClr val="FFFFFF"/>
+        </a:solidFill>
+        <a:effectLst/>
+      </p:bgPr>
+    </p:bg>
+    <p:spTree>
+      <p:nvGrpSpPr>
+        <p:cNvPr id="1" name=""/>
+        <p:cNvGrpSpPr/>
+        <p:nvPr/>
+      </p:nvGrpSpPr>
+      <p:grpSpPr/>
+      <p:sp>
+        <p:nvSpPr>
+          <p:cNvPr id="2" name="Rectangle 1"/>
+          <p:cNvSpPr/>
+          <p:nvPr/>
+        </p:nvSpPr>
+        <p:spPr>
+          <a:xfrm>
+            <a:off x="0" y="0"/>
+            <a:ext cx="12191695" cy="960120"/>
+          </a:xfrm>
+          <a:prstGeom prst="rect">
+            <a:avLst/>
+          </a:prstGeom>
+          <a:solidFill>
+            <a:srgbClr val="095292"/>
+          </a:solidFill>
+          <a:ln>
+            <a:noFill/>
+          </a:ln>
+        </p:spPr>
+        <p:style>
+          <a:lnRef idx="1">
+            <a:schemeClr val="accent1"/>
+          </a:lnRef>
+          <a:fillRef idx="3">
+            <a:schemeClr val="accent1"/>
+          </a:fillRef>
+          <a:effectRef idx="2">
+            <a:schemeClr val="accent1"/>
+          </a:effectRef>
+          <a:fontRef idx="minor">
+            <a:schemeClr val="lt1"/>
+          </a:fontRef>
+        </p:style>
+        <p:txBody>
+          <a:bodyPr rtlCol="0" anchor="ctr"/>
+          <a:lstStyle/>
+          <a:p>
+            <a:pPr algn="ctr"/>
+          </a:p>
+        </p:txBody>
+      </p:sp>
+      <p:sp>
+        <p:nvSpPr>
+          <p:cNvPr id="3" name="Rectangle 2"/>
+          <p:cNvSpPr/>
+          <p:nvPr/>
+        </p:nvSpPr>
+        <p:spPr>
+          <a:xfrm>
+            <a:off x="0" y="960120"/>
+            <a:ext cx="12191695" cy="41148"/>
+          </a:xfrm>
+          <a:prstGeom prst="rect">
+            <a:avLst/>
+          </a:prstGeom>
+          <a:solidFill>
+            <a:srgbClr val="FFD000"/>
+          </a:solidFill>
+          <a:ln>
+            <a:noFill/>
+          </a:ln>
+        </p:spPr>
+        <p:style>
+          <a:lnRef idx="1">
+            <a:schemeClr val="accent1"/>
+          </a:lnRef>
+          <a:fillRef idx="3">
+            <a:schemeClr val="accent1"/>
+          </a:fillRef>
+          <a:effectRef idx="2">
+            <a:schemeClr val="accent1"/>
+          </a:effectRef>
+          <a:fontRef idx="minor">
+            <a:schemeClr val="lt1"/>
+          </a:fontRef>
+        </p:style>
+        <p:txBody>
+          <a:bodyPr rtlCol="0" anchor="ctr"/>
+          <a:lstStyle/>
+          <a:p>
+            <a:pPr algn="ctr"/>
+          </a:p>
+        </p:txBody>
+      </p:sp>
+      <p:sp>
+        <p:nvSpPr>
+          <p:cNvPr id="4" name="TextBox 3"/>
+          <p:cNvSpPr txBox="1"/>
+          <p:nvPr/>
+        </p:nvSpPr>
+        <p:spPr>
+          <a:xfrm>
+            <a:off x="457200" y="164592"/>
+            <a:ext cx="11277295" cy="502920"/>
+          </a:xfrm>
+          <a:prstGeom prst="rect">
+            <a:avLst/>
+          </a:prstGeom>
+          <a:noFill/>
+        </p:spPr>
+        <p:txBody>
+          <a:bodyPr wrap="square">
+            <a:spAutoFit/>
+          </a:bodyPr>
+          <a:lstStyle/>
+          <a:p>
+            <a:r>
+              <a:rPr sz="2600" b="1" i="0">
+                <a:solidFill>
+                  <a:srgbClr val="FFFFFF"/>
+                </a:solidFill>
+                <a:latin typeface="Calibri"/>
+              </a:rPr>
+              <a:t>Criterios de exito / entregable</a:t>
+            </a:r>
+          </a:p>
+        </p:txBody>
+      </p:sp>
+      <p:sp>
+        <p:nvSpPr>
+          <p:cNvPr id="5" name="TextBox 4"/>
+          <p:cNvSpPr txBox="1"/>
+          <p:nvPr/>
+        </p:nvSpPr>
+        <p:spPr>
+          <a:xfrm>
+            <a:off x="457200" y="1170432"/>
+            <a:ext cx="11277295" cy="5230368"/>
+          </a:xfrm>
+          <a:prstGeom prst="rect">
+            <a:avLst/>
+          </a:prstGeom>
+          <a:noFill/>
+        </p:spPr>
+        <p:txBody>
+          <a:bodyPr wrap="square">
+            <a:spAutoFit/>
+          </a:bodyPr>
+          <a:lstStyle/>
+          <a:p>
+            <a:pPr>
+              <a:spcAft>
+                <a:spcPts val="800"/>
+              </a:spcAft>
+            </a:pPr>
+            <a:r>
+              <a:rPr sz="2000" b="0" i="0">
+                <a:solidFill>
+                  <a:srgbClr val="333333"/>
+                </a:solidFill>
+                <a:latin typeface="Calibri"/>
+              </a:rPr>
+              <a:t>–   </a:t>
+            </a:r>
+            <a:r>
+              <a:rPr sz="2000" b="1" i="0">
+                <a:solidFill>
+                  <a:srgbClr val="333333"/>
+                </a:solidFill>
+                <a:latin typeface="Calibri"/>
+              </a:rPr>
+              <a:t>Entregable:</a:t>
+            </a:r>
+            <a:r>
+              <a:rPr sz="2000" b="0" i="0">
+                <a:solidFill>
+                  <a:srgbClr val="333333"/>
+                </a:solidFill>
+                <a:latin typeface="Calibri"/>
+              </a:rPr>
+              <a:t> Mascota, Cita y AgendaService con Javadoc completo, la carpeta HTML generada y una clase de pruebas con cuatro casos, subidos a la plataforma del curso.</a:t>
+            </a:r>
+          </a:p>
+          <a:p>
+            <a:pPr>
+              <a:spcAft>
+                <a:spcPts val="800"/>
+              </a:spcAft>
+            </a:pPr>
+            <a:r>
+              <a:rPr sz="2000" b="0" i="0">
+                <a:solidFill>
+                  <a:srgbClr val="333333"/>
+                </a:solidFill>
+                <a:latin typeface="Calibri"/>
+              </a:rPr>
+              <a:t>–   </a:t>
+            </a:r>
+            <a:r>
+              <a:rPr sz="2000" b="1" i="0">
+                <a:solidFill>
+                  <a:srgbClr val="333333"/>
+                </a:solidFill>
+                <a:latin typeface="Calibri"/>
+              </a:rPr>
+              <a:t>Exito:</a:t>
+            </a:r>
+            <a:r>
+              <a:rPr sz="2000" b="0" i="0">
+                <a:solidFill>
+                  <a:srgbClr val="333333"/>
+                </a:solidFill>
+                <a:latin typeface="Calibri"/>
+              </a:rPr>
+              <a:t> El Javadoc de agendar incluye @param de los dos parametros, @return y al menos dos @throws, y la regla de la mascota inactiva queda escrita en palabras.</a:t>
+            </a:r>
+          </a:p>
+          <a:p>
+            <a:pPr>
+              <a:spcAft>
+                <a:spcPts val="800"/>
+              </a:spcAft>
+            </a:pPr>
+            <a:r>
+              <a:rPr sz="2000" b="0" i="0">
+                <a:solidFill>
+                  <a:srgbClr val="333333"/>
+                </a:solidFill>
+                <a:latin typeface="Calibri"/>
+              </a:rPr>
+              <a:t>–   </a:t>
+            </a:r>
+            <a:r>
+              <a:rPr sz="2000" b="1" i="0">
+                <a:solidFill>
+                  <a:srgbClr val="333333"/>
+                </a:solidFill>
+                <a:latin typeface="Calibri"/>
+              </a:rPr>
+              <a:t>Exito:</a:t>
+            </a:r>
+            <a:r>
+              <a:rPr sz="2000" b="0" i="0">
+                <a:solidFill>
+                  <a:srgbClr val="333333"/>
+                </a:solidFill>
+                <a:latin typeface="Calibri"/>
+              </a:rPr>
+              <a:t> La documentacion HTML se genera sin errores y en la ficha de AgendaService se lee el resumen de cada metodo publico.</a:t>
+            </a:r>
+          </a:p>
+          <a:p>
+            <a:pPr>
+              <a:spcAft>
+                <a:spcPts val="800"/>
+              </a:spcAft>
+            </a:pPr>
+            <a:r>
+              <a:rPr sz="2000" b="0" i="0">
+                <a:solidFill>
+                  <a:srgbClr val="333333"/>
+                </a:solidFill>
+                <a:latin typeface="Calibri"/>
+              </a:rPr>
+              <a:t>–   </a:t>
+            </a:r>
+            <a:r>
+              <a:rPr sz="2000" b="1" i="0">
+                <a:solidFill>
+                  <a:srgbClr val="333333"/>
+                </a:solidFill>
+                <a:latin typeface="Calibri"/>
+              </a:rPr>
+              <a:t>Exito:</a:t>
+            </a:r>
+            <a:r>
+              <a:rPr sz="2000" b="0" i="0">
+                <a:solidFill>
+                  <a:srgbClr val="333333"/>
+                </a:solidFill>
+                <a:latin typeface="Calibri"/>
+              </a:rPr>
+              <a:t> Existen cuatro casos de prueba con nombres que describen escenario y resultado esperado, y cada uno funciona sin depender de los otros.</a:t>
+            </a:r>
+          </a:p>
+          <a:p>
+            <a:pPr>
+              <a:spcAft>
+                <a:spcPts val="800"/>
+              </a:spcAft>
+            </a:pPr>
+            <a:r>
+              <a:rPr sz="2000" b="0" i="0">
+                <a:solidFill>
+                  <a:srgbClr val="333333"/>
+                </a:solidFill>
+                <a:latin typeface="Calibri"/>
+              </a:rPr>
+              <a:t>–   </a:t>
+            </a:r>
+            <a:r>
+              <a:rPr sz="2000" b="1" i="0">
+                <a:solidFill>
+                  <a:srgbClr val="333333"/>
+                </a:solidFill>
+                <a:latin typeface="Calibri"/>
+              </a:rPr>
+              <a:t>Exito:</a:t>
+            </a:r>
+            <a:r>
+              <a:rPr sz="2000" b="0" i="0">
+                <a:solidFill>
+                  <a:srgbClr val="333333"/>
+                </a:solidFill>
+                <a:latin typeface="Calibri"/>
+              </a:rPr>
+              <a:t> Al comentar la validacion de mascota inactiva la prueba correspondiente falla, y al restaurarla vuelve a pasar (evidencia de rojo y de verde).</a:t>
+            </a:r>
+          </a:p>
+          <a:p>
+            <a:pPr>
+              <a:spcAft>
+                <a:spcPts val="800"/>
+              </a:spcAft>
+            </a:pPr>
+            <a:r>
+              <a:rPr sz="2000" b="0" i="0">
+                <a:solidFill>
+                  <a:srgbClr val="333333"/>
+                </a:solidFill>
+                <a:latin typeface="Calibri"/>
+              </a:rPr>
+              <a:t>–   </a:t>
+            </a:r>
+            <a:r>
+              <a:rPr sz="2000" b="1" i="0">
+                <a:solidFill>
+                  <a:srgbClr val="333333"/>
+                </a:solidFill>
+                <a:latin typeface="Calibri"/>
+              </a:rPr>
+              <a:t>Entrega en la plataforma del curso</a:t>
+            </a:r>
+            <a:r>
+              <a:rPr sz="2000" b="0" i="0">
+                <a:solidFill>
+                  <a:srgbClr val="333333"/>
+                </a:solidFill>
+                <a:latin typeface="Calibri"/>
+              </a:rPr>
+              <a:t> — en la fecha que indique el docente.</a:t>
+            </a:r>
+          </a:p>
+        </p:txBody>
+      </p:sp>
+      <p:sp>
+        <p:nvSpPr>
+          <p:cNvPr id="6" name="TextBox 5"/>
+          <p:cNvSpPr txBox="1"/>
+          <p:nvPr/>
+        </p:nvSpPr>
+        <p:spPr>
+          <a:xfrm>
+            <a:off x="11185855" y="6473952"/>
+            <a:ext cx="640080" cy="274320"/>
+          </a:xfrm>
+          <a:prstGeom prst="rect">
+            <a:avLst/>
+          </a:prstGeom>
+          <a:noFill/>
+        </p:spPr>
+        <p:txBody>
+          <a:bodyPr wrap="square">
+            <a:spAutoFit/>
+          </a:bodyPr>
+          <a:lstStyle/>
+          <a:p>
+            <a:pPr algn="r"/>
+            <a:r>
+              <a:rPr sz="1100" b="0" i="0">
+                <a:solidFill>
+                  <a:srgbClr val="666666"/>
+                </a:solidFill>
+                <a:latin typeface="Calibri"/>
+              </a:rPr>
+              <a:t>16</a:t>
+            </a:r>
+          </a:p>
+        </p:txBody>
+      </p:sp>
+    </p:spTree>
+  </p:cSld>
+  <p:clrMapOvr>
+    <a:masterClrMapping/>
+  </p:clrMapOvr>
+</p:sld>
+</file>
+
+<file path=ppt/slides/slide17.xml><?xml version="1.0" encoding="utf-8"?>
+<p:sld xmlns:a="http://schemas.openxmlformats.org/drawingml/2006/main" xmlns:p="http://schemas.openxmlformats.org/presentationml/2006/main" xmlns:r="http://schemas.openxmlformats.org/officeDocument/2006/relationships">
+  <p:cSld>
+    <p:bg>
+      <p:bgPr>
+        <a:solidFill>
+          <a:srgbClr val="FFFFFF"/>
+        </a:solidFill>
+        <a:effectLst/>
+      </p:bgPr>
+    </p:bg>
+    <p:spTree>
+      <p:nvGrpSpPr>
+        <p:cNvPr id="1" name=""/>
+        <p:cNvGrpSpPr/>
+        <p:nvPr/>
+      </p:nvGrpSpPr>
+      <p:grpSpPr/>
+      <p:sp>
+        <p:nvSpPr>
+          <p:cNvPr id="2" name="Rectangle 1"/>
+          <p:cNvSpPr/>
+          <p:nvPr/>
+        </p:nvSpPr>
+        <p:spPr>
+          <a:xfrm>
+            <a:off x="0" y="0"/>
+            <a:ext cx="12191695" cy="960120"/>
+          </a:xfrm>
+          <a:prstGeom prst="rect">
+            <a:avLst/>
+          </a:prstGeom>
+          <a:solidFill>
+            <a:srgbClr val="095292"/>
+          </a:solidFill>
+          <a:ln>
+            <a:noFill/>
+          </a:ln>
+        </p:spPr>
+        <p:style>
+          <a:lnRef idx="1">
+            <a:schemeClr val="accent1"/>
+          </a:lnRef>
+          <a:fillRef idx="3">
+            <a:schemeClr val="accent1"/>
+          </a:fillRef>
+          <a:effectRef idx="2">
+            <a:schemeClr val="accent1"/>
+          </a:effectRef>
+          <a:fontRef idx="minor">
+            <a:schemeClr val="lt1"/>
+          </a:fontRef>
+        </p:style>
+        <p:txBody>
+          <a:bodyPr rtlCol="0" anchor="ctr"/>
+          <a:lstStyle/>
+          <a:p>
+            <a:pPr algn="ctr"/>
+          </a:p>
+        </p:txBody>
+      </p:sp>
+      <p:sp>
+        <p:nvSpPr>
+          <p:cNvPr id="3" name="Rectangle 2"/>
+          <p:cNvSpPr/>
+          <p:nvPr/>
+        </p:nvSpPr>
+        <p:spPr>
+          <a:xfrm>
+            <a:off x="0" y="960120"/>
+            <a:ext cx="12191695" cy="41148"/>
+          </a:xfrm>
+          <a:prstGeom prst="rect">
+            <a:avLst/>
+          </a:prstGeom>
+          <a:solidFill>
+            <a:srgbClr val="FFD000"/>
+          </a:solidFill>
+          <a:ln>
+            <a:noFill/>
+          </a:ln>
+        </p:spPr>
+        <p:style>
+          <a:lnRef idx="1">
+            <a:schemeClr val="accent1"/>
+          </a:lnRef>
+          <a:fillRef idx="3">
+            <a:schemeClr val="accent1"/>
+          </a:fillRef>
+          <a:effectRef idx="2">
+            <a:schemeClr val="accent1"/>
+          </a:effectRef>
+          <a:fontRef idx="minor">
+            <a:schemeClr val="lt1"/>
+          </a:fontRef>
+        </p:style>
+        <p:txBody>
+          <a:bodyPr rtlCol="0" anchor="ctr"/>
+          <a:lstStyle/>
+          <a:p>
+            <a:pPr algn="ctr"/>
+          </a:p>
+        </p:txBody>
+      </p:sp>
+      <p:sp>
+        <p:nvSpPr>
+          <p:cNvPr id="4" name="TextBox 3"/>
+          <p:cNvSpPr txBox="1"/>
+          <p:nvPr/>
+        </p:nvSpPr>
+        <p:spPr>
+          <a:xfrm>
+            <a:off x="457200" y="164592"/>
+            <a:ext cx="11277295" cy="502920"/>
+          </a:xfrm>
+          <a:prstGeom prst="rect">
+            <a:avLst/>
+          </a:prstGeom>
+          <a:noFill/>
+        </p:spPr>
+        <p:txBody>
+          <a:bodyPr wrap="square">
+            <a:spAutoFit/>
+          </a:bodyPr>
+          <a:lstStyle/>
+          <a:p>
+            <a:r>
+              <a:rPr sz="2600" b="1" i="0">
+                <a:solidFill>
+                  <a:srgbClr val="FFFFFF"/>
+                </a:solidFill>
+                <a:latin typeface="Calibri"/>
+              </a:rPr>
+              <a:t>Para el PI esta semana</a:t>
+            </a:r>
+          </a:p>
+        </p:txBody>
+      </p:sp>
+      <p:sp>
+        <p:nvSpPr>
+          <p:cNvPr id="5" name="Rounded Rectangle 4"/>
+          <p:cNvSpPr/>
+          <p:nvPr/>
+        </p:nvSpPr>
+        <p:spPr>
+          <a:xfrm>
+            <a:off x="457200" y="1261872"/>
+            <a:ext cx="11277295" cy="1051560"/>
+          </a:xfrm>
+          <a:prstGeom prst="roundRect">
+            <a:avLst>
+              <a:gd name="adj" fmla="val 12000"/>
+            </a:avLst>
+          </a:prstGeom>
+          <a:solidFill>
+            <a:srgbClr val="E8F4FA"/>
+          </a:solidFill>
+          <a:ln>
+            <a:noFill/>
+          </a:ln>
+        </p:spPr>
+        <p:style>
+          <a:lnRef idx="1">
+            <a:schemeClr val="accent1"/>
+          </a:lnRef>
+          <a:fillRef idx="3">
+            <a:schemeClr val="accent1"/>
+          </a:fillRef>
+          <a:effectRef idx="2">
+            <a:schemeClr val="accent1"/>
+          </a:effectRef>
+          <a:fontRef idx="minor">
+            <a:schemeClr val="lt1"/>
+          </a:fontRef>
+        </p:style>
+        <p:txBody>
+          <a:bodyPr rtlCol="0" anchor="ctr"/>
+          <a:lstStyle/>
+          <a:p>
+            <a:pPr algn="ctr"/>
+          </a:p>
+        </p:txBody>
+      </p:sp>
+      <p:sp>
+        <p:nvSpPr>
+          <p:cNvPr id="6" name="Rectangle 5"/>
+          <p:cNvSpPr/>
+          <p:nvPr/>
+        </p:nvSpPr>
+        <p:spPr>
+          <a:xfrm>
+            <a:off x="457200" y="1261872"/>
+            <a:ext cx="128016" cy="1051560"/>
+          </a:xfrm>
+          <a:prstGeom prst="rect">
+            <a:avLst/>
+          </a:prstGeom>
+          <a:solidFill>
+            <a:srgbClr val="269CCB"/>
+          </a:solidFill>
+          <a:ln>
+            <a:noFill/>
+          </a:ln>
+        </p:spPr>
+        <p:style>
+          <a:lnRef idx="1">
+            <a:schemeClr val="accent1"/>
+          </a:lnRef>
+          <a:fillRef idx="3">
+            <a:schemeClr val="accent1"/>
+          </a:fillRef>
+          <a:effectRef idx="2">
+            <a:schemeClr val="accent1"/>
+          </a:effectRef>
+          <a:fontRef idx="minor">
+            <a:schemeClr val="lt1"/>
+          </a:fontRef>
+        </p:style>
+        <p:txBody>
+          <a:bodyPr rtlCol="0" anchor="ctr"/>
+          <a:lstStyle/>
+          <a:p>
+            <a:pPr algn="ctr"/>
+          </a:p>
+        </p:txBody>
+      </p:sp>
+      <p:sp>
+        <p:nvSpPr>
+          <p:cNvPr id="7" name="TextBox 6"/>
+          <p:cNvSpPr txBox="1"/>
+          <p:nvPr/>
+        </p:nvSpPr>
+        <p:spPr>
+          <a:xfrm>
+            <a:off x="777240" y="1399031"/>
+            <a:ext cx="10774375" cy="822959"/>
+          </a:xfrm>
+          <a:prstGeom prst="rect">
+            <a:avLst/>
+          </a:prstGeom>
+          <a:noFill/>
+        </p:spPr>
+        <p:txBody>
+          <a:bodyPr wrap="square">
+            <a:spAutoFit/>
+          </a:bodyPr>
+          <a:lstStyle/>
+          <a:p>
+            <a:r>
+              <a:rPr sz="1200" b="1" i="0">
+                <a:solidFill>
+                  <a:srgbClr val="269CCB"/>
+                </a:solidFill>
+                <a:latin typeface="Calibri"/>
+              </a:rPr>
+              <a:t>Info</a:t>
+            </a:r>
+          </a:p>
+          <a:p>
+            <a:pPr>
+              <a:spcBef>
+                <a:spcPts val="400"/>
+              </a:spcBef>
+            </a:pPr>
+            <a:r>
+              <a:rPr sz="1400" b="0" i="0">
+                <a:solidFill>
+                  <a:srgbClr val="333333"/>
+                </a:solidFill>
+                <a:latin typeface="Calibri"/>
+              </a:rPr>
+              <a:t>Hito: Las clases del dominio de VetCare quedan documentadas con Javadoc y la regla 'mascota inactiva no agenda' queda respaldada por pruebas que se ejecutan solas.</a:t>
+            </a:r>
+          </a:p>
+        </p:txBody>
+      </p:sp>
+      <p:sp>
+        <p:nvSpPr>
+          <p:cNvPr id="8" name="Rounded Rectangle 7"/>
+          <p:cNvSpPr/>
+          <p:nvPr/>
+        </p:nvSpPr>
+        <p:spPr>
+          <a:xfrm>
+            <a:off x="457200" y="2478024"/>
+            <a:ext cx="11277295" cy="1051560"/>
+          </a:xfrm>
+          <a:prstGeom prst="roundRect">
+            <a:avLst>
+              <a:gd name="adj" fmla="val 12000"/>
+            </a:avLst>
+          </a:prstGeom>
+          <a:solidFill>
+            <a:srgbClr val="FFF8E1"/>
+          </a:solidFill>
+          <a:ln>
+            <a:noFill/>
+          </a:ln>
+        </p:spPr>
+        <p:style>
+          <a:lnRef idx="1">
+            <a:schemeClr val="accent1"/>
+          </a:lnRef>
+          <a:fillRef idx="3">
+            <a:schemeClr val="accent1"/>
+          </a:fillRef>
+          <a:effectRef idx="2">
+            <a:schemeClr val="accent1"/>
+          </a:effectRef>
+          <a:fontRef idx="minor">
+            <a:schemeClr val="lt1"/>
+          </a:fontRef>
+        </p:style>
+        <p:txBody>
+          <a:bodyPr rtlCol="0" anchor="ctr"/>
+          <a:lstStyle/>
+          <a:p>
+            <a:pPr algn="ctr"/>
+          </a:p>
+        </p:txBody>
+      </p:sp>
+      <p:sp>
+        <p:nvSpPr>
+          <p:cNvPr id="9" name="Rectangle 8"/>
+          <p:cNvSpPr/>
+          <p:nvPr/>
+        </p:nvSpPr>
+        <p:spPr>
+          <a:xfrm>
+            <a:off x="457200" y="2478024"/>
+            <a:ext cx="128016" cy="1051560"/>
+          </a:xfrm>
+          <a:prstGeom prst="rect">
+            <a:avLst/>
+          </a:prstGeom>
+          <a:solidFill>
+            <a:srgbClr val="FFD000"/>
+          </a:solidFill>
+          <a:ln>
+            <a:noFill/>
+          </a:ln>
+        </p:spPr>
+        <p:style>
+          <a:lnRef idx="1">
+            <a:schemeClr val="accent1"/>
+          </a:lnRef>
+          <a:fillRef idx="3">
+            <a:schemeClr val="accent1"/>
+          </a:fillRef>
+          <a:effectRef idx="2">
+            <a:schemeClr val="accent1"/>
+          </a:effectRef>
+          <a:fontRef idx="minor">
+            <a:schemeClr val="lt1"/>
+          </a:fontRef>
+        </p:style>
+        <p:txBody>
+          <a:bodyPr rtlCol="0" anchor="ctr"/>
+          <a:lstStyle/>
+          <a:p>
+            <a:pPr algn="ctr"/>
+          </a:p>
+        </p:txBody>
+      </p:sp>
+      <p:sp>
+        <p:nvSpPr>
+          <p:cNvPr id="10" name="TextBox 9"/>
+          <p:cNvSpPr txBox="1"/>
+          <p:nvPr/>
+        </p:nvSpPr>
+        <p:spPr>
+          <a:xfrm>
+            <a:off x="777240" y="2615184"/>
+            <a:ext cx="10774375" cy="822959"/>
+          </a:xfrm>
+          <a:prstGeom prst="rect">
+            <a:avLst/>
+          </a:prstGeom>
+          <a:noFill/>
+        </p:spPr>
+        <p:txBody>
+          <a:bodyPr wrap="square">
+            <a:spAutoFit/>
+          </a:bodyPr>
+          <a:lstStyle/>
+          <a:p>
+            <a:r>
+              <a:rPr sz="1200" b="1" i="0">
+                <a:solidFill>
+                  <a:srgbClr val="FFD000"/>
+                </a:solidFill>
+                <a:latin typeface="Calibri"/>
+              </a:rPr>
+              <a:t>Aclaración</a:t>
+            </a:r>
+          </a:p>
+          <a:p>
+            <a:pPr>
+              <a:spcBef>
+                <a:spcPts val="400"/>
+              </a:spcBef>
+            </a:pPr>
+            <a:r>
+              <a:rPr sz="1400" b="0" i="0">
+                <a:solidFill>
+                  <a:srgbClr val="333333"/>
+                </a:solidFill>
+                <a:latin typeface="Calibri"/>
+              </a:rPr>
+              <a:t>Enunciado completo: Clases/Proyecto Integrador/ (VetCare).</a:t>
+            </a:r>
+          </a:p>
+        </p:txBody>
+      </p:sp>
+      <p:sp>
+        <p:nvSpPr>
+          <p:cNvPr id="11" name="Rounded Rectangle 10"/>
+          <p:cNvSpPr/>
+          <p:nvPr/>
+        </p:nvSpPr>
+        <p:spPr>
+          <a:xfrm>
+            <a:off x="457200" y="3694176"/>
+            <a:ext cx="11277295" cy="1051560"/>
+          </a:xfrm>
+          <a:prstGeom prst="roundRect">
+            <a:avLst>
+              <a:gd name="adj" fmla="val 12000"/>
+            </a:avLst>
+          </a:prstGeom>
+          <a:solidFill>
+            <a:srgbClr val="FBE4E4"/>
+          </a:solidFill>
+          <a:ln>
+            <a:noFill/>
+          </a:ln>
+        </p:spPr>
+        <p:style>
+          <a:lnRef idx="1">
+            <a:schemeClr val="accent1"/>
+          </a:lnRef>
+          <a:fillRef idx="3">
+            <a:schemeClr val="accent1"/>
+          </a:fillRef>
+          <a:effectRef idx="2">
+            <a:schemeClr val="accent1"/>
+          </a:effectRef>
+          <a:fontRef idx="minor">
+            <a:schemeClr val="lt1"/>
+          </a:fontRef>
+        </p:style>
+        <p:txBody>
+          <a:bodyPr rtlCol="0" anchor="ctr"/>
+          <a:lstStyle/>
+          <a:p>
+            <a:pPr algn="ctr"/>
+          </a:p>
+        </p:txBody>
+      </p:sp>
+      <p:sp>
+        <p:nvSpPr>
+          <p:cNvPr id="12" name="Rectangle 11"/>
+          <p:cNvSpPr/>
+          <p:nvPr/>
+        </p:nvSpPr>
+        <p:spPr>
+          <a:xfrm>
+            <a:off x="457200" y="3694176"/>
+            <a:ext cx="128016" cy="1051560"/>
+          </a:xfrm>
+          <a:prstGeom prst="rect">
+            <a:avLst/>
+          </a:prstGeom>
+          <a:solidFill>
+            <a:srgbClr val="A02030"/>
+          </a:solidFill>
+          <a:ln>
+            <a:noFill/>
+          </a:ln>
+        </p:spPr>
+        <p:style>
+          <a:lnRef idx="1">
+            <a:schemeClr val="accent1"/>
+          </a:lnRef>
+          <a:fillRef idx="3">
+            <a:schemeClr val="accent1"/>
+          </a:fillRef>
+          <a:effectRef idx="2">
+            <a:schemeClr val="accent1"/>
+          </a:effectRef>
+          <a:fontRef idx="minor">
+            <a:schemeClr val="lt1"/>
+          </a:fontRef>
+        </p:style>
+        <p:txBody>
+          <a:bodyPr rtlCol="0" anchor="ctr"/>
+          <a:lstStyle/>
+          <a:p>
+            <a:pPr algn="ctr"/>
+          </a:p>
+        </p:txBody>
+      </p:sp>
+      <p:sp>
+        <p:nvSpPr>
+          <p:cNvPr id="13" name="TextBox 12"/>
+          <p:cNvSpPr txBox="1"/>
+          <p:nvPr/>
+        </p:nvSpPr>
+        <p:spPr>
+          <a:xfrm>
+            <a:off x="777240" y="3831336"/>
+            <a:ext cx="10774375" cy="822959"/>
+          </a:xfrm>
+          <a:prstGeom prst="rect">
+            <a:avLst/>
+          </a:prstGeom>
+          <a:noFill/>
+        </p:spPr>
+        <p:txBody>
+          <a:bodyPr wrap="square">
+            <a:spAutoFit/>
+          </a:bodyPr>
+          <a:lstStyle/>
+          <a:p>
+            <a:r>
+              <a:rPr sz="1200" b="1" i="0">
+                <a:solidFill>
+                  <a:srgbClr val="A02030"/>
+                </a:solidFill>
+                <a:latin typeface="Calibri"/>
+              </a:rPr>
+              <a:t>Atención</a:t>
+            </a:r>
+          </a:p>
+          <a:p>
+            <a:pPr>
+              <a:spcBef>
+                <a:spcPts val="400"/>
+              </a:spcBef>
+            </a:pPr>
+            <a:r>
+              <a:rPr sz="1400" b="0" i="0">
+                <a:solidFill>
+                  <a:srgbClr val="333333"/>
+                </a:solidFill>
+                <a:latin typeface="Calibri"/>
+              </a:rPr>
+              <a:t>Entrega del taller, si el docente lo asigna · en la fecha que indique el docente.</a:t>
+            </a:r>
+          </a:p>
+        </p:txBody>
+      </p:sp>
+      <p:sp>
+        <p:nvSpPr>
+          <p:cNvPr id="14" name="TextBox 13"/>
+          <p:cNvSpPr txBox="1"/>
+          <p:nvPr/>
+        </p:nvSpPr>
+        <p:spPr>
+          <a:xfrm>
+            <a:off x="11185855" y="6473952"/>
+            <a:ext cx="640080" cy="274320"/>
+          </a:xfrm>
+          <a:prstGeom prst="rect">
+            <a:avLst/>
+          </a:prstGeom>
+          <a:noFill/>
+        </p:spPr>
+        <p:txBody>
+          <a:bodyPr wrap="square">
+            <a:spAutoFit/>
+          </a:bodyPr>
+          <a:lstStyle/>
+          <a:p>
+            <a:pPr algn="r"/>
+            <a:r>
+              <a:rPr sz="1100" b="0" i="0">
+                <a:solidFill>
+                  <a:srgbClr val="666666"/>
+                </a:solidFill>
+                <a:latin typeface="Calibri"/>
+              </a:rPr>
+              <a:t>17</a:t>
+            </a:r>
+          </a:p>
+        </p:txBody>
+      </p:sp>
+    </p:spTree>
+  </p:cSld>
+  <p:clrMapOvr>
+    <a:masterClrMapping/>
+  </p:clrMapOvr>
+</p:sld>
+</file>
+
+<file path=ppt/slides/slide18.xml><?xml version="1.0" encoding="utf-8"?>
+<p:sld xmlns:a="http://schemas.openxmlformats.org/drawingml/2006/main" xmlns:p="http://schemas.openxmlformats.org/presentationml/2006/main" xmlns:r="http://schemas.openxmlformats.org/officeDocument/2006/relationships">
+  <p:cSld>
+    <p:bg>
+      <p:bgPr>
+        <a:solidFill>
+          <a:srgbClr val="FFFFFF"/>
+        </a:solidFill>
+        <a:effectLst/>
+      </p:bgPr>
+    </p:bg>
+    <p:spTree>
+      <p:nvGrpSpPr>
+        <p:cNvPr id="1" name=""/>
+        <p:cNvGrpSpPr/>
+        <p:nvPr/>
+      </p:nvGrpSpPr>
+      <p:grpSpPr/>
+      <p:sp>
+        <p:nvSpPr>
+          <p:cNvPr id="2" name="Rectangle 1"/>
+          <p:cNvSpPr/>
+          <p:nvPr/>
+        </p:nvSpPr>
+        <p:spPr>
+          <a:xfrm>
+            <a:off x="0" y="0"/>
             <a:ext cx="12191695" cy="164592"/>
           </a:xfrm>
           <a:prstGeom prst="rect">
@@ -6712,7 +9098,7 @@
                 </a:solidFill>
                 <a:latin typeface="Calibri"/>
               </a:rPr>
-              <a:t>Teoria Core</a:t>
+              <a:t>Documentar no es llenar el codigo de comentarios</a:t>
             </a:r>
           </a:p>
         </p:txBody>
@@ -6751,7 +9137,7 @@
                 </a:solidFill>
                 <a:latin typeface="Calibri"/>
               </a:rPr>
-              <a:t>–   Documentar no es llenar el codigo de comentarios</a:t>
+              <a:t>–   Documentar no es llenar el codigo de comentarios.</a:t>
             </a:r>
           </a:p>
           <a:p>
@@ -6767,7 +9153,7 @@
                 </a:solidFill>
                 <a:latin typeface="Calibri"/>
               </a:rPr>
-              <a:t>–   Un bloque Javadoc se escribe con /** y se cierra con */, y va inmediatamente encima de la clase, del constructor…</a:t>
+              <a:t>–   Un comentario como '// suma uno al contador' encima de la linea contador++ no le sirve a nadie: repite lo que ya dice el codigo y ademas envejece mal</a:t>
             </a:r>
           </a:p>
           <a:p>
@@ -6783,7 +9169,7 @@
                 </a:solidFill>
                 <a:latin typeface="Calibri"/>
               </a:rPr>
-              <a:t>–   Ahora bien, la mejor documentacion es la que no hay que escribir, y eso se logra con nombres que se explican solos</a:t>
+              <a:t>–   Porque cuando alguien cambia la linea nadie se acuerda de cambiar el comentario, y entonces el comentario miente.</a:t>
             </a:r>
           </a:p>
           <a:p>
@@ -6799,7 +9185,7 @@
                 </a:solidFill>
                 <a:latin typeface="Calibri"/>
               </a:rPr>
-              <a:t>–   La segunda mitad de la clase es control de calidad</a:t>
+              <a:t>–   Javadoc resuelve otro problema, que es el del contrato: le dice a quien va a usar su clase que hace el metodo, que espera recibir, que devuelve y en que casos revienta, sin que esa persona tenga que abrir el codigo fuente.</a:t>
             </a:r>
           </a:p>
           <a:p>
@@ -6815,7 +9201,23 @@
                 </a:solidFill>
                 <a:latin typeface="Calibri"/>
               </a:rPr>
-              <a:t>–   JUnit es la herramienta que convierte esos casos en codigo que se ejecuta solo</a:t>
+              <a:t>–   En VetCare esa diferencia es concreta: el estudiante que escriba la ventana de citas necesita saber que agendar() lanza excepcion si la mascota esta inactiva, y no tiene por que leer las veinte lineas del metodo para descubrirlo.</a:t>
+            </a:r>
+          </a:p>
+          <a:p>
+            <a:pPr>
+              <a:spcAft>
+                <a:spcPts val="800"/>
+              </a:spcAft>
+            </a:pPr>
+            <a:r>
+              <a:rPr sz="2000" b="0" i="0">
+                <a:solidFill>
+                  <a:srgbClr val="333333"/>
+                </a:solidFill>
+                <a:latin typeface="Calibri"/>
+              </a:rPr>
+              <a:t>–   La documentacion tecnica no describe la implementacion, describe la promesa.</a:t>
             </a:r>
           </a:p>
         </p:txBody>
@@ -6996,141 +9398,21 @@
                 </a:solidFill>
                 <a:latin typeface="Calibri"/>
               </a:rPr>
-              <a:t>El contrato documentado y su prueba</a:t>
-            </a:r>
-          </a:p>
-        </p:txBody>
-      </p:sp>
-      <p:sp>
-        <p:nvSpPr>
-          <p:cNvPr id="5" name="Rounded Rectangle 4"/>
-          <p:cNvSpPr/>
-          <p:nvPr/>
-        </p:nvSpPr>
-        <p:spPr>
-          <a:xfrm>
-            <a:off x="457200" y="1261872"/>
-            <a:ext cx="11277295" cy="4773168"/>
-          </a:xfrm>
-          <a:prstGeom prst="roundRect">
-            <a:avLst>
-              <a:gd name="adj" fmla="val 12000"/>
-            </a:avLst>
-          </a:prstGeom>
-          <a:solidFill>
-            <a:srgbClr val="1E2A38"/>
-          </a:solidFill>
-          <a:ln>
-            <a:noFill/>
-          </a:ln>
-        </p:spPr>
-        <p:style>
-          <a:lnRef idx="1">
-            <a:schemeClr val="accent1"/>
-          </a:lnRef>
-          <a:fillRef idx="3">
-            <a:schemeClr val="accent1"/>
-          </a:fillRef>
-          <a:effectRef idx="2">
-            <a:schemeClr val="accent1"/>
-          </a:effectRef>
-          <a:fontRef idx="minor">
-            <a:schemeClr val="lt1"/>
-          </a:fontRef>
-        </p:style>
-        <p:txBody>
-          <a:bodyPr rtlCol="0" anchor="ctr"/>
-          <a:lstStyle/>
-          <a:p>
-            <a:pPr algn="ctr"/>
-          </a:p>
-        </p:txBody>
-      </p:sp>
-      <p:sp>
-        <p:nvSpPr>
-          <p:cNvPr id="6" name="Rectangle 5"/>
-          <p:cNvSpPr/>
-          <p:nvPr/>
-        </p:nvSpPr>
-        <p:spPr>
-          <a:xfrm>
-            <a:off x="457200" y="1261872"/>
-            <a:ext cx="11277295" cy="320040"/>
-          </a:xfrm>
-          <a:prstGeom prst="rect">
-            <a:avLst/>
-          </a:prstGeom>
-          <a:solidFill>
-            <a:srgbClr val="095292"/>
-          </a:solidFill>
-          <a:ln>
-            <a:noFill/>
-          </a:ln>
-        </p:spPr>
-        <p:style>
-          <a:lnRef idx="1">
-            <a:schemeClr val="accent1"/>
-          </a:lnRef>
-          <a:fillRef idx="3">
-            <a:schemeClr val="accent1"/>
-          </a:fillRef>
-          <a:effectRef idx="2">
-            <a:schemeClr val="accent1"/>
-          </a:effectRef>
-          <a:fontRef idx="minor">
-            <a:schemeClr val="lt1"/>
-          </a:fontRef>
-        </p:style>
-        <p:txBody>
-          <a:bodyPr rtlCol="0" anchor="ctr"/>
-          <a:lstStyle/>
-          <a:p>
-            <a:pPr algn="ctr"/>
-          </a:p>
-        </p:txBody>
-      </p:sp>
-      <p:sp>
-        <p:nvSpPr>
-          <p:cNvPr id="7" name="TextBox 6"/>
+              <a:t>Un bloque Javadoc se escribe con /** y se cierra con */, y va...</a:t>
+            </a:r>
+          </a:p>
+        </p:txBody>
+      </p:sp>
+      <p:sp>
+        <p:nvSpPr>
+          <p:cNvPr id="5" name="TextBox 4"/>
           <p:cNvSpPr txBox="1"/>
           <p:nvPr/>
         </p:nvSpPr>
         <p:spPr>
           <a:xfrm>
-            <a:off x="685800" y="1307592"/>
-            <a:ext cx="10820095" cy="256032"/>
-          </a:xfrm>
-          <a:prstGeom prst="rect">
-            <a:avLst/>
-          </a:prstGeom>
-          <a:noFill/>
-        </p:spPr>
-        <p:txBody>
-          <a:bodyPr wrap="square" anchor="ctr"/>
-          <a:lstStyle/>
-          <a:p>
-            <a:r>
-              <a:rPr sz="1000" b="1" i="0">
-                <a:solidFill>
-                  <a:srgbClr val="269CCB"/>
-                </a:solidFill>
-                <a:latin typeface="Calibri"/>
-              </a:rPr>
-              <a:t>● ● ●</a:t>
-            </a:r>
-          </a:p>
-        </p:txBody>
-      </p:sp>
-      <p:sp>
-        <p:nvSpPr>
-          <p:cNvPr id="8" name="TextBox 7"/>
-          <p:cNvSpPr txBox="1"/>
-          <p:nvPr/>
-        </p:nvSpPr>
-        <p:spPr>
-          <a:xfrm>
-            <a:off x="777240" y="1719072"/>
-            <a:ext cx="10637215" cy="4133087"/>
+            <a:off x="457200" y="1170432"/>
+            <a:ext cx="11277295" cy="5230368"/>
           </a:xfrm>
           <a:prstGeom prst="rect">
             <a:avLst/>
@@ -7145,299 +9427,120 @@
           <a:p>
             <a:pPr>
               <a:spcAft>
-                <a:spcPts val="371"/>
+                <a:spcPts val="800"/>
               </a:spcAft>
             </a:pPr>
             <a:r>
-              <a:rPr sz="1300" b="0" i="0">
-                <a:solidFill>
-                  <a:srgbClr val="FFFFFF"/>
-                </a:solidFill>
-                <a:latin typeface="Calibri"/>
-              </a:rPr>
-              <a:t>/**</a:t>
+              <a:rPr sz="2000" b="0" i="0">
+                <a:solidFill>
+                  <a:srgbClr val="333333"/>
+                </a:solidFill>
+                <a:latin typeface="Calibri"/>
+              </a:rPr>
+              <a:t>–   Un bloque Javadoc se escribe con /** y se cierra con */, y va inmediatamente encima de la clase, del constructor, del atributo o del metodo que documenta (si lo pone debajo, no sirve).</a:t>
             </a:r>
           </a:p>
           <a:p>
             <a:pPr>
               <a:spcAft>
-                <a:spcPts val="371"/>
+                <a:spcPts val="800"/>
               </a:spcAft>
             </a:pPr>
             <a:r>
-              <a:rPr sz="1300" b="0" i="0">
-                <a:solidFill>
-                  <a:srgbClr val="FFFFFF"/>
-                </a:solidFill>
-                <a:latin typeface="Calibri"/>
-              </a:rPr>
-              <a:t> * Agenda una cita para una mascota registrada y activa.</a:t>
+              <a:rPr sz="2000" b="0" i="0">
+                <a:solidFill>
+                  <a:srgbClr val="333333"/>
+                </a:solidFill>
+                <a:latin typeface="Calibri"/>
+              </a:rPr>
+              <a:t>–   La primera frase debe ser un resumen corto que termine en punto, porque esa frase es la que aparece en las tablas resumen del HTML generado.</a:t>
             </a:r>
           </a:p>
           <a:p>
             <a:pPr>
               <a:spcAft>
-                <a:spcPts val="371"/>
+                <a:spcPts val="800"/>
               </a:spcAft>
             </a:pPr>
             <a:r>
-              <a:rPr sz="1300" b="0" i="0">
-                <a:solidFill>
-                  <a:srgbClr val="FFFFFF"/>
-                </a:solidFill>
-                <a:latin typeface="Calibri"/>
-              </a:rPr>
-              <a:t> * @param idMascota identificador del expediente, por ejemplo {@code M-001}</a:t>
+              <a:rPr sz="2000" b="0" i="0">
+                <a:solidFill>
+                  <a:srgbClr val="333333"/>
+                </a:solidFill>
+                <a:latin typeface="Calibri"/>
+              </a:rPr>
+              <a:t>–   Despues vienen las etiquetas: @param una por cada parametro con su nombre exacto, @return si el metodo devuelve algo, @throws por cada excepcion documentada, y a nivel de clase @author y @version.</a:t>
             </a:r>
           </a:p>
           <a:p>
             <a:pPr>
               <a:spcAft>
-                <a:spcPts val="371"/>
+                <a:spcPts val="800"/>
               </a:spcAft>
             </a:pPr>
             <a:r>
-              <a:rPr sz="1300" b="0" i="0">
-                <a:solidFill>
-                  <a:srgbClr val="FFFFFF"/>
-                </a:solidFill>
-                <a:latin typeface="Calibri"/>
-              </a:rPr>
-              <a:t> * @param fechaHora fecha y hora en formato yyyy-MM-dd HH:mm</a:t>
+              <a:rPr sz="2000" b="0" i="0">
+                <a:solidFill>
+                  <a:srgbClr val="333333"/>
+                </a:solidFill>
+                <a:latin typeface="Calibri"/>
+              </a:rPr>
+              <a:t>–   Se pueden usar marcas como {@code M-001} para que un texto se vea con tipografia de codigo y @see para remitir a otra clase.</a:t>
             </a:r>
           </a:p>
           <a:p>
             <a:pPr>
               <a:spcAft>
-                <a:spcPts val="371"/>
+                <a:spcPts val="800"/>
               </a:spcAft>
             </a:pPr>
             <a:r>
-              <a:rPr sz="1300" b="0" i="0">
-                <a:solidFill>
-                  <a:srgbClr val="FFFFFF"/>
-                </a:solidFill>
-                <a:latin typeface="Calibri"/>
-              </a:rPr>
-              <a:t> * @return la cita creada</a:t>
+              <a:rPr sz="2000" b="0" i="0">
+                <a:solidFill>
+                  <a:srgbClr val="333333"/>
+                </a:solidFill>
+                <a:latin typeface="Calibri"/>
+              </a:rPr>
+              <a:t>–   Lo que se genera es un sitio web: en VS Code se corre la herramienta del JDK desde la terminal integrada, «javadoc -d docs -private src/vetcare/*.java»</a:t>
             </a:r>
           </a:p>
           <a:p>
             <a:pPr>
               <a:spcAft>
-                <a:spcPts val="371"/>
+                <a:spcPts val="800"/>
               </a:spcAft>
             </a:pPr>
             <a:r>
-              <a:rPr sz="1300" b="0" i="0">
-                <a:solidFill>
-                  <a:srgbClr val="FFFFFF"/>
-                </a:solidFill>
-                <a:latin typeface="Calibri"/>
-              </a:rPr>
-              <a:t> * @throws IllegalStateException si la mascota esta inactiva</a:t>
+              <a:rPr sz="2000" b="0" i="0">
+                <a:solidFill>
+                  <a:srgbClr val="333333"/>
+                </a:solidFill>
+                <a:latin typeface="Calibri"/>
+              </a:rPr>
+              <a:t>–   Que crea la carpeta docs/ y deja un index.html que se abre en el navegador con la misma cara que tiene la documentacion oficial de Java.</a:t>
             </a:r>
           </a:p>
           <a:p>
             <a:pPr>
               <a:spcAft>
-                <a:spcPts val="371"/>
+                <a:spcPts val="800"/>
               </a:spcAft>
             </a:pPr>
             <a:r>
-              <a:rPr sz="1300" b="0" i="0">
-                <a:solidFill>
-                  <a:srgbClr val="FFFFFF"/>
-                </a:solidFill>
-                <a:latin typeface="Calibri"/>
-              </a:rPr>
-              <a:t> */</a:t>
-            </a:r>
-          </a:p>
-          <a:p>
-            <a:pPr>
-              <a:spcAft>
-                <a:spcPts val="371"/>
-              </a:spcAft>
-            </a:pPr>
-            <a:r>
-              <a:rPr sz="1300" b="0" i="0">
-                <a:solidFill>
-                  <a:srgbClr val="FFFFFF"/>
-                </a:solidFill>
-                <a:latin typeface="Calibri"/>
-              </a:rPr>
-              <a:t>public Cita agendar(String idMascota, String fechaHora) { /* reglas en AgendaService */ }</a:t>
-            </a:r>
-          </a:p>
-          <a:p>
-            <a:pPr>
-              <a:spcAft>
-                <a:spcPts val="371"/>
-              </a:spcAft>
-            </a:pPr>
-            <a:r>
-              <a:rPr sz="1300" b="0" i="0">
-                <a:solidFill>
-                  <a:srgbClr val="FFFFFF"/>
-                </a:solidFill>
-                <a:latin typeface="Calibri"/>
-              </a:rPr>
-              <a:t/>
-            </a:r>
-          </a:p>
-          <a:p>
-            <a:pPr>
-              <a:spcAft>
-                <a:spcPts val="371"/>
-              </a:spcAft>
-            </a:pPr>
-            <a:r>
-              <a:rPr sz="1300" b="0" i="0">
-                <a:solidFill>
-                  <a:srgbClr val="FFFFFF"/>
-                </a:solidFill>
-                <a:latin typeface="Calibri"/>
-              </a:rPr>
-              <a:t>@Test   // un caso = un metodo cuyo nombre se lee como una frase</a:t>
-            </a:r>
-          </a:p>
-          <a:p>
-            <a:pPr>
-              <a:spcAft>
-                <a:spcPts val="371"/>
-              </a:spcAft>
-            </a:pPr>
-            <a:r>
-              <a:rPr sz="1300" b="0" i="0">
-                <a:solidFill>
-                  <a:srgbClr val="FFFFFF"/>
-                </a:solidFill>
-                <a:latin typeface="Calibri"/>
-              </a:rPr>
-              <a:t>public void agendar_mascotaInactiva_lanzaIllegalStateException() {</a:t>
-            </a:r>
-          </a:p>
-          <a:p>
-            <a:pPr>
-              <a:spcAft>
-                <a:spcPts val="371"/>
-              </a:spcAft>
-            </a:pPr>
-            <a:r>
-              <a:rPr sz="1300" b="0" i="0">
-                <a:solidFill>
-                  <a:srgbClr val="FFFFFF"/>
-                </a:solidFill>
-                <a:latin typeface="Calibri"/>
-              </a:rPr>
-              <a:t>    agenda.registrarMascota(new Mascota("M-009", "Rocky", false));   // Arrange</a:t>
-            </a:r>
-          </a:p>
-          <a:p>
-            <a:pPr>
-              <a:spcAft>
-                <a:spcPts val="371"/>
-              </a:spcAft>
-            </a:pPr>
-            <a:r>
-              <a:rPr sz="1300" b="0" i="0">
-                <a:solidFill>
-                  <a:srgbClr val="FFFFFF"/>
-                </a:solidFill>
-                <a:latin typeface="Calibri"/>
-              </a:rPr>
-              <a:t>    assertThrows(IllegalStateException.class,                         // Act + Assert</a:t>
-            </a:r>
-          </a:p>
-          <a:p>
-            <a:pPr>
-              <a:spcAft>
-                <a:spcPts val="371"/>
-              </a:spcAft>
-            </a:pPr>
-            <a:r>
-              <a:rPr sz="1300" b="0" i="0">
-                <a:solidFill>
-                  <a:srgbClr val="FFFFFF"/>
-                </a:solidFill>
-                <a:latin typeface="Calibri"/>
-              </a:rPr>
-              <a:t>            () -&gt; agenda.agendar("M-009", "2026-09-30 10:00"));</a:t>
-            </a:r>
-          </a:p>
-          <a:p>
-            <a:pPr>
-              <a:spcAft>
-                <a:spcPts val="371"/>
-              </a:spcAft>
-            </a:pPr>
-            <a:r>
-              <a:rPr sz="1300" b="0" i="0">
-                <a:solidFill>
-                  <a:srgbClr val="FFFFFF"/>
-                </a:solidFill>
-                <a:latin typeface="Calibri"/>
-              </a:rPr>
-              <a:t>    assertEquals(0, agenda.totalCitas());   // y ademas no dejo la cita a medias</a:t>
-            </a:r>
-          </a:p>
-          <a:p>
-            <a:pPr>
-              <a:spcAft>
-                <a:spcPts val="371"/>
-              </a:spcAft>
-            </a:pPr>
-            <a:r>
-              <a:rPr sz="1300" b="0" i="0">
-                <a:solidFill>
-                  <a:srgbClr val="FFFFFF"/>
-                </a:solidFill>
-                <a:latin typeface="Calibri"/>
-              </a:rPr>
-              <a:t>}</a:t>
-            </a:r>
-          </a:p>
-        </p:txBody>
-      </p:sp>
-      <p:sp>
-        <p:nvSpPr>
-          <p:cNvPr id="9" name="TextBox 8"/>
-          <p:cNvSpPr txBox="1"/>
-          <p:nvPr/>
-        </p:nvSpPr>
-        <p:spPr>
-          <a:xfrm>
-            <a:off x="457200" y="6080760"/>
-            <a:ext cx="11277295" cy="320040"/>
-          </a:xfrm>
-          <a:prstGeom prst="rect">
-            <a:avLst/>
-          </a:prstGeom>
-          <a:noFill/>
-        </p:spPr>
-        <p:txBody>
-          <a:bodyPr wrap="square">
-            <a:spAutoFit/>
-          </a:bodyPr>
-          <a:lstStyle/>
-          <a:p>
-            <a:pPr algn="ctr"/>
-            <a:r>
-              <a:rPr sz="1200" b="0" i="1">
-                <a:solidFill>
-                  <a:srgbClr val="666666"/>
-                </a:solidFill>
-                <a:latin typeface="Calibri"/>
-              </a:rPr>
-              <a:t>Lo que el Javadoc promete es exactamente lo que la prueba obliga a cumplir.</a:t>
-            </a:r>
-          </a:p>
-        </p:txBody>
-      </p:sp>
-      <p:sp>
-        <p:nvSpPr>
-          <p:cNvPr id="10" name="TextBox 9"/>
+              <a:rPr sz="2000" b="0" i="0">
+                <a:solidFill>
+                  <a:srgbClr val="333333"/>
+                </a:solidFill>
+                <a:latin typeface="Calibri"/>
+              </a:rPr>
+              <a:t>–   Un beneficio inmediato que se ve sin generar nada: apenas usted escribe el Javadoc, VS Code se lo muestra al pasar el cursor cuando alguien invoca el metodo con Ctrl+Espacio.</a:t>
+            </a:r>
+          </a:p>
+        </p:txBody>
+      </p:sp>
+      <p:sp>
+        <p:nvSpPr>
+          <p:cNvPr id="6" name="TextBox 5"/>
           <p:cNvSpPr txBox="1"/>
           <p:nvPr/>
         </p:nvSpPr>
@@ -7611,7 +9714,7 @@
                 </a:solidFill>
                 <a:latin typeface="Calibri"/>
               </a:rPr>
-              <a:t>Demo del dia</a:t>
+              <a:t>La mejor documentacion es la que no hay que escribir, y eso se logra...</a:t>
             </a:r>
           </a:p>
         </p:txBody>
@@ -7650,25 +9753,7 @@
                 </a:solidFill>
                 <a:latin typeface="Calibri"/>
               </a:rPr>
-              <a:t>–   </a:t>
-            </a:r>
-            <a:r>
-              <a:rPr sz="2000" b="1" i="0">
-                <a:solidFill>
-                  <a:srgbClr val="333333"/>
-                </a:solidFill>
-                <a:latin typeface="Calibri"/>
-              </a:rPr>
-              <a:t>Herramienta:</a:t>
-            </a:r>
-            <a:r>
-              <a:rPr sz="2000" b="0" i="0">
-                <a:solidFill>
-                  <a:srgbClr val="333333"/>
-                </a:solidFill>
-                <a:latin typeface="Calibri"/>
-              </a:rPr>
-              <a:t> Visual Studio Code (Java)</a:t>
+              <a:t>–   Ahora bien, la mejor documentacion es la que no hay que escribir, y eso se logra con nombres que se explican solos.</a:t>
             </a:r>
           </a:p>
           <a:p>
@@ -7684,25 +9769,7 @@
                 </a:solidFill>
                 <a:latin typeface="Calibri"/>
               </a:rPr>
-              <a:t>–   </a:t>
-            </a:r>
-            <a:r>
-              <a:rPr sz="2000" b="1" i="0">
-                <a:solidFill>
-                  <a:srgbClr val="333333"/>
-                </a:solidFill>
-                <a:latin typeface="Calibri"/>
-              </a:rPr>
-              <a:t>Demo:</a:t>
-            </a:r>
-            <a:r>
-              <a:rPr sz="2000" b="0" i="0">
-                <a:solidFill>
-                  <a:srgbClr val="333333"/>
-                </a:solidFill>
-                <a:latin typeface="Calibri"/>
-              </a:rPr>
-              <a:t> El docente escribe un bloque Javadoc, genera la documentacion HTML con javadoc desde la terminal integrada y luego corre las pruebas mostrando la barra en rojo, corrige la regla y la muestra en verde.</a:t>
+              <a:t>–   Compare 'public boolean verificar(String x)' con 'public boolean estaActiva(String idMascota)': la segunda no necesita comentario.</a:t>
             </a:r>
           </a:p>
           <a:p>
@@ -7718,7 +9785,55 @@
                 </a:solidFill>
                 <a:latin typeface="Calibri"/>
               </a:rPr>
-              <a:t>–   Mismo dominio VetCare — no otro ejemplo.</a:t>
+              <a:t>–   En Java hay convenciones que el mundo entero respeta y que sus estudiantes deben respetar desde ya: clases en PascalCase (AgendaService), metodos y variables en camelCase (agendarCita, idMascota)</a:t>
+            </a:r>
+          </a:p>
+          <a:p>
+            <a:pPr>
+              <a:spcAft>
+                <a:spcPts val="800"/>
+              </a:spcAft>
+            </a:pPr>
+            <a:r>
+              <a:rPr sz="2000" b="0" i="0">
+                <a:solidFill>
+                  <a:srgbClr val="333333"/>
+                </a:solidFill>
+                <a:latin typeface="Calibri"/>
+              </a:rPr>
+              <a:t>–   Constantes en MAYUSCULAS con guion bajo (TARIFA_BASE), metodos que devuelven boolean nombrados como una pregunta (estaActiva, tieneCitasPendientes), y metodos que hacen algo nombrados con verbo (agendar, registrar, buscarPorId).</a:t>
+            </a:r>
+          </a:p>
+          <a:p>
+            <a:pPr>
+              <a:spcAft>
+                <a:spcPts val="800"/>
+              </a:spcAft>
+            </a:pPr>
+            <a:r>
+              <a:rPr sz="2000" b="0" i="0">
+                <a:solidFill>
+                  <a:srgbClr val="333333"/>
+                </a:solidFill>
+                <a:latin typeface="Calibri"/>
+              </a:rPr>
+              <a:t>–   Nada de proc1, dato2, aux ni flag.</a:t>
+            </a:r>
+          </a:p>
+          <a:p>
+            <a:pPr>
+              <a:spcAft>
+                <a:spcPts val="800"/>
+              </a:spcAft>
+            </a:pPr>
+            <a:r>
+              <a:rPr sz="2000" b="0" i="0">
+                <a:solidFill>
+                  <a:srgbClr val="333333"/>
+                </a:solidFill>
+                <a:latin typeface="Calibri"/>
+              </a:rPr>
+              <a:t>–   En VetCare hicimos precisamente ese refactor: lo que empezo llamandose 'validar' pasa a llamarse 'agendar', y la variable 'b' pasa a llamarse 'mascotaActiva'; el codigo quedo igual de largo pero dejo de necesitar traductor.</a:t>
             </a:r>
           </a:p>
         </p:txBody>
@@ -7899,7 +10014,7 @@
                 </a:solidFill>
                 <a:latin typeface="Calibri"/>
               </a:rPr>
-              <a:t>Taller PI — por que importa</a:t>
+              <a:t>La segunda mitad de la clase es control de calidad</a:t>
             </a:r>
           </a:p>
         </p:txBody>
@@ -7932,31 +10047,13 @@
               </a:spcAft>
             </a:pPr>
             <a:r>
-              <a:rPr sz="2000" b="0" i="0">
+              <a:rPr sz="1900" b="0" i="0">
                 <a:solidFill>
                   <a:srgbClr val="333333"/>
                 </a:solidFill>
                 <a:latin typeface="Calibri"/>
               </a:rPr>
-              <a:t>–   </a:t>
-            </a:r>
-            <a:r>
-              <a:rPr sz="2000" b="1" i="0">
-                <a:solidFill>
-                  <a:srgbClr val="333333"/>
-                </a:solidFill>
-                <a:latin typeface="Calibri"/>
-              </a:rPr>
-              <a:t>Por que importa al PI:</a:t>
-            </a:r>
-            <a:r>
-              <a:rPr sz="2000" b="0" i="0">
-                <a:solidFill>
-                  <a:srgbClr val="333333"/>
-                </a:solidFill>
-                <a:latin typeface="Calibri"/>
-              </a:rPr>
-              <a:t> el PI se entrega y se sustenta, y un evaluador no puede confiar en lo que no esta documentado ni comprobado; hoy VetCare pasa de 'a mi me funciono' a 'aqui esta la evidencia'.</a:t>
+              <a:t>–   La segunda mitad de la clase es control de calidad.</a:t>
             </a:r>
           </a:p>
           <a:p>
@@ -7966,13 +10063,13 @@
               </a:spcAft>
             </a:pPr>
             <a:r>
-              <a:rPr sz="2000" b="0" i="0">
+              <a:rPr sz="1900" b="0" i="0">
                 <a:solidFill>
                   <a:srgbClr val="333333"/>
                 </a:solidFill>
                 <a:latin typeface="Calibri"/>
               </a:rPr>
-              <a:t>–   Las reglas del dominio (mascota inactiva, ID inexistente, horario ocupado) son las que van a fallar en la sustentacion si nadie las prueba antes.</a:t>
+              <a:t>–   Un caso de prueba tiene cuatro partes y conviene escribirlas en el tablero antes de tocar el teclado: un nombre que se lea como una frase, unos datos o estado de partida, una accion concreta y un resultado esperado.</a:t>
             </a:r>
           </a:p>
           <a:p>
@@ -7982,13 +10079,93 @@
               </a:spcAft>
             </a:pPr>
             <a:r>
-              <a:rPr sz="2000" b="0" i="0">
+              <a:rPr sz="1900" b="0" i="0">
                 <a:solidFill>
                   <a:srgbClr val="333333"/>
                 </a:solidFill>
                 <a:latin typeface="Calibri"/>
               </a:rPr>
-              <a:t>–   La documentacion generada hoy es la que permite que otro compañero use AgendaService en la ventana de citas sin leer el codigo por dentro.</a:t>
+              <a:t>–   En ingles a esa estructura se le dice AAA: Arrange (preparar), Act (ejecutar), Assert (comprobar).</a:t>
+            </a:r>
+          </a:p>
+          <a:p>
+            <a:pPr>
+              <a:spcAft>
+                <a:spcPts val="800"/>
+              </a:spcAft>
+            </a:pPr>
+            <a:r>
+              <a:rPr sz="1900" b="0" i="0">
+                <a:solidFill>
+                  <a:srgbClr val="333333"/>
+                </a:solidFill>
+                <a:latin typeface="Calibri"/>
+              </a:rPr>
+              <a:t>–   Y no basta con probar que todo salga bien: por cada funcionalidad se necesitan pruebas positivas (mascota activa agenda y la cita queda registrada)</a:t>
+            </a:r>
+          </a:p>
+          <a:p>
+            <a:pPr>
+              <a:spcAft>
+                <a:spcPts val="800"/>
+              </a:spcAft>
+            </a:pPr>
+            <a:r>
+              <a:rPr sz="1900" b="0" i="0">
+                <a:solidFill>
+                  <a:srgbClr val="333333"/>
+                </a:solidFill>
+                <a:latin typeface="Calibri"/>
+              </a:rPr>
+              <a:t>–   Negativas (mascota inactiva no agenda y lanza excepcion) y de borde (fecha vacia, ID inexistente, horario ya ocupado).</a:t>
+            </a:r>
+          </a:p>
+          <a:p>
+            <a:pPr>
+              <a:spcAft>
+                <a:spcPts val="800"/>
+              </a:spcAft>
+            </a:pPr>
+            <a:r>
+              <a:rPr sz="1900" b="0" i="0">
+                <a:solidFill>
+                  <a:srgbClr val="333333"/>
+                </a:solidFill>
+                <a:latin typeface="Calibri"/>
+              </a:rPr>
+              <a:t>–   Para la regla de hoy la tabla queda asi: caso 1, mascota M-001 Kira activa, agendar el 30 de septiembre a las 10:00, se espera una cita creada y total de citas igual a 1</a:t>
+            </a:r>
+          </a:p>
+          <a:p>
+            <a:pPr>
+              <a:spcAft>
+                <a:spcPts val="800"/>
+              </a:spcAft>
+            </a:pPr>
+            <a:r>
+              <a:rPr sz="1900" b="0" i="0">
+                <a:solidFill>
+                  <a:srgbClr val="333333"/>
+                </a:solidFill>
+                <a:latin typeface="Calibri"/>
+              </a:rPr>
+              <a:t>–   Caso 2, mascota M-009 Rocky inactiva, misma accion, se espera IllegalStateException y total de citas igual a 0.</a:t>
+            </a:r>
+          </a:p>
+          <a:p>
+            <a:pPr>
+              <a:spcAft>
+                <a:spcPts val="800"/>
+              </a:spcAft>
+            </a:pPr>
+            <a:r>
+              <a:rPr sz="1900" b="0" i="0">
+                <a:solidFill>
+                  <a:srgbClr val="333333"/>
+                </a:solidFill>
+                <a:latin typeface="Calibri"/>
+              </a:rPr>
+              <a:t>–   Fijese que el resultado esperado se define ANTES de correr el programa; si usted primero ejecuta y despues decide que esperaba, eso no es una prueba, es una conformidad.</a:t>
             </a:r>
           </a:p>
         </p:txBody>
@@ -8169,7 +10346,7 @@
                 </a:solidFill>
                 <a:latin typeface="Calibri"/>
               </a:rPr>
-              <a:t>Taller PI — punto de partida</a:t>
+              <a:t>JUnit es la herramienta que convierte esos casos en codigo que se... (1/2)</a:t>
             </a:r>
           </a:p>
         </p:txBody>
@@ -8208,7 +10385,7 @@
                 </a:solidFill>
                 <a:latin typeface="Calibri"/>
               </a:rPr>
-              <a:t>–   VetCare ya tiene el dominio (Mascota, Cita), el servicio de agendamiento y la interfaz conectada por eventos, con el repositorio unico de la clase anterior.</a:t>
+              <a:t>–   JUnit es la herramienta que convierte esos casos en codigo que se ejecuta solo.</a:t>
             </a:r>
           </a:p>
           <a:p>
@@ -8224,7 +10401,7 @@
                 </a:solidFill>
                 <a:latin typeface="Calibri"/>
               </a:rPr>
-              <a:t>–   Las clases estan sin documentar y hay tres metodos con nombres heredados de los primeros borradores: validar, proceso y dato1.</a:t>
+              <a:t>–   En VS Code se agrega desde la vista Testing (el icono del matraz) con «Enable Java Tests» &gt; JUnit 5</a:t>
             </a:r>
           </a:p>
           <a:p>
@@ -8240,7 +10417,55 @@
                 </a:solidFill>
                 <a:latin typeface="Calibri"/>
               </a:rPr>
-              <a:t>–   Expedientes de partida: M-001 Kira activa, M-002 Michi activa y M-009 Rocky inactiva (dada de baja del servicio).</a:t>
+              <a:t>–   Que baja los.jar solo; las clases de prueba viven en la carpeta test/, separadas del codigo de produccion; la convencion es AgendaServiceTest para probar AgendaService.</a:t>
+            </a:r>
+          </a:p>
+          <a:p>
+            <a:pPr>
+              <a:spcAft>
+                <a:spcPts val="800"/>
+              </a:spcAft>
+            </a:pPr>
+            <a:r>
+              <a:rPr sz="2000" b="0" i="0">
+                <a:solidFill>
+                  <a:srgbClr val="333333"/>
+                </a:solidFill>
+                <a:latin typeface="Calibri"/>
+              </a:rPr>
+              <a:t>–   Cada caso es un metodo publico anotado con @Test cuyo nombre describe el escenario (agendar_mascotaInactiva_lanzaIllegalStateException)</a:t>
+            </a:r>
+          </a:p>
+          <a:p>
+            <a:pPr>
+              <a:spcAft>
+                <a:spcPts val="800"/>
+              </a:spcAft>
+            </a:pPr>
+            <a:r>
+              <a:rPr sz="2000" b="0" i="0">
+                <a:solidFill>
+                  <a:srgbClr val="333333"/>
+                </a:solidFill>
+                <a:latin typeface="Calibri"/>
+              </a:rPr>
+              <a:t>–   Con un metodo anotado @Before o @BeforeEach que arma el estado limpio antes de cada caso, para que ninguna prueba dependa de la anterior.</a:t>
+            </a:r>
+          </a:p>
+          <a:p>
+            <a:pPr>
+              <a:spcAft>
+                <a:spcPts val="800"/>
+              </a:spcAft>
+            </a:pPr>
+            <a:r>
+              <a:rPr sz="2000" b="0" i="0">
+                <a:solidFill>
+                  <a:srgbClr val="333333"/>
+                </a:solidFill>
+                <a:latin typeface="Calibri"/>
+              </a:rPr>
+              <a:t>–   Las comprobaciones se hacen con assertEquals(esperado, obtenido), assertTrue(condicion) y assertThrows(IllegalStateException.class, () -&gt; agenda.agendar(...)), que es la forma moderna de verificar que algo debe fallar.</a:t>
             </a:r>
           </a:p>
         </p:txBody>
@@ -8421,111 +10646,21 @@
                 </a:solidFill>
                 <a:latin typeface="Calibri"/>
               </a:rPr>
-              <a:t>Taller PI — pasos guiados</a:t>
-            </a:r>
-          </a:p>
-        </p:txBody>
-      </p:sp>
-      <p:sp>
-        <p:nvSpPr>
-          <p:cNvPr id="5" name="Rounded Rectangle 4"/>
-          <p:cNvSpPr/>
-          <p:nvPr/>
-        </p:nvSpPr>
-        <p:spPr>
-          <a:xfrm>
-            <a:off x="457200" y="1234440"/>
-            <a:ext cx="11277295" cy="950976"/>
-          </a:xfrm>
-          <a:prstGeom prst="roundRect">
-            <a:avLst>
-              <a:gd name="adj" fmla="val 12000"/>
-            </a:avLst>
-          </a:prstGeom>
-          <a:solidFill>
-            <a:srgbClr val="F2F2F2"/>
-          </a:solidFill>
-          <a:ln>
-            <a:noFill/>
-          </a:ln>
-        </p:spPr>
-        <p:style>
-          <a:lnRef idx="1">
-            <a:schemeClr val="accent1"/>
-          </a:lnRef>
-          <a:fillRef idx="3">
-            <a:schemeClr val="accent1"/>
-          </a:fillRef>
-          <a:effectRef idx="2">
-            <a:schemeClr val="accent1"/>
-          </a:effectRef>
-          <a:fontRef idx="minor">
-            <a:schemeClr val="lt1"/>
-          </a:fontRef>
-        </p:style>
-        <p:txBody>
-          <a:bodyPr rtlCol="0" anchor="ctr"/>
-          <a:lstStyle/>
-          <a:p>
-            <a:pPr algn="ctr"/>
-          </a:p>
-        </p:txBody>
-      </p:sp>
-      <p:sp>
-        <p:nvSpPr>
-          <p:cNvPr id="6" name="Rounded Rectangle 5"/>
-          <p:cNvSpPr/>
-          <p:nvPr/>
-        </p:nvSpPr>
-        <p:spPr>
-          <a:xfrm>
-            <a:off x="594360" y="1490472"/>
-            <a:ext cx="438912" cy="438912"/>
-          </a:xfrm>
-          <a:prstGeom prst="roundRect">
-            <a:avLst>
-              <a:gd name="adj" fmla="val 12000"/>
-            </a:avLst>
-          </a:prstGeom>
-          <a:solidFill>
-            <a:srgbClr val="095292"/>
-          </a:solidFill>
-          <a:ln>
-            <a:noFill/>
-          </a:ln>
-        </p:spPr>
-        <p:style>
-          <a:lnRef idx="1">
-            <a:schemeClr val="accent1"/>
-          </a:lnRef>
-          <a:fillRef idx="3">
-            <a:schemeClr val="accent1"/>
-          </a:fillRef>
-          <a:effectRef idx="2">
-            <a:schemeClr val="accent1"/>
-          </a:effectRef>
-          <a:fontRef idx="minor">
-            <a:schemeClr val="lt1"/>
-          </a:fontRef>
-        </p:style>
-        <p:txBody>
-          <a:bodyPr rtlCol="0" anchor="ctr"/>
-          <a:lstStyle/>
-          <a:p>
-            <a:pPr algn="ctr"/>
-          </a:p>
-        </p:txBody>
-      </p:sp>
-      <p:sp>
-        <p:nvSpPr>
-          <p:cNvPr id="7" name="TextBox 6"/>
+              <a:t>JUnit es la herramienta que convierte esos casos en codigo que se... (2/2)</a:t>
+            </a:r>
+          </a:p>
+        </p:txBody>
+      </p:sp>
+      <p:sp>
+        <p:nvSpPr>
+          <p:cNvPr id="5" name="TextBox 4"/>
           <p:cNvSpPr txBox="1"/>
           <p:nvPr/>
         </p:nvSpPr>
         <p:spPr>
           <a:xfrm>
-            <a:off x="594360" y="1490472"/>
-            <a:ext cx="438912" cy="438912"/>
+            <a:off x="457200" y="1170432"/>
+            <a:ext cx="11277295" cy="5230368"/>
           </a:xfrm>
           <a:prstGeom prst="rect">
             <a:avLst/>
@@ -8533,677 +10668,79 @@
           <a:noFill/>
         </p:spPr>
         <p:txBody>
-          <a:bodyPr wrap="square" anchor="ctr"/>
-          <a:lstStyle/>
-          <a:p>
-            <a:pPr algn="ctr"/>
-            <a:r>
-              <a:rPr sz="1600" b="1" i="0">
-                <a:solidFill>
-                  <a:srgbClr val="FFFFFF"/>
-                </a:solidFill>
-                <a:latin typeface="Calibri"/>
-              </a:rPr>
-              <a:t>1</a:t>
-            </a:r>
-          </a:p>
-        </p:txBody>
-      </p:sp>
-      <p:sp>
-        <p:nvSpPr>
-          <p:cNvPr id="8" name="TextBox 7"/>
-          <p:cNvSpPr txBox="1"/>
-          <p:nvPr/>
-        </p:nvSpPr>
-        <p:spPr>
-          <a:xfrm>
-            <a:off x="1188720" y="1325880"/>
-            <a:ext cx="10271455" cy="786384"/>
-          </a:xfrm>
-          <a:prstGeom prst="rect">
-            <a:avLst/>
-          </a:prstGeom>
-          <a:noFill/>
-        </p:spPr>
-        <p:txBody>
-          <a:bodyPr wrap="square" anchor="ctr"/>
-          <a:lstStyle/>
-          <a:p>
-            <a:r>
-              <a:rPr sz="1400" b="1" i="0">
-                <a:solidFill>
-                  <a:srgbClr val="095292"/>
-                </a:solidFill>
-                <a:latin typeface="Calibri"/>
-              </a:rPr>
-              <a:t>Documente con Javadoc las clases Mascota y Cita y el servicio AgendaService: bloque de clase con resumen y @author, y en cada metodo publico @param por parametro, @return si aplica y @throws por cada excepcion; el metodo agendar debe dejar escrita la regla 'una mascota inactiva no puede agendar'.</a:t>
-            </a:r>
-          </a:p>
-        </p:txBody>
-      </p:sp>
-      <p:sp>
-        <p:nvSpPr>
-          <p:cNvPr id="9" name="Rounded Rectangle 8"/>
-          <p:cNvSpPr/>
-          <p:nvPr/>
-        </p:nvSpPr>
-        <p:spPr>
-          <a:xfrm>
-            <a:off x="457200" y="2276856"/>
-            <a:ext cx="11277295" cy="950976"/>
-          </a:xfrm>
-          <a:prstGeom prst="roundRect">
-            <a:avLst>
-              <a:gd name="adj" fmla="val 12000"/>
-            </a:avLst>
-          </a:prstGeom>
-          <a:solidFill>
-            <a:srgbClr val="E8F4FA"/>
-          </a:solidFill>
-          <a:ln>
-            <a:noFill/>
-          </a:ln>
-        </p:spPr>
-        <p:style>
-          <a:lnRef idx="1">
-            <a:schemeClr val="accent1"/>
-          </a:lnRef>
-          <a:fillRef idx="3">
-            <a:schemeClr val="accent1"/>
-          </a:fillRef>
-          <a:effectRef idx="2">
-            <a:schemeClr val="accent1"/>
-          </a:effectRef>
-          <a:fontRef idx="minor">
-            <a:schemeClr val="lt1"/>
-          </a:fontRef>
-        </p:style>
-        <p:txBody>
-          <a:bodyPr rtlCol="0" anchor="ctr"/>
-          <a:lstStyle/>
-          <a:p>
-            <a:pPr algn="ctr"/>
-          </a:p>
-        </p:txBody>
-      </p:sp>
-      <p:sp>
-        <p:nvSpPr>
-          <p:cNvPr id="10" name="Rounded Rectangle 9"/>
-          <p:cNvSpPr/>
-          <p:nvPr/>
-        </p:nvSpPr>
-        <p:spPr>
-          <a:xfrm>
-            <a:off x="594360" y="2532888"/>
-            <a:ext cx="438912" cy="438912"/>
-          </a:xfrm>
-          <a:prstGeom prst="roundRect">
-            <a:avLst>
-              <a:gd name="adj" fmla="val 12000"/>
-            </a:avLst>
-          </a:prstGeom>
-          <a:solidFill>
-            <a:srgbClr val="095292"/>
-          </a:solidFill>
-          <a:ln>
-            <a:noFill/>
-          </a:ln>
-        </p:spPr>
-        <p:style>
-          <a:lnRef idx="1">
-            <a:schemeClr val="accent1"/>
-          </a:lnRef>
-          <a:fillRef idx="3">
-            <a:schemeClr val="accent1"/>
-          </a:fillRef>
-          <a:effectRef idx="2">
-            <a:schemeClr val="accent1"/>
-          </a:effectRef>
-          <a:fontRef idx="minor">
-            <a:schemeClr val="lt1"/>
-          </a:fontRef>
-        </p:style>
-        <p:txBody>
-          <a:bodyPr rtlCol="0" anchor="ctr"/>
-          <a:lstStyle/>
-          <a:p>
-            <a:pPr algn="ctr"/>
-          </a:p>
-        </p:txBody>
-      </p:sp>
-      <p:sp>
-        <p:nvSpPr>
-          <p:cNvPr id="11" name="TextBox 10"/>
-          <p:cNvSpPr txBox="1"/>
-          <p:nvPr/>
-        </p:nvSpPr>
-        <p:spPr>
-          <a:xfrm>
-            <a:off x="594360" y="2532888"/>
-            <a:ext cx="438912" cy="438912"/>
-          </a:xfrm>
-          <a:prstGeom prst="rect">
-            <a:avLst/>
-          </a:prstGeom>
-          <a:noFill/>
-        </p:spPr>
-        <p:txBody>
-          <a:bodyPr wrap="square" anchor="ctr"/>
-          <a:lstStyle/>
-          <a:p>
-            <a:pPr algn="ctr"/>
-            <a:r>
-              <a:rPr sz="1600" b="1" i="0">
-                <a:solidFill>
-                  <a:srgbClr val="FFFFFF"/>
-                </a:solidFill>
-                <a:latin typeface="Calibri"/>
-              </a:rPr>
-              <a:t>2</a:t>
-            </a:r>
-          </a:p>
-        </p:txBody>
-      </p:sp>
-      <p:sp>
-        <p:nvSpPr>
-          <p:cNvPr id="12" name="TextBox 11"/>
-          <p:cNvSpPr txBox="1"/>
-          <p:nvPr/>
-        </p:nvSpPr>
-        <p:spPr>
-          <a:xfrm>
-            <a:off x="1188720" y="2368296"/>
-            <a:ext cx="10271455" cy="786384"/>
-          </a:xfrm>
-          <a:prstGeom prst="rect">
-            <a:avLst/>
-          </a:prstGeom>
-          <a:noFill/>
-        </p:spPr>
-        <p:txBody>
-          <a:bodyPr wrap="square" anchor="ctr"/>
-          <a:lstStyle/>
-          <a:p>
-            <a:r>
-              <a:rPr sz="1500" b="1" i="0">
-                <a:solidFill>
-                  <a:srgbClr val="095292"/>
-                </a:solidFill>
-                <a:latin typeface="Calibri"/>
-              </a:rPr>
-              <a:t>Renombre al menos tres identificadores pobres del proyecto (por ejemplo validar por agendar, b por mascotaActiva, dato1 por idMascota) usando Rename Symbol (F2) de VS Code para que el cambio se propague sin romper nada.</a:t>
-            </a:r>
-          </a:p>
-        </p:txBody>
-      </p:sp>
-      <p:sp>
-        <p:nvSpPr>
-          <p:cNvPr id="13" name="Rounded Rectangle 12"/>
-          <p:cNvSpPr/>
-          <p:nvPr/>
-        </p:nvSpPr>
-        <p:spPr>
-          <a:xfrm>
-            <a:off x="457200" y="3319272"/>
-            <a:ext cx="11277295" cy="950976"/>
-          </a:xfrm>
-          <a:prstGeom prst="roundRect">
-            <a:avLst>
-              <a:gd name="adj" fmla="val 12000"/>
-            </a:avLst>
-          </a:prstGeom>
-          <a:solidFill>
-            <a:srgbClr val="F2F2F2"/>
-          </a:solidFill>
-          <a:ln>
-            <a:noFill/>
-          </a:ln>
-        </p:spPr>
-        <p:style>
-          <a:lnRef idx="1">
-            <a:schemeClr val="accent1"/>
-          </a:lnRef>
-          <a:fillRef idx="3">
-            <a:schemeClr val="accent1"/>
-          </a:fillRef>
-          <a:effectRef idx="2">
-            <a:schemeClr val="accent1"/>
-          </a:effectRef>
-          <a:fontRef idx="minor">
-            <a:schemeClr val="lt1"/>
-          </a:fontRef>
-        </p:style>
-        <p:txBody>
-          <a:bodyPr rtlCol="0" anchor="ctr"/>
-          <a:lstStyle/>
-          <a:p>
-            <a:pPr algn="ctr"/>
-          </a:p>
-        </p:txBody>
-      </p:sp>
-      <p:sp>
-        <p:nvSpPr>
-          <p:cNvPr id="14" name="Rounded Rectangle 13"/>
-          <p:cNvSpPr/>
-          <p:nvPr/>
-        </p:nvSpPr>
-        <p:spPr>
-          <a:xfrm>
-            <a:off x="594360" y="3575304"/>
-            <a:ext cx="438912" cy="438912"/>
-          </a:xfrm>
-          <a:prstGeom prst="roundRect">
-            <a:avLst>
-              <a:gd name="adj" fmla="val 12000"/>
-            </a:avLst>
-          </a:prstGeom>
-          <a:solidFill>
-            <a:srgbClr val="095292"/>
-          </a:solidFill>
-          <a:ln>
-            <a:noFill/>
-          </a:ln>
-        </p:spPr>
-        <p:style>
-          <a:lnRef idx="1">
-            <a:schemeClr val="accent1"/>
-          </a:lnRef>
-          <a:fillRef idx="3">
-            <a:schemeClr val="accent1"/>
-          </a:fillRef>
-          <a:effectRef idx="2">
-            <a:schemeClr val="accent1"/>
-          </a:effectRef>
-          <a:fontRef idx="minor">
-            <a:schemeClr val="lt1"/>
-          </a:fontRef>
-        </p:style>
-        <p:txBody>
-          <a:bodyPr rtlCol="0" anchor="ctr"/>
-          <a:lstStyle/>
-          <a:p>
-            <a:pPr algn="ctr"/>
-          </a:p>
-        </p:txBody>
-      </p:sp>
-      <p:sp>
-        <p:nvSpPr>
-          <p:cNvPr id="15" name="TextBox 14"/>
-          <p:cNvSpPr txBox="1"/>
-          <p:nvPr/>
-        </p:nvSpPr>
-        <p:spPr>
-          <a:xfrm>
-            <a:off x="594360" y="3575304"/>
-            <a:ext cx="438912" cy="438912"/>
-          </a:xfrm>
-          <a:prstGeom prst="rect">
-            <a:avLst/>
-          </a:prstGeom>
-          <a:noFill/>
-        </p:spPr>
-        <p:txBody>
-          <a:bodyPr wrap="square" anchor="ctr"/>
-          <a:lstStyle/>
-          <a:p>
-            <a:pPr algn="ctr"/>
-            <a:r>
-              <a:rPr sz="1600" b="1" i="0">
-                <a:solidFill>
-                  <a:srgbClr val="FFFFFF"/>
-                </a:solidFill>
-                <a:latin typeface="Calibri"/>
-              </a:rPr>
-              <a:t>3</a:t>
-            </a:r>
-          </a:p>
-        </p:txBody>
-      </p:sp>
-      <p:sp>
-        <p:nvSpPr>
-          <p:cNvPr id="16" name="TextBox 15"/>
-          <p:cNvSpPr txBox="1"/>
-          <p:nvPr/>
-        </p:nvSpPr>
-        <p:spPr>
-          <a:xfrm>
-            <a:off x="1188720" y="3410712"/>
-            <a:ext cx="10271455" cy="786384"/>
-          </a:xfrm>
-          <a:prstGeom prst="rect">
-            <a:avLst/>
-          </a:prstGeom>
-          <a:noFill/>
-        </p:spPr>
-        <p:txBody>
-          <a:bodyPr wrap="square" anchor="ctr"/>
-          <a:lstStyle/>
-          <a:p>
-            <a:r>
-              <a:rPr sz="1500" b="1" i="0">
-                <a:solidFill>
-                  <a:srgbClr val="095292"/>
-                </a:solidFill>
-                <a:latin typeface="Calibri"/>
-              </a:rPr>
-              <a:t>Genere la documentacion con clic derecho sobre el proyecto y Generate Javadoc, abra el HTML y verifique que en la ficha de AgendaService se lee la regla de negocio y las tres excepciones documentadas; guarde una captura.</a:t>
-            </a:r>
-          </a:p>
-        </p:txBody>
-      </p:sp>
-      <p:sp>
-        <p:nvSpPr>
-          <p:cNvPr id="17" name="Rounded Rectangle 16"/>
-          <p:cNvSpPr/>
-          <p:nvPr/>
-        </p:nvSpPr>
-        <p:spPr>
-          <a:xfrm>
-            <a:off x="457200" y="4361688"/>
-            <a:ext cx="11277295" cy="950976"/>
-          </a:xfrm>
-          <a:prstGeom prst="roundRect">
-            <a:avLst>
-              <a:gd name="adj" fmla="val 12000"/>
-            </a:avLst>
-          </a:prstGeom>
-          <a:solidFill>
-            <a:srgbClr val="E8F4FA"/>
-          </a:solidFill>
-          <a:ln>
-            <a:noFill/>
-          </a:ln>
-        </p:spPr>
-        <p:style>
-          <a:lnRef idx="1">
-            <a:schemeClr val="accent1"/>
-          </a:lnRef>
-          <a:fillRef idx="3">
-            <a:schemeClr val="accent1"/>
-          </a:fillRef>
-          <a:effectRef idx="2">
-            <a:schemeClr val="accent1"/>
-          </a:effectRef>
-          <a:fontRef idx="minor">
-            <a:schemeClr val="lt1"/>
-          </a:fontRef>
-        </p:style>
-        <p:txBody>
-          <a:bodyPr rtlCol="0" anchor="ctr"/>
-          <a:lstStyle/>
-          <a:p>
-            <a:pPr algn="ctr"/>
-          </a:p>
-        </p:txBody>
-      </p:sp>
-      <p:sp>
-        <p:nvSpPr>
-          <p:cNvPr id="18" name="Rounded Rectangle 17"/>
-          <p:cNvSpPr/>
-          <p:nvPr/>
-        </p:nvSpPr>
-        <p:spPr>
-          <a:xfrm>
-            <a:off x="594360" y="4617720"/>
-            <a:ext cx="438912" cy="438912"/>
-          </a:xfrm>
-          <a:prstGeom prst="roundRect">
-            <a:avLst>
-              <a:gd name="adj" fmla="val 12000"/>
-            </a:avLst>
-          </a:prstGeom>
-          <a:solidFill>
-            <a:srgbClr val="095292"/>
-          </a:solidFill>
-          <a:ln>
-            <a:noFill/>
-          </a:ln>
-        </p:spPr>
-        <p:style>
-          <a:lnRef idx="1">
-            <a:schemeClr val="accent1"/>
-          </a:lnRef>
-          <a:fillRef idx="3">
-            <a:schemeClr val="accent1"/>
-          </a:fillRef>
-          <a:effectRef idx="2">
-            <a:schemeClr val="accent1"/>
-          </a:effectRef>
-          <a:fontRef idx="minor">
-            <a:schemeClr val="lt1"/>
-          </a:fontRef>
-        </p:style>
-        <p:txBody>
-          <a:bodyPr rtlCol="0" anchor="ctr"/>
-          <a:lstStyle/>
-          <a:p>
-            <a:pPr algn="ctr"/>
-          </a:p>
-        </p:txBody>
-      </p:sp>
-      <p:sp>
-        <p:nvSpPr>
-          <p:cNvPr id="19" name="TextBox 18"/>
-          <p:cNvSpPr txBox="1"/>
-          <p:nvPr/>
-        </p:nvSpPr>
-        <p:spPr>
-          <a:xfrm>
-            <a:off x="594360" y="4617720"/>
-            <a:ext cx="438912" cy="438912"/>
-          </a:xfrm>
-          <a:prstGeom prst="rect">
-            <a:avLst/>
-          </a:prstGeom>
-          <a:noFill/>
-        </p:spPr>
-        <p:txBody>
-          <a:bodyPr wrap="square" anchor="ctr"/>
-          <a:lstStyle/>
-          <a:p>
-            <a:pPr algn="ctr"/>
-            <a:r>
-              <a:rPr sz="1600" b="1" i="0">
-                <a:solidFill>
-                  <a:srgbClr val="FFFFFF"/>
-                </a:solidFill>
-                <a:latin typeface="Calibri"/>
-              </a:rPr>
-              <a:t>4</a:t>
-            </a:r>
-          </a:p>
-        </p:txBody>
-      </p:sp>
-      <p:sp>
-        <p:nvSpPr>
-          <p:cNvPr id="20" name="TextBox 19"/>
-          <p:cNvSpPr txBox="1"/>
-          <p:nvPr/>
-        </p:nvSpPr>
-        <p:spPr>
-          <a:xfrm>
-            <a:off x="1188720" y="4453128"/>
-            <a:ext cx="10271455" cy="786384"/>
-          </a:xfrm>
-          <a:prstGeom prst="rect">
-            <a:avLst/>
-          </a:prstGeom>
-          <a:noFill/>
-        </p:spPr>
-        <p:txBody>
-          <a:bodyPr wrap="square" anchor="ctr"/>
-          <a:lstStyle/>
-          <a:p>
-            <a:r>
-              <a:rPr sz="1400" b="1" i="0">
-                <a:solidFill>
-                  <a:srgbClr val="095292"/>
-                </a:solidFill>
-                <a:latin typeface="Calibri"/>
-              </a:rPr>
-              <a:t>Cree en Test Packages la clase AgendaServiceTest con un metodo de preparacion que registre M-001 Kira activa, M-002 Michi activa y M-009 Rocky inactiva, y escriba cuatro casos: mascota activa agenda, mascota inactiva lanza IllegalStateException, ID inexistente lanza NoSuchElementException y horario ocupado no duplica la cita.</a:t>
-            </a:r>
-          </a:p>
-        </p:txBody>
-      </p:sp>
-      <p:sp>
-        <p:nvSpPr>
-          <p:cNvPr id="21" name="Rounded Rectangle 20"/>
-          <p:cNvSpPr/>
-          <p:nvPr/>
-        </p:nvSpPr>
-        <p:spPr>
-          <a:xfrm>
-            <a:off x="457200" y="5404104"/>
-            <a:ext cx="11277295" cy="950976"/>
-          </a:xfrm>
-          <a:prstGeom prst="roundRect">
-            <a:avLst>
-              <a:gd name="adj" fmla="val 12000"/>
-            </a:avLst>
-          </a:prstGeom>
-          <a:solidFill>
-            <a:srgbClr val="F2F2F2"/>
-          </a:solidFill>
-          <a:ln>
-            <a:noFill/>
-          </a:ln>
-        </p:spPr>
-        <p:style>
-          <a:lnRef idx="1">
-            <a:schemeClr val="accent1"/>
-          </a:lnRef>
-          <a:fillRef idx="3">
-            <a:schemeClr val="accent1"/>
-          </a:fillRef>
-          <a:effectRef idx="2">
-            <a:schemeClr val="accent1"/>
-          </a:effectRef>
-          <a:fontRef idx="minor">
-            <a:schemeClr val="lt1"/>
-          </a:fontRef>
-        </p:style>
-        <p:txBody>
-          <a:bodyPr rtlCol="0" anchor="ctr"/>
-          <a:lstStyle/>
-          <a:p>
-            <a:pPr algn="ctr"/>
-          </a:p>
-        </p:txBody>
-      </p:sp>
-      <p:sp>
-        <p:nvSpPr>
-          <p:cNvPr id="22" name="Rounded Rectangle 21"/>
-          <p:cNvSpPr/>
-          <p:nvPr/>
-        </p:nvSpPr>
-        <p:spPr>
-          <a:xfrm>
-            <a:off x="594360" y="5660136"/>
-            <a:ext cx="438912" cy="438912"/>
-          </a:xfrm>
-          <a:prstGeom prst="roundRect">
-            <a:avLst>
-              <a:gd name="adj" fmla="val 12000"/>
-            </a:avLst>
-          </a:prstGeom>
-          <a:solidFill>
-            <a:srgbClr val="095292"/>
-          </a:solidFill>
-          <a:ln>
-            <a:noFill/>
-          </a:ln>
-        </p:spPr>
-        <p:style>
-          <a:lnRef idx="1">
-            <a:schemeClr val="accent1"/>
-          </a:lnRef>
-          <a:fillRef idx="3">
-            <a:schemeClr val="accent1"/>
-          </a:fillRef>
-          <a:effectRef idx="2">
-            <a:schemeClr val="accent1"/>
-          </a:effectRef>
-          <a:fontRef idx="minor">
-            <a:schemeClr val="lt1"/>
-          </a:fontRef>
-        </p:style>
-        <p:txBody>
-          <a:bodyPr rtlCol="0" anchor="ctr"/>
-          <a:lstStyle/>
-          <a:p>
-            <a:pPr algn="ctr"/>
-          </a:p>
-        </p:txBody>
-      </p:sp>
-      <p:sp>
-        <p:nvSpPr>
-          <p:cNvPr id="23" name="TextBox 22"/>
-          <p:cNvSpPr txBox="1"/>
-          <p:nvPr/>
-        </p:nvSpPr>
-        <p:spPr>
-          <a:xfrm>
-            <a:off x="594360" y="5660136"/>
-            <a:ext cx="438912" cy="438912"/>
-          </a:xfrm>
-          <a:prstGeom prst="rect">
-            <a:avLst/>
-          </a:prstGeom>
-          <a:noFill/>
-        </p:spPr>
-        <p:txBody>
-          <a:bodyPr wrap="square" anchor="ctr"/>
-          <a:lstStyle/>
-          <a:p>
-            <a:pPr algn="ctr"/>
-            <a:r>
-              <a:rPr sz="1600" b="1" i="0">
-                <a:solidFill>
-                  <a:srgbClr val="FFFFFF"/>
-                </a:solidFill>
-                <a:latin typeface="Calibri"/>
-              </a:rPr>
-              <a:t>5</a:t>
-            </a:r>
-          </a:p>
-        </p:txBody>
-      </p:sp>
-      <p:sp>
-        <p:nvSpPr>
-          <p:cNvPr id="24" name="TextBox 23"/>
-          <p:cNvSpPr txBox="1"/>
-          <p:nvPr/>
-        </p:nvSpPr>
-        <p:spPr>
-          <a:xfrm>
-            <a:off x="1188720" y="5495544"/>
-            <a:ext cx="10271455" cy="786384"/>
-          </a:xfrm>
-          <a:prstGeom prst="rect">
-            <a:avLst/>
-          </a:prstGeom>
-          <a:noFill/>
-        </p:spPr>
-        <p:txBody>
-          <a:bodyPr wrap="square" anchor="ctr"/>
-          <a:lstStyle/>
-          <a:p>
-            <a:r>
-              <a:rPr sz="1400" b="1" i="0">
-                <a:solidFill>
-                  <a:srgbClr val="095292"/>
-                </a:solidFill>
-                <a:latin typeface="Calibri"/>
-              </a:rPr>
-              <a:t>Rompa a proposito la regla (comente la validacion de mascota inactiva), corra las pruebas y capture la barra roja; restaure la validacion, corra otra vez y capture la barra verde; escriba ademas dos pruebas manuales que NO se pueden automatizar y suba todo a la plataforma del curso.</a:t>
-            </a:r>
-          </a:p>
-        </p:txBody>
-      </p:sp>
-      <p:sp>
-        <p:nvSpPr>
-          <p:cNvPr id="25" name="TextBox 24"/>
+          <a:bodyPr wrap="square">
+            <a:spAutoFit/>
+          </a:bodyPr>
+          <a:lstStyle/>
+          <a:p>
+            <a:pPr>
+              <a:spcAft>
+                <a:spcPts val="800"/>
+              </a:spcAft>
+            </a:pPr>
+            <a:r>
+              <a:rPr sz="2000" b="0" i="0">
+                <a:solidFill>
+                  <a:srgbClr val="333333"/>
+                </a:solidFill>
+                <a:latin typeface="Calibri"/>
+              </a:rPr>
+              <a:t>–   La diferencia con la prueba manual es importante y hay que decirla completa: la prueba unitaria es automatica, repetible, rapida y prueba logica aislada</a:t>
+            </a:r>
+          </a:p>
+          <a:p>
+            <a:pPr>
+              <a:spcAft>
+                <a:spcPts val="800"/>
+              </a:spcAft>
+            </a:pPr>
+            <a:r>
+              <a:rPr sz="2000" b="0" i="0">
+                <a:solidFill>
+                  <a:srgbClr val="333333"/>
+                </a:solidFill>
+                <a:latin typeface="Calibri"/>
+              </a:rPr>
+              <a:t>–   Y por eso se corre cada vez que se toca el codigo; la prueba manual la hace un humano usando la interfaz, sirve para lo que no se puede automatizar facil (que el JOptionPane se lea bien</a:t>
+            </a:r>
+          </a:p>
+          <a:p>
+            <a:pPr>
+              <a:spcAft>
+                <a:spcPts val="800"/>
+              </a:spcAft>
+            </a:pPr>
+            <a:r>
+              <a:rPr sz="2000" b="0" i="0">
+                <a:solidFill>
+                  <a:srgbClr val="333333"/>
+                </a:solidFill>
+                <a:latin typeface="Calibri"/>
+              </a:rPr>
+              <a:t>–   Que la ventana no se congele, que el flujo tenga sentido para la recepcionista) y no reemplaza a la otra.</a:t>
+            </a:r>
+          </a:p>
+          <a:p>
+            <a:pPr>
+              <a:spcAft>
+                <a:spcPts val="800"/>
+              </a:spcAft>
+            </a:pPr>
+            <a:r>
+              <a:rPr sz="2000" b="0" i="0">
+                <a:solidFill>
+                  <a:srgbClr val="333333"/>
+                </a:solidFill>
+                <a:latin typeface="Calibri"/>
+              </a:rPr>
+              <a:t>–   Y aqui se cobra la clase 6: como la regla de agendar vive en AgendaService y no dentro de un boton, se puede probar sin abrir ni una sola ventana.</a:t>
+            </a:r>
+          </a:p>
+        </p:txBody>
+      </p:sp>
+      <p:sp>
+        <p:nvSpPr>
+          <p:cNvPr id="6" name="TextBox 5"/>
           <p:cNvSpPr txBox="1"/>
           <p:nvPr/>
         </p:nvSpPr>

--- a/Programacion II/Clases/Clase 8 - Documentacion y QA Javadoc y pruebas/Presentacion.pptx
+++ b/Programacion II/Clases/Clase 8 - Documentacion y QA Javadoc y pruebas/Presentacion.pptx
@@ -9,39 +9,33 @@
     <p:sldId id="257" r:id="rId8"/>
     <p:sldId id="258" r:id="rId9"/>
     <p:sldId id="259" r:id="rId10"/>
-    <p:sldId id="260" r:id="rId11"/>
-    <p:sldId id="261" r:id="rId12"/>
-    <p:sldId id="262" r:id="rId13"/>
-    <p:sldId id="263" r:id="rId14"/>
-    <p:sldId id="264" r:id="rId15"/>
-    <p:sldId id="265" r:id="rId16"/>
-    <p:sldId id="266" r:id="rId17"/>
-    <p:sldId id="267" r:id="rId18"/>
-    <p:sldId id="268" r:id="rId19"/>
-    <p:sldId id="269" r:id="rId20"/>
-    <p:sldId id="270" r:id="rId21"/>
-    <p:sldId id="271" r:id="rId22"/>
-    <p:sldId id="272" r:id="rId23"/>
-    <p:sldId id="273" r:id="rId24"/>
-    <p:sldId id="274" r:id="rId25"/>
-    <p:sldId id="275" r:id="rId26"/>
-    <p:sldId id="276" r:id="rId27"/>
-    <p:sldId id="277" r:id="rId28"/>
-    <p:sldId id="278" r:id="rId29"/>
-    <p:sldId id="279" r:id="rId30"/>
-    <p:sldId id="280" r:id="rId31"/>
-    <p:sldId id="281" r:id="rId32"/>
-    <p:sldId id="282" r:id="rId33"/>
-    <p:sldId id="283" r:id="rId34"/>
-    <p:sldId id="284" r:id="rId35"/>
-    <p:sldId id="285" r:id="rId36"/>
-    <p:sldId id="286" r:id="rId37"/>
-    <p:sldId id="287" r:id="rId38"/>
-    <p:sldId id="288" r:id="rId39"/>
-    <p:sldId id="289" r:id="rId40"/>
-    <p:sldId id="290" r:id="rId41"/>
-    <p:sldId id="291" r:id="rId42"/>
-    <p:sldId id="292" r:id="rId43"/>
+    <p:sldId id="260" r:id="rId12"/>
+    <p:sldId id="261" r:id="rId13"/>
+    <p:sldId id="262" r:id="rId14"/>
+    <p:sldId id="263" r:id="rId15"/>
+    <p:sldId id="264" r:id="rId16"/>
+    <p:sldId id="265" r:id="rId17"/>
+    <p:sldId id="266" r:id="rId18"/>
+    <p:sldId id="267" r:id="rId19"/>
+    <p:sldId id="268" r:id="rId20"/>
+    <p:sldId id="269" r:id="rId21"/>
+    <p:sldId id="270" r:id="rId22"/>
+    <p:sldId id="271" r:id="rId23"/>
+    <p:sldId id="272" r:id="rId24"/>
+    <p:sldId id="273" r:id="rId25"/>
+    <p:sldId id="274" r:id="rId26"/>
+    <p:sldId id="275" r:id="rId27"/>
+    <p:sldId id="276" r:id="rId28"/>
+    <p:sldId id="277" r:id="rId29"/>
+    <p:sldId id="278" r:id="rId30"/>
+    <p:sldId id="279" r:id="rId31"/>
+    <p:sldId id="280" r:id="rId32"/>
+    <p:sldId id="281" r:id="rId33"/>
+    <p:sldId id="282" r:id="rId34"/>
+    <p:sldId id="283" r:id="rId35"/>
+    <p:sldId id="284" r:id="rId36"/>
+    <p:sldId id="285" r:id="rId37"/>
+    <p:sldId id="286" r:id="rId38"/>
   </p:sldIdLst>
   <p:sldSz cx="12191695" cy="6858000" type="screen4x3"/>
   <p:notesSz cx="6858000" cy="9144000"/>
@@ -141,6 +135,572 @@
     </a:lvl9pPr>
   </p:defaultTextStyle>
 </p:presentation>
+</file>
+
+<file path=ppt/notesMasters/notesMaster1.xml><?xml version="1.0" encoding="utf-8"?>
+<p:notesMaster xmlns:a="http://schemas.openxmlformats.org/drawingml/2006/main" xmlns:p="http://schemas.openxmlformats.org/presentationml/2006/main" xmlns:r="http://schemas.openxmlformats.org/officeDocument/2006/relationships">
+  <p:cSld>
+    <p:bg>
+      <p:bgRef idx="1001">
+        <a:schemeClr val="bg1"/>
+      </p:bgRef>
+    </p:bg>
+    <p:spTree>
+      <p:nvGrpSpPr>
+        <p:cNvPr id="1" name=""/>
+        <p:cNvGrpSpPr/>
+        <p:nvPr/>
+      </p:nvGrpSpPr>
+      <p:grpSpPr>
+        <a:xfrm>
+          <a:off x="0" y="0"/>
+          <a:ext cx="0" cy="0"/>
+          <a:chOff x="0" y="0"/>
+          <a:chExt cx="0" cy="0"/>
+        </a:xfrm>
+      </p:grpSpPr>
+      <p:sp>
+        <p:nvSpPr>
+          <p:cNvPr id="2" name="Header Placeholder 1"/>
+          <p:cNvSpPr>
+            <a:spLocks noGrp="1"/>
+          </p:cNvSpPr>
+          <p:nvPr>
+            <p:ph type="hdr" sz="quarter"/>
+          </p:nvPr>
+        </p:nvSpPr>
+        <p:spPr>
+          <a:xfrm>
+            <a:off x="0" y="0"/>
+            <a:ext cx="2971800" cy="457200"/>
+          </a:xfrm>
+          <a:prstGeom prst="rect">
+            <a:avLst/>
+          </a:prstGeom>
+        </p:spPr>
+        <p:txBody>
+          <a:bodyPr vert="horz" lIns="91440" tIns="45720" rIns="91440" bIns="45720" rtlCol="0"/>
+          <a:lstStyle>
+            <a:lvl1pPr algn="l">
+              <a:defRPr sz="1200"/>
+            </a:lvl1pPr>
+          </a:lstStyle>
+          <a:p>
+            <a:endParaRPr lang="en-US"/>
+          </a:p>
+        </p:txBody>
+      </p:sp>
+      <p:sp>
+        <p:nvSpPr>
+          <p:cNvPr id="3" name="Date Placeholder 2"/>
+          <p:cNvSpPr>
+            <a:spLocks noGrp="1"/>
+          </p:cNvSpPr>
+          <p:nvPr>
+            <p:ph type="dt" idx="1"/>
+          </p:nvPr>
+        </p:nvSpPr>
+        <p:spPr>
+          <a:xfrm>
+            <a:off x="3884613" y="0"/>
+            <a:ext cx="2971800" cy="457200"/>
+          </a:xfrm>
+          <a:prstGeom prst="rect">
+            <a:avLst/>
+          </a:prstGeom>
+        </p:spPr>
+        <p:txBody>
+          <a:bodyPr vert="horz" lIns="91440" tIns="45720" rIns="91440" bIns="45720" rtlCol="0"/>
+          <a:lstStyle>
+            <a:lvl1pPr algn="r">
+              <a:defRPr sz="1200"/>
+            </a:lvl1pPr>
+          </a:lstStyle>
+          <a:p>
+            <a:fld id="{0F89C1C7-3DCD-1040-A9CF-14679D8B5DDD}" type="datetimeFigureOut">
+              <a:rPr lang="en-US" smtClean="0"/>
+              <a:t>10/17/16</a:t>
+            </a:fld>
+            <a:endParaRPr lang="en-US"/>
+          </a:p>
+        </p:txBody>
+      </p:sp>
+      <p:sp>
+        <p:nvSpPr>
+          <p:cNvPr id="4" name="Slide Image Placeholder 3"/>
+          <p:cNvSpPr>
+            <a:spLocks noGrp="1" noRot="1" noChangeAspect="1"/>
+          </p:cNvSpPr>
+          <p:nvPr>
+            <p:ph type="sldImg" idx="2"/>
+          </p:nvPr>
+        </p:nvSpPr>
+        <p:spPr>
+          <a:xfrm>
+            <a:off x="1143000" y="685800"/>
+            <a:ext cx="4572000" cy="3429000"/>
+          </a:xfrm>
+          <a:prstGeom prst="rect">
+            <a:avLst/>
+          </a:prstGeom>
+          <a:noFill/>
+          <a:ln w="12700">
+            <a:solidFill>
+              <a:prstClr val="black"/>
+            </a:solidFill>
+          </a:ln>
+        </p:spPr>
+        <p:txBody>
+          <a:bodyPr vert="horz" lIns="91440" tIns="45720" rIns="91440" bIns="45720" rtlCol="0" anchor="ctr"/>
+          <a:lstStyle/>
+          <a:p>
+            <a:endParaRPr lang="en-US"/>
+          </a:p>
+        </p:txBody>
+      </p:sp>
+      <p:sp>
+        <p:nvSpPr>
+          <p:cNvPr id="5" name="Notes Placeholder 4"/>
+          <p:cNvSpPr>
+            <a:spLocks noGrp="1"/>
+          </p:cNvSpPr>
+          <p:nvPr>
+            <p:ph type="body" sz="quarter" idx="3"/>
+          </p:nvPr>
+        </p:nvSpPr>
+        <p:spPr>
+          <a:xfrm>
+            <a:off x="685800" y="4343400"/>
+            <a:ext cx="5486400" cy="4114800"/>
+          </a:xfrm>
+          <a:prstGeom prst="rect">
+            <a:avLst/>
+          </a:prstGeom>
+        </p:spPr>
+        <p:txBody>
+          <a:bodyPr vert="horz" lIns="91440" tIns="45720" rIns="91440" bIns="45720" rtlCol="0"/>
+          <a:lstStyle/>
+          <a:p>
+            <a:pPr lvl="0"/>
+            <a:r>
+              <a:rPr lang="en-US" smtClean="0"/>
+              <a:t>Click to edit Master text styles</a:t>
+            </a:r>
+          </a:p>
+          <a:p>
+            <a:pPr lvl="1"/>
+            <a:r>
+              <a:rPr lang="en-US" smtClean="0"/>
+              <a:t>Second level</a:t>
+            </a:r>
+          </a:p>
+          <a:p>
+            <a:pPr lvl="2"/>
+            <a:r>
+              <a:rPr lang="en-US" smtClean="0"/>
+              <a:t>Third level</a:t>
+            </a:r>
+          </a:p>
+          <a:p>
+            <a:pPr lvl="3"/>
+            <a:r>
+              <a:rPr lang="en-US" smtClean="0"/>
+              <a:t>Fourth level</a:t>
+            </a:r>
+          </a:p>
+          <a:p>
+            <a:pPr lvl="4"/>
+            <a:r>
+              <a:rPr lang="en-US" smtClean="0"/>
+              <a:t>Fifth level</a:t>
+            </a:r>
+            <a:endParaRPr lang="en-US"/>
+          </a:p>
+        </p:txBody>
+      </p:sp>
+      <p:sp>
+        <p:nvSpPr>
+          <p:cNvPr id="6" name="Footer Placeholder 5"/>
+          <p:cNvSpPr>
+            <a:spLocks noGrp="1"/>
+          </p:cNvSpPr>
+          <p:nvPr>
+            <p:ph type="ftr" sz="quarter" idx="4"/>
+          </p:nvPr>
+        </p:nvSpPr>
+        <p:spPr>
+          <a:xfrm>
+            <a:off x="0" y="8685213"/>
+            <a:ext cx="2971800" cy="457200"/>
+          </a:xfrm>
+          <a:prstGeom prst="rect">
+            <a:avLst/>
+          </a:prstGeom>
+        </p:spPr>
+        <p:txBody>
+          <a:bodyPr vert="horz" lIns="91440" tIns="45720" rIns="91440" bIns="45720" rtlCol="0" anchor="b"/>
+          <a:lstStyle>
+            <a:lvl1pPr algn="l">
+              <a:defRPr sz="1200"/>
+            </a:lvl1pPr>
+          </a:lstStyle>
+          <a:p>
+            <a:endParaRPr lang="en-US"/>
+          </a:p>
+        </p:txBody>
+      </p:sp>
+      <p:sp>
+        <p:nvSpPr>
+          <p:cNvPr id="7" name="Slide Number Placeholder 6"/>
+          <p:cNvSpPr>
+            <a:spLocks noGrp="1"/>
+          </p:cNvSpPr>
+          <p:nvPr>
+            <p:ph type="sldNum" sz="quarter" idx="5"/>
+          </p:nvPr>
+        </p:nvSpPr>
+        <p:spPr>
+          <a:xfrm>
+            <a:off x="3884613" y="8685213"/>
+            <a:ext cx="2971800" cy="457200"/>
+          </a:xfrm>
+          <a:prstGeom prst="rect">
+            <a:avLst/>
+          </a:prstGeom>
+        </p:spPr>
+        <p:txBody>
+          <a:bodyPr vert="horz" lIns="91440" tIns="45720" rIns="91440" bIns="45720" rtlCol="0" anchor="b"/>
+          <a:lstStyle>
+            <a:lvl1pPr algn="r">
+              <a:defRPr sz="1200"/>
+            </a:lvl1pPr>
+          </a:lstStyle>
+          <a:p>
+            <a:fld id="{BB5E49A5-4136-284D-997B-48E1D791AD67}" type="slidenum">
+              <a:rPr lang="en-US" smtClean="0"/>
+              <a:t>‹#›</a:t>
+            </a:fld>
+            <a:endParaRPr lang="en-US"/>
+          </a:p>
+        </p:txBody>
+      </p:sp>
+    </p:spTree>
+    <p:extLst>
+      <p:ext uri="{BB962C8B-B14F-4D97-AF65-F5344CB8AC3E}">
+        <p14:creationId xmlns:p14="http://schemas.microsoft.com/office/powerpoint/2010/main" val="2623252185"/>
+      </p:ext>
+    </p:extLst>
+  </p:cSld>
+  <p:clrMap bg1="lt1" tx1="dk1" bg2="lt2" tx2="dk2" accent1="accent1" accent2="accent2" accent3="accent3" accent4="accent4" accent5="accent5" accent6="accent6" hlink="hlink" folHlink="folHlink"/>
+  <p:notesStyle>
+    <a:lvl1pPr marL="0" algn="l" defTabSz="457200" rtl="0" eaLnBrk="1" latinLnBrk="0" hangingPunct="1">
+      <a:defRPr sz="1200" kern="1200">
+        <a:solidFill>
+          <a:schemeClr val="tx1"/>
+        </a:solidFill>
+        <a:latin typeface="+mn-lt"/>
+        <a:ea typeface="+mn-ea"/>
+        <a:cs typeface="+mn-cs"/>
+      </a:defRPr>
+    </a:lvl1pPr>
+    <a:lvl2pPr marL="457200" algn="l" defTabSz="457200" rtl="0" eaLnBrk="1" latinLnBrk="0" hangingPunct="1">
+      <a:defRPr sz="1200" kern="1200">
+        <a:solidFill>
+          <a:schemeClr val="tx1"/>
+        </a:solidFill>
+        <a:latin typeface="+mn-lt"/>
+        <a:ea typeface="+mn-ea"/>
+        <a:cs typeface="+mn-cs"/>
+      </a:defRPr>
+    </a:lvl2pPr>
+    <a:lvl3pPr marL="914400" algn="l" defTabSz="457200" rtl="0" eaLnBrk="1" latinLnBrk="0" hangingPunct="1">
+      <a:defRPr sz="1200" kern="1200">
+        <a:solidFill>
+          <a:schemeClr val="tx1"/>
+        </a:solidFill>
+        <a:latin typeface="+mn-lt"/>
+        <a:ea typeface="+mn-ea"/>
+        <a:cs typeface="+mn-cs"/>
+      </a:defRPr>
+    </a:lvl3pPr>
+    <a:lvl4pPr marL="1371600" algn="l" defTabSz="457200" rtl="0" eaLnBrk="1" latinLnBrk="0" hangingPunct="1">
+      <a:defRPr sz="1200" kern="1200">
+        <a:solidFill>
+          <a:schemeClr val="tx1"/>
+        </a:solidFill>
+        <a:latin typeface="+mn-lt"/>
+        <a:ea typeface="+mn-ea"/>
+        <a:cs typeface="+mn-cs"/>
+      </a:defRPr>
+    </a:lvl4pPr>
+    <a:lvl5pPr marL="1828800" algn="l" defTabSz="457200" rtl="0" eaLnBrk="1" latinLnBrk="0" hangingPunct="1">
+      <a:defRPr sz="1200" kern="1200">
+        <a:solidFill>
+          <a:schemeClr val="tx1"/>
+        </a:solidFill>
+        <a:latin typeface="+mn-lt"/>
+        <a:ea typeface="+mn-ea"/>
+        <a:cs typeface="+mn-cs"/>
+      </a:defRPr>
+    </a:lvl5pPr>
+    <a:lvl6pPr marL="2286000" algn="l" defTabSz="457200" rtl="0" eaLnBrk="1" latinLnBrk="0" hangingPunct="1">
+      <a:defRPr sz="1200" kern="1200">
+        <a:solidFill>
+          <a:schemeClr val="tx1"/>
+        </a:solidFill>
+        <a:latin typeface="+mn-lt"/>
+        <a:ea typeface="+mn-ea"/>
+        <a:cs typeface="+mn-cs"/>
+      </a:defRPr>
+    </a:lvl6pPr>
+    <a:lvl7pPr marL="2743200" algn="l" defTabSz="457200" rtl="0" eaLnBrk="1" latinLnBrk="0" hangingPunct="1">
+      <a:defRPr sz="1200" kern="1200">
+        <a:solidFill>
+          <a:schemeClr val="tx1"/>
+        </a:solidFill>
+        <a:latin typeface="+mn-lt"/>
+        <a:ea typeface="+mn-ea"/>
+        <a:cs typeface="+mn-cs"/>
+      </a:defRPr>
+    </a:lvl7pPr>
+    <a:lvl8pPr marL="3200400" algn="l" defTabSz="457200" rtl="0" eaLnBrk="1" latinLnBrk="0" hangingPunct="1">
+      <a:defRPr sz="1200" kern="1200">
+        <a:solidFill>
+          <a:schemeClr val="tx1"/>
+        </a:solidFill>
+        <a:latin typeface="+mn-lt"/>
+        <a:ea typeface="+mn-ea"/>
+        <a:cs typeface="+mn-cs"/>
+      </a:defRPr>
+    </a:lvl8pPr>
+    <a:lvl9pPr marL="3657600" algn="l" defTabSz="457200" rtl="0" eaLnBrk="1" latinLnBrk="0" hangingPunct="1">
+      <a:defRPr sz="1200" kern="1200">
+        <a:solidFill>
+          <a:schemeClr val="tx1"/>
+        </a:solidFill>
+        <a:latin typeface="+mn-lt"/>
+        <a:ea typeface="+mn-ea"/>
+        <a:cs typeface="+mn-cs"/>
+      </a:defRPr>
+    </a:lvl9pPr>
+  </p:notesStyle>
+</p:notesMaster>
+</file>
+
+<file path=ppt/notesSlides/notesSlide1.xml><?xml version="1.0" encoding="utf-8"?>
+<p:notes xmlns:a="http://schemas.openxmlformats.org/drawingml/2006/main" xmlns:p="http://schemas.openxmlformats.org/presentationml/2006/main" xmlns:r="http://schemas.openxmlformats.org/officeDocument/2006/relationships">
+  <p:cSld>
+    <p:spTree>
+      <p:nvGrpSpPr>
+        <p:cNvPr id="1" name=""/>
+        <p:cNvGrpSpPr/>
+        <p:nvPr/>
+      </p:nvGrpSpPr>
+      <p:grpSpPr>
+        <a:xfrm>
+          <a:off x="0" y="0"/>
+          <a:ext cx="0" cy="0"/>
+          <a:chOff x="0" y="0"/>
+          <a:chExt cx="0" cy="0"/>
+        </a:xfrm>
+      </p:grpSpPr>
+      <p:sp>
+        <p:nvSpPr>
+          <p:cNvPr id="2" name="Slide Image Placeholder 1"/>
+          <p:cNvSpPr>
+            <a:spLocks noGrp="1"/>
+          </p:cNvSpPr>
+          <p:nvPr>
+            <p:ph type="sldImg" idx="2"/>
+          </p:nvPr>
+        </p:nvSpPr>
+        <p:spPr/>
+      </p:sp>
+      <p:sp>
+        <p:nvSpPr>
+          <p:cNvPr id="3" name="Notes Placeholder 2"/>
+          <p:cNvSpPr>
+            <a:spLocks noGrp="1"/>
+          </p:cNvSpPr>
+          <p:nvPr>
+            <p:ph type="body" idx="3" sz="quarter"/>
+          </p:nvPr>
+        </p:nvSpPr>
+        <p:spPr/>
+        <p:txBody>
+          <a:bodyPr/>
+          <a:lstStyle/>
+          <a:p>
+            <a:r>
+              <a:t>La documentacion tecnica no describe la implementacion, describe la promesa.</a:t>
+            </a:r>
+          </a:p>
+        </p:txBody>
+      </p:sp>
+      <p:sp>
+        <p:nvSpPr>
+          <p:cNvPr id="4" name="Slide Number Placeholder 3"/>
+          <p:cNvSpPr>
+            <a:spLocks noGrp="1"/>
+          </p:cNvSpPr>
+          <p:nvPr>
+            <p:ph type="sldNum" idx="5" sz="quarter"/>
+          </p:nvPr>
+        </p:nvSpPr>
+        <p:spPr/>
+      </p:sp>
+    </p:spTree>
+  </p:cSld>
+  <p:clrMapOvr>
+    <a:masterClrMapping/>
+  </p:clrMapOvr>
+</p:notes>
+</file>
+
+<file path=ppt/notesSlides/notesSlide2.xml><?xml version="1.0" encoding="utf-8"?>
+<p:notes xmlns:a="http://schemas.openxmlformats.org/drawingml/2006/main" xmlns:p="http://schemas.openxmlformats.org/presentationml/2006/main" xmlns:r="http://schemas.openxmlformats.org/officeDocument/2006/relationships">
+  <p:cSld>
+    <p:spTree>
+      <p:nvGrpSpPr>
+        <p:cNvPr id="1" name=""/>
+        <p:cNvGrpSpPr/>
+        <p:nvPr/>
+      </p:nvGrpSpPr>
+      <p:grpSpPr>
+        <a:xfrm>
+          <a:off x="0" y="0"/>
+          <a:ext cx="0" cy="0"/>
+          <a:chOff x="0" y="0"/>
+          <a:chExt cx="0" cy="0"/>
+        </a:xfrm>
+      </p:grpSpPr>
+      <p:sp>
+        <p:nvSpPr>
+          <p:cNvPr id="2" name="Slide Image Placeholder 1"/>
+          <p:cNvSpPr>
+            <a:spLocks noGrp="1"/>
+          </p:cNvSpPr>
+          <p:nvPr>
+            <p:ph type="sldImg" idx="2"/>
+          </p:nvPr>
+        </p:nvSpPr>
+        <p:spPr/>
+      </p:sp>
+      <p:sp>
+        <p:nvSpPr>
+          <p:cNvPr id="3" name="Notes Placeholder 2"/>
+          <p:cNvSpPr>
+            <a:spLocks noGrp="1"/>
+          </p:cNvSpPr>
+          <p:nvPr>
+            <p:ph type="body" idx="3" sz="quarter"/>
+          </p:nvPr>
+        </p:nvSpPr>
+        <p:spPr/>
+        <p:txBody>
+          <a:bodyPr/>
+          <a:lstStyle/>
+          <a:p>
+            <a:r>
+              <a:t>La primera frase debe ser un resumen corto que termine en punto, porque esa frase es la que aparece en las tablas resumen del HTML generado.</a:t>
+            </a:r>
+          </a:p>
+          <a:p/>
+          <a:p>
+            <a:r>
+              <a:t>Lo que se genera es un sitio web: en VS Code se corre la herramienta del JDK desde la terminal integrada, «javadoc -d docs -private src/vetcare/*.java», que crea la carpeta docs/ y deja un index.html que se abre en el navegador con la misma cara que tiene la documentacion oficial de Java.</a:t>
+            </a:r>
+          </a:p>
+        </p:txBody>
+      </p:sp>
+      <p:sp>
+        <p:nvSpPr>
+          <p:cNvPr id="4" name="Slide Number Placeholder 3"/>
+          <p:cNvSpPr>
+            <a:spLocks noGrp="1"/>
+          </p:cNvSpPr>
+          <p:nvPr>
+            <p:ph type="sldNum" idx="5" sz="quarter"/>
+          </p:nvPr>
+        </p:nvSpPr>
+        <p:spPr/>
+      </p:sp>
+    </p:spTree>
+  </p:cSld>
+  <p:clrMapOvr>
+    <a:masterClrMapping/>
+  </p:clrMapOvr>
+</p:notes>
+</file>
+
+<file path=ppt/notesSlides/notesSlide3.xml><?xml version="1.0" encoding="utf-8"?>
+<p:notes xmlns:a="http://schemas.openxmlformats.org/drawingml/2006/main" xmlns:p="http://schemas.openxmlformats.org/presentationml/2006/main" xmlns:r="http://schemas.openxmlformats.org/officeDocument/2006/relationships">
+  <p:cSld>
+    <p:spTree>
+      <p:nvGrpSpPr>
+        <p:cNvPr id="1" name=""/>
+        <p:cNvGrpSpPr/>
+        <p:nvPr/>
+      </p:nvGrpSpPr>
+      <p:grpSpPr>
+        <a:xfrm>
+          <a:off x="0" y="0"/>
+          <a:ext cx="0" cy="0"/>
+          <a:chOff x="0" y="0"/>
+          <a:chExt cx="0" cy="0"/>
+        </a:xfrm>
+      </p:grpSpPr>
+      <p:sp>
+        <p:nvSpPr>
+          <p:cNvPr id="2" name="Slide Image Placeholder 1"/>
+          <p:cNvSpPr>
+            <a:spLocks noGrp="1"/>
+          </p:cNvSpPr>
+          <p:nvPr>
+            <p:ph type="sldImg" idx="2"/>
+          </p:nvPr>
+        </p:nvSpPr>
+        <p:spPr/>
+      </p:sp>
+      <p:sp>
+        <p:nvSpPr>
+          <p:cNvPr id="3" name="Notes Placeholder 2"/>
+          <p:cNvSpPr>
+            <a:spLocks noGrp="1"/>
+          </p:cNvSpPr>
+          <p:nvPr>
+            <p:ph type="body" idx="3" sz="quarter"/>
+          </p:nvPr>
+        </p:nvSpPr>
+        <p:spPr/>
+        <p:txBody>
+          <a:bodyPr/>
+          <a:lstStyle/>
+          <a:p>
+            <a:r>
+              <a:t>Ahora bien, la mejor documentacion es la que no hay que escribir, y eso se logra con nombres que se explican solos.</a:t>
+            </a:r>
+          </a:p>
+        </p:txBody>
+      </p:sp>
+      <p:sp>
+        <p:nvSpPr>
+          <p:cNvPr id="4" name="Slide Number Placeholder 3"/>
+          <p:cNvSpPr>
+            <a:spLocks noGrp="1"/>
+          </p:cNvSpPr>
+          <p:nvPr>
+            <p:ph type="sldNum" idx="5" sz="quarter"/>
+          </p:nvPr>
+        </p:nvSpPr>
+        <p:spPr/>
+      </p:sp>
+    </p:spTree>
+  </p:cSld>
+  <p:clrMapOvr>
+    <a:masterClrMapping/>
+  </p:clrMapOvr>
+</p:notes>
 </file>
 
 <file path=ppt/slideLayouts/slideLayout1.xml><?xml version="1.0" encoding="utf-8"?>
@@ -8647,7 +9207,7 @@
                 </a:solidFill>
                 <a:latin typeface="Calibri"/>
               </a:rPr>
-              <a:t>Encuadre de hoy · Objetivo del PI</a:t>
+              <a:t>Encuadre de hoy</a:t>
             </a:r>
           </a:p>
         </p:txBody>
@@ -8695,7 +9255,7 @@
                 </a:solidFill>
                 <a:latin typeface="Calibri"/>
               </a:rPr>
-              <a:t>Hoy avanzamos VetCare en:</a:t>
+              <a:t>Tema de hoy:</a:t>
             </a:r>
             <a:r>
               <a:rPr sz="2000" b="0" i="0">
@@ -8704,7 +9264,7 @@
                 </a:solidFill>
                 <a:latin typeface="Calibri"/>
               </a:rPr>
-              <a:t> Las clases del dominio de VetCare quedan documentadas con Javadoc y la regla 'mascota inactiva no agenda' queda respaldada por pruebas que se ejecutan solas.</a:t>
+              <a:t> Documentacion y QA · Javadoc y pruebas — Codigo que se explica solo y que se puede comprobar</a:t>
             </a:r>
           </a:p>
           <a:p>
@@ -8763,41 +9323,23 @@
                 </a:solidFill>
                 <a:latin typeface="Calibri"/>
               </a:rPr>
-              <a:t>–   </a:t>
-            </a:r>
-            <a:r>
-              <a:rPr sz="2000" b="1" i="0">
+              <a:t>–   Primero el concepto, despues el codigo que lo muestra y la demo en vivo.</a:t>
+            </a:r>
+          </a:p>
+          <a:p>
+            <a:pPr>
+              <a:spcAft>
+                <a:spcPts val="800"/>
+              </a:spcAft>
+            </a:pPr>
+            <a:r>
+              <a:rPr sz="2000" b="0" i="0">
                 <a:solidFill>
                   <a:srgbClr val="333333"/>
                 </a:solidFill>
                 <a:latin typeface="Calibri"/>
               </a:rPr>
-              <a:t>Entregable de hoy:</a:t>
-            </a:r>
-            <a:r>
-              <a:rPr sz="2000" b="0" i="0">
-                <a:solidFill>
-                  <a:srgbClr val="333333"/>
-                </a:solidFill>
-                <a:latin typeface="Calibri"/>
-              </a:rPr>
-              <a:t> Mascota, Cita y AgendaService con Javadoc completo, la carpeta HTML generada y una clase de pruebas con cuatro casos, subidos a la plataforma del curso.</a:t>
-            </a:r>
-          </a:p>
-          <a:p>
-            <a:pPr>
-              <a:spcAft>
-                <a:spcPts val="800"/>
-              </a:spcAft>
-            </a:pPr>
-            <a:r>
-              <a:rPr sz="2000" b="0" i="0">
-                <a:solidFill>
-                  <a:srgbClr val="333333"/>
-                </a:solidFill>
-                <a:latin typeface="Calibri"/>
-              </a:rPr>
-              <a:t>–   La teoria esta al servicio del producto: al salir, VetCare avanzo.</a:t>
+              <a:t>–   Todo con el mismo dominio: la clinica veterinaria Huellitas (VetCare).</a:t>
             </a:r>
           </a:p>
         </p:txBody>
@@ -14825,7 +15367,7 @@
                 </a:solidFill>
                 <a:latin typeface="Calibri"/>
               </a:rPr>
-              <a:t>Encuadre y repaso del avance</a:t>
+              <a:t>Encuadre y repaso de la clase anterior</a:t>
             </a:r>
           </a:p>
         </p:txBody>
@@ -15170,7 +15712,7 @@
                 </a:solidFill>
                 <a:latin typeface="Calibri"/>
               </a:rPr>
-              <a:t>Taller guiado = avance del PI</a:t>
+              <a:t>Practica (opcional, guia en la carpeta)</a:t>
             </a:r>
           </a:p>
         </p:txBody>
@@ -15285,7 +15827,7 @@
                 </a:solidFill>
                 <a:latin typeface="Calibri"/>
               </a:rPr>
-              <a:t>Criterios de exito y cierre</a:t>
+              <a:t>Repaso de conceptos y cierre</a:t>
             </a:r>
           </a:p>
         </p:txBody>
@@ -15701,3163 +16243,6 @@
         <p:spPr>
           <a:xfrm>
             <a:off x="0" y="0"/>
-            <a:ext cx="12191695" cy="960120"/>
-          </a:xfrm>
-          <a:prstGeom prst="rect">
-            <a:avLst/>
-          </a:prstGeom>
-          <a:solidFill>
-            <a:srgbClr val="095292"/>
-          </a:solidFill>
-          <a:ln>
-            <a:noFill/>
-          </a:ln>
-        </p:spPr>
-        <p:style>
-          <a:lnRef idx="1">
-            <a:schemeClr val="accent1"/>
-          </a:lnRef>
-          <a:fillRef idx="3">
-            <a:schemeClr val="accent1"/>
-          </a:fillRef>
-          <a:effectRef idx="2">
-            <a:schemeClr val="accent1"/>
-          </a:effectRef>
-          <a:fontRef idx="minor">
-            <a:schemeClr val="lt1"/>
-          </a:fontRef>
-        </p:style>
-        <p:txBody>
-          <a:bodyPr rtlCol="0" anchor="ctr"/>
-          <a:lstStyle/>
-          <a:p>
-            <a:pPr algn="ctr"/>
-          </a:p>
-        </p:txBody>
-      </p:sp>
-      <p:sp>
-        <p:nvSpPr>
-          <p:cNvPr id="3" name="Rectangle 2"/>
-          <p:cNvSpPr/>
-          <p:nvPr/>
-        </p:nvSpPr>
-        <p:spPr>
-          <a:xfrm>
-            <a:off x="0" y="960120"/>
-            <a:ext cx="12191695" cy="41148"/>
-          </a:xfrm>
-          <a:prstGeom prst="rect">
-            <a:avLst/>
-          </a:prstGeom>
-          <a:solidFill>
-            <a:srgbClr val="FFD000"/>
-          </a:solidFill>
-          <a:ln>
-            <a:noFill/>
-          </a:ln>
-        </p:spPr>
-        <p:style>
-          <a:lnRef idx="1">
-            <a:schemeClr val="accent1"/>
-          </a:lnRef>
-          <a:fillRef idx="3">
-            <a:schemeClr val="accent1"/>
-          </a:fillRef>
-          <a:effectRef idx="2">
-            <a:schemeClr val="accent1"/>
-          </a:effectRef>
-          <a:fontRef idx="minor">
-            <a:schemeClr val="lt1"/>
-          </a:fontRef>
-        </p:style>
-        <p:txBody>
-          <a:bodyPr rtlCol="0" anchor="ctr"/>
-          <a:lstStyle/>
-          <a:p>
-            <a:pPr algn="ctr"/>
-          </a:p>
-        </p:txBody>
-      </p:sp>
-      <p:sp>
-        <p:nvSpPr>
-          <p:cNvPr id="4" name="TextBox 3"/>
-          <p:cNvSpPr txBox="1"/>
-          <p:nvPr/>
-        </p:nvSpPr>
-        <p:spPr>
-          <a:xfrm>
-            <a:off x="457200" y="164592"/>
-            <a:ext cx="11277295" cy="502920"/>
-          </a:xfrm>
-          <a:prstGeom prst="rect">
-            <a:avLst/>
-          </a:prstGeom>
-          <a:noFill/>
-        </p:spPr>
-        <p:txBody>
-          <a:bodyPr wrap="square">
-            <a:spAutoFit/>
-          </a:bodyPr>
-          <a:lstStyle/>
-          <a:p>
-            <a:r>
-              <a:rPr sz="2600" b="1" i="0">
-                <a:solidFill>
-                  <a:srgbClr val="FFFFFF"/>
-                </a:solidFill>
-                <a:latin typeface="Calibri"/>
-              </a:rPr>
-              <a:t>Taller PI — por que importa</a:t>
-            </a:r>
-          </a:p>
-        </p:txBody>
-      </p:sp>
-      <p:sp>
-        <p:nvSpPr>
-          <p:cNvPr id="5" name="TextBox 4"/>
-          <p:cNvSpPr txBox="1"/>
-          <p:nvPr/>
-        </p:nvSpPr>
-        <p:spPr>
-          <a:xfrm>
-            <a:off x="457200" y="1170432"/>
-            <a:ext cx="11277295" cy="5230368"/>
-          </a:xfrm>
-          <a:prstGeom prst="rect">
-            <a:avLst/>
-          </a:prstGeom>
-          <a:noFill/>
-        </p:spPr>
-        <p:txBody>
-          <a:bodyPr wrap="square">
-            <a:spAutoFit/>
-          </a:bodyPr>
-          <a:lstStyle/>
-          <a:p>
-            <a:pPr>
-              <a:spcAft>
-                <a:spcPts val="800"/>
-              </a:spcAft>
-            </a:pPr>
-            <a:r>
-              <a:rPr sz="2000" b="0" i="0">
-                <a:solidFill>
-                  <a:srgbClr val="333333"/>
-                </a:solidFill>
-                <a:latin typeface="Calibri"/>
-              </a:rPr>
-              <a:t>–   </a:t>
-            </a:r>
-            <a:r>
-              <a:rPr sz="2000" b="1" i="0">
-                <a:solidFill>
-                  <a:srgbClr val="333333"/>
-                </a:solidFill>
-                <a:latin typeface="Calibri"/>
-              </a:rPr>
-              <a:t>Por que importa al PI:</a:t>
-            </a:r>
-            <a:r>
-              <a:rPr sz="2000" b="0" i="0">
-                <a:solidFill>
-                  <a:srgbClr val="333333"/>
-                </a:solidFill>
-                <a:latin typeface="Calibri"/>
-              </a:rPr>
-              <a:t> el PI se entrega y se sustenta, y un evaluador no puede confiar en lo que no esta documentado ni comprobado; hoy VetCare pasa de 'a mi me funciono' a 'aqui esta la evidencia'.</a:t>
-            </a:r>
-          </a:p>
-          <a:p>
-            <a:pPr>
-              <a:spcAft>
-                <a:spcPts val="800"/>
-              </a:spcAft>
-            </a:pPr>
-            <a:r>
-              <a:rPr sz="2000" b="0" i="0">
-                <a:solidFill>
-                  <a:srgbClr val="333333"/>
-                </a:solidFill>
-                <a:latin typeface="Calibri"/>
-              </a:rPr>
-              <a:t>–   Las reglas del dominio (mascota inactiva, ID inexistente, horario ocupado) son las que van a fallar en la sustentacion si nadie las prueba antes.</a:t>
-            </a:r>
-          </a:p>
-          <a:p>
-            <a:pPr>
-              <a:spcAft>
-                <a:spcPts val="800"/>
-              </a:spcAft>
-            </a:pPr>
-            <a:r>
-              <a:rPr sz="2000" b="0" i="0">
-                <a:solidFill>
-                  <a:srgbClr val="333333"/>
-                </a:solidFill>
-                <a:latin typeface="Calibri"/>
-              </a:rPr>
-              <a:t>–   La documentacion generada hoy es la que permite que otro compañero use AgendaService en la ventana de citas sin leer el codigo por dentro.</a:t>
-            </a:r>
-          </a:p>
-        </p:txBody>
-      </p:sp>
-      <p:sp>
-        <p:nvSpPr>
-          <p:cNvPr id="6" name="TextBox 5"/>
-          <p:cNvSpPr txBox="1"/>
-          <p:nvPr/>
-        </p:nvSpPr>
-        <p:spPr>
-          <a:xfrm>
-            <a:off x="11185855" y="6473952"/>
-            <a:ext cx="640080" cy="274320"/>
-          </a:xfrm>
-          <a:prstGeom prst="rect">
-            <a:avLst/>
-          </a:prstGeom>
-          <a:noFill/>
-        </p:spPr>
-        <p:txBody>
-          <a:bodyPr wrap="square">
-            <a:spAutoFit/>
-          </a:bodyPr>
-          <a:lstStyle/>
-          <a:p>
-            <a:pPr algn="r"/>
-            <a:r>
-              <a:rPr sz="1100" b="0" i="0">
-                <a:solidFill>
-                  <a:srgbClr val="666666"/>
-                </a:solidFill>
-                <a:latin typeface="Calibri"/>
-              </a:rPr>
-              <a:t>31</a:t>
-            </a:r>
-          </a:p>
-        </p:txBody>
-      </p:sp>
-    </p:spTree>
-  </p:cSld>
-  <p:clrMapOvr>
-    <a:masterClrMapping/>
-  </p:clrMapOvr>
-</p:sld>
-</file>
-
-<file path=ppt/slides/slide32.xml><?xml version="1.0" encoding="utf-8"?>
-<p:sld xmlns:a="http://schemas.openxmlformats.org/drawingml/2006/main" xmlns:p="http://schemas.openxmlformats.org/presentationml/2006/main" xmlns:r="http://schemas.openxmlformats.org/officeDocument/2006/relationships">
-  <p:cSld>
-    <p:bg>
-      <p:bgPr>
-        <a:solidFill>
-          <a:srgbClr val="FFFFFF"/>
-        </a:solidFill>
-        <a:effectLst/>
-      </p:bgPr>
-    </p:bg>
-    <p:spTree>
-      <p:nvGrpSpPr>
-        <p:cNvPr id="1" name=""/>
-        <p:cNvGrpSpPr/>
-        <p:nvPr/>
-      </p:nvGrpSpPr>
-      <p:grpSpPr/>
-      <p:sp>
-        <p:nvSpPr>
-          <p:cNvPr id="2" name="Rectangle 1"/>
-          <p:cNvSpPr/>
-          <p:nvPr/>
-        </p:nvSpPr>
-        <p:spPr>
-          <a:xfrm>
-            <a:off x="0" y="0"/>
-            <a:ext cx="12191695" cy="960120"/>
-          </a:xfrm>
-          <a:prstGeom prst="rect">
-            <a:avLst/>
-          </a:prstGeom>
-          <a:solidFill>
-            <a:srgbClr val="095292"/>
-          </a:solidFill>
-          <a:ln>
-            <a:noFill/>
-          </a:ln>
-        </p:spPr>
-        <p:style>
-          <a:lnRef idx="1">
-            <a:schemeClr val="accent1"/>
-          </a:lnRef>
-          <a:fillRef idx="3">
-            <a:schemeClr val="accent1"/>
-          </a:fillRef>
-          <a:effectRef idx="2">
-            <a:schemeClr val="accent1"/>
-          </a:effectRef>
-          <a:fontRef idx="minor">
-            <a:schemeClr val="lt1"/>
-          </a:fontRef>
-        </p:style>
-        <p:txBody>
-          <a:bodyPr rtlCol="0" anchor="ctr"/>
-          <a:lstStyle/>
-          <a:p>
-            <a:pPr algn="ctr"/>
-          </a:p>
-        </p:txBody>
-      </p:sp>
-      <p:sp>
-        <p:nvSpPr>
-          <p:cNvPr id="3" name="Rectangle 2"/>
-          <p:cNvSpPr/>
-          <p:nvPr/>
-        </p:nvSpPr>
-        <p:spPr>
-          <a:xfrm>
-            <a:off x="0" y="960120"/>
-            <a:ext cx="12191695" cy="41148"/>
-          </a:xfrm>
-          <a:prstGeom prst="rect">
-            <a:avLst/>
-          </a:prstGeom>
-          <a:solidFill>
-            <a:srgbClr val="FFD000"/>
-          </a:solidFill>
-          <a:ln>
-            <a:noFill/>
-          </a:ln>
-        </p:spPr>
-        <p:style>
-          <a:lnRef idx="1">
-            <a:schemeClr val="accent1"/>
-          </a:lnRef>
-          <a:fillRef idx="3">
-            <a:schemeClr val="accent1"/>
-          </a:fillRef>
-          <a:effectRef idx="2">
-            <a:schemeClr val="accent1"/>
-          </a:effectRef>
-          <a:fontRef idx="minor">
-            <a:schemeClr val="lt1"/>
-          </a:fontRef>
-        </p:style>
-        <p:txBody>
-          <a:bodyPr rtlCol="0" anchor="ctr"/>
-          <a:lstStyle/>
-          <a:p>
-            <a:pPr algn="ctr"/>
-          </a:p>
-        </p:txBody>
-      </p:sp>
-      <p:sp>
-        <p:nvSpPr>
-          <p:cNvPr id="4" name="TextBox 3"/>
-          <p:cNvSpPr txBox="1"/>
-          <p:nvPr/>
-        </p:nvSpPr>
-        <p:spPr>
-          <a:xfrm>
-            <a:off x="457200" y="164592"/>
-            <a:ext cx="11277295" cy="502920"/>
-          </a:xfrm>
-          <a:prstGeom prst="rect">
-            <a:avLst/>
-          </a:prstGeom>
-          <a:noFill/>
-        </p:spPr>
-        <p:txBody>
-          <a:bodyPr wrap="square">
-            <a:spAutoFit/>
-          </a:bodyPr>
-          <a:lstStyle/>
-          <a:p>
-            <a:r>
-              <a:rPr sz="2600" b="1" i="0">
-                <a:solidFill>
-                  <a:srgbClr val="FFFFFF"/>
-                </a:solidFill>
-                <a:latin typeface="Calibri"/>
-              </a:rPr>
-              <a:t>Taller PI — punto de partida</a:t>
-            </a:r>
-          </a:p>
-        </p:txBody>
-      </p:sp>
-      <p:sp>
-        <p:nvSpPr>
-          <p:cNvPr id="5" name="TextBox 4"/>
-          <p:cNvSpPr txBox="1"/>
-          <p:nvPr/>
-        </p:nvSpPr>
-        <p:spPr>
-          <a:xfrm>
-            <a:off x="457200" y="1170432"/>
-            <a:ext cx="11277295" cy="5230368"/>
-          </a:xfrm>
-          <a:prstGeom prst="rect">
-            <a:avLst/>
-          </a:prstGeom>
-          <a:noFill/>
-        </p:spPr>
-        <p:txBody>
-          <a:bodyPr wrap="square">
-            <a:spAutoFit/>
-          </a:bodyPr>
-          <a:lstStyle/>
-          <a:p>
-            <a:pPr>
-              <a:spcAft>
-                <a:spcPts val="800"/>
-              </a:spcAft>
-            </a:pPr>
-            <a:r>
-              <a:rPr sz="2000" b="0" i="0">
-                <a:solidFill>
-                  <a:srgbClr val="333333"/>
-                </a:solidFill>
-                <a:latin typeface="Calibri"/>
-              </a:rPr>
-              <a:t>–   VetCare ya tiene el dominio (Mascota, Cita), el servicio de agendamiento y la interfaz conectada por eventos, con el repositorio unico de la clase anterior.</a:t>
-            </a:r>
-          </a:p>
-          <a:p>
-            <a:pPr>
-              <a:spcAft>
-                <a:spcPts val="800"/>
-              </a:spcAft>
-            </a:pPr>
-            <a:r>
-              <a:rPr sz="2000" b="0" i="0">
-                <a:solidFill>
-                  <a:srgbClr val="333333"/>
-                </a:solidFill>
-                <a:latin typeface="Calibri"/>
-              </a:rPr>
-              <a:t>–   Las clases estan sin documentar y hay tres metodos con nombres heredados de los primeros borradores: validar, proceso y dato1.</a:t>
-            </a:r>
-          </a:p>
-          <a:p>
-            <a:pPr>
-              <a:spcAft>
-                <a:spcPts val="800"/>
-              </a:spcAft>
-            </a:pPr>
-            <a:r>
-              <a:rPr sz="2000" b="0" i="0">
-                <a:solidFill>
-                  <a:srgbClr val="333333"/>
-                </a:solidFill>
-                <a:latin typeface="Calibri"/>
-              </a:rPr>
-              <a:t>–   Expedientes de partida: M-001 Kira activa, M-002 Michi activa y M-009 Rocky inactiva (dada de baja del servicio).</a:t>
-            </a:r>
-          </a:p>
-        </p:txBody>
-      </p:sp>
-      <p:sp>
-        <p:nvSpPr>
-          <p:cNvPr id="6" name="TextBox 5"/>
-          <p:cNvSpPr txBox="1"/>
-          <p:nvPr/>
-        </p:nvSpPr>
-        <p:spPr>
-          <a:xfrm>
-            <a:off x="11185855" y="6473952"/>
-            <a:ext cx="640080" cy="274320"/>
-          </a:xfrm>
-          <a:prstGeom prst="rect">
-            <a:avLst/>
-          </a:prstGeom>
-          <a:noFill/>
-        </p:spPr>
-        <p:txBody>
-          <a:bodyPr wrap="square">
-            <a:spAutoFit/>
-          </a:bodyPr>
-          <a:lstStyle/>
-          <a:p>
-            <a:pPr algn="r"/>
-            <a:r>
-              <a:rPr sz="1100" b="0" i="0">
-                <a:solidFill>
-                  <a:srgbClr val="666666"/>
-                </a:solidFill>
-                <a:latin typeface="Calibri"/>
-              </a:rPr>
-              <a:t>32</a:t>
-            </a:r>
-          </a:p>
-        </p:txBody>
-      </p:sp>
-    </p:spTree>
-  </p:cSld>
-  <p:clrMapOvr>
-    <a:masterClrMapping/>
-  </p:clrMapOvr>
-</p:sld>
-</file>
-
-<file path=ppt/slides/slide33.xml><?xml version="1.0" encoding="utf-8"?>
-<p:sld xmlns:a="http://schemas.openxmlformats.org/drawingml/2006/main" xmlns:p="http://schemas.openxmlformats.org/presentationml/2006/main" xmlns:r="http://schemas.openxmlformats.org/officeDocument/2006/relationships">
-  <p:cSld>
-    <p:bg>
-      <p:bgPr>
-        <a:solidFill>
-          <a:srgbClr val="FFFFFF"/>
-        </a:solidFill>
-        <a:effectLst/>
-      </p:bgPr>
-    </p:bg>
-    <p:spTree>
-      <p:nvGrpSpPr>
-        <p:cNvPr id="1" name=""/>
-        <p:cNvGrpSpPr/>
-        <p:nvPr/>
-      </p:nvGrpSpPr>
-      <p:grpSpPr/>
-      <p:sp>
-        <p:nvSpPr>
-          <p:cNvPr id="2" name="Rectangle 1"/>
-          <p:cNvSpPr/>
-          <p:nvPr/>
-        </p:nvSpPr>
-        <p:spPr>
-          <a:xfrm>
-            <a:off x="0" y="0"/>
-            <a:ext cx="12191695" cy="960120"/>
-          </a:xfrm>
-          <a:prstGeom prst="rect">
-            <a:avLst/>
-          </a:prstGeom>
-          <a:solidFill>
-            <a:srgbClr val="095292"/>
-          </a:solidFill>
-          <a:ln>
-            <a:noFill/>
-          </a:ln>
-        </p:spPr>
-        <p:style>
-          <a:lnRef idx="1">
-            <a:schemeClr val="accent1"/>
-          </a:lnRef>
-          <a:fillRef idx="3">
-            <a:schemeClr val="accent1"/>
-          </a:fillRef>
-          <a:effectRef idx="2">
-            <a:schemeClr val="accent1"/>
-          </a:effectRef>
-          <a:fontRef idx="minor">
-            <a:schemeClr val="lt1"/>
-          </a:fontRef>
-        </p:style>
-        <p:txBody>
-          <a:bodyPr rtlCol="0" anchor="ctr"/>
-          <a:lstStyle/>
-          <a:p>
-            <a:pPr algn="ctr"/>
-          </a:p>
-        </p:txBody>
-      </p:sp>
-      <p:sp>
-        <p:nvSpPr>
-          <p:cNvPr id="3" name="Rectangle 2"/>
-          <p:cNvSpPr/>
-          <p:nvPr/>
-        </p:nvSpPr>
-        <p:spPr>
-          <a:xfrm>
-            <a:off x="0" y="960120"/>
-            <a:ext cx="12191695" cy="41148"/>
-          </a:xfrm>
-          <a:prstGeom prst="rect">
-            <a:avLst/>
-          </a:prstGeom>
-          <a:solidFill>
-            <a:srgbClr val="FFD000"/>
-          </a:solidFill>
-          <a:ln>
-            <a:noFill/>
-          </a:ln>
-        </p:spPr>
-        <p:style>
-          <a:lnRef idx="1">
-            <a:schemeClr val="accent1"/>
-          </a:lnRef>
-          <a:fillRef idx="3">
-            <a:schemeClr val="accent1"/>
-          </a:fillRef>
-          <a:effectRef idx="2">
-            <a:schemeClr val="accent1"/>
-          </a:effectRef>
-          <a:fontRef idx="minor">
-            <a:schemeClr val="lt1"/>
-          </a:fontRef>
-        </p:style>
-        <p:txBody>
-          <a:bodyPr rtlCol="0" anchor="ctr"/>
-          <a:lstStyle/>
-          <a:p>
-            <a:pPr algn="ctr"/>
-          </a:p>
-        </p:txBody>
-      </p:sp>
-      <p:sp>
-        <p:nvSpPr>
-          <p:cNvPr id="4" name="TextBox 3"/>
-          <p:cNvSpPr txBox="1"/>
-          <p:nvPr/>
-        </p:nvSpPr>
-        <p:spPr>
-          <a:xfrm>
-            <a:off x="457200" y="164592"/>
-            <a:ext cx="11277295" cy="502920"/>
-          </a:xfrm>
-          <a:prstGeom prst="rect">
-            <a:avLst/>
-          </a:prstGeom>
-          <a:noFill/>
-        </p:spPr>
-        <p:txBody>
-          <a:bodyPr wrap="square">
-            <a:spAutoFit/>
-          </a:bodyPr>
-          <a:lstStyle/>
-          <a:p>
-            <a:r>
-              <a:rPr sz="2600" b="1" i="0">
-                <a:solidFill>
-                  <a:srgbClr val="FFFFFF"/>
-                </a:solidFill>
-                <a:latin typeface="Calibri"/>
-              </a:rPr>
-              <a:t>Taller PI — pasos guiados</a:t>
-            </a:r>
-          </a:p>
-        </p:txBody>
-      </p:sp>
-      <p:sp>
-        <p:nvSpPr>
-          <p:cNvPr id="5" name="Rounded Rectangle 4"/>
-          <p:cNvSpPr/>
-          <p:nvPr/>
-        </p:nvSpPr>
-        <p:spPr>
-          <a:xfrm>
-            <a:off x="457200" y="1234440"/>
-            <a:ext cx="11277295" cy="950976"/>
-          </a:xfrm>
-          <a:prstGeom prst="roundRect">
-            <a:avLst>
-              <a:gd name="adj" fmla="val 12000"/>
-            </a:avLst>
-          </a:prstGeom>
-          <a:solidFill>
-            <a:srgbClr val="F2F2F2"/>
-          </a:solidFill>
-          <a:ln>
-            <a:noFill/>
-          </a:ln>
-        </p:spPr>
-        <p:style>
-          <a:lnRef idx="1">
-            <a:schemeClr val="accent1"/>
-          </a:lnRef>
-          <a:fillRef idx="3">
-            <a:schemeClr val="accent1"/>
-          </a:fillRef>
-          <a:effectRef idx="2">
-            <a:schemeClr val="accent1"/>
-          </a:effectRef>
-          <a:fontRef idx="minor">
-            <a:schemeClr val="lt1"/>
-          </a:fontRef>
-        </p:style>
-        <p:txBody>
-          <a:bodyPr rtlCol="0" anchor="ctr"/>
-          <a:lstStyle/>
-          <a:p>
-            <a:pPr algn="ctr"/>
-          </a:p>
-        </p:txBody>
-      </p:sp>
-      <p:sp>
-        <p:nvSpPr>
-          <p:cNvPr id="6" name="Rounded Rectangle 5"/>
-          <p:cNvSpPr/>
-          <p:nvPr/>
-        </p:nvSpPr>
-        <p:spPr>
-          <a:xfrm>
-            <a:off x="594360" y="1490472"/>
-            <a:ext cx="438912" cy="438912"/>
-          </a:xfrm>
-          <a:prstGeom prst="roundRect">
-            <a:avLst>
-              <a:gd name="adj" fmla="val 12000"/>
-            </a:avLst>
-          </a:prstGeom>
-          <a:solidFill>
-            <a:srgbClr val="095292"/>
-          </a:solidFill>
-          <a:ln>
-            <a:noFill/>
-          </a:ln>
-        </p:spPr>
-        <p:style>
-          <a:lnRef idx="1">
-            <a:schemeClr val="accent1"/>
-          </a:lnRef>
-          <a:fillRef idx="3">
-            <a:schemeClr val="accent1"/>
-          </a:fillRef>
-          <a:effectRef idx="2">
-            <a:schemeClr val="accent1"/>
-          </a:effectRef>
-          <a:fontRef idx="minor">
-            <a:schemeClr val="lt1"/>
-          </a:fontRef>
-        </p:style>
-        <p:txBody>
-          <a:bodyPr rtlCol="0" anchor="ctr"/>
-          <a:lstStyle/>
-          <a:p>
-            <a:pPr algn="ctr"/>
-          </a:p>
-        </p:txBody>
-      </p:sp>
-      <p:sp>
-        <p:nvSpPr>
-          <p:cNvPr id="7" name="TextBox 6"/>
-          <p:cNvSpPr txBox="1"/>
-          <p:nvPr/>
-        </p:nvSpPr>
-        <p:spPr>
-          <a:xfrm>
-            <a:off x="594360" y="1490472"/>
-            <a:ext cx="438912" cy="438912"/>
-          </a:xfrm>
-          <a:prstGeom prst="rect">
-            <a:avLst/>
-          </a:prstGeom>
-          <a:noFill/>
-        </p:spPr>
-        <p:txBody>
-          <a:bodyPr wrap="square" anchor="ctr"/>
-          <a:lstStyle/>
-          <a:p>
-            <a:pPr algn="ctr"/>
-            <a:r>
-              <a:rPr sz="1600" b="1" i="0">
-                <a:solidFill>
-                  <a:srgbClr val="FFFFFF"/>
-                </a:solidFill>
-                <a:latin typeface="Calibri"/>
-              </a:rPr>
-              <a:t>1</a:t>
-            </a:r>
-          </a:p>
-        </p:txBody>
-      </p:sp>
-      <p:sp>
-        <p:nvSpPr>
-          <p:cNvPr id="8" name="TextBox 7"/>
-          <p:cNvSpPr txBox="1"/>
-          <p:nvPr/>
-        </p:nvSpPr>
-        <p:spPr>
-          <a:xfrm>
-            <a:off x="1188720" y="1325880"/>
-            <a:ext cx="10271455" cy="786384"/>
-          </a:xfrm>
-          <a:prstGeom prst="rect">
-            <a:avLst/>
-          </a:prstGeom>
-          <a:noFill/>
-        </p:spPr>
-        <p:txBody>
-          <a:bodyPr wrap="square" anchor="ctr"/>
-          <a:lstStyle/>
-          <a:p>
-            <a:r>
-              <a:rPr sz="1400" b="1" i="0">
-                <a:solidFill>
-                  <a:srgbClr val="095292"/>
-                </a:solidFill>
-                <a:latin typeface="Calibri"/>
-              </a:rPr>
-              <a:t>Documente con Javadoc las clases Mascota y Cita y el servicio AgendaService: bloque de clase con resumen y @author, y en cada metodo publico @param por parametro, @return si aplica y @throws por cada excepcion; el metodo agendar debe dejar escrita la regla 'una mascota inactiva no puede agendar'.</a:t>
-            </a:r>
-          </a:p>
-        </p:txBody>
-      </p:sp>
-      <p:sp>
-        <p:nvSpPr>
-          <p:cNvPr id="9" name="Rounded Rectangle 8"/>
-          <p:cNvSpPr/>
-          <p:nvPr/>
-        </p:nvSpPr>
-        <p:spPr>
-          <a:xfrm>
-            <a:off x="457200" y="2276856"/>
-            <a:ext cx="11277295" cy="950976"/>
-          </a:xfrm>
-          <a:prstGeom prst="roundRect">
-            <a:avLst>
-              <a:gd name="adj" fmla="val 12000"/>
-            </a:avLst>
-          </a:prstGeom>
-          <a:solidFill>
-            <a:srgbClr val="E8F4FA"/>
-          </a:solidFill>
-          <a:ln>
-            <a:noFill/>
-          </a:ln>
-        </p:spPr>
-        <p:style>
-          <a:lnRef idx="1">
-            <a:schemeClr val="accent1"/>
-          </a:lnRef>
-          <a:fillRef idx="3">
-            <a:schemeClr val="accent1"/>
-          </a:fillRef>
-          <a:effectRef idx="2">
-            <a:schemeClr val="accent1"/>
-          </a:effectRef>
-          <a:fontRef idx="minor">
-            <a:schemeClr val="lt1"/>
-          </a:fontRef>
-        </p:style>
-        <p:txBody>
-          <a:bodyPr rtlCol="0" anchor="ctr"/>
-          <a:lstStyle/>
-          <a:p>
-            <a:pPr algn="ctr"/>
-          </a:p>
-        </p:txBody>
-      </p:sp>
-      <p:sp>
-        <p:nvSpPr>
-          <p:cNvPr id="10" name="Rounded Rectangle 9"/>
-          <p:cNvSpPr/>
-          <p:nvPr/>
-        </p:nvSpPr>
-        <p:spPr>
-          <a:xfrm>
-            <a:off x="594360" y="2532888"/>
-            <a:ext cx="438912" cy="438912"/>
-          </a:xfrm>
-          <a:prstGeom prst="roundRect">
-            <a:avLst>
-              <a:gd name="adj" fmla="val 12000"/>
-            </a:avLst>
-          </a:prstGeom>
-          <a:solidFill>
-            <a:srgbClr val="095292"/>
-          </a:solidFill>
-          <a:ln>
-            <a:noFill/>
-          </a:ln>
-        </p:spPr>
-        <p:style>
-          <a:lnRef idx="1">
-            <a:schemeClr val="accent1"/>
-          </a:lnRef>
-          <a:fillRef idx="3">
-            <a:schemeClr val="accent1"/>
-          </a:fillRef>
-          <a:effectRef idx="2">
-            <a:schemeClr val="accent1"/>
-          </a:effectRef>
-          <a:fontRef idx="minor">
-            <a:schemeClr val="lt1"/>
-          </a:fontRef>
-        </p:style>
-        <p:txBody>
-          <a:bodyPr rtlCol="0" anchor="ctr"/>
-          <a:lstStyle/>
-          <a:p>
-            <a:pPr algn="ctr"/>
-          </a:p>
-        </p:txBody>
-      </p:sp>
-      <p:sp>
-        <p:nvSpPr>
-          <p:cNvPr id="11" name="TextBox 10"/>
-          <p:cNvSpPr txBox="1"/>
-          <p:nvPr/>
-        </p:nvSpPr>
-        <p:spPr>
-          <a:xfrm>
-            <a:off x="594360" y="2532888"/>
-            <a:ext cx="438912" cy="438912"/>
-          </a:xfrm>
-          <a:prstGeom prst="rect">
-            <a:avLst/>
-          </a:prstGeom>
-          <a:noFill/>
-        </p:spPr>
-        <p:txBody>
-          <a:bodyPr wrap="square" anchor="ctr"/>
-          <a:lstStyle/>
-          <a:p>
-            <a:pPr algn="ctr"/>
-            <a:r>
-              <a:rPr sz="1600" b="1" i="0">
-                <a:solidFill>
-                  <a:srgbClr val="FFFFFF"/>
-                </a:solidFill>
-                <a:latin typeface="Calibri"/>
-              </a:rPr>
-              <a:t>2</a:t>
-            </a:r>
-          </a:p>
-        </p:txBody>
-      </p:sp>
-      <p:sp>
-        <p:nvSpPr>
-          <p:cNvPr id="12" name="TextBox 11"/>
-          <p:cNvSpPr txBox="1"/>
-          <p:nvPr/>
-        </p:nvSpPr>
-        <p:spPr>
-          <a:xfrm>
-            <a:off x="1188720" y="2368296"/>
-            <a:ext cx="10271455" cy="786384"/>
-          </a:xfrm>
-          <a:prstGeom prst="rect">
-            <a:avLst/>
-          </a:prstGeom>
-          <a:noFill/>
-        </p:spPr>
-        <p:txBody>
-          <a:bodyPr wrap="square" anchor="ctr"/>
-          <a:lstStyle/>
-          <a:p>
-            <a:r>
-              <a:rPr sz="1500" b="1" i="0">
-                <a:solidFill>
-                  <a:srgbClr val="095292"/>
-                </a:solidFill>
-                <a:latin typeface="Calibri"/>
-              </a:rPr>
-              <a:t>Renombre al menos tres identificadores pobres del proyecto (por ejemplo validar por agendar, b por mascotaActiva, dato1 por idMascota) usando Rename Symbol (F2) de VS Code para que el cambio se propague sin romper nada.</a:t>
-            </a:r>
-          </a:p>
-        </p:txBody>
-      </p:sp>
-      <p:sp>
-        <p:nvSpPr>
-          <p:cNvPr id="13" name="Rounded Rectangle 12"/>
-          <p:cNvSpPr/>
-          <p:nvPr/>
-        </p:nvSpPr>
-        <p:spPr>
-          <a:xfrm>
-            <a:off x="457200" y="3319272"/>
-            <a:ext cx="11277295" cy="950976"/>
-          </a:xfrm>
-          <a:prstGeom prst="roundRect">
-            <a:avLst>
-              <a:gd name="adj" fmla="val 12000"/>
-            </a:avLst>
-          </a:prstGeom>
-          <a:solidFill>
-            <a:srgbClr val="F2F2F2"/>
-          </a:solidFill>
-          <a:ln>
-            <a:noFill/>
-          </a:ln>
-        </p:spPr>
-        <p:style>
-          <a:lnRef idx="1">
-            <a:schemeClr val="accent1"/>
-          </a:lnRef>
-          <a:fillRef idx="3">
-            <a:schemeClr val="accent1"/>
-          </a:fillRef>
-          <a:effectRef idx="2">
-            <a:schemeClr val="accent1"/>
-          </a:effectRef>
-          <a:fontRef idx="minor">
-            <a:schemeClr val="lt1"/>
-          </a:fontRef>
-        </p:style>
-        <p:txBody>
-          <a:bodyPr rtlCol="0" anchor="ctr"/>
-          <a:lstStyle/>
-          <a:p>
-            <a:pPr algn="ctr"/>
-          </a:p>
-        </p:txBody>
-      </p:sp>
-      <p:sp>
-        <p:nvSpPr>
-          <p:cNvPr id="14" name="Rounded Rectangle 13"/>
-          <p:cNvSpPr/>
-          <p:nvPr/>
-        </p:nvSpPr>
-        <p:spPr>
-          <a:xfrm>
-            <a:off x="594360" y="3575304"/>
-            <a:ext cx="438912" cy="438912"/>
-          </a:xfrm>
-          <a:prstGeom prst="roundRect">
-            <a:avLst>
-              <a:gd name="adj" fmla="val 12000"/>
-            </a:avLst>
-          </a:prstGeom>
-          <a:solidFill>
-            <a:srgbClr val="095292"/>
-          </a:solidFill>
-          <a:ln>
-            <a:noFill/>
-          </a:ln>
-        </p:spPr>
-        <p:style>
-          <a:lnRef idx="1">
-            <a:schemeClr val="accent1"/>
-          </a:lnRef>
-          <a:fillRef idx="3">
-            <a:schemeClr val="accent1"/>
-          </a:fillRef>
-          <a:effectRef idx="2">
-            <a:schemeClr val="accent1"/>
-          </a:effectRef>
-          <a:fontRef idx="minor">
-            <a:schemeClr val="lt1"/>
-          </a:fontRef>
-        </p:style>
-        <p:txBody>
-          <a:bodyPr rtlCol="0" anchor="ctr"/>
-          <a:lstStyle/>
-          <a:p>
-            <a:pPr algn="ctr"/>
-          </a:p>
-        </p:txBody>
-      </p:sp>
-      <p:sp>
-        <p:nvSpPr>
-          <p:cNvPr id="15" name="TextBox 14"/>
-          <p:cNvSpPr txBox="1"/>
-          <p:nvPr/>
-        </p:nvSpPr>
-        <p:spPr>
-          <a:xfrm>
-            <a:off x="594360" y="3575304"/>
-            <a:ext cx="438912" cy="438912"/>
-          </a:xfrm>
-          <a:prstGeom prst="rect">
-            <a:avLst/>
-          </a:prstGeom>
-          <a:noFill/>
-        </p:spPr>
-        <p:txBody>
-          <a:bodyPr wrap="square" anchor="ctr"/>
-          <a:lstStyle/>
-          <a:p>
-            <a:pPr algn="ctr"/>
-            <a:r>
-              <a:rPr sz="1600" b="1" i="0">
-                <a:solidFill>
-                  <a:srgbClr val="FFFFFF"/>
-                </a:solidFill>
-                <a:latin typeface="Calibri"/>
-              </a:rPr>
-              <a:t>3</a:t>
-            </a:r>
-          </a:p>
-        </p:txBody>
-      </p:sp>
-      <p:sp>
-        <p:nvSpPr>
-          <p:cNvPr id="16" name="TextBox 15"/>
-          <p:cNvSpPr txBox="1"/>
-          <p:nvPr/>
-        </p:nvSpPr>
-        <p:spPr>
-          <a:xfrm>
-            <a:off x="1188720" y="3410712"/>
-            <a:ext cx="10271455" cy="786384"/>
-          </a:xfrm>
-          <a:prstGeom prst="rect">
-            <a:avLst/>
-          </a:prstGeom>
-          <a:noFill/>
-        </p:spPr>
-        <p:txBody>
-          <a:bodyPr wrap="square" anchor="ctr"/>
-          <a:lstStyle/>
-          <a:p>
-            <a:r>
-              <a:rPr sz="1500" b="1" i="0">
-                <a:solidFill>
-                  <a:srgbClr val="095292"/>
-                </a:solidFill>
-                <a:latin typeface="Calibri"/>
-              </a:rPr>
-              <a:t>Genere la documentacion con clic derecho sobre el proyecto y Generate Javadoc, abra el HTML y verifique que en la ficha de AgendaService se lee la regla de negocio y las tres excepciones documentadas; guarde una captura.</a:t>
-            </a:r>
-          </a:p>
-        </p:txBody>
-      </p:sp>
-      <p:sp>
-        <p:nvSpPr>
-          <p:cNvPr id="17" name="Rounded Rectangle 16"/>
-          <p:cNvSpPr/>
-          <p:nvPr/>
-        </p:nvSpPr>
-        <p:spPr>
-          <a:xfrm>
-            <a:off x="457200" y="4361688"/>
-            <a:ext cx="11277295" cy="950976"/>
-          </a:xfrm>
-          <a:prstGeom prst="roundRect">
-            <a:avLst>
-              <a:gd name="adj" fmla="val 12000"/>
-            </a:avLst>
-          </a:prstGeom>
-          <a:solidFill>
-            <a:srgbClr val="E8F4FA"/>
-          </a:solidFill>
-          <a:ln>
-            <a:noFill/>
-          </a:ln>
-        </p:spPr>
-        <p:style>
-          <a:lnRef idx="1">
-            <a:schemeClr val="accent1"/>
-          </a:lnRef>
-          <a:fillRef idx="3">
-            <a:schemeClr val="accent1"/>
-          </a:fillRef>
-          <a:effectRef idx="2">
-            <a:schemeClr val="accent1"/>
-          </a:effectRef>
-          <a:fontRef idx="minor">
-            <a:schemeClr val="lt1"/>
-          </a:fontRef>
-        </p:style>
-        <p:txBody>
-          <a:bodyPr rtlCol="0" anchor="ctr"/>
-          <a:lstStyle/>
-          <a:p>
-            <a:pPr algn="ctr"/>
-          </a:p>
-        </p:txBody>
-      </p:sp>
-      <p:sp>
-        <p:nvSpPr>
-          <p:cNvPr id="18" name="Rounded Rectangle 17"/>
-          <p:cNvSpPr/>
-          <p:nvPr/>
-        </p:nvSpPr>
-        <p:spPr>
-          <a:xfrm>
-            <a:off x="594360" y="4617720"/>
-            <a:ext cx="438912" cy="438912"/>
-          </a:xfrm>
-          <a:prstGeom prst="roundRect">
-            <a:avLst>
-              <a:gd name="adj" fmla="val 12000"/>
-            </a:avLst>
-          </a:prstGeom>
-          <a:solidFill>
-            <a:srgbClr val="095292"/>
-          </a:solidFill>
-          <a:ln>
-            <a:noFill/>
-          </a:ln>
-        </p:spPr>
-        <p:style>
-          <a:lnRef idx="1">
-            <a:schemeClr val="accent1"/>
-          </a:lnRef>
-          <a:fillRef idx="3">
-            <a:schemeClr val="accent1"/>
-          </a:fillRef>
-          <a:effectRef idx="2">
-            <a:schemeClr val="accent1"/>
-          </a:effectRef>
-          <a:fontRef idx="minor">
-            <a:schemeClr val="lt1"/>
-          </a:fontRef>
-        </p:style>
-        <p:txBody>
-          <a:bodyPr rtlCol="0" anchor="ctr"/>
-          <a:lstStyle/>
-          <a:p>
-            <a:pPr algn="ctr"/>
-          </a:p>
-        </p:txBody>
-      </p:sp>
-      <p:sp>
-        <p:nvSpPr>
-          <p:cNvPr id="19" name="TextBox 18"/>
-          <p:cNvSpPr txBox="1"/>
-          <p:nvPr/>
-        </p:nvSpPr>
-        <p:spPr>
-          <a:xfrm>
-            <a:off x="594360" y="4617720"/>
-            <a:ext cx="438912" cy="438912"/>
-          </a:xfrm>
-          <a:prstGeom prst="rect">
-            <a:avLst/>
-          </a:prstGeom>
-          <a:noFill/>
-        </p:spPr>
-        <p:txBody>
-          <a:bodyPr wrap="square" anchor="ctr"/>
-          <a:lstStyle/>
-          <a:p>
-            <a:pPr algn="ctr"/>
-            <a:r>
-              <a:rPr sz="1600" b="1" i="0">
-                <a:solidFill>
-                  <a:srgbClr val="FFFFFF"/>
-                </a:solidFill>
-                <a:latin typeface="Calibri"/>
-              </a:rPr>
-              <a:t>4</a:t>
-            </a:r>
-          </a:p>
-        </p:txBody>
-      </p:sp>
-      <p:sp>
-        <p:nvSpPr>
-          <p:cNvPr id="20" name="TextBox 19"/>
-          <p:cNvSpPr txBox="1"/>
-          <p:nvPr/>
-        </p:nvSpPr>
-        <p:spPr>
-          <a:xfrm>
-            <a:off x="1188720" y="4453128"/>
-            <a:ext cx="10271455" cy="786384"/>
-          </a:xfrm>
-          <a:prstGeom prst="rect">
-            <a:avLst/>
-          </a:prstGeom>
-          <a:noFill/>
-        </p:spPr>
-        <p:txBody>
-          <a:bodyPr wrap="square" anchor="ctr"/>
-          <a:lstStyle/>
-          <a:p>
-            <a:r>
-              <a:rPr sz="1400" b="1" i="0">
-                <a:solidFill>
-                  <a:srgbClr val="095292"/>
-                </a:solidFill>
-                <a:latin typeface="Calibri"/>
-              </a:rPr>
-              <a:t>Cree en Test Packages la clase AgendaServiceTest con un metodo de preparacion que registre M-001 Kira activa, M-002 Michi activa y M-009 Rocky inactiva, y escriba cuatro casos: mascota activa agenda, mascota inactiva lanza IllegalStateException, ID inexistente lanza NoSuchElementException y horario ocupado no duplica la cita.</a:t>
-            </a:r>
-          </a:p>
-        </p:txBody>
-      </p:sp>
-      <p:sp>
-        <p:nvSpPr>
-          <p:cNvPr id="21" name="Rounded Rectangle 20"/>
-          <p:cNvSpPr/>
-          <p:nvPr/>
-        </p:nvSpPr>
-        <p:spPr>
-          <a:xfrm>
-            <a:off x="457200" y="5404104"/>
-            <a:ext cx="11277295" cy="950976"/>
-          </a:xfrm>
-          <a:prstGeom prst="roundRect">
-            <a:avLst>
-              <a:gd name="adj" fmla="val 12000"/>
-            </a:avLst>
-          </a:prstGeom>
-          <a:solidFill>
-            <a:srgbClr val="F2F2F2"/>
-          </a:solidFill>
-          <a:ln>
-            <a:noFill/>
-          </a:ln>
-        </p:spPr>
-        <p:style>
-          <a:lnRef idx="1">
-            <a:schemeClr val="accent1"/>
-          </a:lnRef>
-          <a:fillRef idx="3">
-            <a:schemeClr val="accent1"/>
-          </a:fillRef>
-          <a:effectRef idx="2">
-            <a:schemeClr val="accent1"/>
-          </a:effectRef>
-          <a:fontRef idx="minor">
-            <a:schemeClr val="lt1"/>
-          </a:fontRef>
-        </p:style>
-        <p:txBody>
-          <a:bodyPr rtlCol="0" anchor="ctr"/>
-          <a:lstStyle/>
-          <a:p>
-            <a:pPr algn="ctr"/>
-          </a:p>
-        </p:txBody>
-      </p:sp>
-      <p:sp>
-        <p:nvSpPr>
-          <p:cNvPr id="22" name="Rounded Rectangle 21"/>
-          <p:cNvSpPr/>
-          <p:nvPr/>
-        </p:nvSpPr>
-        <p:spPr>
-          <a:xfrm>
-            <a:off x="594360" y="5660136"/>
-            <a:ext cx="438912" cy="438912"/>
-          </a:xfrm>
-          <a:prstGeom prst="roundRect">
-            <a:avLst>
-              <a:gd name="adj" fmla="val 12000"/>
-            </a:avLst>
-          </a:prstGeom>
-          <a:solidFill>
-            <a:srgbClr val="095292"/>
-          </a:solidFill>
-          <a:ln>
-            <a:noFill/>
-          </a:ln>
-        </p:spPr>
-        <p:style>
-          <a:lnRef idx="1">
-            <a:schemeClr val="accent1"/>
-          </a:lnRef>
-          <a:fillRef idx="3">
-            <a:schemeClr val="accent1"/>
-          </a:fillRef>
-          <a:effectRef idx="2">
-            <a:schemeClr val="accent1"/>
-          </a:effectRef>
-          <a:fontRef idx="minor">
-            <a:schemeClr val="lt1"/>
-          </a:fontRef>
-        </p:style>
-        <p:txBody>
-          <a:bodyPr rtlCol="0" anchor="ctr"/>
-          <a:lstStyle/>
-          <a:p>
-            <a:pPr algn="ctr"/>
-          </a:p>
-        </p:txBody>
-      </p:sp>
-      <p:sp>
-        <p:nvSpPr>
-          <p:cNvPr id="23" name="TextBox 22"/>
-          <p:cNvSpPr txBox="1"/>
-          <p:nvPr/>
-        </p:nvSpPr>
-        <p:spPr>
-          <a:xfrm>
-            <a:off x="594360" y="5660136"/>
-            <a:ext cx="438912" cy="438912"/>
-          </a:xfrm>
-          <a:prstGeom prst="rect">
-            <a:avLst/>
-          </a:prstGeom>
-          <a:noFill/>
-        </p:spPr>
-        <p:txBody>
-          <a:bodyPr wrap="square" anchor="ctr"/>
-          <a:lstStyle/>
-          <a:p>
-            <a:pPr algn="ctr"/>
-            <a:r>
-              <a:rPr sz="1600" b="1" i="0">
-                <a:solidFill>
-                  <a:srgbClr val="FFFFFF"/>
-                </a:solidFill>
-                <a:latin typeface="Calibri"/>
-              </a:rPr>
-              <a:t>5</a:t>
-            </a:r>
-          </a:p>
-        </p:txBody>
-      </p:sp>
-      <p:sp>
-        <p:nvSpPr>
-          <p:cNvPr id="24" name="TextBox 23"/>
-          <p:cNvSpPr txBox="1"/>
-          <p:nvPr/>
-        </p:nvSpPr>
-        <p:spPr>
-          <a:xfrm>
-            <a:off x="1188720" y="5495544"/>
-            <a:ext cx="10271455" cy="786384"/>
-          </a:xfrm>
-          <a:prstGeom prst="rect">
-            <a:avLst/>
-          </a:prstGeom>
-          <a:noFill/>
-        </p:spPr>
-        <p:txBody>
-          <a:bodyPr wrap="square" anchor="ctr"/>
-          <a:lstStyle/>
-          <a:p>
-            <a:r>
-              <a:rPr sz="1400" b="1" i="0">
-                <a:solidFill>
-                  <a:srgbClr val="095292"/>
-                </a:solidFill>
-                <a:latin typeface="Calibri"/>
-              </a:rPr>
-              <a:t>Rompa a proposito la regla (comente la validacion de mascota inactiva), corra las pruebas y capture la barra roja; restaure la validacion, corra otra vez y capture la barra verde; escriba ademas dos pruebas manuales que NO se pueden automatizar y suba todo a la plataforma del curso.</a:t>
-            </a:r>
-          </a:p>
-        </p:txBody>
-      </p:sp>
-      <p:sp>
-        <p:nvSpPr>
-          <p:cNvPr id="25" name="TextBox 24"/>
-          <p:cNvSpPr txBox="1"/>
-          <p:nvPr/>
-        </p:nvSpPr>
-        <p:spPr>
-          <a:xfrm>
-            <a:off x="11185855" y="6473952"/>
-            <a:ext cx="640080" cy="274320"/>
-          </a:xfrm>
-          <a:prstGeom prst="rect">
-            <a:avLst/>
-          </a:prstGeom>
-          <a:noFill/>
-        </p:spPr>
-        <p:txBody>
-          <a:bodyPr wrap="square">
-            <a:spAutoFit/>
-          </a:bodyPr>
-          <a:lstStyle/>
-          <a:p>
-            <a:pPr algn="r"/>
-            <a:r>
-              <a:rPr sz="1100" b="0" i="0">
-                <a:solidFill>
-                  <a:srgbClr val="666666"/>
-                </a:solidFill>
-                <a:latin typeface="Calibri"/>
-              </a:rPr>
-              <a:t>33</a:t>
-            </a:r>
-          </a:p>
-        </p:txBody>
-      </p:sp>
-    </p:spTree>
-  </p:cSld>
-  <p:clrMapOvr>
-    <a:masterClrMapping/>
-  </p:clrMapOvr>
-</p:sld>
-</file>
-
-<file path=ppt/slides/slide34.xml><?xml version="1.0" encoding="utf-8"?>
-<p:sld xmlns:a="http://schemas.openxmlformats.org/drawingml/2006/main" xmlns:p="http://schemas.openxmlformats.org/presentationml/2006/main" xmlns:r="http://schemas.openxmlformats.org/officeDocument/2006/relationships">
-  <p:cSld>
-    <p:bg>
-      <p:bgPr>
-        <a:solidFill>
-          <a:srgbClr val="FFFFFF"/>
-        </a:solidFill>
-        <a:effectLst/>
-      </p:bgPr>
-    </p:bg>
-    <p:spTree>
-      <p:nvGrpSpPr>
-        <p:cNvPr id="1" name=""/>
-        <p:cNvGrpSpPr/>
-        <p:nvPr/>
-      </p:nvGrpSpPr>
-      <p:grpSpPr/>
-      <p:sp>
-        <p:nvSpPr>
-          <p:cNvPr id="2" name="Rectangle 1"/>
-          <p:cNvSpPr/>
-          <p:nvPr/>
-        </p:nvSpPr>
-        <p:spPr>
-          <a:xfrm>
-            <a:off x="0" y="0"/>
-            <a:ext cx="12191695" cy="960120"/>
-          </a:xfrm>
-          <a:prstGeom prst="rect">
-            <a:avLst/>
-          </a:prstGeom>
-          <a:solidFill>
-            <a:srgbClr val="095292"/>
-          </a:solidFill>
-          <a:ln>
-            <a:noFill/>
-          </a:ln>
-        </p:spPr>
-        <p:style>
-          <a:lnRef idx="1">
-            <a:schemeClr val="accent1"/>
-          </a:lnRef>
-          <a:fillRef idx="3">
-            <a:schemeClr val="accent1"/>
-          </a:fillRef>
-          <a:effectRef idx="2">
-            <a:schemeClr val="accent1"/>
-          </a:effectRef>
-          <a:fontRef idx="minor">
-            <a:schemeClr val="lt1"/>
-          </a:fontRef>
-        </p:style>
-        <p:txBody>
-          <a:bodyPr rtlCol="0" anchor="ctr"/>
-          <a:lstStyle/>
-          <a:p>
-            <a:pPr algn="ctr"/>
-          </a:p>
-        </p:txBody>
-      </p:sp>
-      <p:sp>
-        <p:nvSpPr>
-          <p:cNvPr id="3" name="Rectangle 2"/>
-          <p:cNvSpPr/>
-          <p:nvPr/>
-        </p:nvSpPr>
-        <p:spPr>
-          <a:xfrm>
-            <a:off x="0" y="960120"/>
-            <a:ext cx="12191695" cy="41148"/>
-          </a:xfrm>
-          <a:prstGeom prst="rect">
-            <a:avLst/>
-          </a:prstGeom>
-          <a:solidFill>
-            <a:srgbClr val="FFD000"/>
-          </a:solidFill>
-          <a:ln>
-            <a:noFill/>
-          </a:ln>
-        </p:spPr>
-        <p:style>
-          <a:lnRef idx="1">
-            <a:schemeClr val="accent1"/>
-          </a:lnRef>
-          <a:fillRef idx="3">
-            <a:schemeClr val="accent1"/>
-          </a:fillRef>
-          <a:effectRef idx="2">
-            <a:schemeClr val="accent1"/>
-          </a:effectRef>
-          <a:fontRef idx="minor">
-            <a:schemeClr val="lt1"/>
-          </a:fontRef>
-        </p:style>
-        <p:txBody>
-          <a:bodyPr rtlCol="0" anchor="ctr"/>
-          <a:lstStyle/>
-          <a:p>
-            <a:pPr algn="ctr"/>
-          </a:p>
-        </p:txBody>
-      </p:sp>
-      <p:sp>
-        <p:nvSpPr>
-          <p:cNvPr id="4" name="TextBox 3"/>
-          <p:cNvSpPr txBox="1"/>
-          <p:nvPr/>
-        </p:nvSpPr>
-        <p:spPr>
-          <a:xfrm>
-            <a:off x="457200" y="164592"/>
-            <a:ext cx="11277295" cy="502920"/>
-          </a:xfrm>
-          <a:prstGeom prst="rect">
-            <a:avLst/>
-          </a:prstGeom>
-          <a:noFill/>
-        </p:spPr>
-        <p:txBody>
-          <a:bodyPr wrap="square">
-            <a:spAutoFit/>
-          </a:bodyPr>
-          <a:lstStyle/>
-          <a:p>
-            <a:r>
-              <a:rPr sz="2600" b="1" i="0">
-                <a:solidFill>
-                  <a:srgbClr val="FFFFFF"/>
-                </a:solidFill>
-                <a:latin typeface="Calibri"/>
-              </a:rPr>
-              <a:t>Antes de entregar — autochequeo</a:t>
-            </a:r>
-          </a:p>
-        </p:txBody>
-      </p:sp>
-      <p:sp>
-        <p:nvSpPr>
-          <p:cNvPr id="5" name="Rounded Rectangle 4"/>
-          <p:cNvSpPr/>
-          <p:nvPr/>
-        </p:nvSpPr>
-        <p:spPr>
-          <a:xfrm>
-            <a:off x="457200" y="1261872"/>
-            <a:ext cx="11277295" cy="566928"/>
-          </a:xfrm>
-          <a:prstGeom prst="roundRect">
-            <a:avLst>
-              <a:gd name="adj" fmla="val 12000"/>
-            </a:avLst>
-          </a:prstGeom>
-          <a:solidFill>
-            <a:srgbClr val="F2F2F2"/>
-          </a:solidFill>
-          <a:ln>
-            <a:noFill/>
-          </a:ln>
-        </p:spPr>
-        <p:style>
-          <a:lnRef idx="1">
-            <a:schemeClr val="accent1"/>
-          </a:lnRef>
-          <a:fillRef idx="3">
-            <a:schemeClr val="accent1"/>
-          </a:fillRef>
-          <a:effectRef idx="2">
-            <a:schemeClr val="accent1"/>
-          </a:effectRef>
-          <a:fontRef idx="minor">
-            <a:schemeClr val="lt1"/>
-          </a:fontRef>
-        </p:style>
-        <p:txBody>
-          <a:bodyPr rtlCol="0" anchor="ctr"/>
-          <a:lstStyle/>
-          <a:p>
-            <a:pPr algn="ctr"/>
-          </a:p>
-        </p:txBody>
-      </p:sp>
-      <p:sp>
-        <p:nvSpPr>
-          <p:cNvPr id="6" name="Rectangle 5"/>
-          <p:cNvSpPr/>
-          <p:nvPr/>
-        </p:nvSpPr>
-        <p:spPr>
-          <a:xfrm>
-            <a:off x="640080" y="1408175"/>
-            <a:ext cx="274320" cy="274320"/>
-          </a:xfrm>
-          <a:prstGeom prst="rect">
-            <a:avLst/>
-          </a:prstGeom>
-          <a:solidFill>
-            <a:srgbClr val="FFFFFF"/>
-          </a:solidFill>
-          <a:ln>
-            <a:solidFill>
-              <a:srgbClr val="333333"/>
-            </a:solidFill>
-          </a:ln>
-        </p:spPr>
-        <p:style>
-          <a:lnRef idx="1">
-            <a:schemeClr val="accent1"/>
-          </a:lnRef>
-          <a:fillRef idx="3">
-            <a:schemeClr val="accent1"/>
-          </a:fillRef>
-          <a:effectRef idx="2">
-            <a:schemeClr val="accent1"/>
-          </a:effectRef>
-          <a:fontRef idx="minor">
-            <a:schemeClr val="lt1"/>
-          </a:fontRef>
-        </p:style>
-        <p:txBody>
-          <a:bodyPr rtlCol="0" anchor="ctr"/>
-          <a:lstStyle/>
-          <a:p>
-            <a:pPr algn="ctr"/>
-          </a:p>
-        </p:txBody>
-      </p:sp>
-      <p:sp>
-        <p:nvSpPr>
-          <p:cNvPr id="7" name="Rectangle 6"/>
-          <p:cNvSpPr/>
-          <p:nvPr/>
-        </p:nvSpPr>
-        <p:spPr>
-          <a:xfrm>
-            <a:off x="640080" y="1408175"/>
-            <a:ext cx="73152" cy="274320"/>
-          </a:xfrm>
-          <a:prstGeom prst="rect">
-            <a:avLst/>
-          </a:prstGeom>
-          <a:solidFill>
-            <a:srgbClr val="269CCB"/>
-          </a:solidFill>
-          <a:ln>
-            <a:noFill/>
-          </a:ln>
-        </p:spPr>
-        <p:style>
-          <a:lnRef idx="1">
-            <a:schemeClr val="accent1"/>
-          </a:lnRef>
-          <a:fillRef idx="3">
-            <a:schemeClr val="accent1"/>
-          </a:fillRef>
-          <a:effectRef idx="2">
-            <a:schemeClr val="accent1"/>
-          </a:effectRef>
-          <a:fontRef idx="minor">
-            <a:schemeClr val="lt1"/>
-          </a:fontRef>
-        </p:style>
-        <p:txBody>
-          <a:bodyPr rtlCol="0" anchor="ctr"/>
-          <a:lstStyle/>
-          <a:p>
-            <a:pPr algn="ctr"/>
-          </a:p>
-        </p:txBody>
-      </p:sp>
-      <p:sp>
-        <p:nvSpPr>
-          <p:cNvPr id="8" name="TextBox 7"/>
-          <p:cNvSpPr txBox="1"/>
-          <p:nvPr/>
-        </p:nvSpPr>
-        <p:spPr>
-          <a:xfrm>
-            <a:off x="1097280" y="1353312"/>
-            <a:ext cx="10362895" cy="402336"/>
-          </a:xfrm>
-          <a:prstGeom prst="rect">
-            <a:avLst/>
-          </a:prstGeom>
-          <a:noFill/>
-        </p:spPr>
-        <p:txBody>
-          <a:bodyPr wrap="square" anchor="ctr"/>
-          <a:lstStyle/>
-          <a:p>
-            <a:r>
-              <a:rPr sz="1500" b="0" i="0">
-                <a:solidFill>
-                  <a:srgbClr val="333333"/>
-                </a:solidFill>
-                <a:latin typeface="Calibri"/>
-              </a:rPr>
-              <a:t>Si el HTML generado sale vacio o le falta un metodo: con que tres caracteres exactos abre su bloque de comentario y donde esta ubicado respecto al metodo?</a:t>
-            </a:r>
-          </a:p>
-        </p:txBody>
-      </p:sp>
-      <p:sp>
-        <p:nvSpPr>
-          <p:cNvPr id="9" name="Rounded Rectangle 8"/>
-          <p:cNvSpPr/>
-          <p:nvPr/>
-        </p:nvSpPr>
-        <p:spPr>
-          <a:xfrm>
-            <a:off x="457200" y="1938528"/>
-            <a:ext cx="11277295" cy="566928"/>
-          </a:xfrm>
-          <a:prstGeom prst="roundRect">
-            <a:avLst>
-              <a:gd name="adj" fmla="val 12000"/>
-            </a:avLst>
-          </a:prstGeom>
-          <a:solidFill>
-            <a:srgbClr val="F2F2F2"/>
-          </a:solidFill>
-          <a:ln>
-            <a:noFill/>
-          </a:ln>
-        </p:spPr>
-        <p:style>
-          <a:lnRef idx="1">
-            <a:schemeClr val="accent1"/>
-          </a:lnRef>
-          <a:fillRef idx="3">
-            <a:schemeClr val="accent1"/>
-          </a:fillRef>
-          <a:effectRef idx="2">
-            <a:schemeClr val="accent1"/>
-          </a:effectRef>
-          <a:fontRef idx="minor">
-            <a:schemeClr val="lt1"/>
-          </a:fontRef>
-        </p:style>
-        <p:txBody>
-          <a:bodyPr rtlCol="0" anchor="ctr"/>
-          <a:lstStyle/>
-          <a:p>
-            <a:pPr algn="ctr"/>
-          </a:p>
-        </p:txBody>
-      </p:sp>
-      <p:sp>
-        <p:nvSpPr>
-          <p:cNvPr id="10" name="Rectangle 9"/>
-          <p:cNvSpPr/>
-          <p:nvPr/>
-        </p:nvSpPr>
-        <p:spPr>
-          <a:xfrm>
-            <a:off x="640080" y="2084832"/>
-            <a:ext cx="274320" cy="274320"/>
-          </a:xfrm>
-          <a:prstGeom prst="rect">
-            <a:avLst/>
-          </a:prstGeom>
-          <a:solidFill>
-            <a:srgbClr val="FFFFFF"/>
-          </a:solidFill>
-          <a:ln>
-            <a:solidFill>
-              <a:srgbClr val="333333"/>
-            </a:solidFill>
-          </a:ln>
-        </p:spPr>
-        <p:style>
-          <a:lnRef idx="1">
-            <a:schemeClr val="accent1"/>
-          </a:lnRef>
-          <a:fillRef idx="3">
-            <a:schemeClr val="accent1"/>
-          </a:fillRef>
-          <a:effectRef idx="2">
-            <a:schemeClr val="accent1"/>
-          </a:effectRef>
-          <a:fontRef idx="minor">
-            <a:schemeClr val="lt1"/>
-          </a:fontRef>
-        </p:style>
-        <p:txBody>
-          <a:bodyPr rtlCol="0" anchor="ctr"/>
-          <a:lstStyle/>
-          <a:p>
-            <a:pPr algn="ctr"/>
-          </a:p>
-        </p:txBody>
-      </p:sp>
-      <p:sp>
-        <p:nvSpPr>
-          <p:cNvPr id="11" name="Rectangle 10"/>
-          <p:cNvSpPr/>
-          <p:nvPr/>
-        </p:nvSpPr>
-        <p:spPr>
-          <a:xfrm>
-            <a:off x="640080" y="2084832"/>
-            <a:ext cx="73152" cy="274320"/>
-          </a:xfrm>
-          <a:prstGeom prst="rect">
-            <a:avLst/>
-          </a:prstGeom>
-          <a:solidFill>
-            <a:srgbClr val="269CCB"/>
-          </a:solidFill>
-          <a:ln>
-            <a:noFill/>
-          </a:ln>
-        </p:spPr>
-        <p:style>
-          <a:lnRef idx="1">
-            <a:schemeClr val="accent1"/>
-          </a:lnRef>
-          <a:fillRef idx="3">
-            <a:schemeClr val="accent1"/>
-          </a:fillRef>
-          <a:effectRef idx="2">
-            <a:schemeClr val="accent1"/>
-          </a:effectRef>
-          <a:fontRef idx="minor">
-            <a:schemeClr val="lt1"/>
-          </a:fontRef>
-        </p:style>
-        <p:txBody>
-          <a:bodyPr rtlCol="0" anchor="ctr"/>
-          <a:lstStyle/>
-          <a:p>
-            <a:pPr algn="ctr"/>
-          </a:p>
-        </p:txBody>
-      </p:sp>
-      <p:sp>
-        <p:nvSpPr>
-          <p:cNvPr id="12" name="TextBox 11"/>
-          <p:cNvSpPr txBox="1"/>
-          <p:nvPr/>
-        </p:nvSpPr>
-        <p:spPr>
-          <a:xfrm>
-            <a:off x="1097280" y="2029968"/>
-            <a:ext cx="10362895" cy="402336"/>
-          </a:xfrm>
-          <a:prstGeom prst="rect">
-            <a:avLst/>
-          </a:prstGeom>
-          <a:noFill/>
-        </p:spPr>
-        <p:txBody>
-          <a:bodyPr wrap="square" anchor="ctr"/>
-          <a:lstStyle/>
-          <a:p>
-            <a:r>
-              <a:rPr sz="1500" b="0" i="0">
-                <a:solidFill>
-                  <a:srgbClr val="333333"/>
-                </a:solidFill>
-                <a:latin typeface="Calibri"/>
-              </a:rPr>
-              <a:t>Si una prueba pasa cuando se corre sola pero falla cuando se corren todas, que estado esta sobreviviendo de un caso al siguiente y quien deberia limpiarlo?</a:t>
-            </a:r>
-          </a:p>
-        </p:txBody>
-      </p:sp>
-      <p:sp>
-        <p:nvSpPr>
-          <p:cNvPr id="13" name="Rounded Rectangle 12"/>
-          <p:cNvSpPr/>
-          <p:nvPr/>
-        </p:nvSpPr>
-        <p:spPr>
-          <a:xfrm>
-            <a:off x="457200" y="2615184"/>
-            <a:ext cx="11277295" cy="566928"/>
-          </a:xfrm>
-          <a:prstGeom prst="roundRect">
-            <a:avLst>
-              <a:gd name="adj" fmla="val 12000"/>
-            </a:avLst>
-          </a:prstGeom>
-          <a:solidFill>
-            <a:srgbClr val="F2F2F2"/>
-          </a:solidFill>
-          <a:ln>
-            <a:noFill/>
-          </a:ln>
-        </p:spPr>
-        <p:style>
-          <a:lnRef idx="1">
-            <a:schemeClr val="accent1"/>
-          </a:lnRef>
-          <a:fillRef idx="3">
-            <a:schemeClr val="accent1"/>
-          </a:fillRef>
-          <a:effectRef idx="2">
-            <a:schemeClr val="accent1"/>
-          </a:effectRef>
-          <a:fontRef idx="minor">
-            <a:schemeClr val="lt1"/>
-          </a:fontRef>
-        </p:style>
-        <p:txBody>
-          <a:bodyPr rtlCol="0" anchor="ctr"/>
-          <a:lstStyle/>
-          <a:p>
-            <a:pPr algn="ctr"/>
-          </a:p>
-        </p:txBody>
-      </p:sp>
-      <p:sp>
-        <p:nvSpPr>
-          <p:cNvPr id="14" name="Rectangle 13"/>
-          <p:cNvSpPr/>
-          <p:nvPr/>
-        </p:nvSpPr>
-        <p:spPr>
-          <a:xfrm>
-            <a:off x="640080" y="2761488"/>
-            <a:ext cx="274320" cy="274320"/>
-          </a:xfrm>
-          <a:prstGeom prst="rect">
-            <a:avLst/>
-          </a:prstGeom>
-          <a:solidFill>
-            <a:srgbClr val="FFFFFF"/>
-          </a:solidFill>
-          <a:ln>
-            <a:solidFill>
-              <a:srgbClr val="333333"/>
-            </a:solidFill>
-          </a:ln>
-        </p:spPr>
-        <p:style>
-          <a:lnRef idx="1">
-            <a:schemeClr val="accent1"/>
-          </a:lnRef>
-          <a:fillRef idx="3">
-            <a:schemeClr val="accent1"/>
-          </a:fillRef>
-          <a:effectRef idx="2">
-            <a:schemeClr val="accent1"/>
-          </a:effectRef>
-          <a:fontRef idx="minor">
-            <a:schemeClr val="lt1"/>
-          </a:fontRef>
-        </p:style>
-        <p:txBody>
-          <a:bodyPr rtlCol="0" anchor="ctr"/>
-          <a:lstStyle/>
-          <a:p>
-            <a:pPr algn="ctr"/>
-          </a:p>
-        </p:txBody>
-      </p:sp>
-      <p:sp>
-        <p:nvSpPr>
-          <p:cNvPr id="15" name="Rectangle 14"/>
-          <p:cNvSpPr/>
-          <p:nvPr/>
-        </p:nvSpPr>
-        <p:spPr>
-          <a:xfrm>
-            <a:off x="640080" y="2761488"/>
-            <a:ext cx="73152" cy="274320"/>
-          </a:xfrm>
-          <a:prstGeom prst="rect">
-            <a:avLst/>
-          </a:prstGeom>
-          <a:solidFill>
-            <a:srgbClr val="269CCB"/>
-          </a:solidFill>
-          <a:ln>
-            <a:noFill/>
-          </a:ln>
-        </p:spPr>
-        <p:style>
-          <a:lnRef idx="1">
-            <a:schemeClr val="accent1"/>
-          </a:lnRef>
-          <a:fillRef idx="3">
-            <a:schemeClr val="accent1"/>
-          </a:fillRef>
-          <a:effectRef idx="2">
-            <a:schemeClr val="accent1"/>
-          </a:effectRef>
-          <a:fontRef idx="minor">
-            <a:schemeClr val="lt1"/>
-          </a:fontRef>
-        </p:style>
-        <p:txBody>
-          <a:bodyPr rtlCol="0" anchor="ctr"/>
-          <a:lstStyle/>
-          <a:p>
-            <a:pPr algn="ctr"/>
-          </a:p>
-        </p:txBody>
-      </p:sp>
-      <p:sp>
-        <p:nvSpPr>
-          <p:cNvPr id="16" name="TextBox 15"/>
-          <p:cNvSpPr txBox="1"/>
-          <p:nvPr/>
-        </p:nvSpPr>
-        <p:spPr>
-          <a:xfrm>
-            <a:off x="1097280" y="2706624"/>
-            <a:ext cx="10362895" cy="402336"/>
-          </a:xfrm>
-          <a:prstGeom prst="rect">
-            <a:avLst/>
-          </a:prstGeom>
-          <a:noFill/>
-        </p:spPr>
-        <p:txBody>
-          <a:bodyPr wrap="square" anchor="ctr"/>
-          <a:lstStyle/>
-          <a:p>
-            <a:r>
-              <a:rPr sz="1500" b="0" i="0">
-                <a:solidFill>
-                  <a:srgbClr val="333333"/>
-                </a:solidFill>
-                <a:latin typeface="Calibri"/>
-              </a:rPr>
-              <a:t>Si para comprobar la regla usted necesita abrir la ventana y oprimir un boton, donde quedo escrita esa regla y donde deberia estar?</a:t>
-            </a:r>
-          </a:p>
-        </p:txBody>
-      </p:sp>
-      <p:sp>
-        <p:nvSpPr>
-          <p:cNvPr id="17" name="TextBox 16"/>
-          <p:cNvSpPr txBox="1"/>
-          <p:nvPr/>
-        </p:nvSpPr>
-        <p:spPr>
-          <a:xfrm>
-            <a:off x="11185855" y="6473952"/>
-            <a:ext cx="640080" cy="274320"/>
-          </a:xfrm>
-          <a:prstGeom prst="rect">
-            <a:avLst/>
-          </a:prstGeom>
-          <a:noFill/>
-        </p:spPr>
-        <p:txBody>
-          <a:bodyPr wrap="square">
-            <a:spAutoFit/>
-          </a:bodyPr>
-          <a:lstStyle/>
-          <a:p>
-            <a:pPr algn="r"/>
-            <a:r>
-              <a:rPr sz="1100" b="0" i="0">
-                <a:solidFill>
-                  <a:srgbClr val="666666"/>
-                </a:solidFill>
-                <a:latin typeface="Calibri"/>
-              </a:rPr>
-              <a:t>34</a:t>
-            </a:r>
-          </a:p>
-        </p:txBody>
-      </p:sp>
-    </p:spTree>
-  </p:cSld>
-  <p:clrMapOvr>
-    <a:masterClrMapping/>
-  </p:clrMapOvr>
-</p:sld>
-</file>
-
-<file path=ppt/slides/slide35.xml><?xml version="1.0" encoding="utf-8"?>
-<p:sld xmlns:a="http://schemas.openxmlformats.org/drawingml/2006/main" xmlns:p="http://schemas.openxmlformats.org/presentationml/2006/main" xmlns:r="http://schemas.openxmlformats.org/officeDocument/2006/relationships">
-  <p:cSld>
-    <p:bg>
-      <p:bgPr>
-        <a:solidFill>
-          <a:srgbClr val="FFFFFF"/>
-        </a:solidFill>
-        <a:effectLst/>
-      </p:bgPr>
-    </p:bg>
-    <p:spTree>
-      <p:nvGrpSpPr>
-        <p:cNvPr id="1" name=""/>
-        <p:cNvGrpSpPr/>
-        <p:nvPr/>
-      </p:nvGrpSpPr>
-      <p:grpSpPr/>
-      <p:sp>
-        <p:nvSpPr>
-          <p:cNvPr id="2" name="Rectangle 1"/>
-          <p:cNvSpPr/>
-          <p:nvPr/>
-        </p:nvSpPr>
-        <p:spPr>
-          <a:xfrm>
-            <a:off x="0" y="0"/>
-            <a:ext cx="12191695" cy="960120"/>
-          </a:xfrm>
-          <a:prstGeom prst="rect">
-            <a:avLst/>
-          </a:prstGeom>
-          <a:solidFill>
-            <a:srgbClr val="095292"/>
-          </a:solidFill>
-          <a:ln>
-            <a:noFill/>
-          </a:ln>
-        </p:spPr>
-        <p:style>
-          <a:lnRef idx="1">
-            <a:schemeClr val="accent1"/>
-          </a:lnRef>
-          <a:fillRef idx="3">
-            <a:schemeClr val="accent1"/>
-          </a:fillRef>
-          <a:effectRef idx="2">
-            <a:schemeClr val="accent1"/>
-          </a:effectRef>
-          <a:fontRef idx="minor">
-            <a:schemeClr val="lt1"/>
-          </a:fontRef>
-        </p:style>
-        <p:txBody>
-          <a:bodyPr rtlCol="0" anchor="ctr"/>
-          <a:lstStyle/>
-          <a:p>
-            <a:pPr algn="ctr"/>
-          </a:p>
-        </p:txBody>
-      </p:sp>
-      <p:sp>
-        <p:nvSpPr>
-          <p:cNvPr id="3" name="Rectangle 2"/>
-          <p:cNvSpPr/>
-          <p:nvPr/>
-        </p:nvSpPr>
-        <p:spPr>
-          <a:xfrm>
-            <a:off x="0" y="960120"/>
-            <a:ext cx="12191695" cy="41148"/>
-          </a:xfrm>
-          <a:prstGeom prst="rect">
-            <a:avLst/>
-          </a:prstGeom>
-          <a:solidFill>
-            <a:srgbClr val="FFD000"/>
-          </a:solidFill>
-          <a:ln>
-            <a:noFill/>
-          </a:ln>
-        </p:spPr>
-        <p:style>
-          <a:lnRef idx="1">
-            <a:schemeClr val="accent1"/>
-          </a:lnRef>
-          <a:fillRef idx="3">
-            <a:schemeClr val="accent1"/>
-          </a:fillRef>
-          <a:effectRef idx="2">
-            <a:schemeClr val="accent1"/>
-          </a:effectRef>
-          <a:fontRef idx="minor">
-            <a:schemeClr val="lt1"/>
-          </a:fontRef>
-        </p:style>
-        <p:txBody>
-          <a:bodyPr rtlCol="0" anchor="ctr"/>
-          <a:lstStyle/>
-          <a:p>
-            <a:pPr algn="ctr"/>
-          </a:p>
-        </p:txBody>
-      </p:sp>
-      <p:sp>
-        <p:nvSpPr>
-          <p:cNvPr id="4" name="TextBox 3"/>
-          <p:cNvSpPr txBox="1"/>
-          <p:nvPr/>
-        </p:nvSpPr>
-        <p:spPr>
-          <a:xfrm>
-            <a:off x="457200" y="164592"/>
-            <a:ext cx="11277295" cy="502920"/>
-          </a:xfrm>
-          <a:prstGeom prst="rect">
-            <a:avLst/>
-          </a:prstGeom>
-          <a:noFill/>
-        </p:spPr>
-        <p:txBody>
-          <a:bodyPr wrap="square">
-            <a:spAutoFit/>
-          </a:bodyPr>
-          <a:lstStyle/>
-          <a:p>
-            <a:r>
-              <a:rPr sz="2600" b="1" i="0">
-                <a:solidFill>
-                  <a:srgbClr val="FFFFFF"/>
-                </a:solidFill>
-                <a:latin typeface="Calibri"/>
-              </a:rPr>
-              <a:t>Criterios de exito / entregable</a:t>
-            </a:r>
-          </a:p>
-        </p:txBody>
-      </p:sp>
-      <p:sp>
-        <p:nvSpPr>
-          <p:cNvPr id="5" name="TextBox 4"/>
-          <p:cNvSpPr txBox="1"/>
-          <p:nvPr/>
-        </p:nvSpPr>
-        <p:spPr>
-          <a:xfrm>
-            <a:off x="457200" y="1170432"/>
-            <a:ext cx="11277295" cy="5230368"/>
-          </a:xfrm>
-          <a:prstGeom prst="rect">
-            <a:avLst/>
-          </a:prstGeom>
-          <a:noFill/>
-        </p:spPr>
-        <p:txBody>
-          <a:bodyPr wrap="square">
-            <a:spAutoFit/>
-          </a:bodyPr>
-          <a:lstStyle/>
-          <a:p>
-            <a:pPr>
-              <a:spcAft>
-                <a:spcPts val="800"/>
-              </a:spcAft>
-            </a:pPr>
-            <a:r>
-              <a:rPr sz="2000" b="0" i="0">
-                <a:solidFill>
-                  <a:srgbClr val="333333"/>
-                </a:solidFill>
-                <a:latin typeface="Calibri"/>
-              </a:rPr>
-              <a:t>–   </a:t>
-            </a:r>
-            <a:r>
-              <a:rPr sz="2000" b="1" i="0">
-                <a:solidFill>
-                  <a:srgbClr val="333333"/>
-                </a:solidFill>
-                <a:latin typeface="Calibri"/>
-              </a:rPr>
-              <a:t>Entregable:</a:t>
-            </a:r>
-            <a:r>
-              <a:rPr sz="2000" b="0" i="0">
-                <a:solidFill>
-                  <a:srgbClr val="333333"/>
-                </a:solidFill>
-                <a:latin typeface="Calibri"/>
-              </a:rPr>
-              <a:t> Mascota, Cita y AgendaService con Javadoc completo, la carpeta HTML generada y una clase de pruebas con cuatro casos, subidos a la plataforma del curso.</a:t>
-            </a:r>
-          </a:p>
-          <a:p>
-            <a:pPr>
-              <a:spcAft>
-                <a:spcPts val="800"/>
-              </a:spcAft>
-            </a:pPr>
-            <a:r>
-              <a:rPr sz="2000" b="0" i="0">
-                <a:solidFill>
-                  <a:srgbClr val="333333"/>
-                </a:solidFill>
-                <a:latin typeface="Calibri"/>
-              </a:rPr>
-              <a:t>–   </a:t>
-            </a:r>
-            <a:r>
-              <a:rPr sz="2000" b="1" i="0">
-                <a:solidFill>
-                  <a:srgbClr val="333333"/>
-                </a:solidFill>
-                <a:latin typeface="Calibri"/>
-              </a:rPr>
-              <a:t>Exito:</a:t>
-            </a:r>
-            <a:r>
-              <a:rPr sz="2000" b="0" i="0">
-                <a:solidFill>
-                  <a:srgbClr val="333333"/>
-                </a:solidFill>
-                <a:latin typeface="Calibri"/>
-              </a:rPr>
-              <a:t> El Javadoc de agendar incluye @param de los dos parametros, @return y al menos dos @throws, y la regla de la mascota inactiva queda escrita en palabras.</a:t>
-            </a:r>
-          </a:p>
-          <a:p>
-            <a:pPr>
-              <a:spcAft>
-                <a:spcPts val="800"/>
-              </a:spcAft>
-            </a:pPr>
-            <a:r>
-              <a:rPr sz="2000" b="0" i="0">
-                <a:solidFill>
-                  <a:srgbClr val="333333"/>
-                </a:solidFill>
-                <a:latin typeface="Calibri"/>
-              </a:rPr>
-              <a:t>–   </a:t>
-            </a:r>
-            <a:r>
-              <a:rPr sz="2000" b="1" i="0">
-                <a:solidFill>
-                  <a:srgbClr val="333333"/>
-                </a:solidFill>
-                <a:latin typeface="Calibri"/>
-              </a:rPr>
-              <a:t>Exito:</a:t>
-            </a:r>
-            <a:r>
-              <a:rPr sz="2000" b="0" i="0">
-                <a:solidFill>
-                  <a:srgbClr val="333333"/>
-                </a:solidFill>
-                <a:latin typeface="Calibri"/>
-              </a:rPr>
-              <a:t> La documentacion HTML se genera sin errores y en la ficha de AgendaService se lee el resumen de cada metodo publico.</a:t>
-            </a:r>
-          </a:p>
-          <a:p>
-            <a:pPr>
-              <a:spcAft>
-                <a:spcPts val="800"/>
-              </a:spcAft>
-            </a:pPr>
-            <a:r>
-              <a:rPr sz="2000" b="0" i="0">
-                <a:solidFill>
-                  <a:srgbClr val="333333"/>
-                </a:solidFill>
-                <a:latin typeface="Calibri"/>
-              </a:rPr>
-              <a:t>–   </a:t>
-            </a:r>
-            <a:r>
-              <a:rPr sz="2000" b="1" i="0">
-                <a:solidFill>
-                  <a:srgbClr val="333333"/>
-                </a:solidFill>
-                <a:latin typeface="Calibri"/>
-              </a:rPr>
-              <a:t>Exito:</a:t>
-            </a:r>
-            <a:r>
-              <a:rPr sz="2000" b="0" i="0">
-                <a:solidFill>
-                  <a:srgbClr val="333333"/>
-                </a:solidFill>
-                <a:latin typeface="Calibri"/>
-              </a:rPr>
-              <a:t> Existen cuatro casos de prueba con nombres que describen escenario y resultado esperado, y cada uno funciona sin depender de los otros.</a:t>
-            </a:r>
-          </a:p>
-          <a:p>
-            <a:pPr>
-              <a:spcAft>
-                <a:spcPts val="800"/>
-              </a:spcAft>
-            </a:pPr>
-            <a:r>
-              <a:rPr sz="2000" b="0" i="0">
-                <a:solidFill>
-                  <a:srgbClr val="333333"/>
-                </a:solidFill>
-                <a:latin typeface="Calibri"/>
-              </a:rPr>
-              <a:t>–   </a:t>
-            </a:r>
-            <a:r>
-              <a:rPr sz="2000" b="1" i="0">
-                <a:solidFill>
-                  <a:srgbClr val="333333"/>
-                </a:solidFill>
-                <a:latin typeface="Calibri"/>
-              </a:rPr>
-              <a:t>Exito:</a:t>
-            </a:r>
-            <a:r>
-              <a:rPr sz="2000" b="0" i="0">
-                <a:solidFill>
-                  <a:srgbClr val="333333"/>
-                </a:solidFill>
-                <a:latin typeface="Calibri"/>
-              </a:rPr>
-              <a:t> Al comentar la validacion de mascota inactiva la prueba correspondiente falla, y al restaurarla vuelve a pasar (evidencia de rojo y de verde).</a:t>
-            </a:r>
-          </a:p>
-          <a:p>
-            <a:pPr>
-              <a:spcAft>
-                <a:spcPts val="800"/>
-              </a:spcAft>
-            </a:pPr>
-            <a:r>
-              <a:rPr sz="2000" b="0" i="0">
-                <a:solidFill>
-                  <a:srgbClr val="333333"/>
-                </a:solidFill>
-                <a:latin typeface="Calibri"/>
-              </a:rPr>
-              <a:t>–   </a:t>
-            </a:r>
-            <a:r>
-              <a:rPr sz="2000" b="1" i="0">
-                <a:solidFill>
-                  <a:srgbClr val="333333"/>
-                </a:solidFill>
-                <a:latin typeface="Calibri"/>
-              </a:rPr>
-              <a:t>Entrega en la plataforma del curso</a:t>
-            </a:r>
-            <a:r>
-              <a:rPr sz="2000" b="0" i="0">
-                <a:solidFill>
-                  <a:srgbClr val="333333"/>
-                </a:solidFill>
-                <a:latin typeface="Calibri"/>
-              </a:rPr>
-              <a:t> — en la fecha que indique el docente.</a:t>
-            </a:r>
-          </a:p>
-        </p:txBody>
-      </p:sp>
-      <p:sp>
-        <p:nvSpPr>
-          <p:cNvPr id="6" name="TextBox 5"/>
-          <p:cNvSpPr txBox="1"/>
-          <p:nvPr/>
-        </p:nvSpPr>
-        <p:spPr>
-          <a:xfrm>
-            <a:off x="11185855" y="6473952"/>
-            <a:ext cx="640080" cy="274320"/>
-          </a:xfrm>
-          <a:prstGeom prst="rect">
-            <a:avLst/>
-          </a:prstGeom>
-          <a:noFill/>
-        </p:spPr>
-        <p:txBody>
-          <a:bodyPr wrap="square">
-            <a:spAutoFit/>
-          </a:bodyPr>
-          <a:lstStyle/>
-          <a:p>
-            <a:pPr algn="r"/>
-            <a:r>
-              <a:rPr sz="1100" b="0" i="0">
-                <a:solidFill>
-                  <a:srgbClr val="666666"/>
-                </a:solidFill>
-                <a:latin typeface="Calibri"/>
-              </a:rPr>
-              <a:t>35</a:t>
-            </a:r>
-          </a:p>
-        </p:txBody>
-      </p:sp>
-    </p:spTree>
-  </p:cSld>
-  <p:clrMapOvr>
-    <a:masterClrMapping/>
-  </p:clrMapOvr>
-</p:sld>
-</file>
-
-<file path=ppt/slides/slide36.xml><?xml version="1.0" encoding="utf-8"?>
-<p:sld xmlns:a="http://schemas.openxmlformats.org/drawingml/2006/main" xmlns:p="http://schemas.openxmlformats.org/presentationml/2006/main" xmlns:r="http://schemas.openxmlformats.org/officeDocument/2006/relationships">
-  <p:cSld>
-    <p:bg>
-      <p:bgPr>
-        <a:solidFill>
-          <a:srgbClr val="FFFFFF"/>
-        </a:solidFill>
-        <a:effectLst/>
-      </p:bgPr>
-    </p:bg>
-    <p:spTree>
-      <p:nvGrpSpPr>
-        <p:cNvPr id="1" name=""/>
-        <p:cNvGrpSpPr/>
-        <p:nvPr/>
-      </p:nvGrpSpPr>
-      <p:grpSpPr/>
-      <p:sp>
-        <p:nvSpPr>
-          <p:cNvPr id="2" name="Rectangle 1"/>
-          <p:cNvSpPr/>
-          <p:nvPr/>
-        </p:nvSpPr>
-        <p:spPr>
-          <a:xfrm>
-            <a:off x="0" y="0"/>
-            <a:ext cx="12191695" cy="960120"/>
-          </a:xfrm>
-          <a:prstGeom prst="rect">
-            <a:avLst/>
-          </a:prstGeom>
-          <a:solidFill>
-            <a:srgbClr val="095292"/>
-          </a:solidFill>
-          <a:ln>
-            <a:noFill/>
-          </a:ln>
-        </p:spPr>
-        <p:style>
-          <a:lnRef idx="1">
-            <a:schemeClr val="accent1"/>
-          </a:lnRef>
-          <a:fillRef idx="3">
-            <a:schemeClr val="accent1"/>
-          </a:fillRef>
-          <a:effectRef idx="2">
-            <a:schemeClr val="accent1"/>
-          </a:effectRef>
-          <a:fontRef idx="minor">
-            <a:schemeClr val="lt1"/>
-          </a:fontRef>
-        </p:style>
-        <p:txBody>
-          <a:bodyPr rtlCol="0" anchor="ctr"/>
-          <a:lstStyle/>
-          <a:p>
-            <a:pPr algn="ctr"/>
-          </a:p>
-        </p:txBody>
-      </p:sp>
-      <p:sp>
-        <p:nvSpPr>
-          <p:cNvPr id="3" name="Rectangle 2"/>
-          <p:cNvSpPr/>
-          <p:nvPr/>
-        </p:nvSpPr>
-        <p:spPr>
-          <a:xfrm>
-            <a:off x="0" y="960120"/>
-            <a:ext cx="12191695" cy="41148"/>
-          </a:xfrm>
-          <a:prstGeom prst="rect">
-            <a:avLst/>
-          </a:prstGeom>
-          <a:solidFill>
-            <a:srgbClr val="FFD000"/>
-          </a:solidFill>
-          <a:ln>
-            <a:noFill/>
-          </a:ln>
-        </p:spPr>
-        <p:style>
-          <a:lnRef idx="1">
-            <a:schemeClr val="accent1"/>
-          </a:lnRef>
-          <a:fillRef idx="3">
-            <a:schemeClr val="accent1"/>
-          </a:fillRef>
-          <a:effectRef idx="2">
-            <a:schemeClr val="accent1"/>
-          </a:effectRef>
-          <a:fontRef idx="minor">
-            <a:schemeClr val="lt1"/>
-          </a:fontRef>
-        </p:style>
-        <p:txBody>
-          <a:bodyPr rtlCol="0" anchor="ctr"/>
-          <a:lstStyle/>
-          <a:p>
-            <a:pPr algn="ctr"/>
-          </a:p>
-        </p:txBody>
-      </p:sp>
-      <p:sp>
-        <p:nvSpPr>
-          <p:cNvPr id="4" name="TextBox 3"/>
-          <p:cNvSpPr txBox="1"/>
-          <p:nvPr/>
-        </p:nvSpPr>
-        <p:spPr>
-          <a:xfrm>
-            <a:off x="457200" y="164592"/>
-            <a:ext cx="11277295" cy="502920"/>
-          </a:xfrm>
-          <a:prstGeom prst="rect">
-            <a:avLst/>
-          </a:prstGeom>
-          <a:noFill/>
-        </p:spPr>
-        <p:txBody>
-          <a:bodyPr wrap="square">
-            <a:spAutoFit/>
-          </a:bodyPr>
-          <a:lstStyle/>
-          <a:p>
-            <a:r>
-              <a:rPr sz="2600" b="1" i="0">
-                <a:solidFill>
-                  <a:srgbClr val="FFFFFF"/>
-                </a:solidFill>
-                <a:latin typeface="Calibri"/>
-              </a:rPr>
-              <a:t>Para el PI esta semana</a:t>
-            </a:r>
-          </a:p>
-        </p:txBody>
-      </p:sp>
-      <p:sp>
-        <p:nvSpPr>
-          <p:cNvPr id="5" name="Rounded Rectangle 4"/>
-          <p:cNvSpPr/>
-          <p:nvPr/>
-        </p:nvSpPr>
-        <p:spPr>
-          <a:xfrm>
-            <a:off x="457200" y="1261872"/>
-            <a:ext cx="11277295" cy="1051560"/>
-          </a:xfrm>
-          <a:prstGeom prst="roundRect">
-            <a:avLst>
-              <a:gd name="adj" fmla="val 12000"/>
-            </a:avLst>
-          </a:prstGeom>
-          <a:solidFill>
-            <a:srgbClr val="E8F4FA"/>
-          </a:solidFill>
-          <a:ln>
-            <a:noFill/>
-          </a:ln>
-        </p:spPr>
-        <p:style>
-          <a:lnRef idx="1">
-            <a:schemeClr val="accent1"/>
-          </a:lnRef>
-          <a:fillRef idx="3">
-            <a:schemeClr val="accent1"/>
-          </a:fillRef>
-          <a:effectRef idx="2">
-            <a:schemeClr val="accent1"/>
-          </a:effectRef>
-          <a:fontRef idx="minor">
-            <a:schemeClr val="lt1"/>
-          </a:fontRef>
-        </p:style>
-        <p:txBody>
-          <a:bodyPr rtlCol="0" anchor="ctr"/>
-          <a:lstStyle/>
-          <a:p>
-            <a:pPr algn="ctr"/>
-          </a:p>
-        </p:txBody>
-      </p:sp>
-      <p:sp>
-        <p:nvSpPr>
-          <p:cNvPr id="6" name="Rectangle 5"/>
-          <p:cNvSpPr/>
-          <p:nvPr/>
-        </p:nvSpPr>
-        <p:spPr>
-          <a:xfrm>
-            <a:off x="457200" y="1261872"/>
-            <a:ext cx="128016" cy="1051560"/>
-          </a:xfrm>
-          <a:prstGeom prst="rect">
-            <a:avLst/>
-          </a:prstGeom>
-          <a:solidFill>
-            <a:srgbClr val="269CCB"/>
-          </a:solidFill>
-          <a:ln>
-            <a:noFill/>
-          </a:ln>
-        </p:spPr>
-        <p:style>
-          <a:lnRef idx="1">
-            <a:schemeClr val="accent1"/>
-          </a:lnRef>
-          <a:fillRef idx="3">
-            <a:schemeClr val="accent1"/>
-          </a:fillRef>
-          <a:effectRef idx="2">
-            <a:schemeClr val="accent1"/>
-          </a:effectRef>
-          <a:fontRef idx="minor">
-            <a:schemeClr val="lt1"/>
-          </a:fontRef>
-        </p:style>
-        <p:txBody>
-          <a:bodyPr rtlCol="0" anchor="ctr"/>
-          <a:lstStyle/>
-          <a:p>
-            <a:pPr algn="ctr"/>
-          </a:p>
-        </p:txBody>
-      </p:sp>
-      <p:sp>
-        <p:nvSpPr>
-          <p:cNvPr id="7" name="TextBox 6"/>
-          <p:cNvSpPr txBox="1"/>
-          <p:nvPr/>
-        </p:nvSpPr>
-        <p:spPr>
-          <a:xfrm>
-            <a:off x="777240" y="1399031"/>
-            <a:ext cx="10774375" cy="822959"/>
-          </a:xfrm>
-          <a:prstGeom prst="rect">
-            <a:avLst/>
-          </a:prstGeom>
-          <a:noFill/>
-        </p:spPr>
-        <p:txBody>
-          <a:bodyPr wrap="square">
-            <a:spAutoFit/>
-          </a:bodyPr>
-          <a:lstStyle/>
-          <a:p>
-            <a:r>
-              <a:rPr sz="1200" b="1" i="0">
-                <a:solidFill>
-                  <a:srgbClr val="269CCB"/>
-                </a:solidFill>
-                <a:latin typeface="Calibri"/>
-              </a:rPr>
-              <a:t>Info</a:t>
-            </a:r>
-          </a:p>
-          <a:p>
-            <a:pPr>
-              <a:spcBef>
-                <a:spcPts val="400"/>
-              </a:spcBef>
-            </a:pPr>
-            <a:r>
-              <a:rPr sz="1400" b="0" i="0">
-                <a:solidFill>
-                  <a:srgbClr val="333333"/>
-                </a:solidFill>
-                <a:latin typeface="Calibri"/>
-              </a:rPr>
-              <a:t>Hito: Las clases del dominio de VetCare quedan documentadas con Javadoc y la regla 'mascota inactiva no agenda' queda respaldada por pruebas que se ejecutan solas.</a:t>
-            </a:r>
-          </a:p>
-        </p:txBody>
-      </p:sp>
-      <p:sp>
-        <p:nvSpPr>
-          <p:cNvPr id="8" name="Rounded Rectangle 7"/>
-          <p:cNvSpPr/>
-          <p:nvPr/>
-        </p:nvSpPr>
-        <p:spPr>
-          <a:xfrm>
-            <a:off x="457200" y="2478024"/>
-            <a:ext cx="11277295" cy="1051560"/>
-          </a:xfrm>
-          <a:prstGeom prst="roundRect">
-            <a:avLst>
-              <a:gd name="adj" fmla="val 12000"/>
-            </a:avLst>
-          </a:prstGeom>
-          <a:solidFill>
-            <a:srgbClr val="FFF8E1"/>
-          </a:solidFill>
-          <a:ln>
-            <a:noFill/>
-          </a:ln>
-        </p:spPr>
-        <p:style>
-          <a:lnRef idx="1">
-            <a:schemeClr val="accent1"/>
-          </a:lnRef>
-          <a:fillRef idx="3">
-            <a:schemeClr val="accent1"/>
-          </a:fillRef>
-          <a:effectRef idx="2">
-            <a:schemeClr val="accent1"/>
-          </a:effectRef>
-          <a:fontRef idx="minor">
-            <a:schemeClr val="lt1"/>
-          </a:fontRef>
-        </p:style>
-        <p:txBody>
-          <a:bodyPr rtlCol="0" anchor="ctr"/>
-          <a:lstStyle/>
-          <a:p>
-            <a:pPr algn="ctr"/>
-          </a:p>
-        </p:txBody>
-      </p:sp>
-      <p:sp>
-        <p:nvSpPr>
-          <p:cNvPr id="9" name="Rectangle 8"/>
-          <p:cNvSpPr/>
-          <p:nvPr/>
-        </p:nvSpPr>
-        <p:spPr>
-          <a:xfrm>
-            <a:off x="457200" y="2478024"/>
-            <a:ext cx="128016" cy="1051560"/>
-          </a:xfrm>
-          <a:prstGeom prst="rect">
-            <a:avLst/>
-          </a:prstGeom>
-          <a:solidFill>
-            <a:srgbClr val="FFD000"/>
-          </a:solidFill>
-          <a:ln>
-            <a:noFill/>
-          </a:ln>
-        </p:spPr>
-        <p:style>
-          <a:lnRef idx="1">
-            <a:schemeClr val="accent1"/>
-          </a:lnRef>
-          <a:fillRef idx="3">
-            <a:schemeClr val="accent1"/>
-          </a:fillRef>
-          <a:effectRef idx="2">
-            <a:schemeClr val="accent1"/>
-          </a:effectRef>
-          <a:fontRef idx="minor">
-            <a:schemeClr val="lt1"/>
-          </a:fontRef>
-        </p:style>
-        <p:txBody>
-          <a:bodyPr rtlCol="0" anchor="ctr"/>
-          <a:lstStyle/>
-          <a:p>
-            <a:pPr algn="ctr"/>
-          </a:p>
-        </p:txBody>
-      </p:sp>
-      <p:sp>
-        <p:nvSpPr>
-          <p:cNvPr id="10" name="TextBox 9"/>
-          <p:cNvSpPr txBox="1"/>
-          <p:nvPr/>
-        </p:nvSpPr>
-        <p:spPr>
-          <a:xfrm>
-            <a:off x="777240" y="2615184"/>
-            <a:ext cx="10774375" cy="822959"/>
-          </a:xfrm>
-          <a:prstGeom prst="rect">
-            <a:avLst/>
-          </a:prstGeom>
-          <a:noFill/>
-        </p:spPr>
-        <p:txBody>
-          <a:bodyPr wrap="square">
-            <a:spAutoFit/>
-          </a:bodyPr>
-          <a:lstStyle/>
-          <a:p>
-            <a:r>
-              <a:rPr sz="1200" b="1" i="0">
-                <a:solidFill>
-                  <a:srgbClr val="FFD000"/>
-                </a:solidFill>
-                <a:latin typeface="Calibri"/>
-              </a:rPr>
-              <a:t>Aclaración</a:t>
-            </a:r>
-          </a:p>
-          <a:p>
-            <a:pPr>
-              <a:spcBef>
-                <a:spcPts val="400"/>
-              </a:spcBef>
-            </a:pPr>
-            <a:r>
-              <a:rPr sz="1400" b="0" i="0">
-                <a:solidFill>
-                  <a:srgbClr val="333333"/>
-                </a:solidFill>
-                <a:latin typeface="Calibri"/>
-              </a:rPr>
-              <a:t>Enunciado completo: Clases/Proyecto Integrador/ (VetCare).</a:t>
-            </a:r>
-          </a:p>
-        </p:txBody>
-      </p:sp>
-      <p:sp>
-        <p:nvSpPr>
-          <p:cNvPr id="11" name="Rounded Rectangle 10"/>
-          <p:cNvSpPr/>
-          <p:nvPr/>
-        </p:nvSpPr>
-        <p:spPr>
-          <a:xfrm>
-            <a:off x="457200" y="3694176"/>
-            <a:ext cx="11277295" cy="1051560"/>
-          </a:xfrm>
-          <a:prstGeom prst="roundRect">
-            <a:avLst>
-              <a:gd name="adj" fmla="val 12000"/>
-            </a:avLst>
-          </a:prstGeom>
-          <a:solidFill>
-            <a:srgbClr val="FBE4E4"/>
-          </a:solidFill>
-          <a:ln>
-            <a:noFill/>
-          </a:ln>
-        </p:spPr>
-        <p:style>
-          <a:lnRef idx="1">
-            <a:schemeClr val="accent1"/>
-          </a:lnRef>
-          <a:fillRef idx="3">
-            <a:schemeClr val="accent1"/>
-          </a:fillRef>
-          <a:effectRef idx="2">
-            <a:schemeClr val="accent1"/>
-          </a:effectRef>
-          <a:fontRef idx="minor">
-            <a:schemeClr val="lt1"/>
-          </a:fontRef>
-        </p:style>
-        <p:txBody>
-          <a:bodyPr rtlCol="0" anchor="ctr"/>
-          <a:lstStyle/>
-          <a:p>
-            <a:pPr algn="ctr"/>
-          </a:p>
-        </p:txBody>
-      </p:sp>
-      <p:sp>
-        <p:nvSpPr>
-          <p:cNvPr id="12" name="Rectangle 11"/>
-          <p:cNvSpPr/>
-          <p:nvPr/>
-        </p:nvSpPr>
-        <p:spPr>
-          <a:xfrm>
-            <a:off x="457200" y="3694176"/>
-            <a:ext cx="128016" cy="1051560"/>
-          </a:xfrm>
-          <a:prstGeom prst="rect">
-            <a:avLst/>
-          </a:prstGeom>
-          <a:solidFill>
-            <a:srgbClr val="A02030"/>
-          </a:solidFill>
-          <a:ln>
-            <a:noFill/>
-          </a:ln>
-        </p:spPr>
-        <p:style>
-          <a:lnRef idx="1">
-            <a:schemeClr val="accent1"/>
-          </a:lnRef>
-          <a:fillRef idx="3">
-            <a:schemeClr val="accent1"/>
-          </a:fillRef>
-          <a:effectRef idx="2">
-            <a:schemeClr val="accent1"/>
-          </a:effectRef>
-          <a:fontRef idx="minor">
-            <a:schemeClr val="lt1"/>
-          </a:fontRef>
-        </p:style>
-        <p:txBody>
-          <a:bodyPr rtlCol="0" anchor="ctr"/>
-          <a:lstStyle/>
-          <a:p>
-            <a:pPr algn="ctr"/>
-          </a:p>
-        </p:txBody>
-      </p:sp>
-      <p:sp>
-        <p:nvSpPr>
-          <p:cNvPr id="13" name="TextBox 12"/>
-          <p:cNvSpPr txBox="1"/>
-          <p:nvPr/>
-        </p:nvSpPr>
-        <p:spPr>
-          <a:xfrm>
-            <a:off x="777240" y="3831336"/>
-            <a:ext cx="10774375" cy="822959"/>
-          </a:xfrm>
-          <a:prstGeom prst="rect">
-            <a:avLst/>
-          </a:prstGeom>
-          <a:noFill/>
-        </p:spPr>
-        <p:txBody>
-          <a:bodyPr wrap="square">
-            <a:spAutoFit/>
-          </a:bodyPr>
-          <a:lstStyle/>
-          <a:p>
-            <a:r>
-              <a:rPr sz="1200" b="1" i="0">
-                <a:solidFill>
-                  <a:srgbClr val="A02030"/>
-                </a:solidFill>
-                <a:latin typeface="Calibri"/>
-              </a:rPr>
-              <a:t>Atención</a:t>
-            </a:r>
-          </a:p>
-          <a:p>
-            <a:pPr>
-              <a:spcBef>
-                <a:spcPts val="400"/>
-              </a:spcBef>
-            </a:pPr>
-            <a:r>
-              <a:rPr sz="1400" b="0" i="0">
-                <a:solidFill>
-                  <a:srgbClr val="333333"/>
-                </a:solidFill>
-                <a:latin typeface="Calibri"/>
-              </a:rPr>
-              <a:t>Entrega del taller, si el docente lo asigna · en la fecha que indique el docente.</a:t>
-            </a:r>
-          </a:p>
-        </p:txBody>
-      </p:sp>
-      <p:sp>
-        <p:nvSpPr>
-          <p:cNvPr id="14" name="TextBox 13"/>
-          <p:cNvSpPr txBox="1"/>
-          <p:nvPr/>
-        </p:nvSpPr>
-        <p:spPr>
-          <a:xfrm>
-            <a:off x="11185855" y="6473952"/>
-            <a:ext cx="640080" cy="274320"/>
-          </a:xfrm>
-          <a:prstGeom prst="rect">
-            <a:avLst/>
-          </a:prstGeom>
-          <a:noFill/>
-        </p:spPr>
-        <p:txBody>
-          <a:bodyPr wrap="square">
-            <a:spAutoFit/>
-          </a:bodyPr>
-          <a:lstStyle/>
-          <a:p>
-            <a:pPr algn="r"/>
-            <a:r>
-              <a:rPr sz="1100" b="0" i="0">
-                <a:solidFill>
-                  <a:srgbClr val="666666"/>
-                </a:solidFill>
-                <a:latin typeface="Calibri"/>
-              </a:rPr>
-              <a:t>36</a:t>
-            </a:r>
-          </a:p>
-        </p:txBody>
-      </p:sp>
-    </p:spTree>
-  </p:cSld>
-  <p:clrMapOvr>
-    <a:masterClrMapping/>
-  </p:clrMapOvr>
-</p:sld>
-</file>
-
-<file path=ppt/slides/slide37.xml><?xml version="1.0" encoding="utf-8"?>
-<p:sld xmlns:a="http://schemas.openxmlformats.org/drawingml/2006/main" xmlns:p="http://schemas.openxmlformats.org/presentationml/2006/main" xmlns:r="http://schemas.openxmlformats.org/officeDocument/2006/relationships">
-  <p:cSld>
-    <p:bg>
-      <p:bgPr>
-        <a:solidFill>
-          <a:srgbClr val="FFFFFF"/>
-        </a:solidFill>
-        <a:effectLst/>
-      </p:bgPr>
-    </p:bg>
-    <p:spTree>
-      <p:nvGrpSpPr>
-        <p:cNvPr id="1" name=""/>
-        <p:cNvGrpSpPr/>
-        <p:nvPr/>
-      </p:nvGrpSpPr>
-      <p:grpSpPr/>
-      <p:sp>
-        <p:nvSpPr>
-          <p:cNvPr id="2" name="Rectangle 1"/>
-          <p:cNvSpPr/>
-          <p:nvPr/>
-        </p:nvSpPr>
-        <p:spPr>
-          <a:xfrm>
-            <a:off x="0" y="0"/>
             <a:ext cx="12191695" cy="164592"/>
           </a:xfrm>
           <a:prstGeom prst="rect">
@@ -18944,7 +16329,7 @@
                 </a:solidFill>
                 <a:latin typeface="Calibri"/>
               </a:rPr>
-              <a:t>Clase 8 · VetCare avanza</a:t>
+              <a:t>Clase 8 · Documentacion y QA · Javadoc y pruebas</a:t>
             </a:r>
           </a:p>
         </p:txBody>
@@ -18983,7 +16368,7 @@
                 </a:solidFill>
                 <a:latin typeface="Calibri"/>
               </a:rPr>
-              <a:t>Las clases del dominio de VetCare quedan documentadas con Javadoc y la regla 'mascota inactiva no agenda' queda respaldada por pruebas que se ejecutan solas.</a:t>
+              <a:t>Codigo que se explica solo y que se puede comprobar</a:t>
             </a:r>
           </a:p>
           <a:p>
@@ -18999,7 +16384,7 @@
                 </a:solidFill>
                 <a:latin typeface="Calibri"/>
               </a:rPr>
-              <a:t>Entregable: Mascota, Cita y AgendaService con Javadoc completo, la carpeta HTML generada y una clase de pruebas con cuatro casos, subidos a la plataforma del curso.</a:t>
+              <a:t>Repasa las laminas de concepto y el codigo de la demo</a:t>
             </a:r>
           </a:p>
           <a:p>
@@ -19015,7 +16400,7 @@
                 </a:solidFill>
                 <a:latin typeface="Calibri"/>
               </a:rPr>
-              <a:t>Siguiente clase: continuamos el hilo del PI</a:t>
+              <a:t>Siguiente clase: continuamos el hilo del tema</a:t>
             </a:r>
           </a:p>
         </p:txBody>
@@ -20957,4 +18342,324 @@
   </a:objectDefaults>
   <a:extraClrSchemeLst/>
 </a:theme>
+</file>
+
+<file path=ppt/theme/theme2.xml><?xml version="1.0" encoding="utf-8"?>
+<a:theme xmlns:a="http://schemas.openxmlformats.org/drawingml/2006/main" name="Office Theme">
+  <a:themeElements>
+    <a:clrScheme name="Office">
+      <a:dk1>
+        <a:sysClr val="windowText" lastClr="000000"/>
+      </a:dk1>
+      <a:lt1>
+        <a:sysClr val="window" lastClr="FFFFFF"/>
+      </a:lt1>
+      <a:dk2>
+        <a:srgbClr val="1F497D"/>
+      </a:dk2>
+      <a:lt2>
+        <a:srgbClr val="EEECE1"/>
+      </a:lt2>
+      <a:accent1>
+        <a:srgbClr val="4F81BD"/>
+      </a:accent1>
+      <a:accent2>
+        <a:srgbClr val="C0504D"/>
+      </a:accent2>
+      <a:accent3>
+        <a:srgbClr val="9BBB59"/>
+      </a:accent3>
+      <a:accent4>
+        <a:srgbClr val="8064A2"/>
+      </a:accent4>
+      <a:accent5>
+        <a:srgbClr val="4BACC6"/>
+      </a:accent5>
+      <a:accent6>
+        <a:srgbClr val="F79646"/>
+      </a:accent6>
+      <a:hlink>
+        <a:srgbClr val="0000FF"/>
+      </a:hlink>
+      <a:folHlink>
+        <a:srgbClr val="800080"/>
+      </a:folHlink>
+    </a:clrScheme>
+    <a:fontScheme name="Office">
+      <a:majorFont>
+        <a:latin typeface="Calibri"/>
+        <a:ea typeface=""/>
+        <a:cs typeface=""/>
+        <a:font script="Jpan" typeface="ＭＳ Ｐゴシック"/>
+        <a:font script="Hang" typeface="맑은 고딕"/>
+        <a:font script="Hans" typeface="宋体"/>
+        <a:font script="Hant" typeface="新細明體"/>
+        <a:font script="Arab" typeface="Times New Roman"/>
+        <a:font script="Hebr" typeface="Times New Roman"/>
+        <a:font script="Thai" typeface="Angsana New"/>
+        <a:font script="Ethi" typeface="Nyala"/>
+        <a:font script="Beng" typeface="Vrinda"/>
+        <a:font script="Gujr" typeface="Shruti"/>
+        <a:font script="Khmr" typeface="MoolBoran"/>
+        <a:font script="Knda" typeface="Tunga"/>
+        <a:font script="Guru" typeface="Raavi"/>
+        <a:font script="Cans" typeface="Euphemia"/>
+        <a:font script="Cher" typeface="Plantagenet Cherokee"/>
+        <a:font script="Yiii" typeface="Microsoft Yi Baiti"/>
+        <a:font script="Tibt" typeface="Microsoft Himalaya"/>
+        <a:font script="Thaa" typeface="MV Boli"/>
+        <a:font script="Deva" typeface="Mangal"/>
+        <a:font script="Telu" typeface="Gautami"/>
+        <a:font script="Taml" typeface="Latha"/>
+        <a:font script="Syrc" typeface="Estrangelo Edessa"/>
+        <a:font script="Orya" typeface="Kalinga"/>
+        <a:font script="Mlym" typeface="Kartika"/>
+        <a:font script="Laoo" typeface="DokChampa"/>
+        <a:font script="Sinh" typeface="Iskoola Pota"/>
+        <a:font script="Mong" typeface="Mongolian Baiti"/>
+        <a:font script="Viet" typeface="Times New Roman"/>
+        <a:font script="Uigh" typeface="Microsoft Uighur"/>
+        <a:font script="Geor" typeface="Sylfaen"/>
+      </a:majorFont>
+      <a:minorFont>
+        <a:latin typeface="Calibri"/>
+        <a:ea typeface=""/>
+        <a:cs typeface=""/>
+        <a:font script="Jpan" typeface="ＭＳ Ｐゴシック"/>
+        <a:font script="Hang" typeface="맑은 고딕"/>
+        <a:font script="Hans" typeface="宋体"/>
+        <a:font script="Hant" typeface="新細明體"/>
+        <a:font script="Arab" typeface="Arial"/>
+        <a:font script="Hebr" typeface="Arial"/>
+        <a:font script="Thai" typeface="Cordia New"/>
+        <a:font script="Ethi" typeface="Nyala"/>
+        <a:font script="Beng" typeface="Vrinda"/>
+        <a:font script="Gujr" typeface="Shruti"/>
+        <a:font script="Khmr" typeface="DaunPenh"/>
+        <a:font script="Knda" typeface="Tunga"/>
+        <a:font script="Guru" typeface="Raavi"/>
+        <a:font script="Cans" typeface="Euphemia"/>
+        <a:font script="Cher" typeface="Plantagenet Cherokee"/>
+        <a:font script="Yiii" typeface="Microsoft Yi Baiti"/>
+        <a:font script="Tibt" typeface="Microsoft Himalaya"/>
+        <a:font script="Thaa" typeface="MV Boli"/>
+        <a:font script="Deva" typeface="Mangal"/>
+        <a:font script="Telu" typeface="Gautami"/>
+        <a:font script="Taml" typeface="Latha"/>
+        <a:font script="Syrc" typeface="Estrangelo Edessa"/>
+        <a:font script="Orya" typeface="Kalinga"/>
+        <a:font script="Mlym" typeface="Kartika"/>
+        <a:font script="Laoo" typeface="DokChampa"/>
+        <a:font script="Sinh" typeface="Iskoola Pota"/>
+        <a:font script="Mong" typeface="Mongolian Baiti"/>
+        <a:font script="Viet" typeface="Arial"/>
+        <a:font script="Uigh" typeface="Microsoft Uighur"/>
+        <a:font script="Geor" typeface="Sylfaen"/>
+      </a:minorFont>
+    </a:fontScheme>
+    <a:fmtScheme name="Office">
+      <a:fillStyleLst>
+        <a:solidFill>
+          <a:schemeClr val="phClr"/>
+        </a:solidFill>
+        <a:gradFill rotWithShape="1">
+          <a:gsLst>
+            <a:gs pos="0">
+              <a:schemeClr val="phClr">
+                <a:tint val="50000"/>
+                <a:satMod val="300000"/>
+              </a:schemeClr>
+            </a:gs>
+            <a:gs pos="35000">
+              <a:schemeClr val="phClr">
+                <a:tint val="37000"/>
+                <a:satMod val="300000"/>
+              </a:schemeClr>
+            </a:gs>
+            <a:gs pos="100000">
+              <a:schemeClr val="phClr">
+                <a:tint val="15000"/>
+                <a:satMod val="350000"/>
+              </a:schemeClr>
+            </a:gs>
+          </a:gsLst>
+          <a:lin ang="16200000" scaled="1"/>
+        </a:gradFill>
+        <a:gradFill rotWithShape="1">
+          <a:gsLst>
+            <a:gs pos="0">
+              <a:schemeClr val="phClr">
+                <a:tint val="100000"/>
+                <a:shade val="100000"/>
+                <a:satMod val="130000"/>
+              </a:schemeClr>
+            </a:gs>
+            <a:gs pos="100000">
+              <a:schemeClr val="phClr">
+                <a:tint val="50000"/>
+                <a:shade val="100000"/>
+                <a:satMod val="350000"/>
+              </a:schemeClr>
+            </a:gs>
+          </a:gsLst>
+          <a:lin ang="16200000" scaled="0"/>
+        </a:gradFill>
+      </a:fillStyleLst>
+      <a:lnStyleLst>
+        <a:ln w="9525" cap="flat" cmpd="sng" algn="ctr">
+          <a:solidFill>
+            <a:schemeClr val="phClr">
+              <a:shade val="95000"/>
+              <a:satMod val="105000"/>
+            </a:schemeClr>
+          </a:solidFill>
+          <a:prstDash val="solid"/>
+        </a:ln>
+        <a:ln w="25400" cap="flat" cmpd="sng" algn="ctr">
+          <a:solidFill>
+            <a:schemeClr val="phClr"/>
+          </a:solidFill>
+          <a:prstDash val="solid"/>
+        </a:ln>
+        <a:ln w="38100" cap="flat" cmpd="sng" algn="ctr">
+          <a:solidFill>
+            <a:schemeClr val="phClr"/>
+          </a:solidFill>
+          <a:prstDash val="solid"/>
+        </a:ln>
+      </a:lnStyleLst>
+      <a:effectStyleLst>
+        <a:effectStyle>
+          <a:effectLst>
+            <a:outerShdw blurRad="40000" dist="20000" dir="5400000" rotWithShape="0">
+              <a:srgbClr val="000000">
+                <a:alpha val="38000"/>
+              </a:srgbClr>
+            </a:outerShdw>
+          </a:effectLst>
+        </a:effectStyle>
+        <a:effectStyle>
+          <a:effectLst>
+            <a:outerShdw blurRad="40000" dist="23000" dir="5400000" rotWithShape="0">
+              <a:srgbClr val="000000">
+                <a:alpha val="35000"/>
+              </a:srgbClr>
+            </a:outerShdw>
+          </a:effectLst>
+        </a:effectStyle>
+        <a:effectStyle>
+          <a:effectLst>
+            <a:outerShdw blurRad="40000" dist="23000" dir="5400000" rotWithShape="0">
+              <a:srgbClr val="000000">
+                <a:alpha val="35000"/>
+              </a:srgbClr>
+            </a:outerShdw>
+          </a:effectLst>
+          <a:scene3d>
+            <a:camera prst="orthographicFront">
+              <a:rot lat="0" lon="0" rev="0"/>
+            </a:camera>
+            <a:lightRig rig="threePt" dir="t">
+              <a:rot lat="0" lon="0" rev="1200000"/>
+            </a:lightRig>
+          </a:scene3d>
+          <a:sp3d>
+            <a:bevelT w="63500" h="25400"/>
+          </a:sp3d>
+        </a:effectStyle>
+      </a:effectStyleLst>
+      <a:bgFillStyleLst>
+        <a:solidFill>
+          <a:schemeClr val="phClr"/>
+        </a:solidFill>
+        <a:gradFill rotWithShape="1">
+          <a:gsLst>
+            <a:gs pos="0">
+              <a:schemeClr val="phClr">
+                <a:tint val="40000"/>
+                <a:satMod val="350000"/>
+              </a:schemeClr>
+            </a:gs>
+            <a:gs pos="40000">
+              <a:schemeClr val="phClr">
+                <a:tint val="45000"/>
+                <a:shade val="99000"/>
+                <a:satMod val="350000"/>
+              </a:schemeClr>
+            </a:gs>
+            <a:gs pos="100000">
+              <a:schemeClr val="phClr">
+                <a:shade val="20000"/>
+                <a:satMod val="255000"/>
+              </a:schemeClr>
+            </a:gs>
+          </a:gsLst>
+          <a:path path="circle">
+            <a:fillToRect l="50000" t="-80000" r="50000" b="180000"/>
+          </a:path>
+        </a:gradFill>
+        <a:gradFill rotWithShape="1">
+          <a:gsLst>
+            <a:gs pos="0">
+              <a:schemeClr val="phClr">
+                <a:tint val="80000"/>
+                <a:satMod val="300000"/>
+              </a:schemeClr>
+            </a:gs>
+            <a:gs pos="100000">
+              <a:schemeClr val="phClr">
+                <a:shade val="30000"/>
+                <a:satMod val="200000"/>
+              </a:schemeClr>
+            </a:gs>
+          </a:gsLst>
+          <a:path path="circle">
+            <a:fillToRect l="50000" t="50000" r="50000" b="50000"/>
+          </a:path>
+        </a:gradFill>
+      </a:bgFillStyleLst>
+    </a:fmtScheme>
+  </a:themeElements>
+  <a:objectDefaults>
+    <a:spDef>
+      <a:spPr/>
+      <a:bodyPr/>
+      <a:lstStyle/>
+      <a:style>
+        <a:lnRef idx="1">
+          <a:schemeClr val="accent1"/>
+        </a:lnRef>
+        <a:fillRef idx="3">
+          <a:schemeClr val="accent1"/>
+        </a:fillRef>
+        <a:effectRef idx="2">
+          <a:schemeClr val="accent1"/>
+        </a:effectRef>
+        <a:fontRef idx="minor">
+          <a:schemeClr val="lt1"/>
+        </a:fontRef>
+      </a:style>
+    </a:spDef>
+    <a:lnDef>
+      <a:spPr/>
+      <a:bodyPr/>
+      <a:lstStyle/>
+      <a:style>
+        <a:lnRef idx="2">
+          <a:schemeClr val="accent1"/>
+        </a:lnRef>
+        <a:fillRef idx="0">
+          <a:schemeClr val="accent1"/>
+        </a:fillRef>
+        <a:effectRef idx="1">
+          <a:schemeClr val="accent1"/>
+        </a:effectRef>
+        <a:fontRef idx="minor">
+          <a:schemeClr val="tx1"/>
+        </a:fontRef>
+      </a:style>
+    </a:lnDef>
+  </a:objectDefaults>
+  <a:extraClrSchemeLst/>
+</a:theme>
 </file>
--- a/Programacion II/Clases/Clase 8 - Documentacion y QA Javadoc y pruebas/Presentacion.pptx
+++ b/Programacion II/Clases/Clase 8 - Documentacion y QA Javadoc y pruebas/Presentacion.pptx
@@ -608,7 +608,7 @@
           <a:p/>
           <a:p>
             <a:r>
-              <a:t>Lo que se genera es un sitio web: en VS Code se corre la herramienta del JDK desde la terminal integrada, «javadoc -d docs -private src/vetcare/*.java», que crea la carpeta docs/ y deja un index.html que se abre en el navegador con la misma cara que tiene la documentacion oficial de Java.</a:t>
+              <a:t>Lo que se genera es un sitio web: en VS Code se corre la herramienta del JDK desde la terminal integrada, «javadoc -d docs -private src/clinica/*.java», que crea la carpeta docs/ y deja un index.html que se abre en el navegador con la misma cara que tiene la documentacion oficial de Java.</a:t>
             </a:r>
           </a:p>
         </p:txBody>
@@ -4770,7 +4770,7 @@
                 </a:solidFill>
                 <a:latin typeface="Calibri"/>
               </a:rPr>
-              <a:t>VetCareQADemo.java — class VetCareQADemo</a:t>
+              <a:t>ClinicaQADemo.java — class ClinicaQADemo</a:t>
             </a:r>
           </a:p>
         </p:txBody>
@@ -4929,7 +4929,7 @@
                 </a:solidFill>
                 <a:latin typeface="Calibri"/>
               </a:rPr>
-              <a:t>public class VetCareQADemo {</a:t>
+              <a:t>public class ClinicaQADemo {</a:t>
             </a:r>
           </a:p>
           <a:p>
@@ -5174,7 +5174,7 @@
                 </a:solidFill>
                 <a:latin typeface="Calibri"/>
               </a:rPr>
-              <a:t>VetCareQADemo.java — main() (1/3)</a:t>
+              <a:t>ClinicaQADemo.java — main() (1/3)</a:t>
             </a:r>
           </a:p>
         </p:txBody>
@@ -5841,7 +5841,7 @@
                 </a:solidFill>
                 <a:latin typeface="Calibri"/>
               </a:rPr>
-              <a:t>VetCareQADemo.java — main() (2/3)</a:t>
+              <a:t>ClinicaQADemo.java — main() (2/3)</a:t>
             </a:r>
           </a:p>
         </p:txBody>
@@ -6508,7 +6508,7 @@
                 </a:solidFill>
                 <a:latin typeface="Calibri"/>
               </a:rPr>
-              <a:t>VetCareQADemo.java — main() (3/3)</a:t>
+              <a:t>ClinicaQADemo.java — main() (3/3)</a:t>
             </a:r>
           </a:p>
         </p:txBody>
@@ -6960,7 +6960,7 @@
                 </a:solidFill>
                 <a:latin typeface="Calibri"/>
               </a:rPr>
-              <a:t>VetCareQADemo.java — nuevaAgenda()</a:t>
+              <a:t>ClinicaQADemo.java — nuevaAgenda()</a:t>
             </a:r>
           </a:p>
         </p:txBody>
@@ -7412,7 +7412,7 @@
                 </a:solidFill>
                 <a:latin typeface="Calibri"/>
               </a:rPr>
-              <a:t>VetCareQADemo.java — verificar()</a:t>
+              <a:t>ClinicaQADemo.java — verificar()</a:t>
             </a:r>
           </a:p>
         </p:txBody>
@@ -7763,7 +7763,7 @@
                 </a:solidFill>
                 <a:latin typeface="Calibri"/>
               </a:rPr>
-              <a:t> * Expediente de una mascota de la clinica Huellitas.</a:t>
+              <a:t> * Expediente de una mascota de la clinica.</a:t>
             </a:r>
           </a:p>
           <a:p>
@@ -7811,7 +7811,7 @@
                 </a:solidFill>
                 <a:latin typeface="Calibri"/>
               </a:rPr>
-              <a:t> * @author Equipo VetCare</a:t>
+              <a:t> * @author Equipo Clinica</a:t>
             </a:r>
           </a:p>
           <a:p>
@@ -8008,7 +8008,7 @@
                 </a:solidFill>
                 <a:latin typeface="Calibri"/>
               </a:rPr>
-              <a:t>VetCareQADemo.java — class Mascota</a:t>
+              <a:t>ClinicaQADemo.java — class Mascota</a:t>
             </a:r>
           </a:p>
         </p:txBody>
@@ -8540,7 +8540,7 @@
                 </a:solidFill>
                 <a:latin typeface="Calibri"/>
               </a:rPr>
-              <a:t>VetCareQADemo.java — Mascota() (1/2)</a:t>
+              <a:t>ClinicaQADemo.java — Mascota() (1/2)</a:t>
             </a:r>
           </a:p>
         </p:txBody>
@@ -9339,7 +9339,7 @@
                 </a:solidFill>
                 <a:latin typeface="Calibri"/>
               </a:rPr>
-              <a:t>–   Todo con el mismo dominio: la clinica veterinaria Huellitas (VetCare).</a:t>
+              <a:t>–   Todo con el mismo dominio: una clinica veterinaria.</a:t>
             </a:r>
           </a:p>
         </p:txBody>
@@ -9520,7 +9520,7 @@
                 </a:solidFill>
                 <a:latin typeface="Calibri"/>
               </a:rPr>
-              <a:t>VetCareQADemo.java — Mascota() (2/2)</a:t>
+              <a:t>ClinicaQADemo.java — Mascota() (2/2)</a:t>
             </a:r>
           </a:p>
         </p:txBody>
@@ -9908,7 +9908,7 @@
                 </a:solidFill>
                 <a:latin typeface="Calibri"/>
               </a:rPr>
-              <a:t>VetCareQADemo.java — class Cita</a:t>
+              <a:t>ClinicaQADemo.java — class Cita</a:t>
             </a:r>
           </a:p>
         </p:txBody>
@@ -10408,7 +10408,7 @@
                 </a:solidFill>
                 <a:latin typeface="Calibri"/>
               </a:rPr>
-              <a:t>VetCareQADemo.java — Cita()</a:t>
+              <a:t>ClinicaQADemo.java — Cita()</a:t>
             </a:r>
           </a:p>
         </p:txBody>
@@ -10892,7 +10892,7 @@
                 </a:solidFill>
                 <a:latin typeface="Calibri"/>
               </a:rPr>
-              <a:t>VetCareQADemo.java — class AgendaService</a:t>
+              <a:t>ClinicaQADemo.java — class AgendaService</a:t>
             </a:r>
           </a:p>
         </p:txBody>
@@ -11392,7 +11392,7 @@
                 </a:solidFill>
                 <a:latin typeface="Calibri"/>
               </a:rPr>
-              <a:t>VetCareQADemo.java — registrarMascota()</a:t>
+              <a:t>ClinicaQADemo.java — registrarMascota()</a:t>
             </a:r>
           </a:p>
         </p:txBody>
@@ -12004,7 +12004,7 @@
                 </a:solidFill>
                 <a:latin typeface="Calibri"/>
               </a:rPr>
-              <a:t>VetCareQADemo.java — agendar() (1/4)</a:t>
+              <a:t>ClinicaQADemo.java — agendar() (1/4)</a:t>
             </a:r>
           </a:p>
         </p:txBody>
@@ -12671,7 +12671,7 @@
                 </a:solidFill>
                 <a:latin typeface="Calibri"/>
               </a:rPr>
-              <a:t>VetCareQADemo.java — agendar() (2/4)</a:t>
+              <a:t>ClinicaQADemo.java — agendar() (2/4)</a:t>
             </a:r>
           </a:p>
         </p:txBody>
@@ -13315,7 +13315,7 @@
                 </a:solidFill>
                 <a:latin typeface="Calibri"/>
               </a:rPr>
-              <a:t>VetCareQADemo.java — agendar() (3/4)</a:t>
+              <a:t>ClinicaQADemo.java — agendar() (3/4)</a:t>
             </a:r>
           </a:p>
         </p:txBody>
@@ -13982,7 +13982,7 @@
                 </a:solidFill>
                 <a:latin typeface="Calibri"/>
               </a:rPr>
-              <a:t>VetCareQADemo.java — agendar() (4/4)</a:t>
+              <a:t>ClinicaQADemo.java — agendar() (4/4)</a:t>
             </a:r>
           </a:p>
         </p:txBody>
@@ -15597,7 +15597,7 @@
                 </a:solidFill>
                 <a:latin typeface="Calibri"/>
               </a:rPr>
-              <a:t>Demo en vivo sobre VetCare</a:t>
+              <a:t>Demo en vivo sobre el tema</a:t>
             </a:r>
           </a:p>
         </p:txBody>
@@ -16168,7 +16168,7 @@
                 </a:solidFill>
                 <a:latin typeface="Calibri"/>
               </a:rPr>
-              <a:t>–   Mismo dominio VetCare — no otro ejemplo.</a:t>
+              <a:t>–   Mismo dominio de la clinica — no otro ejemplo.</a:t>
             </a:r>
           </a:p>
         </p:txBody>
@@ -16684,7 +16684,7 @@
                 </a:solidFill>
                 <a:latin typeface="Calibri"/>
               </a:rPr>
-              <a:t>–   En VetCare esa diferencia es concreta: el estudiante que escriba la ventana de citas necesita saber que agendar() lanza excepcion si la mascota esta inactiva, y no tiene por que leer las veinte lineas del metodo para descubrirlo.</a:t>
+              <a:t>–   En el sistema de la clinica esa diferencia es concreta: el estudiante que escriba la ventana de citas necesita saber que agendar() lanza excepcion si la mascota esta inactiva, y no tiene por que leer las veinte lineas del metodo para descubrirlo.</a:t>
             </a:r>
           </a:p>
         </p:txBody>
@@ -17440,7 +17440,7 @@
                 </a:solidFill>
                 <a:latin typeface="Calibri"/>
               </a:rPr>
-              <a:t>–   En VetCare hicimos precisamente ese refactor: lo que empezo llamandose 'validar' pasa a llamarse 'agendar', y la variable 'b' pasa a llamarse 'mascotaActiva'; el codigo quedo igual de largo pero dejo de necesitar traductor.</a:t>
+              <a:t>–   En el sistema de la clinica hicimos precisamente ese refactor: lo que empezo llamandose 'validar' pasa a llamarse 'agendar', y la variable 'b' pasa a llamarse 'mascotaActiva'; el codigo quedo igual de largo pero dejo de necesitar traductor.</a:t>
             </a:r>
           </a:p>
         </p:txBody>

--- a/Programacion II/Clases/Clase 8 - Documentacion y QA Javadoc y pruebas/Presentacion.pptx
+++ b/Programacion II/Clases/Clase 8 - Documentacion y QA Javadoc y pruebas/Presentacion.pptx
@@ -827,94 +827,6 @@
           <a:p>
             <a:r>
               <a:t>JUnit es la herramienta que convierte esos casos en codigo que se ejecuta solo. En VS Code se agrega desde la vista Testing (el icono del matraz) con «Enable Java Tests» &gt; JUnit 5, que baja los .jar solo; las clases de prueba viven en la carpeta test/, separadas del codigo de produccion; la convencion es AgendaServiceTest para probar AgendaService. Cada caso es un metodo publico anotado con @Test cuyo nombre describe el escenario (agendar_mascotaInactiva_lanzaIllegalStateException), con un metodo anotado @Before o @BeforeEach que arma el estado limpio antes de cada caso, para que ninguna prueba dependa de la anterior. Las comprobaciones se hacen con assertEquals(esperado, obtenido), assertTrue(condicion) y assertThrows(IllegalStateException.class, () -&gt; agenda.agendar(...)), que es la forma moderna de verificar que algo debe fallar. La diferencia con la prueba manual es importante y hay que decirla completa: la prueba unitaria es automatica, repetible, rapida y prueba logica aislada, y por eso se corre cada vez que se toca el codigo; la prueba manual la hace un humano usando la interfaz, sirve para lo que no se puede automatizar facil (que el JOptionPane se lea bien, que la ventana no se congele, que el flujo tenga sentido para la recepcionista) y no reemplaza a la otra. Y aqui se cobra la clase 6: como la regla de agendar vive en AgendaService y no dentro de un boton, se puede probar sin abrir ni una sola ventana.</a:t>
-            </a:r>
-          </a:p>
-        </p:txBody>
-      </p:sp>
-      <p:sp>
-        <p:nvSpPr>
-          <p:cNvPr id="4" name="Slide Number Placeholder 3"/>
-          <p:cNvSpPr>
-            <a:spLocks noGrp="1"/>
-          </p:cNvSpPr>
-          <p:nvPr>
-            <p:ph type="sldNum" idx="5" sz="quarter"/>
-          </p:nvPr>
-        </p:nvSpPr>
-        <p:spPr/>
-      </p:sp>
-    </p:spTree>
-  </p:cSld>
-  <p:clrMapOvr>
-    <a:masterClrMapping/>
-  </p:clrMapOvr>
-</p:notes>
-</file>
-
-<file path=ppt/notesSlides/notesSlide6.xml><?xml version="1.0" encoding="utf-8"?>
-<p:notes xmlns:a="http://schemas.openxmlformats.org/drawingml/2006/main" xmlns:p="http://schemas.openxmlformats.org/presentationml/2006/main" xmlns:r="http://schemas.openxmlformats.org/officeDocument/2006/relationships">
-  <p:cSld>
-    <p:spTree>
-      <p:nvGrpSpPr>
-        <p:cNvPr id="1" name=""/>
-        <p:cNvGrpSpPr/>
-        <p:nvPr/>
-      </p:nvGrpSpPr>
-      <p:grpSpPr>
-        <a:xfrm>
-          <a:off x="0" y="0"/>
-          <a:ext cx="0" cy="0"/>
-          <a:chOff x="0" y="0"/>
-          <a:chExt cx="0" cy="0"/>
-        </a:xfrm>
-      </p:grpSpPr>
-      <p:sp>
-        <p:nvSpPr>
-          <p:cNvPr id="2" name="Slide Image Placeholder 1"/>
-          <p:cNvSpPr>
-            <a:spLocks noGrp="1"/>
-          </p:cNvSpPr>
-          <p:nvPr>
-            <p:ph type="sldImg" idx="2"/>
-          </p:nvPr>
-        </p:nvSpPr>
-        <p:spPr/>
-      </p:sp>
-      <p:sp>
-        <p:nvSpPr>
-          <p:cNvPr id="3" name="Notes Placeholder 2"/>
-          <p:cNvSpPr>
-            <a:spLocks noGrp="1"/>
-          </p:cNvSpPr>
-          <p:nvPr>
-            <p:ph type="body" idx="3" sz="quarter"/>
-          </p:nvPr>
-        </p:nvSpPr>
-        <p:spPr/>
-        <p:txBody>
-          <a:bodyPr/>
-          <a:lstStyle/>
-          <a:p>
-            <a:r>
-              <a:t>TEXTO COMPLETO DE LA LÁMINA (se proyecta resumido):</a:t>
-            </a:r>
-          </a:p>
-          <a:p/>
-          <a:p>
-            <a:r>
-              <a:t>Herramienta: Visual Studio Code (Java)</a:t>
-            </a:r>
-          </a:p>
-          <a:p/>
-          <a:p>
-            <a:r>
-              <a:t>Demo: El docente escribe un bloque Javadoc, genera la documentacion HTML con javadoc desde la terminal integrada y luego corre las pruebas mostrando la barra en rojo, corrige la regla y la muestra en verde.</a:t>
-            </a:r>
-          </a:p>
-          <a:p/>
-          <a:p>
-            <a:r>
-              <a:t>Mismo dominio de la clinica — no otro ejemplo.</a:t>
             </a:r>
           </a:p>
         </p:txBody>
@@ -8626,118 +8538,14 @@
       </p:sp>
       <p:sp>
         <p:nvSpPr>
-          <p:cNvPr id="5" name="Rounded Rectangle 4"/>
-          <p:cNvSpPr/>
-          <p:nvPr/>
-        </p:nvSpPr>
-        <p:spPr>
-          <a:xfrm>
-            <a:off x="5797149" y="1573813"/>
-            <a:ext cx="6010497" cy="4057845"/>
-          </a:xfrm>
-          <a:prstGeom prst="roundRect">
-            <a:avLst>
-              <a:gd name="adj" fmla="val 4000"/>
-            </a:avLst>
-          </a:prstGeom>
-          <a:solidFill>
-            <a:srgbClr val="E8EEF4"/>
-          </a:solidFill>
-          <a:ln>
-            <a:noFill/>
-          </a:ln>
-        </p:spPr>
-        <p:style>
-          <a:lnRef idx="1">
-            <a:schemeClr val="accent1"/>
-          </a:lnRef>
-          <a:fillRef idx="3">
-            <a:schemeClr val="accent1"/>
-          </a:fillRef>
-          <a:effectRef idx="2">
-            <a:schemeClr val="accent1"/>
-          </a:effectRef>
-          <a:fontRef idx="minor">
-            <a:schemeClr val="lt1"/>
-          </a:fontRef>
-        </p:style>
-        <p:txBody>
-          <a:bodyPr rtlCol="0" anchor="ctr"/>
-          <a:lstStyle/>
-          <a:p>
-            <a:pPr algn="ctr"/>
-          </a:p>
-        </p:txBody>
-      </p:sp>
-      <p:pic>
-        <p:nvPicPr>
-          <p:cNvPr id="6" name="Picture 5" descr="laptop-code-live-demo.jpg"/>
-          <p:cNvPicPr>
-            <a:picLocks noChangeAspect="1"/>
-          </p:cNvPicPr>
-          <p:nvPr/>
-        </p:nvPicPr>
-        <p:blipFill>
-          <a:blip r:embed="rId2"/>
-          <a:stretch>
-            <a:fillRect/>
-          </a:stretch>
-        </p:blipFill>
-        <p:spPr>
-          <a:xfrm>
-            <a:off x="5870301" y="1646965"/>
-            <a:ext cx="5864193" cy="3911541"/>
-          </a:xfrm>
-          <a:prstGeom prst="rect">
-            <a:avLst/>
-          </a:prstGeom>
-        </p:spPr>
-      </p:pic>
-      <p:sp>
-        <p:nvSpPr>
-          <p:cNvPr id="7" name="TextBox 6"/>
+          <p:cNvPr id="5" name="TextBox 4"/>
           <p:cNvSpPr txBox="1"/>
           <p:nvPr/>
         </p:nvSpPr>
         <p:spPr>
           <a:xfrm>
-            <a:off x="5870301" y="5961888"/>
-            <a:ext cx="5864193" cy="320040"/>
-          </a:xfrm>
-          <a:prstGeom prst="rect">
-            <a:avLst/>
-          </a:prstGeom>
-          <a:noFill/>
-        </p:spPr>
-        <p:txBody>
-          <a:bodyPr wrap="square">
-            <a:spAutoFit/>
-          </a:bodyPr>
-          <a:lstStyle/>
-          <a:p>
-            <a:pPr algn="ctr"/>
-            <a:r>
-              <a:rPr sz="1100" b="0" i="1">
-                <a:solidFill>
-                  <a:srgbClr val="666666"/>
-                </a:solidFill>
-                <a:latin typeface="Calibri"/>
-              </a:rPr>
-              <a:t>Foto: olia danilevich · Pexels</a:t>
-            </a:r>
-          </a:p>
-        </p:txBody>
-      </p:sp>
-      <p:sp>
-        <p:nvSpPr>
-          <p:cNvPr id="8" name="TextBox 7"/>
-          <p:cNvSpPr txBox="1"/>
-          <p:nvPr/>
-        </p:nvSpPr>
-        <p:spPr>
-          <a:xfrm>
-            <a:off x="457200" y="1353312"/>
-            <a:ext cx="5093061" cy="5047488"/>
+            <a:off x="457200" y="1170432"/>
+            <a:ext cx="11277295" cy="5230368"/>
           </a:xfrm>
           <a:prstGeom prst="rect">
             <a:avLst/>
@@ -8807,6 +8615,15 @@
               </a:rPr>
               <a:t>Demo:</a:t>
             </a:r>
+            <a:r>
+              <a:rPr sz="2000" b="0" i="0">
+                <a:solidFill>
+                  <a:srgbClr val="333333"/>
+                </a:solidFill>
+                <a:latin typeface="Calibri"/>
+              </a:rPr>
+              <a:t> El docente escribe un bloque Javadoc, genera la documentacion HTML con javadoc desde la terminal integrada y luego corre las pruebas mostrando la barra en rojo, corrige la regla y la muestra en verde.</a:t>
+            </a:r>
           </a:p>
           <a:p>
             <a:pPr>
@@ -8828,7 +8645,7 @@
       </p:sp>
       <p:sp>
         <p:nvSpPr>
-          <p:cNvPr id="9" name="TextBox 8"/>
+          <p:cNvPr id="6" name="TextBox 5"/>
           <p:cNvSpPr txBox="1"/>
           <p:nvPr/>
         </p:nvSpPr>
@@ -9241,118 +9058,14 @@
       </p:sp>
       <p:sp>
         <p:nvSpPr>
-          <p:cNvPr id="5" name="Rounded Rectangle 4"/>
-          <p:cNvSpPr/>
-          <p:nvPr/>
-        </p:nvSpPr>
-        <p:spPr>
-          <a:xfrm>
-            <a:off x="5797149" y="1573813"/>
-            <a:ext cx="6010497" cy="4057845"/>
-          </a:xfrm>
-          <a:prstGeom prst="roundRect">
-            <a:avLst>
-              <a:gd name="adj" fmla="val 4000"/>
-            </a:avLst>
-          </a:prstGeom>
-          <a:solidFill>
-            <a:srgbClr val="E8EEF4"/>
-          </a:solidFill>
-          <a:ln>
-            <a:noFill/>
-          </a:ln>
-        </p:spPr>
-        <p:style>
-          <a:lnRef idx="1">
-            <a:schemeClr val="accent1"/>
-          </a:lnRef>
-          <a:fillRef idx="3">
-            <a:schemeClr val="accent1"/>
-          </a:fillRef>
-          <a:effectRef idx="2">
-            <a:schemeClr val="accent1"/>
-          </a:effectRef>
-          <a:fontRef idx="minor">
-            <a:schemeClr val="lt1"/>
-          </a:fontRef>
-        </p:style>
-        <p:txBody>
-          <a:bodyPr rtlCol="0" anchor="ctr"/>
-          <a:lstStyle/>
-          <a:p>
-            <a:pPr algn="ctr"/>
-          </a:p>
-        </p:txBody>
-      </p:sp>
-      <p:pic>
-        <p:nvPicPr>
-          <p:cNvPr id="6" name="Picture 5" descr="notebook-planning-desk-coffee.jpg"/>
-          <p:cNvPicPr>
-            <a:picLocks noChangeAspect="1"/>
-          </p:cNvPicPr>
-          <p:nvPr/>
-        </p:nvPicPr>
-        <p:blipFill>
-          <a:blip r:embed="rId2"/>
-          <a:stretch>
-            <a:fillRect/>
-          </a:stretch>
-        </p:blipFill>
-        <p:spPr>
-          <a:xfrm>
-            <a:off x="5870301" y="1646965"/>
-            <a:ext cx="5864193" cy="3911541"/>
-          </a:xfrm>
-          <a:prstGeom prst="rect">
-            <a:avLst/>
-          </a:prstGeom>
-        </p:spPr>
-      </p:pic>
-      <p:sp>
-        <p:nvSpPr>
-          <p:cNvPr id="7" name="TextBox 6"/>
+          <p:cNvPr id="5" name="TextBox 4"/>
           <p:cNvSpPr txBox="1"/>
           <p:nvPr/>
         </p:nvSpPr>
         <p:spPr>
           <a:xfrm>
-            <a:off x="5870301" y="5961888"/>
-            <a:ext cx="5864193" cy="320040"/>
-          </a:xfrm>
-          <a:prstGeom prst="rect">
-            <a:avLst/>
-          </a:prstGeom>
-          <a:noFill/>
-        </p:spPr>
-        <p:txBody>
-          <a:bodyPr wrap="square">
-            <a:spAutoFit/>
-          </a:bodyPr>
-          <a:lstStyle/>
-          <a:p>
-            <a:pPr algn="ctr"/>
-            <a:r>
-              <a:rPr sz="1100" b="0" i="1">
-                <a:solidFill>
-                  <a:srgbClr val="666666"/>
-                </a:solidFill>
-                <a:latin typeface="Calibri"/>
-              </a:rPr>
-              <a:t>Foto: Cup of  Couple · Pexels</a:t>
-            </a:r>
-          </a:p>
-        </p:txBody>
-      </p:sp>
-      <p:sp>
-        <p:nvSpPr>
-          <p:cNvPr id="8" name="TextBox 7"/>
-          <p:cNvSpPr txBox="1"/>
-          <p:nvPr/>
-        </p:nvSpPr>
-        <p:spPr>
-          <a:xfrm>
-            <a:off x="457200" y="1353312"/>
-            <a:ext cx="5093061" cy="5047488"/>
+            <a:off x="457200" y="1170432"/>
+            <a:ext cx="11277295" cy="5230368"/>
           </a:xfrm>
           <a:prstGeom prst="rect">
             <a:avLst/>
@@ -9477,7 +9190,7 @@
       </p:sp>
       <p:sp>
         <p:nvSpPr>
-          <p:cNvPr id="9" name="TextBox 8"/>
+          <p:cNvPr id="6" name="TextBox 5"/>
           <p:cNvSpPr txBox="1"/>
           <p:nvPr/>
         </p:nvSpPr>
@@ -10510,118 +10223,14 @@
       </p:sp>
       <p:sp>
         <p:nvSpPr>
-          <p:cNvPr id="5" name="Rounded Rectangle 4"/>
-          <p:cNvSpPr/>
-          <p:nvPr/>
-        </p:nvSpPr>
-        <p:spPr>
-          <a:xfrm>
-            <a:off x="5797149" y="1573813"/>
-            <a:ext cx="6010497" cy="4057845"/>
-          </a:xfrm>
-          <a:prstGeom prst="roundRect">
-            <a:avLst>
-              <a:gd name="adj" fmla="val 4000"/>
-            </a:avLst>
-          </a:prstGeom>
-          <a:solidFill>
-            <a:srgbClr val="E8EEF4"/>
-          </a:solidFill>
-          <a:ln>
-            <a:noFill/>
-          </a:ln>
-        </p:spPr>
-        <p:style>
-          <a:lnRef idx="1">
-            <a:schemeClr val="accent1"/>
-          </a:lnRef>
-          <a:fillRef idx="3">
-            <a:schemeClr val="accent1"/>
-          </a:fillRef>
-          <a:effectRef idx="2">
-            <a:schemeClr val="accent1"/>
-          </a:effectRef>
-          <a:fontRef idx="minor">
-            <a:schemeClr val="lt1"/>
-          </a:fontRef>
-        </p:style>
-        <p:txBody>
-          <a:bodyPr rtlCol="0" anchor="ctr"/>
-          <a:lstStyle/>
-          <a:p>
-            <a:pPr algn="ctr"/>
-          </a:p>
-        </p:txBody>
-      </p:sp>
-      <p:pic>
-        <p:nvPicPr>
-          <p:cNvPr id="6" name="Picture 5" descr="programmer-writing-notes-notebook-laptop.jpg"/>
-          <p:cNvPicPr>
-            <a:picLocks noChangeAspect="1"/>
-          </p:cNvPicPr>
-          <p:nvPr/>
-        </p:nvPicPr>
-        <p:blipFill>
-          <a:blip r:embed="rId2"/>
-          <a:stretch>
-            <a:fillRect/>
-          </a:stretch>
-        </p:blipFill>
-        <p:spPr>
-          <a:xfrm>
-            <a:off x="5870301" y="1646965"/>
-            <a:ext cx="5864193" cy="3911541"/>
-          </a:xfrm>
-          <a:prstGeom prst="rect">
-            <a:avLst/>
-          </a:prstGeom>
-        </p:spPr>
-      </p:pic>
-      <p:sp>
-        <p:nvSpPr>
-          <p:cNvPr id="7" name="TextBox 6"/>
+          <p:cNvPr id="5" name="TextBox 4"/>
           <p:cNvSpPr txBox="1"/>
           <p:nvPr/>
         </p:nvSpPr>
         <p:spPr>
           <a:xfrm>
-            <a:off x="5870301" y="5961888"/>
-            <a:ext cx="5864193" cy="320040"/>
-          </a:xfrm>
-          <a:prstGeom prst="rect">
-            <a:avLst/>
-          </a:prstGeom>
-          <a:noFill/>
-        </p:spPr>
-        <p:txBody>
-          <a:bodyPr wrap="square">
-            <a:spAutoFit/>
-          </a:bodyPr>
-          <a:lstStyle/>
-          <a:p>
-            <a:pPr algn="ctr"/>
-            <a:r>
-              <a:rPr sz="1100" b="0" i="1">
-                <a:solidFill>
-                  <a:srgbClr val="666666"/>
-                </a:solidFill>
-                <a:latin typeface="Calibri"/>
-              </a:rPr>
-              <a:t>Foto: Startup Stock Photos · Pexels</a:t>
-            </a:r>
-          </a:p>
-        </p:txBody>
-      </p:sp>
-      <p:sp>
-        <p:nvSpPr>
-          <p:cNvPr id="8" name="TextBox 7"/>
-          <p:cNvSpPr txBox="1"/>
-          <p:nvPr/>
-        </p:nvSpPr>
-        <p:spPr>
-          <a:xfrm>
-            <a:off x="457200" y="1353312"/>
-            <a:ext cx="5093061" cy="5047488"/>
+            <a:off x="457200" y="1170432"/>
+            <a:ext cx="11277295" cy="5230368"/>
           </a:xfrm>
           <a:prstGeom prst="rect">
             <a:avLst/>
@@ -10685,7 +10294,7 @@
       </p:sp>
       <p:sp>
         <p:nvSpPr>
-          <p:cNvPr id="9" name="TextBox 8"/>
+          <p:cNvPr id="6" name="TextBox 5"/>
           <p:cNvSpPr txBox="1"/>
           <p:nvPr/>
         </p:nvSpPr>
@@ -16895,118 +16504,14 @@
       </p:sp>
       <p:sp>
         <p:nvSpPr>
-          <p:cNvPr id="5" name="Rounded Rectangle 4"/>
-          <p:cNvSpPr/>
-          <p:nvPr/>
-        </p:nvSpPr>
-        <p:spPr>
-          <a:xfrm>
-            <a:off x="5797149" y="1573813"/>
-            <a:ext cx="6010497" cy="4057845"/>
-          </a:xfrm>
-          <a:prstGeom prst="roundRect">
-            <a:avLst>
-              <a:gd name="adj" fmla="val 4000"/>
-            </a:avLst>
-          </a:prstGeom>
-          <a:solidFill>
-            <a:srgbClr val="E8EEF4"/>
-          </a:solidFill>
-          <a:ln>
-            <a:noFill/>
-          </a:ln>
-        </p:spPr>
-        <p:style>
-          <a:lnRef idx="1">
-            <a:schemeClr val="accent1"/>
-          </a:lnRef>
-          <a:fillRef idx="3">
-            <a:schemeClr val="accent1"/>
-          </a:fillRef>
-          <a:effectRef idx="2">
-            <a:schemeClr val="accent1"/>
-          </a:effectRef>
-          <a:fontRef idx="minor">
-            <a:schemeClr val="lt1"/>
-          </a:fontRef>
-        </p:style>
-        <p:txBody>
-          <a:bodyPr rtlCol="0" anchor="ctr"/>
-          <a:lstStyle/>
-          <a:p>
-            <a:pPr algn="ctr"/>
-          </a:p>
-        </p:txBody>
-      </p:sp>
-      <p:pic>
-        <p:nvPicPr>
-          <p:cNvPr id="6" name="Picture 5" descr="labels-organized-jars.jpg"/>
-          <p:cNvPicPr>
-            <a:picLocks noChangeAspect="1"/>
-          </p:cNvPicPr>
-          <p:nvPr/>
-        </p:nvPicPr>
-        <p:blipFill>
-          <a:blip r:embed="rId2"/>
-          <a:stretch>
-            <a:fillRect/>
-          </a:stretch>
-        </p:blipFill>
-        <p:spPr>
-          <a:xfrm>
-            <a:off x="5870301" y="1646965"/>
-            <a:ext cx="5864193" cy="3911541"/>
-          </a:xfrm>
-          <a:prstGeom prst="rect">
-            <a:avLst/>
-          </a:prstGeom>
-        </p:spPr>
-      </p:pic>
-      <p:sp>
-        <p:nvSpPr>
-          <p:cNvPr id="7" name="TextBox 6"/>
+          <p:cNvPr id="5" name="TextBox 4"/>
           <p:cNvSpPr txBox="1"/>
           <p:nvPr/>
         </p:nvSpPr>
         <p:spPr>
           <a:xfrm>
-            <a:off x="5870301" y="5961888"/>
-            <a:ext cx="5864193" cy="320040"/>
-          </a:xfrm>
-          <a:prstGeom prst="rect">
-            <a:avLst/>
-          </a:prstGeom>
-          <a:noFill/>
-        </p:spPr>
-        <p:txBody>
-          <a:bodyPr wrap="square">
-            <a:spAutoFit/>
-          </a:bodyPr>
-          <a:lstStyle/>
-          <a:p>
-            <a:pPr algn="ctr"/>
-            <a:r>
-              <a:rPr sz="1100" b="0" i="1">
-                <a:solidFill>
-                  <a:srgbClr val="666666"/>
-                </a:solidFill>
-                <a:latin typeface="Calibri"/>
-              </a:rPr>
-              <a:t>Foto: Sarah  Chai · Pexels</a:t>
-            </a:r>
-          </a:p>
-        </p:txBody>
-      </p:sp>
-      <p:sp>
-        <p:nvSpPr>
-          <p:cNvPr id="8" name="TextBox 7"/>
-          <p:cNvSpPr txBox="1"/>
-          <p:nvPr/>
-        </p:nvSpPr>
-        <p:spPr>
-          <a:xfrm>
-            <a:off x="457200" y="1353312"/>
-            <a:ext cx="5093061" cy="5047488"/>
+            <a:off x="457200" y="1170432"/>
+            <a:ext cx="11277295" cy="5230368"/>
           </a:xfrm>
           <a:prstGeom prst="rect">
             <a:avLst/>
@@ -17086,7 +16591,7 @@
       </p:sp>
       <p:sp>
         <p:nvSpPr>
-          <p:cNvPr id="9" name="TextBox 8"/>
+          <p:cNvPr id="6" name="TextBox 5"/>
           <p:cNvSpPr txBox="1"/>
           <p:nvPr/>
         </p:nvSpPr>

--- a/Programacion II/Clases/Clase 8 - Documentacion y QA Javadoc y pruebas/Presentacion.pptx
+++ b/Programacion II/Clases/Clase 8 - Documentacion y QA Javadoc y pruebas/Presentacion.pptx
@@ -827,6 +827,94 @@
           <a:p>
             <a:r>
               <a:t>JUnit es la herramienta que convierte esos casos en codigo que se ejecuta solo. En VS Code se agrega desde la vista Testing (el icono del matraz) con «Enable Java Tests» &gt; JUnit 5, que baja los .jar solo; las clases de prueba viven en la carpeta test/, separadas del codigo de produccion; la convencion es AgendaServiceTest para probar AgendaService. Cada caso es un metodo publico anotado con @Test cuyo nombre describe el escenario (agendar_mascotaInactiva_lanzaIllegalStateException), con un metodo anotado @Before o @BeforeEach que arma el estado limpio antes de cada caso, para que ninguna prueba dependa de la anterior. Las comprobaciones se hacen con assertEquals(esperado, obtenido), assertTrue(condicion) y assertThrows(IllegalStateException.class, () -&gt; agenda.agendar(...)), que es la forma moderna de verificar que algo debe fallar. La diferencia con la prueba manual es importante y hay que decirla completa: la prueba unitaria es automatica, repetible, rapida y prueba logica aislada, y por eso se corre cada vez que se toca el codigo; la prueba manual la hace un humano usando la interfaz, sirve para lo que no se puede automatizar facil (que el JOptionPane se lea bien, que la ventana no se congele, que el flujo tenga sentido para la recepcionista) y no reemplaza a la otra. Y aqui se cobra la clase 6: como la regla de agendar vive en AgendaService y no dentro de un boton, se puede probar sin abrir ni una sola ventana.</a:t>
+            </a:r>
+          </a:p>
+        </p:txBody>
+      </p:sp>
+      <p:sp>
+        <p:nvSpPr>
+          <p:cNvPr id="4" name="Slide Number Placeholder 3"/>
+          <p:cNvSpPr>
+            <a:spLocks noGrp="1"/>
+          </p:cNvSpPr>
+          <p:nvPr>
+            <p:ph type="sldNum" idx="5" sz="quarter"/>
+          </p:nvPr>
+        </p:nvSpPr>
+        <p:spPr/>
+      </p:sp>
+    </p:spTree>
+  </p:cSld>
+  <p:clrMapOvr>
+    <a:masterClrMapping/>
+  </p:clrMapOvr>
+</p:notes>
+</file>
+
+<file path=ppt/notesSlides/notesSlide6.xml><?xml version="1.0" encoding="utf-8"?>
+<p:notes xmlns:a="http://schemas.openxmlformats.org/drawingml/2006/main" xmlns:p="http://schemas.openxmlformats.org/presentationml/2006/main" xmlns:r="http://schemas.openxmlformats.org/officeDocument/2006/relationships">
+  <p:cSld>
+    <p:spTree>
+      <p:nvGrpSpPr>
+        <p:cNvPr id="1" name=""/>
+        <p:cNvGrpSpPr/>
+        <p:nvPr/>
+      </p:nvGrpSpPr>
+      <p:grpSpPr>
+        <a:xfrm>
+          <a:off x="0" y="0"/>
+          <a:ext cx="0" cy="0"/>
+          <a:chOff x="0" y="0"/>
+          <a:chExt cx="0" cy="0"/>
+        </a:xfrm>
+      </p:grpSpPr>
+      <p:sp>
+        <p:nvSpPr>
+          <p:cNvPr id="2" name="Slide Image Placeholder 1"/>
+          <p:cNvSpPr>
+            <a:spLocks noGrp="1"/>
+          </p:cNvSpPr>
+          <p:nvPr>
+            <p:ph type="sldImg" idx="2"/>
+          </p:nvPr>
+        </p:nvSpPr>
+        <p:spPr/>
+      </p:sp>
+      <p:sp>
+        <p:nvSpPr>
+          <p:cNvPr id="3" name="Notes Placeholder 2"/>
+          <p:cNvSpPr>
+            <a:spLocks noGrp="1"/>
+          </p:cNvSpPr>
+          <p:nvPr>
+            <p:ph type="body" idx="3" sz="quarter"/>
+          </p:nvPr>
+        </p:nvSpPr>
+        <p:spPr/>
+        <p:txBody>
+          <a:bodyPr/>
+          <a:lstStyle/>
+          <a:p>
+            <a:r>
+              <a:t>TEXTO COMPLETO DE LA LÁMINA (se proyecta resumido):</a:t>
+            </a:r>
+          </a:p>
+          <a:p/>
+          <a:p>
+            <a:r>
+              <a:t>Herramienta: Visual Studio Code (Java)</a:t>
+            </a:r>
+          </a:p>
+          <a:p/>
+          <a:p>
+            <a:r>
+              <a:t>Demo: El docente escribe un bloque Javadoc, genera la documentacion HTML con javadoc desde la terminal integrada y luego corre las pruebas mostrando la barra en rojo, corrige la regla y la muestra en verde.</a:t>
+            </a:r>
+          </a:p>
+          <a:p/>
+          <a:p>
+            <a:r>
+              <a:t>Mismo dominio de la clinica — no otro ejemplo.</a:t>
             </a:r>
           </a:p>
         </p:txBody>
@@ -8538,14 +8626,83 @@
       </p:sp>
       <p:sp>
         <p:nvSpPr>
-          <p:cNvPr id="5" name="TextBox 4"/>
+          <p:cNvPr id="5" name="Rounded Rectangle 4"/>
+          <p:cNvSpPr/>
+          <p:nvPr/>
+        </p:nvSpPr>
+        <p:spPr>
+          <a:xfrm>
+            <a:off x="5797149" y="1343926"/>
+            <a:ext cx="6010497" cy="4837658"/>
+          </a:xfrm>
+          <a:prstGeom prst="roundRect">
+            <a:avLst>
+              <a:gd name="adj" fmla="val 4000"/>
+            </a:avLst>
+          </a:prstGeom>
+          <a:solidFill>
+            <a:srgbClr val="E8EEF4"/>
+          </a:solidFill>
+          <a:ln>
+            <a:noFill/>
+          </a:ln>
+        </p:spPr>
+        <p:style>
+          <a:lnRef idx="1">
+            <a:schemeClr val="accent1"/>
+          </a:lnRef>
+          <a:fillRef idx="3">
+            <a:schemeClr val="accent1"/>
+          </a:fillRef>
+          <a:effectRef idx="2">
+            <a:schemeClr val="accent1"/>
+          </a:effectRef>
+          <a:fontRef idx="minor">
+            <a:schemeClr val="lt1"/>
+          </a:fontRef>
+        </p:style>
+        <p:txBody>
+          <a:bodyPr rtlCol="0" anchor="ctr"/>
+          <a:lstStyle/>
+          <a:p>
+            <a:pPr algn="ctr"/>
+          </a:p>
+        </p:txBody>
+      </p:sp>
+      <p:pic>
+        <p:nvPicPr>
+          <p:cNvPr id="6" name="Picture 5" descr="ilus-demo-paso1.png"/>
+          <p:cNvPicPr>
+            <a:picLocks noChangeAspect="1"/>
+          </p:cNvPicPr>
+          <p:nvPr/>
+        </p:nvPicPr>
+        <p:blipFill>
+          <a:blip r:embed="rId2"/>
+          <a:stretch>
+            <a:fillRect/>
+          </a:stretch>
+        </p:blipFill>
+        <p:spPr>
+          <a:xfrm>
+            <a:off x="5870301" y="1417078"/>
+            <a:ext cx="5864193" cy="4691354"/>
+          </a:xfrm>
+          <a:prstGeom prst="rect">
+            <a:avLst/>
+          </a:prstGeom>
+        </p:spPr>
+      </p:pic>
+      <p:sp>
+        <p:nvSpPr>
+          <p:cNvPr id="7" name="TextBox 6"/>
           <p:cNvSpPr txBox="1"/>
           <p:nvPr/>
         </p:nvSpPr>
         <p:spPr>
           <a:xfrm>
-            <a:off x="457200" y="1170432"/>
-            <a:ext cx="11277295" cy="5230368"/>
+            <a:off x="457200" y="1353312"/>
+            <a:ext cx="5093061" cy="5047488"/>
           </a:xfrm>
           <a:prstGeom prst="rect">
             <a:avLst/>
@@ -8622,7 +8779,7 @@
                 </a:solidFill>
                 <a:latin typeface="Calibri"/>
               </a:rPr>
-              <a:t> El docente escribe un bloque Javadoc, genera la documentacion HTML con javadoc desde la terminal integrada y luego corre las pruebas mostrando la barra en rojo, corrige la regla y la muestra en verde.</a:t>
+              <a:t> El docente escribe un bloque Javadoc, genera la documentacion HTML con javadoc desde la terminal integrada y luego corre las pruebas…</a:t>
             </a:r>
           </a:p>
           <a:p>
@@ -8645,7 +8802,7 @@
       </p:sp>
       <p:sp>
         <p:nvSpPr>
-          <p:cNvPr id="6" name="TextBox 5"/>
+          <p:cNvPr id="8" name="TextBox 7"/>
           <p:cNvSpPr txBox="1"/>
           <p:nvPr/>
         </p:nvSpPr>
@@ -10223,14 +10380,83 @@
       </p:sp>
       <p:sp>
         <p:nvSpPr>
-          <p:cNvPr id="5" name="TextBox 4"/>
+          <p:cNvPr id="5" name="Rounded Rectangle 4"/>
+          <p:cNvSpPr/>
+          <p:nvPr/>
+        </p:nvSpPr>
+        <p:spPr>
+          <a:xfrm>
+            <a:off x="5797149" y="1343926"/>
+            <a:ext cx="6010497" cy="4837658"/>
+          </a:xfrm>
+          <a:prstGeom prst="roundRect">
+            <a:avLst>
+              <a:gd name="adj" fmla="val 4000"/>
+            </a:avLst>
+          </a:prstGeom>
+          <a:solidFill>
+            <a:srgbClr val="E8EEF4"/>
+          </a:solidFill>
+          <a:ln>
+            <a:noFill/>
+          </a:ln>
+        </p:spPr>
+        <p:style>
+          <a:lnRef idx="1">
+            <a:schemeClr val="accent1"/>
+          </a:lnRef>
+          <a:fillRef idx="3">
+            <a:schemeClr val="accent1"/>
+          </a:fillRef>
+          <a:effectRef idx="2">
+            <a:schemeClr val="accent1"/>
+          </a:effectRef>
+          <a:fontRef idx="minor">
+            <a:schemeClr val="lt1"/>
+          </a:fontRef>
+        </p:style>
+        <p:txBody>
+          <a:bodyPr rtlCol="0" anchor="ctr"/>
+          <a:lstStyle/>
+          <a:p>
+            <a:pPr algn="ctr"/>
+          </a:p>
+        </p:txBody>
+      </p:sp>
+      <p:pic>
+        <p:nvPicPr>
+          <p:cNvPr id="6" name="Picture 5" descr="ilus-documentar-paso1.png"/>
+          <p:cNvPicPr>
+            <a:picLocks noChangeAspect="1"/>
+          </p:cNvPicPr>
+          <p:nvPr/>
+        </p:nvPicPr>
+        <p:blipFill>
+          <a:blip r:embed="rId2"/>
+          <a:stretch>
+            <a:fillRect/>
+          </a:stretch>
+        </p:blipFill>
+        <p:spPr>
+          <a:xfrm>
+            <a:off x="5870301" y="1417078"/>
+            <a:ext cx="5864193" cy="4691354"/>
+          </a:xfrm>
+          <a:prstGeom prst="rect">
+            <a:avLst/>
+          </a:prstGeom>
+        </p:spPr>
+      </p:pic>
+      <p:sp>
+        <p:nvSpPr>
+          <p:cNvPr id="7" name="TextBox 6"/>
           <p:cNvSpPr txBox="1"/>
           <p:nvPr/>
         </p:nvSpPr>
         <p:spPr>
           <a:xfrm>
-            <a:off x="457200" y="1170432"/>
-            <a:ext cx="11277295" cy="5230368"/>
+            <a:off x="457200" y="1353312"/>
+            <a:ext cx="5093061" cy="5047488"/>
           </a:xfrm>
           <a:prstGeom prst="rect">
             <a:avLst/>
@@ -10294,7 +10520,7 @@
       </p:sp>
       <p:sp>
         <p:nvSpPr>
-          <p:cNvPr id="6" name="TextBox 5"/>
+          <p:cNvPr id="8" name="TextBox 7"/>
           <p:cNvSpPr txBox="1"/>
           <p:nvPr/>
         </p:nvSpPr>
@@ -16504,14 +16730,83 @@
       </p:sp>
       <p:sp>
         <p:nvSpPr>
-          <p:cNvPr id="5" name="TextBox 4"/>
+          <p:cNvPr id="5" name="Rounded Rectangle 4"/>
+          <p:cNvSpPr/>
+          <p:nvPr/>
+        </p:nvSpPr>
+        <p:spPr>
+          <a:xfrm>
+            <a:off x="5797149" y="1343926"/>
+            <a:ext cx="6010497" cy="4837658"/>
+          </a:xfrm>
+          <a:prstGeom prst="roundRect">
+            <a:avLst>
+              <a:gd name="adj" fmla="val 4000"/>
+            </a:avLst>
+          </a:prstGeom>
+          <a:solidFill>
+            <a:srgbClr val="E8EEF4"/>
+          </a:solidFill>
+          <a:ln>
+            <a:noFill/>
+          </a:ln>
+        </p:spPr>
+        <p:style>
+          <a:lnRef idx="1">
+            <a:schemeClr val="accent1"/>
+          </a:lnRef>
+          <a:fillRef idx="3">
+            <a:schemeClr val="accent1"/>
+          </a:fillRef>
+          <a:effectRef idx="2">
+            <a:schemeClr val="accent1"/>
+          </a:effectRef>
+          <a:fontRef idx="minor">
+            <a:schemeClr val="lt1"/>
+          </a:fontRef>
+        </p:style>
+        <p:txBody>
+          <a:bodyPr rtlCol="0" anchor="ctr"/>
+          <a:lstStyle/>
+          <a:p>
+            <a:pPr algn="ctr"/>
+          </a:p>
+        </p:txBody>
+      </p:sp>
+      <p:pic>
+        <p:nvPicPr>
+          <p:cNvPr id="6" name="Picture 5" descr="ilus-nombres-paso1.png"/>
+          <p:cNvPicPr>
+            <a:picLocks noChangeAspect="1"/>
+          </p:cNvPicPr>
+          <p:nvPr/>
+        </p:nvPicPr>
+        <p:blipFill>
+          <a:blip r:embed="rId2"/>
+          <a:stretch>
+            <a:fillRect/>
+          </a:stretch>
+        </p:blipFill>
+        <p:spPr>
+          <a:xfrm>
+            <a:off x="5870301" y="1417078"/>
+            <a:ext cx="5864193" cy="4691354"/>
+          </a:xfrm>
+          <a:prstGeom prst="rect">
+            <a:avLst/>
+          </a:prstGeom>
+        </p:spPr>
+      </p:pic>
+      <p:sp>
+        <p:nvSpPr>
+          <p:cNvPr id="7" name="TextBox 6"/>
           <p:cNvSpPr txBox="1"/>
           <p:nvPr/>
         </p:nvSpPr>
         <p:spPr>
           <a:xfrm>
-            <a:off x="457200" y="1170432"/>
-            <a:ext cx="11277295" cy="5230368"/>
+            <a:off x="457200" y="1353312"/>
+            <a:ext cx="5093061" cy="5047488"/>
           </a:xfrm>
           <a:prstGeom prst="rect">
             <a:avLst/>
@@ -16591,7 +16886,7 @@
       </p:sp>
       <p:sp>
         <p:nvSpPr>
-          <p:cNvPr id="6" name="TextBox 5"/>
+          <p:cNvPr id="8" name="TextBox 7"/>
           <p:cNvSpPr txBox="1"/>
           <p:nvPr/>
         </p:nvSpPr>

--- a/Programacion II/Clases/Clase 8 - Documentacion y QA Javadoc y pruebas/Presentacion.pptx
+++ b/Programacion II/Clases/Clase 8 - Documentacion y QA Javadoc y pruebas/Presentacion.pptx
@@ -6917,7 +6917,7 @@
         <p:spPr>
           <a:xfrm>
             <a:off x="457200" y="1261872"/>
-            <a:ext cx="11277295" cy="4785925"/>
+            <a:ext cx="11277295" cy="3545691"/>
           </a:xfrm>
           <a:prstGeom prst="roundRect">
             <a:avLst>
@@ -7166,8 +7166,8 @@
         </p:nvSpPr>
         <p:spPr>
           <a:xfrm>
-            <a:off x="1188720" y="1719072"/>
-            <a:ext cx="10271455" cy="4191565"/>
+            <a:off x="685800" y="1719072"/>
+            <a:ext cx="502920" cy="2951331"/>
           </a:xfrm>
           <a:prstGeom prst="rect">
             <a:avLst/>
@@ -7180,674 +7180,179 @@
           </a:bodyPr>
           <a:lstStyle/>
           <a:p>
-            <a:pPr>
+            <a:pPr algn="r">
               <a:spcAft>
-                <a:spcPts val="385"/>
+                <a:spcPts val="300"/>
               </a:spcAft>
             </a:pPr>
             <a:r>
-              <a:rPr sz="1800" i="0" b="0">
-                <a:solidFill>
-                  <a:srgbClr val="D4D4D4"/>
-                </a:solidFill>
-                <a:latin typeface="Consolas"/>
-              </a:rPr>
-              <a:t>AgendaService</a:t>
-            </a:r>
-            <a:r>
-              <a:rPr sz="1800" i="0" b="0">
-                <a:solidFill>
-                  <a:srgbClr val="D4D4D4"/>
-                </a:solidFill>
-                <a:latin typeface="Consolas"/>
-              </a:rPr>
-              <a:t> </a:t>
-            </a:r>
-            <a:r>
-              <a:rPr sz="1800" i="0" b="0">
-                <a:solidFill>
-                  <a:srgbClr val="D4D4D4"/>
-                </a:solidFill>
-                <a:latin typeface="Consolas"/>
-              </a:rPr>
-              <a:t>agenda</a:t>
-            </a:r>
-            <a:r>
-              <a:rPr sz="1800" i="0" b="0">
-                <a:solidFill>
-                  <a:srgbClr val="D4D4D4"/>
-                </a:solidFill>
-                <a:latin typeface="Consolas"/>
-              </a:rPr>
-              <a:t> = </a:t>
-            </a:r>
-            <a:r>
-              <a:rPr sz="1800" i="0" b="0">
-                <a:solidFill>
-                  <a:srgbClr val="DCDCAA"/>
-                </a:solidFill>
-                <a:latin typeface="Consolas"/>
-              </a:rPr>
-              <a:t>nuevaAgenda</a:t>
-            </a:r>
-            <a:r>
-              <a:rPr sz="1800" i="0" b="0">
-                <a:solidFill>
-                  <a:srgbClr val="D4D4D4"/>
-                </a:solidFill>
-                <a:latin typeface="Consolas"/>
-              </a:rPr>
-              <a:t>();</a:t>
-            </a:r>
-          </a:p>
-          <a:p>
-            <a:pPr>
+              <a:rPr sz="1400" i="0" b="0">
+                <a:solidFill>
+                  <a:srgbClr val="858585"/>
+                </a:solidFill>
+                <a:latin typeface="Consolas"/>
+              </a:rPr>
+              <a:t>1</a:t>
+            </a:r>
+          </a:p>
+          <a:p>
+            <a:pPr algn="r">
               <a:spcAft>
-                <a:spcPts val="385"/>
+                <a:spcPts val="300"/>
               </a:spcAft>
             </a:pPr>
             <a:r>
-              <a:rPr sz="1800" i="0" b="0">
-                <a:solidFill>
-                  <a:srgbClr val="D4D4D4"/>
-                </a:solidFill>
-                <a:latin typeface="Consolas"/>
-              </a:rPr>
-              <a:t>Cita</a:t>
-            </a:r>
-            <a:r>
-              <a:rPr sz="1800" i="0" b="0">
-                <a:solidFill>
-                  <a:srgbClr val="D4D4D4"/>
-                </a:solidFill>
-                <a:latin typeface="Consolas"/>
-              </a:rPr>
-              <a:t> </a:t>
-            </a:r>
-            <a:r>
-              <a:rPr sz="1800" i="0" b="0">
-                <a:solidFill>
-                  <a:srgbClr val="D4D4D4"/>
-                </a:solidFill>
-                <a:latin typeface="Consolas"/>
-              </a:rPr>
-              <a:t>cita</a:t>
-            </a:r>
-            <a:r>
-              <a:rPr sz="1800" i="0" b="0">
-                <a:solidFill>
-                  <a:srgbClr val="D4D4D4"/>
-                </a:solidFill>
-                <a:latin typeface="Consolas"/>
-              </a:rPr>
-              <a:t> = </a:t>
-            </a:r>
-            <a:r>
-              <a:rPr sz="1800" i="0" b="0">
-                <a:solidFill>
-                  <a:srgbClr val="DCDCAA"/>
-                </a:solidFill>
-                <a:latin typeface="Consolas"/>
-              </a:rPr>
-              <a:t>agenda.agendar</a:t>
-            </a:r>
-            <a:r>
-              <a:rPr sz="1800" i="0" b="0">
-                <a:solidFill>
-                  <a:srgbClr val="D4D4D4"/>
-                </a:solidFill>
-                <a:latin typeface="Consolas"/>
-              </a:rPr>
-              <a:t>(</a:t>
-            </a:r>
-            <a:r>
-              <a:rPr sz="1800" i="0" b="0">
-                <a:solidFill>
-                  <a:srgbClr val="CE9178"/>
-                </a:solidFill>
-                <a:latin typeface="Consolas"/>
-              </a:rPr>
-              <a:t>"M-001"</a:t>
-            </a:r>
-            <a:r>
-              <a:rPr sz="1800" i="0" b="0">
-                <a:solidFill>
-                  <a:srgbClr val="D4D4D4"/>
-                </a:solidFill>
-                <a:latin typeface="Consolas"/>
-              </a:rPr>
-              <a:t>, </a:t>
-            </a:r>
-            <a:r>
-              <a:rPr sz="1800" i="0" b="0">
-                <a:solidFill>
-                  <a:srgbClr val="CE9178"/>
-                </a:solidFill>
-                <a:latin typeface="Consolas"/>
-              </a:rPr>
-              <a:t>"2026-09-30 10:00"</a:t>
-            </a:r>
-            <a:r>
-              <a:rPr sz="1800" i="0" b="0">
-                <a:solidFill>
-                  <a:srgbClr val="D4D4D4"/>
-                </a:solidFill>
-                <a:latin typeface="Consolas"/>
-              </a:rPr>
-              <a:t>);</a:t>
-            </a:r>
-          </a:p>
-          <a:p>
-            <a:pPr>
+              <a:rPr sz="1400" i="0" b="0">
+                <a:solidFill>
+                  <a:srgbClr val="858585"/>
+                </a:solidFill>
+                <a:latin typeface="Consolas"/>
+              </a:rPr>
+              <a:t>2</a:t>
+            </a:r>
+          </a:p>
+          <a:p>
+            <a:pPr algn="r">
               <a:spcAft>
-                <a:spcPts val="385"/>
+                <a:spcPts val="300"/>
               </a:spcAft>
             </a:pPr>
             <a:r>
-              <a:rPr sz="1800" i="0" b="0">
-                <a:solidFill>
-                  <a:srgbClr val="DCDCAA"/>
-                </a:solidFill>
-                <a:latin typeface="Consolas"/>
-              </a:rPr>
-              <a:t>verificar</a:t>
-            </a:r>
-            <a:r>
-              <a:rPr sz="1800" i="0" b="0">
-                <a:solidFill>
-                  <a:srgbClr val="D4D4D4"/>
-                </a:solidFill>
-                <a:latin typeface="Consolas"/>
-              </a:rPr>
-              <a:t>(</a:t>
-            </a:r>
-            <a:r>
-              <a:rPr sz="1800" i="0" b="0">
-                <a:solidFill>
-                  <a:srgbClr val="CE9178"/>
-                </a:solidFill>
-                <a:latin typeface="Consolas"/>
-              </a:rPr>
-              <a:t>"agendar_mascotaActiva_creaLaCita"</a:t>
-            </a:r>
-            <a:r>
-              <a:rPr sz="1800" i="0" b="0">
-                <a:solidFill>
-                  <a:srgbClr val="D4D4D4"/>
-                </a:solidFill>
-                <a:latin typeface="Consolas"/>
-              </a:rPr>
-              <a:t>, </a:t>
-            </a:r>
-            <a:r>
-              <a:rPr sz="1800" i="0" b="0">
-                <a:solidFill>
-                  <a:srgbClr val="D4D4D4"/>
-                </a:solidFill>
-                <a:latin typeface="Consolas"/>
-              </a:rPr>
-              <a:t>cita</a:t>
-            </a:r>
-            <a:r>
-              <a:rPr sz="1800" i="0" b="0">
-                <a:solidFill>
-                  <a:srgbClr val="D4D4D4"/>
-                </a:solidFill>
-                <a:latin typeface="Consolas"/>
-              </a:rPr>
-              <a:t> != </a:t>
-            </a:r>
-            <a:r>
-              <a:rPr sz="1800" i="0" b="0">
-                <a:solidFill>
-                  <a:srgbClr val="569CD6"/>
-                </a:solidFill>
-                <a:latin typeface="Consolas"/>
-              </a:rPr>
-              <a:t>null</a:t>
-            </a:r>
-            <a:r>
-              <a:rPr sz="1800" i="0" b="0">
-                <a:solidFill>
-                  <a:srgbClr val="D4D4D4"/>
-                </a:solidFill>
-                <a:latin typeface="Consolas"/>
-              </a:rPr>
-              <a:t> &amp;&amp; </a:t>
-            </a:r>
-            <a:r>
-              <a:rPr sz="1800" i="0" b="0">
-                <a:solidFill>
-                  <a:srgbClr val="DCDCAA"/>
-                </a:solidFill>
-                <a:latin typeface="Consolas"/>
-              </a:rPr>
-              <a:t>agenda.totalCitas</a:t>
-            </a:r>
-            <a:r>
-              <a:rPr sz="1800" i="0" b="0">
-                <a:solidFill>
-                  <a:srgbClr val="D4D4D4"/>
-                </a:solidFill>
-                <a:latin typeface="Consolas"/>
-              </a:rPr>
-              <a:t>() == </a:t>
-            </a:r>
-            <a:r>
-              <a:rPr sz="1800" i="0" b="0">
-                <a:solidFill>
-                  <a:srgbClr val="B5CEA8"/>
-                </a:solidFill>
-                <a:latin typeface="Consolas"/>
-              </a:rPr>
-              <a:t>1</a:t>
-            </a:r>
-            <a:r>
-              <a:rPr sz="1800" i="0" b="0">
-                <a:solidFill>
-                  <a:srgbClr val="D4D4D4"/>
-                </a:solidFill>
-                <a:latin typeface="Consolas"/>
-              </a:rPr>
-              <a:t>);</a:t>
-            </a:r>
-          </a:p>
-          <a:p>
-            <a:pPr>
+              <a:rPr sz="1400" i="0" b="0">
+                <a:solidFill>
+                  <a:srgbClr val="858585"/>
+                </a:solidFill>
+                <a:latin typeface="Consolas"/>
+              </a:rPr>
+              <a:t>3</a:t>
+            </a:r>
+          </a:p>
+          <a:p>
+            <a:pPr algn="r">
               <a:spcAft>
-                <a:spcPts val="385"/>
+                <a:spcPts val="300"/>
               </a:spcAft>
             </a:pPr>
             <a:r>
-              <a:rPr sz="1800" i="0" b="0">
-                <a:solidFill>
-                  <a:srgbClr val="D4D4D4"/>
-                </a:solidFill>
-                <a:latin typeface="Consolas"/>
-              </a:rPr>
-              <a:t/>
-            </a:r>
-          </a:p>
-          <a:p>
-            <a:pPr>
+              <a:rPr sz="1400" i="0" b="0">
+                <a:solidFill>
+                  <a:srgbClr val="858585"/>
+                </a:solidFill>
+                <a:latin typeface="Consolas"/>
+              </a:rPr>
+              <a:t>4</a:t>
+            </a:r>
+          </a:p>
+          <a:p>
+            <a:pPr algn="r">
               <a:spcAft>
-                <a:spcPts val="385"/>
+                <a:spcPts val="300"/>
               </a:spcAft>
             </a:pPr>
             <a:r>
-              <a:rPr sz="1800" i="0" b="0">
-                <a:solidFill>
-                  <a:srgbClr val="D4D4D4"/>
-                </a:solidFill>
-                <a:latin typeface="Consolas"/>
-              </a:rPr>
-              <a:t>agenda</a:t>
-            </a:r>
-            <a:r>
-              <a:rPr sz="1800" i="0" b="0">
-                <a:solidFill>
-                  <a:srgbClr val="D4D4D4"/>
-                </a:solidFill>
-                <a:latin typeface="Consolas"/>
-              </a:rPr>
-              <a:t> = </a:t>
-            </a:r>
-            <a:r>
-              <a:rPr sz="1800" i="0" b="0">
-                <a:solidFill>
-                  <a:srgbClr val="DCDCAA"/>
-                </a:solidFill>
-                <a:latin typeface="Consolas"/>
-              </a:rPr>
-              <a:t>nuevaAgenda</a:t>
-            </a:r>
-            <a:r>
-              <a:rPr sz="1800" i="0" b="0">
-                <a:solidFill>
-                  <a:srgbClr val="D4D4D4"/>
-                </a:solidFill>
-                <a:latin typeface="Consolas"/>
-              </a:rPr>
-              <a:t>();</a:t>
-            </a:r>
-          </a:p>
-          <a:p>
-            <a:pPr>
+              <a:rPr sz="1400" i="0" b="0">
+                <a:solidFill>
+                  <a:srgbClr val="858585"/>
+                </a:solidFill>
+                <a:latin typeface="Consolas"/>
+              </a:rPr>
+              <a:t>5</a:t>
+            </a:r>
+          </a:p>
+          <a:p>
+            <a:pPr algn="r">
               <a:spcAft>
-                <a:spcPts val="385"/>
+                <a:spcPts val="300"/>
               </a:spcAft>
             </a:pPr>
             <a:r>
-              <a:rPr sz="1800" i="0" b="0">
-                <a:solidFill>
-                  <a:srgbClr val="569CD6"/>
-                </a:solidFill>
-                <a:latin typeface="Consolas"/>
-              </a:rPr>
-              <a:t>try</a:t>
-            </a:r>
-            <a:r>
-              <a:rPr sz="1800" i="0" b="0">
-                <a:solidFill>
-                  <a:srgbClr val="D4D4D4"/>
-                </a:solidFill>
-                <a:latin typeface="Consolas"/>
-              </a:rPr>
-              <a:t> {</a:t>
-            </a:r>
-          </a:p>
-          <a:p>
-            <a:pPr>
+              <a:rPr sz="1400" i="0" b="0">
+                <a:solidFill>
+                  <a:srgbClr val="858585"/>
+                </a:solidFill>
+                <a:latin typeface="Consolas"/>
+              </a:rPr>
+              <a:t>6</a:t>
+            </a:r>
+          </a:p>
+          <a:p>
+            <a:pPr algn="r">
               <a:spcAft>
-                <a:spcPts val="385"/>
+                <a:spcPts val="300"/>
               </a:spcAft>
             </a:pPr>
             <a:r>
-              <a:rPr sz="1800" i="0" b="0">
-                <a:solidFill>
-                  <a:srgbClr val="D4D4D4"/>
-                </a:solidFill>
-                <a:latin typeface="Consolas"/>
-              </a:rPr>
-              <a:t>    </a:t>
-            </a:r>
-            <a:r>
-              <a:rPr sz="1800" i="0" b="0">
-                <a:solidFill>
-                  <a:srgbClr val="DCDCAA"/>
-                </a:solidFill>
-                <a:latin typeface="Consolas"/>
-              </a:rPr>
-              <a:t>agenda.agendar</a:t>
-            </a:r>
-            <a:r>
-              <a:rPr sz="1800" i="0" b="0">
-                <a:solidFill>
-                  <a:srgbClr val="D4D4D4"/>
-                </a:solidFill>
-                <a:latin typeface="Consolas"/>
-              </a:rPr>
-              <a:t>(</a:t>
-            </a:r>
-            <a:r>
-              <a:rPr sz="1800" i="0" b="0">
-                <a:solidFill>
-                  <a:srgbClr val="CE9178"/>
-                </a:solidFill>
-                <a:latin typeface="Consolas"/>
-              </a:rPr>
-              <a:t>"M-009"</a:t>
-            </a:r>
-            <a:r>
-              <a:rPr sz="1800" i="0" b="0">
-                <a:solidFill>
-                  <a:srgbClr val="D4D4D4"/>
-                </a:solidFill>
-                <a:latin typeface="Consolas"/>
-              </a:rPr>
-              <a:t>, </a:t>
-            </a:r>
-            <a:r>
-              <a:rPr sz="1800" i="0" b="0">
-                <a:solidFill>
-                  <a:srgbClr val="CE9178"/>
-                </a:solidFill>
-                <a:latin typeface="Consolas"/>
-              </a:rPr>
-              <a:t>"2026-09-30 10:00"</a:t>
-            </a:r>
-            <a:r>
-              <a:rPr sz="1800" i="0" b="0">
-                <a:solidFill>
-                  <a:srgbClr val="D4D4D4"/>
-                </a:solidFill>
-                <a:latin typeface="Consolas"/>
-              </a:rPr>
-              <a:t>);</a:t>
-            </a:r>
-          </a:p>
-          <a:p>
-            <a:pPr>
+              <a:rPr sz="1400" i="0" b="0">
+                <a:solidFill>
+                  <a:srgbClr val="858585"/>
+                </a:solidFill>
+                <a:latin typeface="Consolas"/>
+              </a:rPr>
+              <a:t>7</a:t>
+            </a:r>
+          </a:p>
+          <a:p>
+            <a:pPr algn="r">
               <a:spcAft>
-                <a:spcPts val="385"/>
+                <a:spcPts val="300"/>
               </a:spcAft>
             </a:pPr>
             <a:r>
-              <a:rPr sz="1800" i="0" b="0">
-                <a:solidFill>
-                  <a:srgbClr val="D4D4D4"/>
-                </a:solidFill>
-                <a:latin typeface="Consolas"/>
-              </a:rPr>
-              <a:t>    </a:t>
-            </a:r>
-            <a:r>
-              <a:rPr sz="1800" i="0" b="0">
-                <a:solidFill>
-                  <a:srgbClr val="DCDCAA"/>
-                </a:solidFill>
-                <a:latin typeface="Consolas"/>
-              </a:rPr>
-              <a:t>verificar</a:t>
-            </a:r>
-            <a:r>
-              <a:rPr sz="1800" i="0" b="0">
-                <a:solidFill>
-                  <a:srgbClr val="D4D4D4"/>
-                </a:solidFill>
-                <a:latin typeface="Consolas"/>
-              </a:rPr>
-              <a:t>(</a:t>
-            </a:r>
-            <a:r>
-              <a:rPr sz="1800" i="0" b="0">
-                <a:solidFill>
-                  <a:srgbClr val="CE9178"/>
-                </a:solidFill>
-                <a:latin typeface="Consolas"/>
-              </a:rPr>
-              <a:t>"agendar_mascotaInactiva_lanzaIllegalStateException"</a:t>
-            </a:r>
-            <a:r>
-              <a:rPr sz="1800" i="0" b="0">
-                <a:solidFill>
-                  <a:srgbClr val="D4D4D4"/>
-                </a:solidFill>
-                <a:latin typeface="Consolas"/>
-              </a:rPr>
-              <a:t>, </a:t>
-            </a:r>
-            <a:r>
-              <a:rPr sz="1800" i="0" b="0">
-                <a:solidFill>
-                  <a:srgbClr val="569CD6"/>
-                </a:solidFill>
-                <a:latin typeface="Consolas"/>
-              </a:rPr>
-              <a:t>false</a:t>
-            </a:r>
-            <a:r>
-              <a:rPr sz="1800" i="0" b="0">
-                <a:solidFill>
-                  <a:srgbClr val="D4D4D4"/>
-                </a:solidFill>
-                <a:latin typeface="Consolas"/>
-              </a:rPr>
-              <a:t>);</a:t>
-            </a:r>
-          </a:p>
-          <a:p>
-            <a:pPr>
+              <a:rPr sz="1400" i="0" b="0">
+                <a:solidFill>
+                  <a:srgbClr val="858585"/>
+                </a:solidFill>
+                <a:latin typeface="Consolas"/>
+              </a:rPr>
+              <a:t>8</a:t>
+            </a:r>
+          </a:p>
+          <a:p>
+            <a:pPr algn="r">
               <a:spcAft>
-                <a:spcPts val="385"/>
+                <a:spcPts val="300"/>
               </a:spcAft>
             </a:pPr>
             <a:r>
-              <a:rPr sz="1800" i="0" b="0">
-                <a:solidFill>
-                  <a:srgbClr val="D4D4D4"/>
-                </a:solidFill>
-                <a:latin typeface="Consolas"/>
-              </a:rPr>
-              <a:t>} </a:t>
-            </a:r>
-            <a:r>
-              <a:rPr sz="1800" i="0" b="0">
-                <a:solidFill>
-                  <a:srgbClr val="569CD6"/>
-                </a:solidFill>
-                <a:latin typeface="Consolas"/>
-              </a:rPr>
-              <a:t>catch</a:t>
-            </a:r>
-            <a:r>
-              <a:rPr sz="1800" i="0" b="0">
-                <a:solidFill>
-                  <a:srgbClr val="D4D4D4"/>
-                </a:solidFill>
-                <a:latin typeface="Consolas"/>
-              </a:rPr>
-              <a:t> (</a:t>
-            </a:r>
-            <a:r>
-              <a:rPr sz="1800" i="0" b="0">
-                <a:solidFill>
-                  <a:srgbClr val="D4D4D4"/>
-                </a:solidFill>
-                <a:latin typeface="Consolas"/>
-              </a:rPr>
-              <a:t>IllegalStateException</a:t>
-            </a:r>
-            <a:r>
-              <a:rPr sz="1800" i="0" b="0">
-                <a:solidFill>
-                  <a:srgbClr val="D4D4D4"/>
-                </a:solidFill>
-                <a:latin typeface="Consolas"/>
-              </a:rPr>
-              <a:t> </a:t>
-            </a:r>
-            <a:r>
-              <a:rPr sz="1800" i="0" b="0">
-                <a:solidFill>
-                  <a:srgbClr val="D4D4D4"/>
-                </a:solidFill>
-                <a:latin typeface="Consolas"/>
-              </a:rPr>
-              <a:t>e</a:t>
-            </a:r>
-            <a:r>
-              <a:rPr sz="1800" i="0" b="0">
-                <a:solidFill>
-                  <a:srgbClr val="D4D4D4"/>
-                </a:solidFill>
-                <a:latin typeface="Consolas"/>
-              </a:rPr>
-              <a:t>) {</a:t>
-            </a:r>
-          </a:p>
-          <a:p>
-            <a:pPr>
+              <a:rPr sz="1400" i="0" b="0">
+                <a:solidFill>
+                  <a:srgbClr val="858585"/>
+                </a:solidFill>
+                <a:latin typeface="Consolas"/>
+              </a:rPr>
+              <a:t>9</a:t>
+            </a:r>
+          </a:p>
+          <a:p>
+            <a:pPr algn="r">
               <a:spcAft>
-                <a:spcPts val="385"/>
+                <a:spcPts val="300"/>
               </a:spcAft>
             </a:pPr>
             <a:r>
-              <a:rPr sz="1800" i="0" b="0">
-                <a:solidFill>
-                  <a:srgbClr val="D4D4D4"/>
-                </a:solidFill>
-                <a:latin typeface="Consolas"/>
-              </a:rPr>
-              <a:t>    </a:t>
-            </a:r>
-            <a:r>
-              <a:rPr sz="1800" i="0" b="0">
-                <a:solidFill>
-                  <a:srgbClr val="DCDCAA"/>
-                </a:solidFill>
-                <a:latin typeface="Consolas"/>
-              </a:rPr>
-              <a:t>verificar</a:t>
-            </a:r>
-            <a:r>
-              <a:rPr sz="1800" i="0" b="0">
-                <a:solidFill>
-                  <a:srgbClr val="D4D4D4"/>
-                </a:solidFill>
-                <a:latin typeface="Consolas"/>
-              </a:rPr>
-              <a:t>(</a:t>
-            </a:r>
-            <a:r>
-              <a:rPr sz="1800" i="0" b="0">
-                <a:solidFill>
-                  <a:srgbClr val="CE9178"/>
-                </a:solidFill>
-                <a:latin typeface="Consolas"/>
-              </a:rPr>
-              <a:t>"agendar_mascotaInactiva_lanzaIllegalStateException"</a:t>
-            </a:r>
-            <a:r>
-              <a:rPr sz="1800" i="0" b="0">
-                <a:solidFill>
-                  <a:srgbClr val="D4D4D4"/>
-                </a:solidFill>
-                <a:latin typeface="Consolas"/>
-              </a:rPr>
-              <a:t>, </a:t>
-            </a:r>
-            <a:r>
-              <a:rPr sz="1800" i="0" b="0">
-                <a:solidFill>
-                  <a:srgbClr val="DCDCAA"/>
-                </a:solidFill>
-                <a:latin typeface="Consolas"/>
-              </a:rPr>
-              <a:t>agenda.totalCitas</a:t>
-            </a:r>
-            <a:r>
-              <a:rPr sz="1800" i="0" b="0">
-                <a:solidFill>
-                  <a:srgbClr val="D4D4D4"/>
-                </a:solidFill>
-                <a:latin typeface="Consolas"/>
-              </a:rPr>
-              <a:t>() == </a:t>
-            </a:r>
-            <a:r>
-              <a:rPr sz="1800" i="0" b="0">
-                <a:solidFill>
-                  <a:srgbClr val="B5CEA8"/>
-                </a:solidFill>
-                <a:latin typeface="Consolas"/>
-              </a:rPr>
-              <a:t>0</a:t>
-            </a:r>
-            <a:r>
-              <a:rPr sz="1800" i="0" b="0">
-                <a:solidFill>
-                  <a:srgbClr val="D4D4D4"/>
-                </a:solidFill>
-                <a:latin typeface="Consolas"/>
-              </a:rPr>
-              <a:t>);</a:t>
-            </a:r>
-          </a:p>
-          <a:p>
-            <a:pPr>
+              <a:rPr sz="1400" i="0" b="0">
+                <a:solidFill>
+                  <a:srgbClr val="858585"/>
+                </a:solidFill>
+                <a:latin typeface="Consolas"/>
+              </a:rPr>
+              <a:t>10</a:t>
+            </a:r>
+          </a:p>
+          <a:p>
+            <a:pPr algn="r">
               <a:spcAft>
-                <a:spcPts val="385"/>
+                <a:spcPts val="300"/>
               </a:spcAft>
             </a:pPr>
             <a:r>
-              <a:rPr sz="1800" i="0" b="0">
-                <a:solidFill>
-                  <a:srgbClr val="D4D4D4"/>
-                </a:solidFill>
-                <a:latin typeface="Consolas"/>
-              </a:rPr>
-              <a:t>}</a:t>
+              <a:rPr sz="1400" i="0" b="0">
+                <a:solidFill>
+                  <a:srgbClr val="858585"/>
+                </a:solidFill>
+                <a:latin typeface="Consolas"/>
+              </a:rPr>
+              <a:t>11</a:t>
             </a:r>
           </a:p>
         </p:txBody>
@@ -7860,8 +7365,8 @@
         </p:nvSpPr>
         <p:spPr>
           <a:xfrm>
-            <a:off x="457200" y="6035040"/>
-            <a:ext cx="11277295" cy="365760"/>
+            <a:off x="1188720" y="1719072"/>
+            <a:ext cx="10271455" cy="2951331"/>
           </a:xfrm>
           <a:prstGeom prst="rect">
             <a:avLst/>
@@ -7874,6 +7379,700 @@
           </a:bodyPr>
           <a:lstStyle/>
           <a:p>
+            <a:pPr>
+              <a:spcAft>
+                <a:spcPts val="300"/>
+              </a:spcAft>
+            </a:pPr>
+            <a:r>
+              <a:rPr sz="1400" i="0" b="0">
+                <a:solidFill>
+                  <a:srgbClr val="D4D4D4"/>
+                </a:solidFill>
+                <a:latin typeface="Consolas"/>
+              </a:rPr>
+              <a:t>AgendaService</a:t>
+            </a:r>
+            <a:r>
+              <a:rPr sz="1400" i="0" b="0">
+                <a:solidFill>
+                  <a:srgbClr val="D4D4D4"/>
+                </a:solidFill>
+                <a:latin typeface="Consolas"/>
+              </a:rPr>
+              <a:t> </a:t>
+            </a:r>
+            <a:r>
+              <a:rPr sz="1400" i="0" b="0">
+                <a:solidFill>
+                  <a:srgbClr val="D4D4D4"/>
+                </a:solidFill>
+                <a:latin typeface="Consolas"/>
+              </a:rPr>
+              <a:t>agenda</a:t>
+            </a:r>
+            <a:r>
+              <a:rPr sz="1400" i="0" b="0">
+                <a:solidFill>
+                  <a:srgbClr val="D4D4D4"/>
+                </a:solidFill>
+                <a:latin typeface="Consolas"/>
+              </a:rPr>
+              <a:t> = </a:t>
+            </a:r>
+            <a:r>
+              <a:rPr sz="1400" i="0" b="0">
+                <a:solidFill>
+                  <a:srgbClr val="DCDCAA"/>
+                </a:solidFill>
+                <a:latin typeface="Consolas"/>
+              </a:rPr>
+              <a:t>nuevaAgenda</a:t>
+            </a:r>
+            <a:r>
+              <a:rPr sz="1400" i="0" b="0">
+                <a:solidFill>
+                  <a:srgbClr val="D4D4D4"/>
+                </a:solidFill>
+                <a:latin typeface="Consolas"/>
+              </a:rPr>
+              <a:t>();</a:t>
+            </a:r>
+          </a:p>
+          <a:p>
+            <a:pPr>
+              <a:spcAft>
+                <a:spcPts val="300"/>
+              </a:spcAft>
+            </a:pPr>
+            <a:r>
+              <a:rPr sz="1400" i="0" b="0">
+                <a:solidFill>
+                  <a:srgbClr val="D4D4D4"/>
+                </a:solidFill>
+                <a:latin typeface="Consolas"/>
+              </a:rPr>
+              <a:t>Cita</a:t>
+            </a:r>
+            <a:r>
+              <a:rPr sz="1400" i="0" b="0">
+                <a:solidFill>
+                  <a:srgbClr val="D4D4D4"/>
+                </a:solidFill>
+                <a:latin typeface="Consolas"/>
+              </a:rPr>
+              <a:t> </a:t>
+            </a:r>
+            <a:r>
+              <a:rPr sz="1400" i="0" b="0">
+                <a:solidFill>
+                  <a:srgbClr val="D4D4D4"/>
+                </a:solidFill>
+                <a:latin typeface="Consolas"/>
+              </a:rPr>
+              <a:t>cita</a:t>
+            </a:r>
+            <a:r>
+              <a:rPr sz="1400" i="0" b="0">
+                <a:solidFill>
+                  <a:srgbClr val="D4D4D4"/>
+                </a:solidFill>
+                <a:latin typeface="Consolas"/>
+              </a:rPr>
+              <a:t> = </a:t>
+            </a:r>
+            <a:r>
+              <a:rPr sz="1400" i="0" b="0">
+                <a:solidFill>
+                  <a:srgbClr val="DCDCAA"/>
+                </a:solidFill>
+                <a:latin typeface="Consolas"/>
+              </a:rPr>
+              <a:t>agenda.agendar</a:t>
+            </a:r>
+            <a:r>
+              <a:rPr sz="1400" i="0" b="0">
+                <a:solidFill>
+                  <a:srgbClr val="D4D4D4"/>
+                </a:solidFill>
+                <a:latin typeface="Consolas"/>
+              </a:rPr>
+              <a:t>(</a:t>
+            </a:r>
+            <a:r>
+              <a:rPr sz="1400" i="0" b="0">
+                <a:solidFill>
+                  <a:srgbClr val="CE9178"/>
+                </a:solidFill>
+                <a:latin typeface="Consolas"/>
+              </a:rPr>
+              <a:t>"M-001"</a:t>
+            </a:r>
+            <a:r>
+              <a:rPr sz="1400" i="0" b="0">
+                <a:solidFill>
+                  <a:srgbClr val="D4D4D4"/>
+                </a:solidFill>
+                <a:latin typeface="Consolas"/>
+              </a:rPr>
+              <a:t>, </a:t>
+            </a:r>
+            <a:r>
+              <a:rPr sz="1400" i="0" b="0">
+                <a:solidFill>
+                  <a:srgbClr val="CE9178"/>
+                </a:solidFill>
+                <a:latin typeface="Consolas"/>
+              </a:rPr>
+              <a:t>"2026-09-30 10:00"</a:t>
+            </a:r>
+            <a:r>
+              <a:rPr sz="1400" i="0" b="0">
+                <a:solidFill>
+                  <a:srgbClr val="D4D4D4"/>
+                </a:solidFill>
+                <a:latin typeface="Consolas"/>
+              </a:rPr>
+              <a:t>);</a:t>
+            </a:r>
+          </a:p>
+          <a:p>
+            <a:pPr>
+              <a:spcAft>
+                <a:spcPts val="300"/>
+              </a:spcAft>
+            </a:pPr>
+            <a:r>
+              <a:rPr sz="1400" i="0" b="0">
+                <a:solidFill>
+                  <a:srgbClr val="DCDCAA"/>
+                </a:solidFill>
+                <a:latin typeface="Consolas"/>
+              </a:rPr>
+              <a:t>verificar</a:t>
+            </a:r>
+            <a:r>
+              <a:rPr sz="1400" i="0" b="0">
+                <a:solidFill>
+                  <a:srgbClr val="D4D4D4"/>
+                </a:solidFill>
+                <a:latin typeface="Consolas"/>
+              </a:rPr>
+              <a:t>(</a:t>
+            </a:r>
+            <a:r>
+              <a:rPr sz="1400" i="0" b="0">
+                <a:solidFill>
+                  <a:srgbClr val="CE9178"/>
+                </a:solidFill>
+                <a:latin typeface="Consolas"/>
+              </a:rPr>
+              <a:t>"agendar_mascotaActiva_creaLaCita"</a:t>
+            </a:r>
+            <a:r>
+              <a:rPr sz="1400" i="0" b="0">
+                <a:solidFill>
+                  <a:srgbClr val="D4D4D4"/>
+                </a:solidFill>
+                <a:latin typeface="Consolas"/>
+              </a:rPr>
+              <a:t>, </a:t>
+            </a:r>
+            <a:r>
+              <a:rPr sz="1400" i="0" b="0">
+                <a:solidFill>
+                  <a:srgbClr val="D4D4D4"/>
+                </a:solidFill>
+                <a:latin typeface="Consolas"/>
+              </a:rPr>
+              <a:t>cita</a:t>
+            </a:r>
+            <a:r>
+              <a:rPr sz="1400" i="0" b="0">
+                <a:solidFill>
+                  <a:srgbClr val="D4D4D4"/>
+                </a:solidFill>
+                <a:latin typeface="Consolas"/>
+              </a:rPr>
+              <a:t> != </a:t>
+            </a:r>
+            <a:r>
+              <a:rPr sz="1400" i="0" b="0">
+                <a:solidFill>
+                  <a:srgbClr val="569CD6"/>
+                </a:solidFill>
+                <a:latin typeface="Consolas"/>
+              </a:rPr>
+              <a:t>null</a:t>
+            </a:r>
+            <a:r>
+              <a:rPr sz="1400" i="0" b="0">
+                <a:solidFill>
+                  <a:srgbClr val="D4D4D4"/>
+                </a:solidFill>
+                <a:latin typeface="Consolas"/>
+              </a:rPr>
+              <a:t> &amp;&amp; </a:t>
+            </a:r>
+            <a:r>
+              <a:rPr sz="1400" i="0" b="0">
+                <a:solidFill>
+                  <a:srgbClr val="DCDCAA"/>
+                </a:solidFill>
+                <a:latin typeface="Consolas"/>
+              </a:rPr>
+              <a:t>agenda.totalCitas</a:t>
+            </a:r>
+            <a:r>
+              <a:rPr sz="1400" i="0" b="0">
+                <a:solidFill>
+                  <a:srgbClr val="D4D4D4"/>
+                </a:solidFill>
+                <a:latin typeface="Consolas"/>
+              </a:rPr>
+              <a:t>() == </a:t>
+            </a:r>
+            <a:r>
+              <a:rPr sz="1400" i="0" b="0">
+                <a:solidFill>
+                  <a:srgbClr val="B5CEA8"/>
+                </a:solidFill>
+                <a:latin typeface="Consolas"/>
+              </a:rPr>
+              <a:t>1</a:t>
+            </a:r>
+            <a:r>
+              <a:rPr sz="1400" i="0" b="0">
+                <a:solidFill>
+                  <a:srgbClr val="D4D4D4"/>
+                </a:solidFill>
+                <a:latin typeface="Consolas"/>
+              </a:rPr>
+              <a:t>);</a:t>
+            </a:r>
+          </a:p>
+          <a:p>
+            <a:pPr>
+              <a:spcAft>
+                <a:spcPts val="300"/>
+              </a:spcAft>
+            </a:pPr>
+            <a:r>
+              <a:rPr sz="1400" i="0" b="0">
+                <a:solidFill>
+                  <a:srgbClr val="D4D4D4"/>
+                </a:solidFill>
+                <a:latin typeface="Consolas"/>
+              </a:rPr>
+              <a:t/>
+            </a:r>
+          </a:p>
+          <a:p>
+            <a:pPr>
+              <a:spcAft>
+                <a:spcPts val="300"/>
+              </a:spcAft>
+            </a:pPr>
+            <a:r>
+              <a:rPr sz="1400" i="0" b="0">
+                <a:solidFill>
+                  <a:srgbClr val="D4D4D4"/>
+                </a:solidFill>
+                <a:latin typeface="Consolas"/>
+              </a:rPr>
+              <a:t>agenda</a:t>
+            </a:r>
+            <a:r>
+              <a:rPr sz="1400" i="0" b="0">
+                <a:solidFill>
+                  <a:srgbClr val="D4D4D4"/>
+                </a:solidFill>
+                <a:latin typeface="Consolas"/>
+              </a:rPr>
+              <a:t> = </a:t>
+            </a:r>
+            <a:r>
+              <a:rPr sz="1400" i="0" b="0">
+                <a:solidFill>
+                  <a:srgbClr val="DCDCAA"/>
+                </a:solidFill>
+                <a:latin typeface="Consolas"/>
+              </a:rPr>
+              <a:t>nuevaAgenda</a:t>
+            </a:r>
+            <a:r>
+              <a:rPr sz="1400" i="0" b="0">
+                <a:solidFill>
+                  <a:srgbClr val="D4D4D4"/>
+                </a:solidFill>
+                <a:latin typeface="Consolas"/>
+              </a:rPr>
+              <a:t>();</a:t>
+            </a:r>
+          </a:p>
+          <a:p>
+            <a:pPr>
+              <a:spcAft>
+                <a:spcPts val="300"/>
+              </a:spcAft>
+            </a:pPr>
+            <a:r>
+              <a:rPr sz="1400" i="0" b="0">
+                <a:solidFill>
+                  <a:srgbClr val="569CD6"/>
+                </a:solidFill>
+                <a:latin typeface="Consolas"/>
+              </a:rPr>
+              <a:t>try</a:t>
+            </a:r>
+            <a:r>
+              <a:rPr sz="1400" i="0" b="0">
+                <a:solidFill>
+                  <a:srgbClr val="D4D4D4"/>
+                </a:solidFill>
+                <a:latin typeface="Consolas"/>
+              </a:rPr>
+              <a:t> {</a:t>
+            </a:r>
+          </a:p>
+          <a:p>
+            <a:pPr>
+              <a:spcAft>
+                <a:spcPts val="300"/>
+              </a:spcAft>
+            </a:pPr>
+            <a:r>
+              <a:rPr sz="1400" i="0" b="0">
+                <a:solidFill>
+                  <a:srgbClr val="D4D4D4"/>
+                </a:solidFill>
+                <a:latin typeface="Consolas"/>
+              </a:rPr>
+              <a:t>    </a:t>
+            </a:r>
+            <a:r>
+              <a:rPr sz="1400" i="0" b="0">
+                <a:solidFill>
+                  <a:srgbClr val="DCDCAA"/>
+                </a:solidFill>
+                <a:latin typeface="Consolas"/>
+              </a:rPr>
+              <a:t>agenda.agendar</a:t>
+            </a:r>
+            <a:r>
+              <a:rPr sz="1400" i="0" b="0">
+                <a:solidFill>
+                  <a:srgbClr val="D4D4D4"/>
+                </a:solidFill>
+                <a:latin typeface="Consolas"/>
+              </a:rPr>
+              <a:t>(</a:t>
+            </a:r>
+            <a:r>
+              <a:rPr sz="1400" i="0" b="0">
+                <a:solidFill>
+                  <a:srgbClr val="CE9178"/>
+                </a:solidFill>
+                <a:latin typeface="Consolas"/>
+              </a:rPr>
+              <a:t>"M-009"</a:t>
+            </a:r>
+            <a:r>
+              <a:rPr sz="1400" i="0" b="0">
+                <a:solidFill>
+                  <a:srgbClr val="D4D4D4"/>
+                </a:solidFill>
+                <a:latin typeface="Consolas"/>
+              </a:rPr>
+              <a:t>, </a:t>
+            </a:r>
+            <a:r>
+              <a:rPr sz="1400" i="0" b="0">
+                <a:solidFill>
+                  <a:srgbClr val="CE9178"/>
+                </a:solidFill>
+                <a:latin typeface="Consolas"/>
+              </a:rPr>
+              <a:t>"2026-09-30 10:00"</a:t>
+            </a:r>
+            <a:r>
+              <a:rPr sz="1400" i="0" b="0">
+                <a:solidFill>
+                  <a:srgbClr val="D4D4D4"/>
+                </a:solidFill>
+                <a:latin typeface="Consolas"/>
+              </a:rPr>
+              <a:t>);</a:t>
+            </a:r>
+          </a:p>
+          <a:p>
+            <a:pPr>
+              <a:spcAft>
+                <a:spcPts val="300"/>
+              </a:spcAft>
+            </a:pPr>
+            <a:r>
+              <a:rPr sz="1400" i="0" b="0">
+                <a:solidFill>
+                  <a:srgbClr val="D4D4D4"/>
+                </a:solidFill>
+                <a:latin typeface="Consolas"/>
+              </a:rPr>
+              <a:t>    </a:t>
+            </a:r>
+            <a:r>
+              <a:rPr sz="1400" i="0" b="0">
+                <a:solidFill>
+                  <a:srgbClr val="DCDCAA"/>
+                </a:solidFill>
+                <a:latin typeface="Consolas"/>
+              </a:rPr>
+              <a:t>verificar</a:t>
+            </a:r>
+            <a:r>
+              <a:rPr sz="1400" i="0" b="0">
+                <a:solidFill>
+                  <a:srgbClr val="D4D4D4"/>
+                </a:solidFill>
+                <a:latin typeface="Consolas"/>
+              </a:rPr>
+              <a:t>(</a:t>
+            </a:r>
+            <a:r>
+              <a:rPr sz="1400" i="0" b="0">
+                <a:solidFill>
+                  <a:srgbClr val="CE9178"/>
+                </a:solidFill>
+                <a:latin typeface="Consolas"/>
+              </a:rPr>
+              <a:t>"agendar_mascotaInactiva_lanzaIllegalStateException"</a:t>
+            </a:r>
+            <a:r>
+              <a:rPr sz="1400" i="0" b="0">
+                <a:solidFill>
+                  <a:srgbClr val="D4D4D4"/>
+                </a:solidFill>
+                <a:latin typeface="Consolas"/>
+              </a:rPr>
+              <a:t>, </a:t>
+            </a:r>
+            <a:r>
+              <a:rPr sz="1400" i="0" b="0">
+                <a:solidFill>
+                  <a:srgbClr val="569CD6"/>
+                </a:solidFill>
+                <a:latin typeface="Consolas"/>
+              </a:rPr>
+              <a:t>false</a:t>
+            </a:r>
+            <a:r>
+              <a:rPr sz="1400" i="0" b="0">
+                <a:solidFill>
+                  <a:srgbClr val="D4D4D4"/>
+                </a:solidFill>
+                <a:latin typeface="Consolas"/>
+              </a:rPr>
+              <a:t>);</a:t>
+            </a:r>
+          </a:p>
+          <a:p>
+            <a:pPr>
+              <a:spcAft>
+                <a:spcPts val="300"/>
+              </a:spcAft>
+            </a:pPr>
+            <a:r>
+              <a:rPr sz="1400" i="0" b="0">
+                <a:solidFill>
+                  <a:srgbClr val="D4D4D4"/>
+                </a:solidFill>
+                <a:latin typeface="Consolas"/>
+              </a:rPr>
+              <a:t>} </a:t>
+            </a:r>
+            <a:r>
+              <a:rPr sz="1400" i="0" b="0">
+                <a:solidFill>
+                  <a:srgbClr val="569CD6"/>
+                </a:solidFill>
+                <a:latin typeface="Consolas"/>
+              </a:rPr>
+              <a:t>catch</a:t>
+            </a:r>
+            <a:r>
+              <a:rPr sz="1400" i="0" b="0">
+                <a:solidFill>
+                  <a:srgbClr val="D4D4D4"/>
+                </a:solidFill>
+                <a:latin typeface="Consolas"/>
+              </a:rPr>
+              <a:t> (</a:t>
+            </a:r>
+            <a:r>
+              <a:rPr sz="1400" i="0" b="0">
+                <a:solidFill>
+                  <a:srgbClr val="D4D4D4"/>
+                </a:solidFill>
+                <a:latin typeface="Consolas"/>
+              </a:rPr>
+              <a:t>IllegalStateException</a:t>
+            </a:r>
+            <a:r>
+              <a:rPr sz="1400" i="0" b="0">
+                <a:solidFill>
+                  <a:srgbClr val="D4D4D4"/>
+                </a:solidFill>
+                <a:latin typeface="Consolas"/>
+              </a:rPr>
+              <a:t> </a:t>
+            </a:r>
+            <a:r>
+              <a:rPr sz="1400" i="0" b="0">
+                <a:solidFill>
+                  <a:srgbClr val="D4D4D4"/>
+                </a:solidFill>
+                <a:latin typeface="Consolas"/>
+              </a:rPr>
+              <a:t>e</a:t>
+            </a:r>
+            <a:r>
+              <a:rPr sz="1400" i="0" b="0">
+                <a:solidFill>
+                  <a:srgbClr val="D4D4D4"/>
+                </a:solidFill>
+                <a:latin typeface="Consolas"/>
+              </a:rPr>
+              <a:t>) {</a:t>
+            </a:r>
+          </a:p>
+          <a:p>
+            <a:pPr>
+              <a:spcAft>
+                <a:spcPts val="300"/>
+              </a:spcAft>
+            </a:pPr>
+            <a:r>
+              <a:rPr sz="1400" i="0" b="0">
+                <a:solidFill>
+                  <a:srgbClr val="D4D4D4"/>
+                </a:solidFill>
+                <a:latin typeface="Consolas"/>
+              </a:rPr>
+              <a:t>    </a:t>
+            </a:r>
+            <a:r>
+              <a:rPr sz="1400" i="0" b="0">
+                <a:solidFill>
+                  <a:srgbClr val="DCDCAA"/>
+                </a:solidFill>
+                <a:latin typeface="Consolas"/>
+              </a:rPr>
+              <a:t>verificar</a:t>
+            </a:r>
+            <a:r>
+              <a:rPr sz="1400" i="0" b="0">
+                <a:solidFill>
+                  <a:srgbClr val="D4D4D4"/>
+                </a:solidFill>
+                <a:latin typeface="Consolas"/>
+              </a:rPr>
+              <a:t>(</a:t>
+            </a:r>
+            <a:r>
+              <a:rPr sz="1400" i="0" b="0">
+                <a:solidFill>
+                  <a:srgbClr val="CE9178"/>
+                </a:solidFill>
+                <a:latin typeface="Consolas"/>
+              </a:rPr>
+              <a:t>"agendar_mascotaInactiva_lanzaIllegalStateException"</a:t>
+            </a:r>
+            <a:r>
+              <a:rPr sz="1400" i="0" b="0">
+                <a:solidFill>
+                  <a:srgbClr val="D4D4D4"/>
+                </a:solidFill>
+                <a:latin typeface="Consolas"/>
+              </a:rPr>
+              <a:t>, </a:t>
+            </a:r>
+            <a:r>
+              <a:rPr sz="1400" i="0" b="0">
+                <a:solidFill>
+                  <a:srgbClr val="DCDCAA"/>
+                </a:solidFill>
+                <a:latin typeface="Consolas"/>
+              </a:rPr>
+              <a:t>agenda.totalCitas</a:t>
+            </a:r>
+            <a:r>
+              <a:rPr sz="1400" i="0" b="0">
+                <a:solidFill>
+                  <a:srgbClr val="D4D4D4"/>
+                </a:solidFill>
+                <a:latin typeface="Consolas"/>
+              </a:rPr>
+              <a:t>() == </a:t>
+            </a:r>
+            <a:r>
+              <a:rPr sz="1400" i="0" b="0">
+                <a:solidFill>
+                  <a:srgbClr val="B5CEA8"/>
+                </a:solidFill>
+                <a:latin typeface="Consolas"/>
+              </a:rPr>
+              <a:t>0</a:t>
+            </a:r>
+            <a:r>
+              <a:rPr sz="1400" i="0" b="0">
+                <a:solidFill>
+                  <a:srgbClr val="D4D4D4"/>
+                </a:solidFill>
+                <a:latin typeface="Consolas"/>
+              </a:rPr>
+              <a:t>);</a:t>
+            </a:r>
+          </a:p>
+          <a:p>
+            <a:pPr>
+              <a:spcAft>
+                <a:spcPts val="300"/>
+              </a:spcAft>
+            </a:pPr>
+            <a:r>
+              <a:rPr sz="1400" i="0" b="0">
+                <a:solidFill>
+                  <a:srgbClr val="D4D4D4"/>
+                </a:solidFill>
+                <a:latin typeface="Consolas"/>
+              </a:rPr>
+              <a:t>}</a:t>
+            </a:r>
+          </a:p>
+        </p:txBody>
+      </p:sp>
+      <p:sp>
+        <p:nvSpPr>
+          <p:cNvPr id="13" name="TextBox 12"/>
+          <p:cNvSpPr txBox="1"/>
+          <p:nvPr/>
+        </p:nvSpPr>
+        <p:spPr>
+          <a:xfrm>
+            <a:off x="457200" y="6035040"/>
+            <a:ext cx="11277295" cy="365760"/>
+          </a:xfrm>
+          <a:prstGeom prst="rect">
+            <a:avLst/>
+          </a:prstGeom>
+          <a:noFill/>
+        </p:spPr>
+        <p:txBody>
+          <a:bodyPr wrap="square">
+            <a:spAutoFit/>
+          </a:bodyPr>
+          <a:lstStyle/>
+          <a:p>
             <a:pPr algn="ctr"/>
             <a:r>
               <a:rPr sz="1300" b="0" i="1">
@@ -7889,7 +8088,7 @@
       </p:sp>
       <p:sp>
         <p:nvSpPr>
-          <p:cNvPr id="13" name="TextBox 12"/>
+          <p:cNvPr id="14" name="TextBox 13"/>
           <p:cNvSpPr txBox="1"/>
           <p:nvPr/>
         </p:nvSpPr>
@@ -13132,7 +13331,7 @@
         <p:spPr>
           <a:xfrm>
             <a:off x="457200" y="1261872"/>
-            <a:ext cx="11277295" cy="4745196"/>
+            <a:ext cx="11277295" cy="4528155"/>
           </a:xfrm>
           <a:prstGeom prst="roundRect">
             <a:avLst>
@@ -13382,7 +13581,7 @@
         <p:spPr>
           <a:xfrm>
             <a:off x="685800" y="1719072"/>
-            <a:ext cx="502920" cy="4150836"/>
+            <a:ext cx="502920" cy="3933795"/>
           </a:xfrm>
           <a:prstGeom prst="rect">
             <a:avLst/>
@@ -13397,11 +13596,11 @@
           <a:p>
             <a:pPr algn="r">
               <a:spcAft>
-                <a:spcPts val="342"/>
+                <a:spcPts val="321"/>
               </a:spcAft>
             </a:pPr>
             <a:r>
-              <a:rPr sz="1600" i="0" b="0">
+              <a:rPr sz="1500" i="0" b="0">
                 <a:solidFill>
                   <a:srgbClr val="858585"/>
                 </a:solidFill>
@@ -13413,11 +13612,11 @@
           <a:p>
             <a:pPr algn="r">
               <a:spcAft>
-                <a:spcPts val="342"/>
+                <a:spcPts val="321"/>
               </a:spcAft>
             </a:pPr>
             <a:r>
-              <a:rPr sz="1600" i="0" b="0">
+              <a:rPr sz="1500" i="0" b="0">
                 <a:solidFill>
                   <a:srgbClr val="858585"/>
                 </a:solidFill>
@@ -13429,11 +13628,11 @@
           <a:p>
             <a:pPr algn="r">
               <a:spcAft>
-                <a:spcPts val="342"/>
+                <a:spcPts val="321"/>
               </a:spcAft>
             </a:pPr>
             <a:r>
-              <a:rPr sz="1600" i="0" b="0">
+              <a:rPr sz="1500" i="0" b="0">
                 <a:solidFill>
                   <a:srgbClr val="858585"/>
                 </a:solidFill>
@@ -13445,11 +13644,11 @@
           <a:p>
             <a:pPr algn="r">
               <a:spcAft>
-                <a:spcPts val="342"/>
+                <a:spcPts val="321"/>
               </a:spcAft>
             </a:pPr>
             <a:r>
-              <a:rPr sz="1600" i="0" b="0">
+              <a:rPr sz="1500" i="0" b="0">
                 <a:solidFill>
                   <a:srgbClr val="858585"/>
                 </a:solidFill>
@@ -13461,11 +13660,11 @@
           <a:p>
             <a:pPr algn="r">
               <a:spcAft>
-                <a:spcPts val="342"/>
+                <a:spcPts val="321"/>
               </a:spcAft>
             </a:pPr>
             <a:r>
-              <a:rPr sz="1600" i="0" b="0">
+              <a:rPr sz="1500" i="0" b="0">
                 <a:solidFill>
                   <a:srgbClr val="858585"/>
                 </a:solidFill>
@@ -13477,11 +13676,11 @@
           <a:p>
             <a:pPr algn="r">
               <a:spcAft>
-                <a:spcPts val="342"/>
+                <a:spcPts val="321"/>
               </a:spcAft>
             </a:pPr>
             <a:r>
-              <a:rPr sz="1600" i="0" b="0">
+              <a:rPr sz="1500" i="0" b="0">
                 <a:solidFill>
                   <a:srgbClr val="858585"/>
                 </a:solidFill>
@@ -13493,11 +13692,11 @@
           <a:p>
             <a:pPr algn="r">
               <a:spcAft>
-                <a:spcPts val="342"/>
+                <a:spcPts val="321"/>
               </a:spcAft>
             </a:pPr>
             <a:r>
-              <a:rPr sz="1600" i="0" b="0">
+              <a:rPr sz="1500" i="0" b="0">
                 <a:solidFill>
                   <a:srgbClr val="858585"/>
                 </a:solidFill>
@@ -13509,11 +13708,11 @@
           <a:p>
             <a:pPr algn="r">
               <a:spcAft>
-                <a:spcPts val="342"/>
+                <a:spcPts val="321"/>
               </a:spcAft>
             </a:pPr>
             <a:r>
-              <a:rPr sz="1600" i="0" b="0">
+              <a:rPr sz="1500" i="0" b="0">
                 <a:solidFill>
                   <a:srgbClr val="858585"/>
                 </a:solidFill>
@@ -13525,11 +13724,11 @@
           <a:p>
             <a:pPr algn="r">
               <a:spcAft>
-                <a:spcPts val="342"/>
+                <a:spcPts val="321"/>
               </a:spcAft>
             </a:pPr>
             <a:r>
-              <a:rPr sz="1600" i="0" b="0">
+              <a:rPr sz="1500" i="0" b="0">
                 <a:solidFill>
                   <a:srgbClr val="858585"/>
                 </a:solidFill>
@@ -13541,11 +13740,11 @@
           <a:p>
             <a:pPr algn="r">
               <a:spcAft>
-                <a:spcPts val="342"/>
+                <a:spcPts val="321"/>
               </a:spcAft>
             </a:pPr>
             <a:r>
-              <a:rPr sz="1600" i="0" b="0">
+              <a:rPr sz="1500" i="0" b="0">
                 <a:solidFill>
                   <a:srgbClr val="858585"/>
                 </a:solidFill>
@@ -13557,11 +13756,11 @@
           <a:p>
             <a:pPr algn="r">
               <a:spcAft>
-                <a:spcPts val="342"/>
+                <a:spcPts val="321"/>
               </a:spcAft>
             </a:pPr>
             <a:r>
-              <a:rPr sz="1600" i="0" b="0">
+              <a:rPr sz="1500" i="0" b="0">
                 <a:solidFill>
                   <a:srgbClr val="858585"/>
                 </a:solidFill>
@@ -13573,11 +13772,11 @@
           <a:p>
             <a:pPr algn="r">
               <a:spcAft>
-                <a:spcPts val="342"/>
+                <a:spcPts val="321"/>
               </a:spcAft>
             </a:pPr>
             <a:r>
-              <a:rPr sz="1600" i="0" b="0">
+              <a:rPr sz="1500" i="0" b="0">
                 <a:solidFill>
                   <a:srgbClr val="858585"/>
                 </a:solidFill>
@@ -13589,11 +13788,11 @@
           <a:p>
             <a:pPr algn="r">
               <a:spcAft>
-                <a:spcPts val="342"/>
+                <a:spcPts val="321"/>
               </a:spcAft>
             </a:pPr>
             <a:r>
-              <a:rPr sz="1600" i="0" b="0">
+              <a:rPr sz="1500" i="0" b="0">
                 <a:solidFill>
                   <a:srgbClr val="858585"/>
                 </a:solidFill>
@@ -13605,11 +13804,11 @@
           <a:p>
             <a:pPr algn="r">
               <a:spcAft>
-                <a:spcPts val="342"/>
+                <a:spcPts val="321"/>
               </a:spcAft>
             </a:pPr>
             <a:r>
-              <a:rPr sz="1600" i="0" b="0">
+              <a:rPr sz="1500" i="0" b="0">
                 <a:solidFill>
                   <a:srgbClr val="858585"/>
                 </a:solidFill>
@@ -13629,7 +13828,7 @@
         <p:spPr>
           <a:xfrm>
             <a:off x="1188720" y="1719072"/>
-            <a:ext cx="10271455" cy="4150836"/>
+            <a:ext cx="10271455" cy="3933795"/>
           </a:xfrm>
           <a:prstGeom prst="rect">
             <a:avLst/>
@@ -13644,11 +13843,11 @@
           <a:p>
             <a:pPr>
               <a:spcAft>
-                <a:spcPts val="342"/>
+                <a:spcPts val="321"/>
               </a:spcAft>
             </a:pPr>
             <a:r>
-              <a:rPr sz="1600" i="1" b="0">
+              <a:rPr sz="1500" i="1" b="0">
                 <a:solidFill>
                   <a:srgbClr val="6A9955"/>
                 </a:solidFill>
@@ -13660,11 +13859,11 @@
           <a:p>
             <a:pPr>
               <a:spcAft>
-                <a:spcPts val="342"/>
+                <a:spcPts val="321"/>
               </a:spcAft>
             </a:pPr>
             <a:r>
-              <a:rPr sz="1600" i="0" b="0">
+              <a:rPr sz="1500" i="0" b="0">
                 <a:solidFill>
                   <a:srgbClr val="D4D4D4"/>
                 </a:solidFill>
@@ -13673,7 +13872,7 @@
               <a:t> * </a:t>
             </a:r>
             <a:r>
-              <a:rPr sz="1600" i="0" b="0">
+              <a:rPr sz="1500" i="0" b="0">
                 <a:solidFill>
                   <a:srgbClr val="D4D4D4"/>
                 </a:solidFill>
@@ -13682,7 +13881,7 @@
               <a:t>Agenda</a:t>
             </a:r>
             <a:r>
-              <a:rPr sz="1600" i="0" b="0">
+              <a:rPr sz="1500" i="0" b="0">
                 <a:solidFill>
                   <a:srgbClr val="D4D4D4"/>
                 </a:solidFill>
@@ -13691,7 +13890,7 @@
               <a:t> </a:t>
             </a:r>
             <a:r>
-              <a:rPr sz="1600" i="0" b="0">
+              <a:rPr sz="1500" i="0" b="0">
                 <a:solidFill>
                   <a:srgbClr val="D4D4D4"/>
                 </a:solidFill>
@@ -13700,7 +13899,7 @@
               <a:t>una</a:t>
             </a:r>
             <a:r>
-              <a:rPr sz="1600" i="0" b="0">
+              <a:rPr sz="1500" i="0" b="0">
                 <a:solidFill>
                   <a:srgbClr val="D4D4D4"/>
                 </a:solidFill>
@@ -13709,7 +13908,7 @@
               <a:t> </a:t>
             </a:r>
             <a:r>
-              <a:rPr sz="1600" i="0" b="0">
+              <a:rPr sz="1500" i="0" b="0">
                 <a:solidFill>
                   <a:srgbClr val="D4D4D4"/>
                 </a:solidFill>
@@ -13718,7 +13917,7 @@
               <a:t>cita</a:t>
             </a:r>
             <a:r>
-              <a:rPr sz="1600" i="0" b="0">
+              <a:rPr sz="1500" i="0" b="0">
                 <a:solidFill>
                   <a:srgbClr val="D4D4D4"/>
                 </a:solidFill>
@@ -13727,7 +13926,7 @@
               <a:t> </a:t>
             </a:r>
             <a:r>
-              <a:rPr sz="1600" i="0" b="0">
+              <a:rPr sz="1500" i="0" b="0">
                 <a:solidFill>
                   <a:srgbClr val="D4D4D4"/>
                 </a:solidFill>
@@ -13736,7 +13935,7 @@
               <a:t>para</a:t>
             </a:r>
             <a:r>
-              <a:rPr sz="1600" i="0" b="0">
+              <a:rPr sz="1500" i="0" b="0">
                 <a:solidFill>
                   <a:srgbClr val="D4D4D4"/>
                 </a:solidFill>
@@ -13745,7 +13944,7 @@
               <a:t> </a:t>
             </a:r>
             <a:r>
-              <a:rPr sz="1600" i="0" b="0">
+              <a:rPr sz="1500" i="0" b="0">
                 <a:solidFill>
                   <a:srgbClr val="D4D4D4"/>
                 </a:solidFill>
@@ -13754,7 +13953,7 @@
               <a:t>una</a:t>
             </a:r>
             <a:r>
-              <a:rPr sz="1600" i="0" b="0">
+              <a:rPr sz="1500" i="0" b="0">
                 <a:solidFill>
                   <a:srgbClr val="D4D4D4"/>
                 </a:solidFill>
@@ -13763,7 +13962,7 @@
               <a:t> </a:t>
             </a:r>
             <a:r>
-              <a:rPr sz="1600" i="0" b="0">
+              <a:rPr sz="1500" i="0" b="0">
                 <a:solidFill>
                   <a:srgbClr val="D4D4D4"/>
                 </a:solidFill>
@@ -13772,7 +13971,7 @@
               <a:t>mascota</a:t>
             </a:r>
             <a:r>
-              <a:rPr sz="1600" i="0" b="0">
+              <a:rPr sz="1500" i="0" b="0">
                 <a:solidFill>
                   <a:srgbClr val="D4D4D4"/>
                 </a:solidFill>
@@ -13781,7 +13980,7 @@
               <a:t> </a:t>
             </a:r>
             <a:r>
-              <a:rPr sz="1600" i="0" b="0">
+              <a:rPr sz="1500" i="0" b="0">
                 <a:solidFill>
                   <a:srgbClr val="D4D4D4"/>
                 </a:solidFill>
@@ -13790,7 +13989,7 @@
               <a:t>registrada</a:t>
             </a:r>
             <a:r>
-              <a:rPr sz="1600" i="0" b="0">
+              <a:rPr sz="1500" i="0" b="0">
                 <a:solidFill>
                   <a:srgbClr val="D4D4D4"/>
                 </a:solidFill>
@@ -13799,7 +13998,7 @@
               <a:t> </a:t>
             </a:r>
             <a:r>
-              <a:rPr sz="1600" i="0" b="0">
+              <a:rPr sz="1500" i="0" b="0">
                 <a:solidFill>
                   <a:srgbClr val="D4D4D4"/>
                 </a:solidFill>
@@ -13808,7 +14007,7 @@
               <a:t>y</a:t>
             </a:r>
             <a:r>
-              <a:rPr sz="1600" i="0" b="0">
+              <a:rPr sz="1500" i="0" b="0">
                 <a:solidFill>
                   <a:srgbClr val="D4D4D4"/>
                 </a:solidFill>
@@ -13817,7 +14016,7 @@
               <a:t> </a:t>
             </a:r>
             <a:r>
-              <a:rPr sz="1600" i="0" b="0">
+              <a:rPr sz="1500" i="0" b="0">
                 <a:solidFill>
                   <a:srgbClr val="D4D4D4"/>
                 </a:solidFill>
@@ -13826,7 +14025,7 @@
               <a:t>activa</a:t>
             </a:r>
             <a:r>
-              <a:rPr sz="1600" i="0" b="0">
+              <a:rPr sz="1500" i="0" b="0">
                 <a:solidFill>
                   <a:srgbClr val="D4D4D4"/>
                 </a:solidFill>
@@ -13838,11 +14037,11 @@
           <a:p>
             <a:pPr>
               <a:spcAft>
-                <a:spcPts val="342"/>
+                <a:spcPts val="321"/>
               </a:spcAft>
             </a:pPr>
             <a:r>
-              <a:rPr sz="1600" i="0" b="0">
+              <a:rPr sz="1500" i="0" b="0">
                 <a:solidFill>
                   <a:srgbClr val="D4D4D4"/>
                 </a:solidFill>
@@ -13851,7 +14050,7 @@
               <a:t> * </a:t>
             </a:r>
             <a:r>
-              <a:rPr sz="1600" i="0" b="0">
+              <a:rPr sz="1500" i="0" b="0">
                 <a:solidFill>
                   <a:srgbClr val="D4D4D4"/>
                 </a:solidFill>
@@ -13860,7 +14059,7 @@
               <a:t>Una</a:t>
             </a:r>
             <a:r>
-              <a:rPr sz="1600" i="0" b="0">
+              <a:rPr sz="1500" i="0" b="0">
                 <a:solidFill>
                   <a:srgbClr val="D4D4D4"/>
                 </a:solidFill>
@@ -13869,7 +14068,7 @@
               <a:t> </a:t>
             </a:r>
             <a:r>
-              <a:rPr sz="1600" i="0" b="0">
+              <a:rPr sz="1500" i="0" b="0">
                 <a:solidFill>
                   <a:srgbClr val="D4D4D4"/>
                 </a:solidFill>
@@ -13878,7 +14077,7 @@
               <a:t>mascota</a:t>
             </a:r>
             <a:r>
-              <a:rPr sz="1600" i="0" b="0">
+              <a:rPr sz="1500" i="0" b="0">
                 <a:solidFill>
                   <a:srgbClr val="D4D4D4"/>
                 </a:solidFill>
@@ -13887,7 +14086,7 @@
               <a:t> </a:t>
             </a:r>
             <a:r>
-              <a:rPr sz="1600" i="0" b="0">
+              <a:rPr sz="1500" i="0" b="0">
                 <a:solidFill>
                   <a:srgbClr val="D4D4D4"/>
                 </a:solidFill>
@@ -13896,7 +14095,7 @@
               <a:t>inactiva</a:t>
             </a:r>
             <a:r>
-              <a:rPr sz="1600" i="0" b="0">
+              <a:rPr sz="1500" i="0" b="0">
                 <a:solidFill>
                   <a:srgbClr val="D4D4D4"/>
                 </a:solidFill>
@@ -13905,7 +14104,7 @@
               <a:t> </a:t>
             </a:r>
             <a:r>
-              <a:rPr sz="1600" i="0" b="0">
+              <a:rPr sz="1500" i="0" b="0">
                 <a:solidFill>
                   <a:srgbClr val="D4D4D4"/>
                 </a:solidFill>
@@ -13914,7 +14113,7 @@
               <a:t>no</a:t>
             </a:r>
             <a:r>
-              <a:rPr sz="1600" i="0" b="0">
+              <a:rPr sz="1500" i="0" b="0">
                 <a:solidFill>
                   <a:srgbClr val="D4D4D4"/>
                 </a:solidFill>
@@ -13923,7 +14122,7 @@
               <a:t> </a:t>
             </a:r>
             <a:r>
-              <a:rPr sz="1600" i="0" b="0">
+              <a:rPr sz="1500" i="0" b="0">
                 <a:solidFill>
                   <a:srgbClr val="D4D4D4"/>
                 </a:solidFill>
@@ -13932,7 +14131,7 @@
               <a:t>puede</a:t>
             </a:r>
             <a:r>
-              <a:rPr sz="1600" i="0" b="0">
+              <a:rPr sz="1500" i="0" b="0">
                 <a:solidFill>
                   <a:srgbClr val="D4D4D4"/>
                 </a:solidFill>
@@ -13941,7 +14140,7 @@
               <a:t> </a:t>
             </a:r>
             <a:r>
-              <a:rPr sz="1600" i="0" b="0">
+              <a:rPr sz="1500" i="0" b="0">
                 <a:solidFill>
                   <a:srgbClr val="D4D4D4"/>
                 </a:solidFill>
@@ -13950,7 +14149,7 @@
               <a:t>agendar</a:t>
             </a:r>
             <a:r>
-              <a:rPr sz="1600" i="0" b="0">
+              <a:rPr sz="1500" i="0" b="0">
                 <a:solidFill>
                   <a:srgbClr val="D4D4D4"/>
                 </a:solidFill>
@@ -13959,7 +14158,7 @@
               <a:t>: </a:t>
             </a:r>
             <a:r>
-              <a:rPr sz="1600" i="0" b="0">
+              <a:rPr sz="1500" i="0" b="0">
                 <a:solidFill>
                   <a:srgbClr val="D4D4D4"/>
                 </a:solidFill>
@@ -13968,7 +14167,7 @@
               <a:t>en</a:t>
             </a:r>
             <a:r>
-              <a:rPr sz="1600" i="0" b="0">
+              <a:rPr sz="1500" i="0" b="0">
                 <a:solidFill>
                   <a:srgbClr val="D4D4D4"/>
                 </a:solidFill>
@@ -13977,7 +14176,7 @@
               <a:t> </a:t>
             </a:r>
             <a:r>
-              <a:rPr sz="1600" i="0" b="0">
+              <a:rPr sz="1500" i="0" b="0">
                 <a:solidFill>
                   <a:srgbClr val="D4D4D4"/>
                 </a:solidFill>
@@ -13986,7 +14185,7 @@
               <a:t>ese</a:t>
             </a:r>
             <a:r>
-              <a:rPr sz="1600" i="0" b="0">
+              <a:rPr sz="1500" i="0" b="0">
                 <a:solidFill>
                   <a:srgbClr val="D4D4D4"/>
                 </a:solidFill>
@@ -13995,7 +14194,7 @@
               <a:t> </a:t>
             </a:r>
             <a:r>
-              <a:rPr sz="1600" i="0" b="0">
+              <a:rPr sz="1500" i="0" b="0">
                 <a:solidFill>
                   <a:srgbClr val="D4D4D4"/>
                 </a:solidFill>
@@ -14004,7 +14203,7 @@
               <a:t>caso</a:t>
             </a:r>
             <a:r>
-              <a:rPr sz="1600" i="0" b="0">
+              <a:rPr sz="1500" i="0" b="0">
                 <a:solidFill>
                   <a:srgbClr val="D4D4D4"/>
                 </a:solidFill>
@@ -14013,7 +14212,7 @@
               <a:t> </a:t>
             </a:r>
             <a:r>
-              <a:rPr sz="1600" i="0" b="0">
+              <a:rPr sz="1500" i="0" b="0">
                 <a:solidFill>
                   <a:srgbClr val="D4D4D4"/>
                 </a:solidFill>
@@ -14022,7 +14221,7 @@
               <a:t>no</a:t>
             </a:r>
             <a:r>
-              <a:rPr sz="1600" i="0" b="0">
+              <a:rPr sz="1500" i="0" b="0">
                 <a:solidFill>
                   <a:srgbClr val="D4D4D4"/>
                 </a:solidFill>
@@ -14031,7 +14230,7 @@
               <a:t> </a:t>
             </a:r>
             <a:r>
-              <a:rPr sz="1600" i="0" b="0">
+              <a:rPr sz="1500" i="0" b="0">
                 <a:solidFill>
                   <a:srgbClr val="D4D4D4"/>
                 </a:solidFill>
@@ -14040,7 +14239,7 @@
               <a:t>se</a:t>
             </a:r>
             <a:r>
-              <a:rPr sz="1600" i="0" b="0">
+              <a:rPr sz="1500" i="0" b="0">
                 <a:solidFill>
                   <a:srgbClr val="D4D4D4"/>
                 </a:solidFill>
@@ -14049,7 +14248,7 @@
               <a:t> </a:t>
             </a:r>
             <a:r>
-              <a:rPr sz="1600" i="0" b="0">
+              <a:rPr sz="1500" i="0" b="0">
                 <a:solidFill>
                   <a:srgbClr val="D4D4D4"/>
                 </a:solidFill>
@@ -14058,7 +14257,7 @@
               <a:t>crea</a:t>
             </a:r>
             <a:r>
-              <a:rPr sz="1600" i="0" b="0">
+              <a:rPr sz="1500" i="0" b="0">
                 <a:solidFill>
                   <a:srgbClr val="D4D4D4"/>
                 </a:solidFill>
@@ -14067,7 +14266,7 @@
               <a:t> </a:t>
             </a:r>
             <a:r>
-              <a:rPr sz="1600" i="0" b="0">
+              <a:rPr sz="1500" i="0" b="0">
                 <a:solidFill>
                   <a:srgbClr val="D4D4D4"/>
                 </a:solidFill>
@@ -14076,7 +14275,7 @@
               <a:t>ninguna</a:t>
             </a:r>
             <a:r>
-              <a:rPr sz="1600" i="0" b="0">
+              <a:rPr sz="1500" i="0" b="0">
                 <a:solidFill>
                   <a:srgbClr val="D4D4D4"/>
                 </a:solidFill>
@@ -14085,7 +14284,7 @@
               <a:t> </a:t>
             </a:r>
             <a:r>
-              <a:rPr sz="1600" i="0" b="0">
+              <a:rPr sz="1500" i="0" b="0">
                 <a:solidFill>
                   <a:srgbClr val="D4D4D4"/>
                 </a:solidFill>
@@ -14094,7 +14293,7 @@
               <a:t>cita</a:t>
             </a:r>
             <a:r>
-              <a:rPr sz="1600" i="0" b="0">
+              <a:rPr sz="1500" i="0" b="0">
                 <a:solidFill>
                   <a:srgbClr val="D4D4D4"/>
                 </a:solidFill>
@@ -14106,11 +14305,11 @@
           <a:p>
             <a:pPr>
               <a:spcAft>
-                <a:spcPts val="342"/>
+                <a:spcPts val="321"/>
               </a:spcAft>
             </a:pPr>
             <a:r>
-              <a:rPr sz="1600" i="0" b="0">
+              <a:rPr sz="1500" i="0" b="0">
                 <a:solidFill>
                   <a:srgbClr val="D4D4D4"/>
                 </a:solidFill>
@@ -14122,11 +14321,11 @@
           <a:p>
             <a:pPr>
               <a:spcAft>
-                <a:spcPts val="342"/>
+                <a:spcPts val="321"/>
               </a:spcAft>
             </a:pPr>
             <a:r>
-              <a:rPr sz="1600" i="0" b="0">
+              <a:rPr sz="1500" i="0" b="0">
                 <a:solidFill>
                   <a:srgbClr val="D4D4D4"/>
                 </a:solidFill>
@@ -14135,7 +14334,7 @@
               <a:t> * @</a:t>
             </a:r>
             <a:r>
-              <a:rPr sz="1600" i="0" b="0">
+              <a:rPr sz="1500" i="0" b="0">
                 <a:solidFill>
                   <a:srgbClr val="D4D4D4"/>
                 </a:solidFill>
@@ -14144,7 +14343,7 @@
               <a:t>param</a:t>
             </a:r>
             <a:r>
-              <a:rPr sz="1600" i="0" b="0">
+              <a:rPr sz="1500" i="0" b="0">
                 <a:solidFill>
                   <a:srgbClr val="D4D4D4"/>
                 </a:solidFill>
@@ -14153,7 +14352,7 @@
               <a:t> </a:t>
             </a:r>
             <a:r>
-              <a:rPr sz="1600" i="0" b="0">
+              <a:rPr sz="1500" i="0" b="0">
                 <a:solidFill>
                   <a:srgbClr val="D4D4D4"/>
                 </a:solidFill>
@@ -14162,7 +14361,7 @@
               <a:t>idMascota</a:t>
             </a:r>
             <a:r>
-              <a:rPr sz="1600" i="0" b="0">
+              <a:rPr sz="1500" i="0" b="0">
                 <a:solidFill>
                   <a:srgbClr val="D4D4D4"/>
                 </a:solidFill>
@@ -14171,7 +14370,7 @@
               <a:t> </a:t>
             </a:r>
             <a:r>
-              <a:rPr sz="1600" i="0" b="0">
+              <a:rPr sz="1500" i="0" b="0">
                 <a:solidFill>
                   <a:srgbClr val="D4D4D4"/>
                 </a:solidFill>
@@ -14180,7 +14379,7 @@
               <a:t>identificador</a:t>
             </a:r>
             <a:r>
-              <a:rPr sz="1600" i="0" b="0">
+              <a:rPr sz="1500" i="0" b="0">
                 <a:solidFill>
                   <a:srgbClr val="D4D4D4"/>
                 </a:solidFill>
@@ -14189,7 +14388,7 @@
               <a:t> </a:t>
             </a:r>
             <a:r>
-              <a:rPr sz="1600" i="0" b="0">
+              <a:rPr sz="1500" i="0" b="0">
                 <a:solidFill>
                   <a:srgbClr val="D4D4D4"/>
                 </a:solidFill>
@@ -14198,7 +14397,7 @@
               <a:t>del</a:t>
             </a:r>
             <a:r>
-              <a:rPr sz="1600" i="0" b="0">
+              <a:rPr sz="1500" i="0" b="0">
                 <a:solidFill>
                   <a:srgbClr val="D4D4D4"/>
                 </a:solidFill>
@@ -14207,7 +14406,7 @@
               <a:t> </a:t>
             </a:r>
             <a:r>
-              <a:rPr sz="1600" i="0" b="0">
+              <a:rPr sz="1500" i="0" b="0">
                 <a:solidFill>
                   <a:srgbClr val="D4D4D4"/>
                 </a:solidFill>
@@ -14216,7 +14415,7 @@
               <a:t>expediente</a:t>
             </a:r>
             <a:r>
-              <a:rPr sz="1600" i="0" b="0">
+              <a:rPr sz="1500" i="0" b="0">
                 <a:solidFill>
                   <a:srgbClr val="D4D4D4"/>
                 </a:solidFill>
@@ -14225,7 +14424,7 @@
               <a:t>, </a:t>
             </a:r>
             <a:r>
-              <a:rPr sz="1600" i="0" b="0">
+              <a:rPr sz="1500" i="0" b="0">
                 <a:solidFill>
                   <a:srgbClr val="D4D4D4"/>
                 </a:solidFill>
@@ -14234,7 +14433,7 @@
               <a:t>por</a:t>
             </a:r>
             <a:r>
-              <a:rPr sz="1600" i="0" b="0">
+              <a:rPr sz="1500" i="0" b="0">
                 <a:solidFill>
                   <a:srgbClr val="D4D4D4"/>
                 </a:solidFill>
@@ -14243,7 +14442,7 @@
               <a:t> </a:t>
             </a:r>
             <a:r>
-              <a:rPr sz="1600" i="0" b="0">
+              <a:rPr sz="1500" i="0" b="0">
                 <a:solidFill>
                   <a:srgbClr val="D4D4D4"/>
                 </a:solidFill>
@@ -14252,7 +14451,7 @@
               <a:t>ejemplo</a:t>
             </a:r>
             <a:r>
-              <a:rPr sz="1600" i="0" b="0">
+              <a:rPr sz="1500" i="0" b="0">
                 <a:solidFill>
                   <a:srgbClr val="D4D4D4"/>
                 </a:solidFill>
@@ -14261,7 +14460,7 @@
               <a:t> </a:t>
             </a:r>
             <a:r>
-              <a:rPr sz="1600" i="0" b="0">
+              <a:rPr sz="1500" i="0" b="0">
                 <a:solidFill>
                   <a:srgbClr val="D4D4D4"/>
                 </a:solidFill>
@@ -14270,7 +14469,7 @@
               <a:t>M</a:t>
             </a:r>
             <a:r>
-              <a:rPr sz="1600" i="0" b="0">
+              <a:rPr sz="1500" i="0" b="0">
                 <a:solidFill>
                   <a:srgbClr val="D4D4D4"/>
                 </a:solidFill>
@@ -14279,7 +14478,7 @@
               <a:t>-</a:t>
             </a:r>
             <a:r>
-              <a:rPr sz="1600" i="0" b="0">
+              <a:rPr sz="1500" i="0" b="0">
                 <a:solidFill>
                   <a:srgbClr val="B5CEA8"/>
                 </a:solidFill>
@@ -14291,11 +14490,11 @@
           <a:p>
             <a:pPr>
               <a:spcAft>
-                <a:spcPts val="342"/>
+                <a:spcPts val="321"/>
               </a:spcAft>
             </a:pPr>
             <a:r>
-              <a:rPr sz="1600" i="0" b="0">
+              <a:rPr sz="1500" i="0" b="0">
                 <a:solidFill>
                   <a:srgbClr val="D4D4D4"/>
                 </a:solidFill>
@@ -14304,7 +14503,7 @@
               <a:t> * @</a:t>
             </a:r>
             <a:r>
-              <a:rPr sz="1600" i="0" b="0">
+              <a:rPr sz="1500" i="0" b="0">
                 <a:solidFill>
                   <a:srgbClr val="D4D4D4"/>
                 </a:solidFill>
@@ -14313,7 +14512,7 @@
               <a:t>param</a:t>
             </a:r>
             <a:r>
-              <a:rPr sz="1600" i="0" b="0">
+              <a:rPr sz="1500" i="0" b="0">
                 <a:solidFill>
                   <a:srgbClr val="D4D4D4"/>
                 </a:solidFill>
@@ -14322,7 +14521,7 @@
               <a:t> </a:t>
             </a:r>
             <a:r>
-              <a:rPr sz="1600" i="0" b="0">
+              <a:rPr sz="1500" i="0" b="0">
                 <a:solidFill>
                   <a:srgbClr val="D4D4D4"/>
                 </a:solidFill>
@@ -14331,7 +14530,7 @@
               <a:t>fechaHora</a:t>
             </a:r>
             <a:r>
-              <a:rPr sz="1600" i="0" b="0">
+              <a:rPr sz="1500" i="0" b="0">
                 <a:solidFill>
                   <a:srgbClr val="D4D4D4"/>
                 </a:solidFill>
@@ -14340,7 +14539,7 @@
               <a:t> </a:t>
             </a:r>
             <a:r>
-              <a:rPr sz="1600" i="0" b="0">
+              <a:rPr sz="1500" i="0" b="0">
                 <a:solidFill>
                   <a:srgbClr val="D4D4D4"/>
                 </a:solidFill>
@@ -14349,7 +14548,7 @@
               <a:t>fecha</a:t>
             </a:r>
             <a:r>
-              <a:rPr sz="1600" i="0" b="0">
+              <a:rPr sz="1500" i="0" b="0">
                 <a:solidFill>
                   <a:srgbClr val="D4D4D4"/>
                 </a:solidFill>
@@ -14358,7 +14557,7 @@
               <a:t> </a:t>
             </a:r>
             <a:r>
-              <a:rPr sz="1600" i="0" b="0">
+              <a:rPr sz="1500" i="0" b="0">
                 <a:solidFill>
                   <a:srgbClr val="D4D4D4"/>
                 </a:solidFill>
@@ -14367,7 +14566,7 @@
               <a:t>y</a:t>
             </a:r>
             <a:r>
-              <a:rPr sz="1600" i="0" b="0">
+              <a:rPr sz="1500" i="0" b="0">
                 <a:solidFill>
                   <a:srgbClr val="D4D4D4"/>
                 </a:solidFill>
@@ -14376,7 +14575,7 @@
               <a:t> </a:t>
             </a:r>
             <a:r>
-              <a:rPr sz="1600" i="0" b="0">
+              <a:rPr sz="1500" i="0" b="0">
                 <a:solidFill>
                   <a:srgbClr val="D4D4D4"/>
                 </a:solidFill>
@@ -14385,7 +14584,7 @@
               <a:t>hora</a:t>
             </a:r>
             <a:r>
-              <a:rPr sz="1600" i="0" b="0">
+              <a:rPr sz="1500" i="0" b="0">
                 <a:solidFill>
                   <a:srgbClr val="D4D4D4"/>
                 </a:solidFill>
@@ -14394,7 +14593,7 @@
               <a:t> </a:t>
             </a:r>
             <a:r>
-              <a:rPr sz="1600" i="0" b="0">
+              <a:rPr sz="1500" i="0" b="0">
                 <a:solidFill>
                   <a:srgbClr val="D4D4D4"/>
                 </a:solidFill>
@@ -14403,7 +14602,7 @@
               <a:t>en</a:t>
             </a:r>
             <a:r>
-              <a:rPr sz="1600" i="0" b="0">
+              <a:rPr sz="1500" i="0" b="0">
                 <a:solidFill>
                   <a:srgbClr val="D4D4D4"/>
                 </a:solidFill>
@@ -14412,7 +14611,7 @@
               <a:t> </a:t>
             </a:r>
             <a:r>
-              <a:rPr sz="1600" i="0" b="0">
+              <a:rPr sz="1500" i="0" b="0">
                 <a:solidFill>
                   <a:srgbClr val="D4D4D4"/>
                 </a:solidFill>
@@ -14421,7 +14620,7 @@
               <a:t>formato</a:t>
             </a:r>
             <a:r>
-              <a:rPr sz="1600" i="0" b="0">
+              <a:rPr sz="1500" i="0" b="0">
                 <a:solidFill>
                   <a:srgbClr val="D4D4D4"/>
                 </a:solidFill>
@@ -14430,7 +14629,7 @@
               <a:t> </a:t>
             </a:r>
             <a:r>
-              <a:rPr sz="1600" i="0" b="0">
+              <a:rPr sz="1500" i="0" b="0">
                 <a:solidFill>
                   <a:srgbClr val="D4D4D4"/>
                 </a:solidFill>
@@ -14439,7 +14638,7 @@
               <a:t>yyyy</a:t>
             </a:r>
             <a:r>
-              <a:rPr sz="1600" i="0" b="0">
+              <a:rPr sz="1500" i="0" b="0">
                 <a:solidFill>
                   <a:srgbClr val="D4D4D4"/>
                 </a:solidFill>
@@ -14448,7 +14647,7 @@
               <a:t>-</a:t>
             </a:r>
             <a:r>
-              <a:rPr sz="1600" i="0" b="0">
+              <a:rPr sz="1500" i="0" b="0">
                 <a:solidFill>
                   <a:srgbClr val="D4D4D4"/>
                 </a:solidFill>
@@ -14457,7 +14656,7 @@
               <a:t>MM</a:t>
             </a:r>
             <a:r>
-              <a:rPr sz="1600" i="0" b="0">
+              <a:rPr sz="1500" i="0" b="0">
                 <a:solidFill>
                   <a:srgbClr val="D4D4D4"/>
                 </a:solidFill>
@@ -14466,7 +14665,7 @@
               <a:t>-</a:t>
             </a:r>
             <a:r>
-              <a:rPr sz="1600" i="0" b="0">
+              <a:rPr sz="1500" i="0" b="0">
                 <a:solidFill>
                   <a:srgbClr val="D4D4D4"/>
                 </a:solidFill>
@@ -14475,7 +14674,7 @@
               <a:t>dd</a:t>
             </a:r>
             <a:r>
-              <a:rPr sz="1600" i="0" b="0">
+              <a:rPr sz="1500" i="0" b="0">
                 <a:solidFill>
                   <a:srgbClr val="D4D4D4"/>
                 </a:solidFill>
@@ -14484,7 +14683,7 @@
               <a:t> </a:t>
             </a:r>
             <a:r>
-              <a:rPr sz="1600" i="0" b="0">
+              <a:rPr sz="1500" i="0" b="0">
                 <a:solidFill>
                   <a:srgbClr val="D4D4D4"/>
                 </a:solidFill>
@@ -14493,7 +14692,7 @@
               <a:t>HH</a:t>
             </a:r>
             <a:r>
-              <a:rPr sz="1600" i="0" b="0">
+              <a:rPr sz="1500" i="0" b="0">
                 <a:solidFill>
                   <a:srgbClr val="D4D4D4"/>
                 </a:solidFill>
@@ -14502,7 +14701,7 @@
               <a:t>:</a:t>
             </a:r>
             <a:r>
-              <a:rPr sz="1600" i="0" b="0">
+              <a:rPr sz="1500" i="0" b="0">
                 <a:solidFill>
                   <a:srgbClr val="D4D4D4"/>
                 </a:solidFill>
@@ -14514,11 +14713,11 @@
           <a:p>
             <a:pPr>
               <a:spcAft>
-                <a:spcPts val="342"/>
+                <a:spcPts val="321"/>
               </a:spcAft>
             </a:pPr>
             <a:r>
-              <a:rPr sz="1600" i="0" b="0">
+              <a:rPr sz="1500" i="0" b="0">
                 <a:solidFill>
                   <a:srgbClr val="D4D4D4"/>
                 </a:solidFill>
@@ -14527,7 +14726,7 @@
               <a:t> * @</a:t>
             </a:r>
             <a:r>
-              <a:rPr sz="1600" i="0" b="0">
+              <a:rPr sz="1500" i="0" b="0">
                 <a:solidFill>
                   <a:srgbClr val="569CD6"/>
                 </a:solidFill>
@@ -14536,7 +14735,7 @@
               <a:t>return</a:t>
             </a:r>
             <a:r>
-              <a:rPr sz="1600" i="0" b="0">
+              <a:rPr sz="1500" i="0" b="0">
                 <a:solidFill>
                   <a:srgbClr val="D4D4D4"/>
                 </a:solidFill>
@@ -14545,7 +14744,7 @@
               <a:t> </a:t>
             </a:r>
             <a:r>
-              <a:rPr sz="1600" i="0" b="0">
+              <a:rPr sz="1500" i="0" b="0">
                 <a:solidFill>
                   <a:srgbClr val="D4D4D4"/>
                 </a:solidFill>
@@ -14554,7 +14753,7 @@
               <a:t>la</a:t>
             </a:r>
             <a:r>
-              <a:rPr sz="1600" i="0" b="0">
+              <a:rPr sz="1500" i="0" b="0">
                 <a:solidFill>
                   <a:srgbClr val="D4D4D4"/>
                 </a:solidFill>
@@ -14563,7 +14762,7 @@
               <a:t> </a:t>
             </a:r>
             <a:r>
-              <a:rPr sz="1600" i="0" b="0">
+              <a:rPr sz="1500" i="0" b="0">
                 <a:solidFill>
                   <a:srgbClr val="D4D4D4"/>
                 </a:solidFill>
@@ -14572,7 +14771,7 @@
               <a:t>cita</a:t>
             </a:r>
             <a:r>
-              <a:rPr sz="1600" i="0" b="0">
+              <a:rPr sz="1500" i="0" b="0">
                 <a:solidFill>
                   <a:srgbClr val="D4D4D4"/>
                 </a:solidFill>
@@ -14581,7 +14780,7 @@
               <a:t> </a:t>
             </a:r>
             <a:r>
-              <a:rPr sz="1600" i="0" b="0">
+              <a:rPr sz="1500" i="0" b="0">
                 <a:solidFill>
                   <a:srgbClr val="D4D4D4"/>
                 </a:solidFill>
@@ -14593,11 +14792,11 @@
           <a:p>
             <a:pPr>
               <a:spcAft>
-                <a:spcPts val="342"/>
+                <a:spcPts val="321"/>
               </a:spcAft>
             </a:pPr>
             <a:r>
-              <a:rPr sz="1600" i="0" b="0">
+              <a:rPr sz="1500" i="0" b="0">
                 <a:solidFill>
                   <a:srgbClr val="D4D4D4"/>
                 </a:solidFill>
@@ -14606,7 +14805,7 @@
               <a:t> * @</a:t>
             </a:r>
             <a:r>
-              <a:rPr sz="1600" i="0" b="0">
+              <a:rPr sz="1500" i="0" b="0">
                 <a:solidFill>
                   <a:srgbClr val="569CD6"/>
                 </a:solidFill>
@@ -14615,7 +14814,7 @@
               <a:t>throws</a:t>
             </a:r>
             <a:r>
-              <a:rPr sz="1600" i="0" b="0">
+              <a:rPr sz="1500" i="0" b="0">
                 <a:solidFill>
                   <a:srgbClr val="D4D4D4"/>
                 </a:solidFill>
@@ -14624,7 +14823,7 @@
               <a:t> </a:t>
             </a:r>
             <a:r>
-              <a:rPr sz="1600" i="0" b="0">
+              <a:rPr sz="1500" i="0" b="0">
                 <a:solidFill>
                   <a:srgbClr val="D4D4D4"/>
                 </a:solidFill>
@@ -14633,7 +14832,7 @@
               <a:t>IllegalArgumentException</a:t>
             </a:r>
             <a:r>
-              <a:rPr sz="1600" i="0" b="0">
+              <a:rPr sz="1500" i="0" b="0">
                 <a:solidFill>
                   <a:srgbClr val="D4D4D4"/>
                 </a:solidFill>
@@ -14642,7 +14841,7 @@
               <a:t> </a:t>
             </a:r>
             <a:r>
-              <a:rPr sz="1600" i="0" b="0">
+              <a:rPr sz="1500" i="0" b="0">
                 <a:solidFill>
                   <a:srgbClr val="D4D4D4"/>
                 </a:solidFill>
@@ -14651,7 +14850,7 @@
               <a:t>si</a:t>
             </a:r>
             <a:r>
-              <a:rPr sz="1600" i="0" b="0">
+              <a:rPr sz="1500" i="0" b="0">
                 <a:solidFill>
                   <a:srgbClr val="D4D4D4"/>
                 </a:solidFill>
@@ -14660,7 +14859,7 @@
               <a:t> </a:t>
             </a:r>
             <a:r>
-              <a:rPr sz="1600" i="0" b="0">
+              <a:rPr sz="1500" i="0" b="0">
                 <a:solidFill>
                   <a:srgbClr val="D4D4D4"/>
                 </a:solidFill>
@@ -14669,7 +14868,7 @@
               <a:t>la</a:t>
             </a:r>
             <a:r>
-              <a:rPr sz="1600" i="0" b="0">
+              <a:rPr sz="1500" i="0" b="0">
                 <a:solidFill>
                   <a:srgbClr val="D4D4D4"/>
                 </a:solidFill>
@@ -14678,7 +14877,7 @@
               <a:t> </a:t>
             </a:r>
             <a:r>
-              <a:rPr sz="1600" i="0" b="0">
+              <a:rPr sz="1500" i="0" b="0">
                 <a:solidFill>
                   <a:srgbClr val="D4D4D4"/>
                 </a:solidFill>
@@ -14687,7 +14886,7 @@
               <a:t>fecha</a:t>
             </a:r>
             <a:r>
-              <a:rPr sz="1600" i="0" b="0">
+              <a:rPr sz="1500" i="0" b="0">
                 <a:solidFill>
                   <a:srgbClr val="D4D4D4"/>
                 </a:solidFill>
@@ -14696,7 +14895,7 @@
               <a:t> </a:t>
             </a:r>
             <a:r>
-              <a:rPr sz="1600" i="0" b="0">
+              <a:rPr sz="1500" i="0" b="0">
                 <a:solidFill>
                   <a:srgbClr val="D4D4D4"/>
                 </a:solidFill>
@@ -14705,7 +14904,7 @@
               <a:t>y</a:t>
             </a:r>
             <a:r>
-              <a:rPr sz="1600" i="0" b="0">
+              <a:rPr sz="1500" i="0" b="0">
                 <a:solidFill>
                   <a:srgbClr val="D4D4D4"/>
                 </a:solidFill>
@@ -14714,7 +14913,7 @@
               <a:t> </a:t>
             </a:r>
             <a:r>
-              <a:rPr sz="1600" i="0" b="0">
+              <a:rPr sz="1500" i="0" b="0">
                 <a:solidFill>
                   <a:srgbClr val="D4D4D4"/>
                 </a:solidFill>
@@ -14723,7 +14922,7 @@
               <a:t>hora</a:t>
             </a:r>
             <a:r>
-              <a:rPr sz="1600" i="0" b="0">
+              <a:rPr sz="1500" i="0" b="0">
                 <a:solidFill>
                   <a:srgbClr val="D4D4D4"/>
                 </a:solidFill>
@@ -14732,7 +14931,7 @@
               <a:t> </a:t>
             </a:r>
             <a:r>
-              <a:rPr sz="1600" i="0" b="0">
+              <a:rPr sz="1500" i="0" b="0">
                 <a:solidFill>
                   <a:srgbClr val="D4D4D4"/>
                 </a:solidFill>
@@ -14741,7 +14940,7 @@
               <a:t>vienen</a:t>
             </a:r>
             <a:r>
-              <a:rPr sz="1600" i="0" b="0">
+              <a:rPr sz="1500" i="0" b="0">
                 <a:solidFill>
                   <a:srgbClr val="D4D4D4"/>
                 </a:solidFill>
@@ -14750,7 +14949,7 @@
               <a:t> </a:t>
             </a:r>
             <a:r>
-              <a:rPr sz="1600" i="0" b="0">
+              <a:rPr sz="1500" i="0" b="0">
                 <a:solidFill>
                   <a:srgbClr val="D4D4D4"/>
                 </a:solidFill>
@@ -14762,11 +14961,11 @@
           <a:p>
             <a:pPr>
               <a:spcAft>
-                <a:spcPts val="342"/>
+                <a:spcPts val="321"/>
               </a:spcAft>
             </a:pPr>
             <a:r>
-              <a:rPr sz="1600" i="0" b="0">
+              <a:rPr sz="1500" i="0" b="0">
                 <a:solidFill>
                   <a:srgbClr val="D4D4D4"/>
                 </a:solidFill>
@@ -14775,7 +14974,7 @@
               <a:t> * @</a:t>
             </a:r>
             <a:r>
-              <a:rPr sz="1600" i="0" b="0">
+              <a:rPr sz="1500" i="0" b="0">
                 <a:solidFill>
                   <a:srgbClr val="569CD6"/>
                 </a:solidFill>
@@ -14784,7 +14983,7 @@
               <a:t>throws</a:t>
             </a:r>
             <a:r>
-              <a:rPr sz="1600" i="0" b="0">
+              <a:rPr sz="1500" i="0" b="0">
                 <a:solidFill>
                   <a:srgbClr val="D4D4D4"/>
                 </a:solidFill>
@@ -14793,7 +14992,7 @@
               <a:t> </a:t>
             </a:r>
             <a:r>
-              <a:rPr sz="1600" i="0" b="0">
+              <a:rPr sz="1500" i="0" b="0">
                 <a:solidFill>
                   <a:srgbClr val="D4D4D4"/>
                 </a:solidFill>
@@ -14802,7 +15001,7 @@
               <a:t>NoSuchElementException</a:t>
             </a:r>
             <a:r>
-              <a:rPr sz="1600" i="0" b="0">
+              <a:rPr sz="1500" i="0" b="0">
                 <a:solidFill>
                   <a:srgbClr val="D4D4D4"/>
                 </a:solidFill>
@@ -14811,7 +15010,7 @@
               <a:t> </a:t>
             </a:r>
             <a:r>
-              <a:rPr sz="1600" i="0" b="0">
+              <a:rPr sz="1500" i="0" b="0">
                 <a:solidFill>
                   <a:srgbClr val="D4D4D4"/>
                 </a:solidFill>
@@ -14820,7 +15019,7 @@
               <a:t>si</a:t>
             </a:r>
             <a:r>
-              <a:rPr sz="1600" i="0" b="0">
+              <a:rPr sz="1500" i="0" b="0">
                 <a:solidFill>
                   <a:srgbClr val="D4D4D4"/>
                 </a:solidFill>
@@ -14829,7 +15028,7 @@
               <a:t> </a:t>
             </a:r>
             <a:r>
-              <a:rPr sz="1600" i="0" b="0">
+              <a:rPr sz="1500" i="0" b="0">
                 <a:solidFill>
                   <a:srgbClr val="D4D4D4"/>
                 </a:solidFill>
@@ -14838,7 +15037,7 @@
               <a:t>no</a:t>
             </a:r>
             <a:r>
-              <a:rPr sz="1600" i="0" b="0">
+              <a:rPr sz="1500" i="0" b="0">
                 <a:solidFill>
                   <a:srgbClr val="D4D4D4"/>
                 </a:solidFill>
@@ -14847,7 +15046,7 @@
               <a:t> </a:t>
             </a:r>
             <a:r>
-              <a:rPr sz="1600" i="0" b="0">
+              <a:rPr sz="1500" i="0" b="0">
                 <a:solidFill>
                   <a:srgbClr val="D4D4D4"/>
                 </a:solidFill>
@@ -14856,7 +15055,7 @@
               <a:t>existe</a:t>
             </a:r>
             <a:r>
-              <a:rPr sz="1600" i="0" b="0">
+              <a:rPr sz="1500" i="0" b="0">
                 <a:solidFill>
                   <a:srgbClr val="D4D4D4"/>
                 </a:solidFill>
@@ -14865,7 +15064,7 @@
               <a:t> </a:t>
             </a:r>
             <a:r>
-              <a:rPr sz="1600" i="0" b="0">
+              <a:rPr sz="1500" i="0" b="0">
                 <a:solidFill>
                   <a:srgbClr val="D4D4D4"/>
                 </a:solidFill>
@@ -14874,7 +15073,7 @@
               <a:t>expediente</a:t>
             </a:r>
             <a:r>
-              <a:rPr sz="1600" i="0" b="0">
+              <a:rPr sz="1500" i="0" b="0">
                 <a:solidFill>
                   <a:srgbClr val="D4D4D4"/>
                 </a:solidFill>
@@ -14883,7 +15082,7 @@
               <a:t> </a:t>
             </a:r>
             <a:r>
-              <a:rPr sz="1600" i="0" b="0">
+              <a:rPr sz="1500" i="0" b="0">
                 <a:solidFill>
                   <a:srgbClr val="D4D4D4"/>
                 </a:solidFill>
@@ -14892,7 +15091,7 @@
               <a:t>con</a:t>
             </a:r>
             <a:r>
-              <a:rPr sz="1600" i="0" b="0">
+              <a:rPr sz="1500" i="0" b="0">
                 <a:solidFill>
                   <a:srgbClr val="D4D4D4"/>
                 </a:solidFill>
@@ -14901,7 +15100,7 @@
               <a:t> </a:t>
             </a:r>
             <a:r>
-              <a:rPr sz="1600" i="0" b="0">
+              <a:rPr sz="1500" i="0" b="0">
                 <a:solidFill>
                   <a:srgbClr val="D4D4D4"/>
                 </a:solidFill>
@@ -14910,7 +15109,7 @@
               <a:t>ese</a:t>
             </a:r>
             <a:r>
-              <a:rPr sz="1600" i="0" b="0">
+              <a:rPr sz="1500" i="0" b="0">
                 <a:solidFill>
                   <a:srgbClr val="D4D4D4"/>
                 </a:solidFill>
@@ -14919,7 +15118,7 @@
               <a:t> </a:t>
             </a:r>
             <a:r>
-              <a:rPr sz="1600" i="0" b="0">
+              <a:rPr sz="1500" i="0" b="0">
                 <a:solidFill>
                   <a:srgbClr val="D4D4D4"/>
                 </a:solidFill>
@@ -14931,11 +15130,11 @@
           <a:p>
             <a:pPr>
               <a:spcAft>
-                <a:spcPts val="342"/>
+                <a:spcPts val="321"/>
               </a:spcAft>
             </a:pPr>
             <a:r>
-              <a:rPr sz="1600" i="0" b="0">
+              <a:rPr sz="1500" i="0" b="0">
                 <a:solidFill>
                   <a:srgbClr val="D4D4D4"/>
                 </a:solidFill>
@@ -14944,7 +15143,7 @@
               <a:t> * @</a:t>
             </a:r>
             <a:r>
-              <a:rPr sz="1600" i="0" b="0">
+              <a:rPr sz="1500" i="0" b="0">
                 <a:solidFill>
                   <a:srgbClr val="569CD6"/>
                 </a:solidFill>
@@ -14953,7 +15152,7 @@
               <a:t>throws</a:t>
             </a:r>
             <a:r>
-              <a:rPr sz="1600" i="0" b="0">
+              <a:rPr sz="1500" i="0" b="0">
                 <a:solidFill>
                   <a:srgbClr val="D4D4D4"/>
                 </a:solidFill>
@@ -14962,7 +15161,7 @@
               <a:t> </a:t>
             </a:r>
             <a:r>
-              <a:rPr sz="1600" i="0" b="0">
+              <a:rPr sz="1500" i="0" b="0">
                 <a:solidFill>
                   <a:srgbClr val="D4D4D4"/>
                 </a:solidFill>
@@ -14971,7 +15170,7 @@
               <a:t>IllegalStateException</a:t>
             </a:r>
             <a:r>
-              <a:rPr sz="1600" i="0" b="0">
+              <a:rPr sz="1500" i="0" b="0">
                 <a:solidFill>
                   <a:srgbClr val="D4D4D4"/>
                 </a:solidFill>
@@ -14980,7 +15179,7 @@
               <a:t> </a:t>
             </a:r>
             <a:r>
-              <a:rPr sz="1600" i="0" b="0">
+              <a:rPr sz="1500" i="0" b="0">
                 <a:solidFill>
                   <a:srgbClr val="D4D4D4"/>
                 </a:solidFill>
@@ -14989,7 +15188,7 @@
               <a:t>si</a:t>
             </a:r>
             <a:r>
-              <a:rPr sz="1600" i="0" b="0">
+              <a:rPr sz="1500" i="0" b="0">
                 <a:solidFill>
                   <a:srgbClr val="D4D4D4"/>
                 </a:solidFill>
@@ -14998,7 +15197,7 @@
               <a:t> </a:t>
             </a:r>
             <a:r>
-              <a:rPr sz="1600" i="0" b="0">
+              <a:rPr sz="1500" i="0" b="0">
                 <a:solidFill>
                   <a:srgbClr val="D4D4D4"/>
                 </a:solidFill>
@@ -15007,7 +15206,7 @@
               <a:t>la</a:t>
             </a:r>
             <a:r>
-              <a:rPr sz="1600" i="0" b="0">
+              <a:rPr sz="1500" i="0" b="0">
                 <a:solidFill>
                   <a:srgbClr val="D4D4D4"/>
                 </a:solidFill>
@@ -15016,7 +15215,7 @@
               <a:t> </a:t>
             </a:r>
             <a:r>
-              <a:rPr sz="1600" i="0" b="0">
+              <a:rPr sz="1500" i="0" b="0">
                 <a:solidFill>
                   <a:srgbClr val="D4D4D4"/>
                 </a:solidFill>
@@ -15025,7 +15224,7 @@
               <a:t>mascota</a:t>
             </a:r>
             <a:r>
-              <a:rPr sz="1600" i="0" b="0">
+              <a:rPr sz="1500" i="0" b="0">
                 <a:solidFill>
                   <a:srgbClr val="D4D4D4"/>
                 </a:solidFill>
@@ -15034,7 +15233,7 @@
               <a:t> </a:t>
             </a:r>
             <a:r>
-              <a:rPr sz="1600" i="0" b="0">
+              <a:rPr sz="1500" i="0" b="0">
                 <a:solidFill>
                   <a:srgbClr val="D4D4D4"/>
                 </a:solidFill>
@@ -15043,7 +15242,7 @@
               <a:t>esta</a:t>
             </a:r>
             <a:r>
-              <a:rPr sz="1600" i="0" b="0">
+              <a:rPr sz="1500" i="0" b="0">
                 <a:solidFill>
                   <a:srgbClr val="D4D4D4"/>
                 </a:solidFill>
@@ -15052,7 +15251,7 @@
               <a:t> </a:t>
             </a:r>
             <a:r>
-              <a:rPr sz="1600" i="0" b="0">
+              <a:rPr sz="1500" i="0" b="0">
                 <a:solidFill>
                   <a:srgbClr val="D4D4D4"/>
                 </a:solidFill>
@@ -15061,7 +15260,7 @@
               <a:t>inactiva</a:t>
             </a:r>
             <a:r>
-              <a:rPr sz="1600" i="0" b="0">
+              <a:rPr sz="1500" i="0" b="0">
                 <a:solidFill>
                   <a:srgbClr val="D4D4D4"/>
                 </a:solidFill>
@@ -15070,7 +15269,7 @@
               <a:t> </a:t>
             </a:r>
             <a:r>
-              <a:rPr sz="1600" i="0" b="0">
+              <a:rPr sz="1500" i="0" b="0">
                 <a:solidFill>
                   <a:srgbClr val="D4D4D4"/>
                 </a:solidFill>
@@ -15079,7 +15278,7 @@
               <a:t>o</a:t>
             </a:r>
             <a:r>
-              <a:rPr sz="1600" i="0" b="0">
+              <a:rPr sz="1500" i="0" b="0">
                 <a:solidFill>
                   <a:srgbClr val="D4D4D4"/>
                 </a:solidFill>
@@ -15088,7 +15287,7 @@
               <a:t> </a:t>
             </a:r>
             <a:r>
-              <a:rPr sz="1600" i="0" b="0">
+              <a:rPr sz="1500" i="0" b="0">
                 <a:solidFill>
                   <a:srgbClr val="D4D4D4"/>
                 </a:solidFill>
@@ -15097,7 +15296,7 @@
               <a:t>el</a:t>
             </a:r>
             <a:r>
-              <a:rPr sz="1600" i="0" b="0">
+              <a:rPr sz="1500" i="0" b="0">
                 <a:solidFill>
                   <a:srgbClr val="D4D4D4"/>
                 </a:solidFill>
@@ -15106,7 +15305,7 @@
               <a:t> </a:t>
             </a:r>
             <a:r>
-              <a:rPr sz="1600" i="0" b="0">
+              <a:rPr sz="1500" i="0" b="0">
                 <a:solidFill>
                   <a:srgbClr val="D4D4D4"/>
                 </a:solidFill>
@@ -15115,7 +15314,7 @@
               <a:t>horario</a:t>
             </a:r>
             <a:r>
-              <a:rPr sz="1600" i="0" b="0">
+              <a:rPr sz="1500" i="0" b="0">
                 <a:solidFill>
                   <a:srgbClr val="D4D4D4"/>
                 </a:solidFill>
@@ -15124,7 +15323,7 @@
               <a:t> </a:t>
             </a:r>
             <a:r>
-              <a:rPr sz="1600" i="0" b="0">
+              <a:rPr sz="1500" i="0" b="0">
                 <a:solidFill>
                   <a:srgbClr val="D4D4D4"/>
                 </a:solidFill>
@@ -15133,7 +15332,7 @@
               <a:t>ya</a:t>
             </a:r>
             <a:r>
-              <a:rPr sz="1600" i="0" b="0">
+              <a:rPr sz="1500" i="0" b="0">
                 <a:solidFill>
                   <a:srgbClr val="D4D4D4"/>
                 </a:solidFill>
@@ -15142,7 +15341,7 @@
               <a:t> </a:t>
             </a:r>
             <a:r>
-              <a:rPr sz="1600" i="0" b="0">
+              <a:rPr sz="1500" i="0" b="0">
                 <a:solidFill>
                   <a:srgbClr val="D4D4D4"/>
                 </a:solidFill>
@@ -15151,7 +15350,7 @@
               <a:t>esta</a:t>
             </a:r>
             <a:r>
-              <a:rPr sz="1600" i="0" b="0">
+              <a:rPr sz="1500" i="0" b="0">
                 <a:solidFill>
                   <a:srgbClr val="D4D4D4"/>
                 </a:solidFill>
@@ -15160,7 +15359,7 @@
               <a:t> </a:t>
             </a:r>
             <a:r>
-              <a:rPr sz="1600" i="0" b="0">
+              <a:rPr sz="1500" i="0" b="0">
                 <a:solidFill>
                   <a:srgbClr val="D4D4D4"/>
                 </a:solidFill>
@@ -15172,11 +15371,11 @@
           <a:p>
             <a:pPr>
               <a:spcAft>
-                <a:spcPts val="342"/>
+                <a:spcPts val="321"/>
               </a:spcAft>
             </a:pPr>
             <a:r>
-              <a:rPr sz="1600" i="0" b="0">
+              <a:rPr sz="1500" i="0" b="0">
                 <a:solidFill>
                   <a:srgbClr val="D4D4D4"/>
                 </a:solidFill>
@@ -15188,11 +15387,11 @@
           <a:p>
             <a:pPr>
               <a:spcAft>
-                <a:spcPts val="342"/>
+                <a:spcPts val="321"/>
               </a:spcAft>
             </a:pPr>
             <a:r>
-              <a:rPr sz="1600" i="0" b="0">
+              <a:rPr sz="1500" i="0" b="0">
                 <a:solidFill>
                   <a:srgbClr val="569CD6"/>
                 </a:solidFill>
@@ -15201,7 +15400,7 @@
               <a:t>public</a:t>
             </a:r>
             <a:r>
-              <a:rPr sz="1600" i="0" b="0">
+              <a:rPr sz="1500" i="0" b="0">
                 <a:solidFill>
                   <a:srgbClr val="D4D4D4"/>
                 </a:solidFill>
@@ -15210,7 +15409,7 @@
               <a:t> </a:t>
             </a:r>
             <a:r>
-              <a:rPr sz="1600" i="0" b="0">
+              <a:rPr sz="1500" i="0" b="0">
                 <a:solidFill>
                   <a:srgbClr val="D4D4D4"/>
                 </a:solidFill>
@@ -15219,7 +15418,7 @@
               <a:t>Cita</a:t>
             </a:r>
             <a:r>
-              <a:rPr sz="1600" i="0" b="0">
+              <a:rPr sz="1500" i="0" b="0">
                 <a:solidFill>
                   <a:srgbClr val="D4D4D4"/>
                 </a:solidFill>
@@ -15228,7 +15427,7 @@
               <a:t> </a:t>
             </a:r>
             <a:r>
-              <a:rPr sz="1600" i="0" b="0">
+              <a:rPr sz="1500" i="0" b="0">
                 <a:solidFill>
                   <a:srgbClr val="DCDCAA"/>
                 </a:solidFill>
@@ -15237,7 +15436,7 @@
               <a:t>agendar</a:t>
             </a:r>
             <a:r>
-              <a:rPr sz="1600" i="0" b="0">
+              <a:rPr sz="1500" i="0" b="0">
                 <a:solidFill>
                   <a:srgbClr val="D4D4D4"/>
                 </a:solidFill>
@@ -15246,7 +15445,7 @@
               <a:t>(</a:t>
             </a:r>
             <a:r>
-              <a:rPr sz="1600" i="0" b="0">
+              <a:rPr sz="1500" i="0" b="0">
                 <a:solidFill>
                   <a:srgbClr val="4EC9B0"/>
                 </a:solidFill>
@@ -15255,7 +15454,7 @@
               <a:t>String</a:t>
             </a:r>
             <a:r>
-              <a:rPr sz="1600" i="0" b="0">
+              <a:rPr sz="1500" i="0" b="0">
                 <a:solidFill>
                   <a:srgbClr val="D4D4D4"/>
                 </a:solidFill>
@@ -15264,7 +15463,7 @@
               <a:t> </a:t>
             </a:r>
             <a:r>
-              <a:rPr sz="1600" i="0" b="0">
+              <a:rPr sz="1500" i="0" b="0">
                 <a:solidFill>
                   <a:srgbClr val="D4D4D4"/>
                 </a:solidFill>
@@ -15273,7 +15472,7 @@
               <a:t>idMascota</a:t>
             </a:r>
             <a:r>
-              <a:rPr sz="1600" i="0" b="0">
+              <a:rPr sz="1500" i="0" b="0">
                 <a:solidFill>
                   <a:srgbClr val="D4D4D4"/>
                 </a:solidFill>
@@ -15282,7 +15481,7 @@
               <a:t>, </a:t>
             </a:r>
             <a:r>
-              <a:rPr sz="1600" i="0" b="0">
+              <a:rPr sz="1500" i="0" b="0">
                 <a:solidFill>
                   <a:srgbClr val="4EC9B0"/>
                 </a:solidFill>
@@ -15291,7 +15490,7 @@
               <a:t>String</a:t>
             </a:r>
             <a:r>
-              <a:rPr sz="1600" i="0" b="0">
+              <a:rPr sz="1500" i="0" b="0">
                 <a:solidFill>
                   <a:srgbClr val="D4D4D4"/>
                 </a:solidFill>
@@ -15300,7 +15499,7 @@
               <a:t> </a:t>
             </a:r>
             <a:r>
-              <a:rPr sz="1600" i="0" b="0">
+              <a:rPr sz="1500" i="0" b="0">
                 <a:solidFill>
                   <a:srgbClr val="D4D4D4"/>
                 </a:solidFill>
@@ -15309,7 +15508,7 @@
               <a:t>fechaHora</a:t>
             </a:r>
             <a:r>
-              <a:rPr sz="1600" i="0" b="0">
+              <a:rPr sz="1500" i="0" b="0">
                 <a:solidFill>
                   <a:srgbClr val="D4D4D4"/>
                 </a:solidFill>
@@ -15321,11 +15520,11 @@
           <a:p>
             <a:pPr>
               <a:spcAft>
-                <a:spcPts val="342"/>
+                <a:spcPts val="321"/>
               </a:spcAft>
             </a:pPr>
             <a:r>
-              <a:rPr sz="1600" i="0" b="0">
+              <a:rPr sz="1500" i="0" b="0">
                 <a:solidFill>
                   <a:srgbClr val="D4D4D4"/>
                 </a:solidFill>
@@ -15334,7 +15533,7 @@
               <a:t>    </a:t>
             </a:r>
             <a:r>
-              <a:rPr sz="1600" i="1" b="0">
+              <a:rPr sz="1500" i="1" b="0">
                 <a:solidFill>
                   <a:srgbClr val="6A9955"/>
                 </a:solidFill>
@@ -15346,11 +15545,11 @@
           <a:p>
             <a:pPr>
               <a:spcAft>
-                <a:spcPts val="342"/>
+                <a:spcPts val="321"/>
               </a:spcAft>
             </a:pPr>
             <a:r>
-              <a:rPr sz="1600" i="0" b="0">
+              <a:rPr sz="1500" i="0" b="0">
                 <a:solidFill>
                   <a:srgbClr val="D4D4D4"/>
                 </a:solidFill>
@@ -15586,7 +15785,7 @@
         <p:spPr>
           <a:xfrm>
             <a:off x="457200" y="1261872"/>
-            <a:ext cx="11277295" cy="4506872"/>
+            <a:ext cx="11277295" cy="3886755"/>
           </a:xfrm>
           <a:prstGeom prst="roundRect">
             <a:avLst>
@@ -15835,8 +16034,8 @@
         </p:nvSpPr>
         <p:spPr>
           <a:xfrm>
-            <a:off x="1188720" y="1719072"/>
-            <a:ext cx="10271455" cy="3912512"/>
+            <a:off x="685800" y="1719072"/>
+            <a:ext cx="502920" cy="3292395"/>
           </a:xfrm>
           <a:prstGeom prst="rect">
             <a:avLst/>
@@ -15849,665 +16048,179 @@
           </a:bodyPr>
           <a:lstStyle/>
           <a:p>
-            <a:pPr>
+            <a:pPr algn="r">
               <a:spcAft>
-                <a:spcPts val="385"/>
+                <a:spcPts val="342"/>
               </a:spcAft>
             </a:pPr>
             <a:r>
-              <a:rPr sz="1800" i="0" b="0">
-                <a:solidFill>
-                  <a:srgbClr val="569CD6"/>
-                </a:solidFill>
-                <a:latin typeface="Consolas"/>
-              </a:rPr>
-              <a:t>if</a:t>
-            </a:r>
-            <a:r>
-              <a:rPr sz="1800" i="0" b="0">
-                <a:solidFill>
-                  <a:srgbClr val="D4D4D4"/>
-                </a:solidFill>
-                <a:latin typeface="Consolas"/>
-              </a:rPr>
-              <a:t> (</a:t>
-            </a:r>
-            <a:r>
-              <a:rPr sz="1800" i="0" b="0">
-                <a:solidFill>
-                  <a:srgbClr val="D4D4D4"/>
-                </a:solidFill>
-                <a:latin typeface="Consolas"/>
-              </a:rPr>
-              <a:t>fechaHora</a:t>
-            </a:r>
-            <a:r>
-              <a:rPr sz="1800" i="0" b="0">
-                <a:solidFill>
-                  <a:srgbClr val="D4D4D4"/>
-                </a:solidFill>
-                <a:latin typeface="Consolas"/>
-              </a:rPr>
-              <a:t> == </a:t>
-            </a:r>
-            <a:r>
-              <a:rPr sz="1800" i="0" b="0">
-                <a:solidFill>
-                  <a:srgbClr val="569CD6"/>
-                </a:solidFill>
-                <a:latin typeface="Consolas"/>
-              </a:rPr>
-              <a:t>null</a:t>
-            </a:r>
-            <a:r>
-              <a:rPr sz="1800" i="0" b="0">
-                <a:solidFill>
-                  <a:srgbClr val="D4D4D4"/>
-                </a:solidFill>
-                <a:latin typeface="Consolas"/>
-              </a:rPr>
-              <a:t> || </a:t>
-            </a:r>
-            <a:r>
-              <a:rPr sz="1800" i="0" b="0">
-                <a:solidFill>
-                  <a:srgbClr val="DCDCAA"/>
-                </a:solidFill>
-                <a:latin typeface="Consolas"/>
-              </a:rPr>
-              <a:t>fechaHora.trim</a:t>
-            </a:r>
-            <a:r>
-              <a:rPr sz="1800" i="0" b="0">
-                <a:solidFill>
-                  <a:srgbClr val="D4D4D4"/>
-                </a:solidFill>
-                <a:latin typeface="Consolas"/>
-              </a:rPr>
-              <a:t>().</a:t>
-            </a:r>
-            <a:r>
-              <a:rPr sz="1800" i="0" b="0">
-                <a:solidFill>
-                  <a:srgbClr val="DCDCAA"/>
-                </a:solidFill>
-                <a:latin typeface="Consolas"/>
-              </a:rPr>
-              <a:t>isEmpty</a:t>
-            </a:r>
-            <a:r>
-              <a:rPr sz="1800" i="0" b="0">
-                <a:solidFill>
-                  <a:srgbClr val="D4D4D4"/>
-                </a:solidFill>
-                <a:latin typeface="Consolas"/>
-              </a:rPr>
-              <a:t>()) {</a:t>
-            </a:r>
-          </a:p>
-          <a:p>
-            <a:pPr>
+              <a:rPr sz="1600" i="0" b="0">
+                <a:solidFill>
+                  <a:srgbClr val="858585"/>
+                </a:solidFill>
+                <a:latin typeface="Consolas"/>
+              </a:rPr>
+              <a:t>1</a:t>
+            </a:r>
+          </a:p>
+          <a:p>
+            <a:pPr algn="r">
               <a:spcAft>
-                <a:spcPts val="385"/>
+                <a:spcPts val="342"/>
               </a:spcAft>
             </a:pPr>
             <a:r>
-              <a:rPr sz="1800" i="0" b="0">
-                <a:solidFill>
-                  <a:srgbClr val="D4D4D4"/>
-                </a:solidFill>
-                <a:latin typeface="Consolas"/>
-              </a:rPr>
-              <a:t>    </a:t>
-            </a:r>
-            <a:r>
-              <a:rPr sz="1800" i="0" b="0">
-                <a:solidFill>
-                  <a:srgbClr val="569CD6"/>
-                </a:solidFill>
-                <a:latin typeface="Consolas"/>
-              </a:rPr>
-              <a:t>throw</a:t>
-            </a:r>
-            <a:r>
-              <a:rPr sz="1800" i="0" b="0">
-                <a:solidFill>
-                  <a:srgbClr val="D4D4D4"/>
-                </a:solidFill>
-                <a:latin typeface="Consolas"/>
-              </a:rPr>
-              <a:t> </a:t>
-            </a:r>
-            <a:r>
-              <a:rPr sz="1800" i="0" b="0">
-                <a:solidFill>
-                  <a:srgbClr val="569CD6"/>
-                </a:solidFill>
-                <a:latin typeface="Consolas"/>
-              </a:rPr>
-              <a:t>new</a:t>
-            </a:r>
-            <a:r>
-              <a:rPr sz="1800" i="0" b="0">
-                <a:solidFill>
-                  <a:srgbClr val="D4D4D4"/>
-                </a:solidFill>
-                <a:latin typeface="Consolas"/>
-              </a:rPr>
-              <a:t> </a:t>
-            </a:r>
-            <a:r>
-              <a:rPr sz="1800" i="0" b="0">
-                <a:solidFill>
-                  <a:srgbClr val="4EC9B0"/>
-                </a:solidFill>
-                <a:latin typeface="Consolas"/>
-              </a:rPr>
-              <a:t>IllegalArgumentException</a:t>
-            </a:r>
-            <a:r>
-              <a:rPr sz="1800" i="0" b="0">
-                <a:solidFill>
-                  <a:srgbClr val="D4D4D4"/>
-                </a:solidFill>
-                <a:latin typeface="Consolas"/>
-              </a:rPr>
-              <a:t>(</a:t>
-            </a:r>
-            <a:r>
-              <a:rPr sz="1800" i="0" b="0">
-                <a:solidFill>
-                  <a:srgbClr val="CE9178"/>
-                </a:solidFill>
-                <a:latin typeface="Consolas"/>
-              </a:rPr>
-              <a:t>"La fecha y hora de la cita son obligatorias."</a:t>
-            </a:r>
-            <a:r>
-              <a:rPr sz="1800" i="0" b="0">
-                <a:solidFill>
-                  <a:srgbClr val="D4D4D4"/>
-                </a:solidFill>
-                <a:latin typeface="Consolas"/>
-              </a:rPr>
-              <a:t>);</a:t>
-            </a:r>
-          </a:p>
-          <a:p>
-            <a:pPr>
+              <a:rPr sz="1600" i="0" b="0">
+                <a:solidFill>
+                  <a:srgbClr val="858585"/>
+                </a:solidFill>
+                <a:latin typeface="Consolas"/>
+              </a:rPr>
+              <a:t>2</a:t>
+            </a:r>
+          </a:p>
+          <a:p>
+            <a:pPr algn="r">
               <a:spcAft>
-                <a:spcPts val="385"/>
+                <a:spcPts val="342"/>
               </a:spcAft>
             </a:pPr>
             <a:r>
-              <a:rPr sz="1800" i="0" b="0">
-                <a:solidFill>
-                  <a:srgbClr val="D4D4D4"/>
-                </a:solidFill>
-                <a:latin typeface="Consolas"/>
-              </a:rPr>
-              <a:t>}</a:t>
-            </a:r>
-          </a:p>
-          <a:p>
-            <a:pPr>
+              <a:rPr sz="1600" i="0" b="0">
+                <a:solidFill>
+                  <a:srgbClr val="858585"/>
+                </a:solidFill>
+                <a:latin typeface="Consolas"/>
+              </a:rPr>
+              <a:t>3</a:t>
+            </a:r>
+          </a:p>
+          <a:p>
+            <a:pPr algn="r">
               <a:spcAft>
-                <a:spcPts val="385"/>
+                <a:spcPts val="342"/>
               </a:spcAft>
             </a:pPr>
             <a:r>
-              <a:rPr sz="1800" i="0" b="0">
-                <a:solidFill>
-                  <a:srgbClr val="D4D4D4"/>
-                </a:solidFill>
-                <a:latin typeface="Consolas"/>
-              </a:rPr>
-              <a:t>Mascota</a:t>
-            </a:r>
-            <a:r>
-              <a:rPr sz="1800" i="0" b="0">
-                <a:solidFill>
-                  <a:srgbClr val="D4D4D4"/>
-                </a:solidFill>
-                <a:latin typeface="Consolas"/>
-              </a:rPr>
-              <a:t> </a:t>
-            </a:r>
-            <a:r>
-              <a:rPr sz="1800" i="0" b="0">
-                <a:solidFill>
-                  <a:srgbClr val="D4D4D4"/>
-                </a:solidFill>
-                <a:latin typeface="Consolas"/>
-              </a:rPr>
-              <a:t>mascota</a:t>
-            </a:r>
-            <a:r>
-              <a:rPr sz="1800" i="0" b="0">
-                <a:solidFill>
-                  <a:srgbClr val="D4D4D4"/>
-                </a:solidFill>
-                <a:latin typeface="Consolas"/>
-              </a:rPr>
-              <a:t> = </a:t>
-            </a:r>
-            <a:r>
-              <a:rPr sz="1800" i="0" b="0">
-                <a:solidFill>
-                  <a:srgbClr val="DCDCAA"/>
-                </a:solidFill>
-                <a:latin typeface="Consolas"/>
-              </a:rPr>
-              <a:t>expedientes.get</a:t>
-            </a:r>
-            <a:r>
-              <a:rPr sz="1800" i="0" b="0">
-                <a:solidFill>
-                  <a:srgbClr val="D4D4D4"/>
-                </a:solidFill>
-                <a:latin typeface="Consolas"/>
-              </a:rPr>
-              <a:t>(</a:t>
-            </a:r>
-            <a:r>
-              <a:rPr sz="1800" i="0" b="0">
-                <a:solidFill>
-                  <a:srgbClr val="D4D4D4"/>
-                </a:solidFill>
-                <a:latin typeface="Consolas"/>
-              </a:rPr>
-              <a:t>idMascota</a:t>
-            </a:r>
-            <a:r>
-              <a:rPr sz="1800" i="0" b="0">
-                <a:solidFill>
-                  <a:srgbClr val="D4D4D4"/>
-                </a:solidFill>
-                <a:latin typeface="Consolas"/>
-              </a:rPr>
-              <a:t>);</a:t>
-            </a:r>
-          </a:p>
-          <a:p>
-            <a:pPr>
+              <a:rPr sz="1600" i="0" b="0">
+                <a:solidFill>
+                  <a:srgbClr val="858585"/>
+                </a:solidFill>
+                <a:latin typeface="Consolas"/>
+              </a:rPr>
+              <a:t>4</a:t>
+            </a:r>
+          </a:p>
+          <a:p>
+            <a:pPr algn="r">
               <a:spcAft>
-                <a:spcPts val="385"/>
+                <a:spcPts val="342"/>
               </a:spcAft>
             </a:pPr>
             <a:r>
-              <a:rPr sz="1800" i="0" b="0">
-                <a:solidFill>
-                  <a:srgbClr val="569CD6"/>
-                </a:solidFill>
-                <a:latin typeface="Consolas"/>
-              </a:rPr>
-              <a:t>if</a:t>
-            </a:r>
-            <a:r>
-              <a:rPr sz="1800" i="0" b="0">
-                <a:solidFill>
-                  <a:srgbClr val="D4D4D4"/>
-                </a:solidFill>
-                <a:latin typeface="Consolas"/>
-              </a:rPr>
-              <a:t> (</a:t>
-            </a:r>
-            <a:r>
-              <a:rPr sz="1800" i="0" b="0">
-                <a:solidFill>
-                  <a:srgbClr val="D4D4D4"/>
-                </a:solidFill>
-                <a:latin typeface="Consolas"/>
-              </a:rPr>
-              <a:t>mascota</a:t>
-            </a:r>
-            <a:r>
-              <a:rPr sz="1800" i="0" b="0">
-                <a:solidFill>
-                  <a:srgbClr val="D4D4D4"/>
-                </a:solidFill>
-                <a:latin typeface="Consolas"/>
-              </a:rPr>
-              <a:t> == </a:t>
-            </a:r>
-            <a:r>
-              <a:rPr sz="1800" i="0" b="0">
-                <a:solidFill>
-                  <a:srgbClr val="569CD6"/>
-                </a:solidFill>
-                <a:latin typeface="Consolas"/>
-              </a:rPr>
-              <a:t>null</a:t>
-            </a:r>
-            <a:r>
-              <a:rPr sz="1800" i="0" b="0">
-                <a:solidFill>
-                  <a:srgbClr val="D4D4D4"/>
-                </a:solidFill>
-                <a:latin typeface="Consolas"/>
-              </a:rPr>
-              <a:t>) {</a:t>
-            </a:r>
-          </a:p>
-          <a:p>
-            <a:pPr>
+              <a:rPr sz="1600" i="0" b="0">
+                <a:solidFill>
+                  <a:srgbClr val="858585"/>
+                </a:solidFill>
+                <a:latin typeface="Consolas"/>
+              </a:rPr>
+              <a:t>5</a:t>
+            </a:r>
+          </a:p>
+          <a:p>
+            <a:pPr algn="r">
               <a:spcAft>
-                <a:spcPts val="385"/>
+                <a:spcPts val="342"/>
               </a:spcAft>
             </a:pPr>
             <a:r>
-              <a:rPr sz="1800" i="0" b="0">
-                <a:solidFill>
-                  <a:srgbClr val="D4D4D4"/>
-                </a:solidFill>
-                <a:latin typeface="Consolas"/>
-              </a:rPr>
-              <a:t>    </a:t>
-            </a:r>
-            <a:r>
-              <a:rPr sz="1800" i="0" b="0">
-                <a:solidFill>
-                  <a:srgbClr val="569CD6"/>
-                </a:solidFill>
-                <a:latin typeface="Consolas"/>
-              </a:rPr>
-              <a:t>throw</a:t>
-            </a:r>
-            <a:r>
-              <a:rPr sz="1800" i="0" b="0">
-                <a:solidFill>
-                  <a:srgbClr val="D4D4D4"/>
-                </a:solidFill>
-                <a:latin typeface="Consolas"/>
-              </a:rPr>
-              <a:t> </a:t>
-            </a:r>
-            <a:r>
-              <a:rPr sz="1800" i="0" b="0">
-                <a:solidFill>
-                  <a:srgbClr val="569CD6"/>
-                </a:solidFill>
-                <a:latin typeface="Consolas"/>
-              </a:rPr>
-              <a:t>new</a:t>
-            </a:r>
-            <a:r>
-              <a:rPr sz="1800" i="0" b="0">
-                <a:solidFill>
-                  <a:srgbClr val="D4D4D4"/>
-                </a:solidFill>
-                <a:latin typeface="Consolas"/>
-              </a:rPr>
-              <a:t> </a:t>
-            </a:r>
-            <a:r>
-              <a:rPr sz="1800" i="0" b="0">
-                <a:solidFill>
-                  <a:srgbClr val="4EC9B0"/>
-                </a:solidFill>
-                <a:latin typeface="Consolas"/>
-              </a:rPr>
-              <a:t>NoSuchElementException</a:t>
-            </a:r>
-            <a:r>
-              <a:rPr sz="1800" i="0" b="0">
-                <a:solidFill>
-                  <a:srgbClr val="D4D4D4"/>
-                </a:solidFill>
-                <a:latin typeface="Consolas"/>
-              </a:rPr>
-              <a:t>(</a:t>
-            </a:r>
-            <a:r>
-              <a:rPr sz="1800" i="0" b="0">
-                <a:solidFill>
-                  <a:srgbClr val="CE9178"/>
-                </a:solidFill>
-                <a:latin typeface="Consolas"/>
-              </a:rPr>
-              <a:t>"No existe expediente con ID "</a:t>
-            </a:r>
-            <a:r>
-              <a:rPr sz="1800" i="0" b="0">
-                <a:solidFill>
-                  <a:srgbClr val="D4D4D4"/>
-                </a:solidFill>
-                <a:latin typeface="Consolas"/>
-              </a:rPr>
-              <a:t> + </a:t>
-            </a:r>
-            <a:r>
-              <a:rPr sz="1800" i="0" b="0">
-                <a:solidFill>
-                  <a:srgbClr val="D4D4D4"/>
-                </a:solidFill>
-                <a:latin typeface="Consolas"/>
-              </a:rPr>
-              <a:t>idMascota</a:t>
-            </a:r>
-            <a:r>
-              <a:rPr sz="1800" i="0" b="0">
-                <a:solidFill>
-                  <a:srgbClr val="D4D4D4"/>
-                </a:solidFill>
-                <a:latin typeface="Consolas"/>
-              </a:rPr>
-              <a:t>);</a:t>
-            </a:r>
-          </a:p>
-          <a:p>
-            <a:pPr>
+              <a:rPr sz="1600" i="0" b="0">
+                <a:solidFill>
+                  <a:srgbClr val="858585"/>
+                </a:solidFill>
+                <a:latin typeface="Consolas"/>
+              </a:rPr>
+              <a:t>6</a:t>
+            </a:r>
+          </a:p>
+          <a:p>
+            <a:pPr algn="r">
               <a:spcAft>
-                <a:spcPts val="385"/>
+                <a:spcPts val="342"/>
               </a:spcAft>
             </a:pPr>
             <a:r>
-              <a:rPr sz="1800" i="0" b="0">
-                <a:solidFill>
-                  <a:srgbClr val="D4D4D4"/>
-                </a:solidFill>
-                <a:latin typeface="Consolas"/>
-              </a:rPr>
-              <a:t>}</a:t>
-            </a:r>
-          </a:p>
-          <a:p>
-            <a:pPr>
+              <a:rPr sz="1600" i="0" b="0">
+                <a:solidFill>
+                  <a:srgbClr val="858585"/>
+                </a:solidFill>
+                <a:latin typeface="Consolas"/>
+              </a:rPr>
+              <a:t>7</a:t>
+            </a:r>
+          </a:p>
+          <a:p>
+            <a:pPr algn="r">
               <a:spcAft>
-                <a:spcPts val="385"/>
+                <a:spcPts val="342"/>
               </a:spcAft>
             </a:pPr>
             <a:r>
-              <a:rPr sz="1800" i="0" b="0">
-                <a:solidFill>
-                  <a:srgbClr val="569CD6"/>
-                </a:solidFill>
-                <a:latin typeface="Consolas"/>
-              </a:rPr>
-              <a:t>if</a:t>
-            </a:r>
-            <a:r>
-              <a:rPr sz="1800" i="0" b="0">
-                <a:solidFill>
-                  <a:srgbClr val="D4D4D4"/>
-                </a:solidFill>
-                <a:latin typeface="Consolas"/>
-              </a:rPr>
-              <a:t> (!</a:t>
-            </a:r>
-            <a:r>
-              <a:rPr sz="1800" i="0" b="0">
-                <a:solidFill>
-                  <a:srgbClr val="DCDCAA"/>
-                </a:solidFill>
-                <a:latin typeface="Consolas"/>
-              </a:rPr>
-              <a:t>mascota.estaActiva</a:t>
-            </a:r>
-            <a:r>
-              <a:rPr sz="1800" i="0" b="0">
-                <a:solidFill>
-                  <a:srgbClr val="D4D4D4"/>
-                </a:solidFill>
-                <a:latin typeface="Consolas"/>
-              </a:rPr>
-              <a:t>()) {</a:t>
-            </a:r>
-          </a:p>
-          <a:p>
-            <a:pPr>
+              <a:rPr sz="1600" i="0" b="0">
+                <a:solidFill>
+                  <a:srgbClr val="858585"/>
+                </a:solidFill>
+                <a:latin typeface="Consolas"/>
+              </a:rPr>
+              <a:t>8</a:t>
+            </a:r>
+          </a:p>
+          <a:p>
+            <a:pPr algn="r">
               <a:spcAft>
-                <a:spcPts val="385"/>
+                <a:spcPts val="342"/>
               </a:spcAft>
             </a:pPr>
             <a:r>
-              <a:rPr sz="1800" i="0" b="0">
-                <a:solidFill>
-                  <a:srgbClr val="D4D4D4"/>
-                </a:solidFill>
-                <a:latin typeface="Consolas"/>
-              </a:rPr>
-              <a:t>    </a:t>
-            </a:r>
-            <a:r>
-              <a:rPr sz="1800" i="0" b="0">
-                <a:solidFill>
-                  <a:srgbClr val="569CD6"/>
-                </a:solidFill>
-                <a:latin typeface="Consolas"/>
-              </a:rPr>
-              <a:t>throw</a:t>
-            </a:r>
-            <a:r>
-              <a:rPr sz="1800" i="0" b="0">
-                <a:solidFill>
-                  <a:srgbClr val="D4D4D4"/>
-                </a:solidFill>
-                <a:latin typeface="Consolas"/>
-              </a:rPr>
-              <a:t> </a:t>
-            </a:r>
-            <a:r>
-              <a:rPr sz="1800" i="0" b="0">
-                <a:solidFill>
-                  <a:srgbClr val="569CD6"/>
-                </a:solidFill>
-                <a:latin typeface="Consolas"/>
-              </a:rPr>
-              <a:t>new</a:t>
-            </a:r>
-            <a:r>
-              <a:rPr sz="1800" i="0" b="0">
-                <a:solidFill>
-                  <a:srgbClr val="D4D4D4"/>
-                </a:solidFill>
-                <a:latin typeface="Consolas"/>
-              </a:rPr>
-              <a:t> </a:t>
-            </a:r>
-            <a:r>
-              <a:rPr sz="1800" i="0" b="0">
-                <a:solidFill>
-                  <a:srgbClr val="4EC9B0"/>
-                </a:solidFill>
-                <a:latin typeface="Consolas"/>
-              </a:rPr>
-              <a:t>IllegalStateException</a:t>
-            </a:r>
-            <a:r>
-              <a:rPr sz="1800" i="0" b="0">
-                <a:solidFill>
-                  <a:srgbClr val="D4D4D4"/>
-                </a:solidFill>
-                <a:latin typeface="Consolas"/>
-              </a:rPr>
-              <a:t>(</a:t>
-            </a:r>
-            <a:r>
-              <a:rPr sz="1800" i="0" b="0">
-                <a:solidFill>
-                  <a:srgbClr val="CE9178"/>
-                </a:solidFill>
-                <a:latin typeface="Consolas"/>
-              </a:rPr>
-              <a:t>"La mascota "</a:t>
-            </a:r>
-            <a:r>
-              <a:rPr sz="1800" i="0" b="0">
-                <a:solidFill>
-                  <a:srgbClr val="D4D4D4"/>
-                </a:solidFill>
-                <a:latin typeface="Consolas"/>
-              </a:rPr>
-              <a:t> + </a:t>
-            </a:r>
-            <a:r>
-              <a:rPr sz="1800" i="0" b="0">
-                <a:solidFill>
-                  <a:srgbClr val="DCDCAA"/>
-                </a:solidFill>
-                <a:latin typeface="Consolas"/>
-              </a:rPr>
-              <a:t>mascota.getNombre</a:t>
-            </a:r>
-            <a:r>
-              <a:rPr sz="1800" i="0" b="0">
-                <a:solidFill>
-                  <a:srgbClr val="D4D4D4"/>
-                </a:solidFill>
-                <a:latin typeface="Consolas"/>
-              </a:rPr>
-              <a:t>()</a:t>
-            </a:r>
-          </a:p>
-          <a:p>
-            <a:pPr>
+              <a:rPr sz="1600" i="0" b="0">
+                <a:solidFill>
+                  <a:srgbClr val="858585"/>
+                </a:solidFill>
+                <a:latin typeface="Consolas"/>
+              </a:rPr>
+              <a:t>9</a:t>
+            </a:r>
+          </a:p>
+          <a:p>
+            <a:pPr algn="r">
               <a:spcAft>
-                <a:spcPts val="385"/>
+                <a:spcPts val="342"/>
               </a:spcAft>
             </a:pPr>
             <a:r>
-              <a:rPr sz="1800" i="0" b="0">
-                <a:solidFill>
-                  <a:srgbClr val="D4D4D4"/>
-                </a:solidFill>
-                <a:latin typeface="Consolas"/>
-              </a:rPr>
-              <a:t>            + </a:t>
-            </a:r>
-            <a:r>
-              <a:rPr sz="1800" i="0" b="0">
-                <a:solidFill>
-                  <a:srgbClr val="CE9178"/>
-                </a:solidFill>
-                <a:latin typeface="Consolas"/>
-              </a:rPr>
-              <a:t>" esta inactiva y no puede agendar citas."</a:t>
-            </a:r>
-            <a:r>
-              <a:rPr sz="1800" i="0" b="0">
-                <a:solidFill>
-                  <a:srgbClr val="D4D4D4"/>
-                </a:solidFill>
-                <a:latin typeface="Consolas"/>
-              </a:rPr>
-              <a:t>);</a:t>
-            </a:r>
-          </a:p>
-          <a:p>
-            <a:pPr>
+              <a:rPr sz="1600" i="0" b="0">
+                <a:solidFill>
+                  <a:srgbClr val="858585"/>
+                </a:solidFill>
+                <a:latin typeface="Consolas"/>
+              </a:rPr>
+              <a:t>10</a:t>
+            </a:r>
+          </a:p>
+          <a:p>
+            <a:pPr algn="r">
               <a:spcAft>
-                <a:spcPts val="385"/>
+                <a:spcPts val="342"/>
               </a:spcAft>
             </a:pPr>
             <a:r>
-              <a:rPr sz="1800" i="0" b="0">
-                <a:solidFill>
-                  <a:srgbClr val="D4D4D4"/>
-                </a:solidFill>
-                <a:latin typeface="Consolas"/>
-              </a:rPr>
-              <a:t>}</a:t>
+              <a:rPr sz="1600" i="0" b="0">
+                <a:solidFill>
+                  <a:srgbClr val="858585"/>
+                </a:solidFill>
+                <a:latin typeface="Consolas"/>
+              </a:rPr>
+              <a:t>11</a:t>
             </a:r>
           </a:p>
         </p:txBody>
@@ -16520,8 +16233,8 @@
         </p:nvSpPr>
         <p:spPr>
           <a:xfrm>
-            <a:off x="457200" y="6035040"/>
-            <a:ext cx="11277295" cy="365760"/>
+            <a:off x="1188720" y="1719072"/>
+            <a:ext cx="10271455" cy="3292395"/>
           </a:xfrm>
           <a:prstGeom prst="rect">
             <a:avLst/>
@@ -16534,6 +16247,691 @@
           </a:bodyPr>
           <a:lstStyle/>
           <a:p>
+            <a:pPr>
+              <a:spcAft>
+                <a:spcPts val="342"/>
+              </a:spcAft>
+            </a:pPr>
+            <a:r>
+              <a:rPr sz="1600" i="0" b="0">
+                <a:solidFill>
+                  <a:srgbClr val="569CD6"/>
+                </a:solidFill>
+                <a:latin typeface="Consolas"/>
+              </a:rPr>
+              <a:t>if</a:t>
+            </a:r>
+            <a:r>
+              <a:rPr sz="1600" i="0" b="0">
+                <a:solidFill>
+                  <a:srgbClr val="D4D4D4"/>
+                </a:solidFill>
+                <a:latin typeface="Consolas"/>
+              </a:rPr>
+              <a:t> (</a:t>
+            </a:r>
+            <a:r>
+              <a:rPr sz="1600" i="0" b="0">
+                <a:solidFill>
+                  <a:srgbClr val="D4D4D4"/>
+                </a:solidFill>
+                <a:latin typeface="Consolas"/>
+              </a:rPr>
+              <a:t>fechaHora</a:t>
+            </a:r>
+            <a:r>
+              <a:rPr sz="1600" i="0" b="0">
+                <a:solidFill>
+                  <a:srgbClr val="D4D4D4"/>
+                </a:solidFill>
+                <a:latin typeface="Consolas"/>
+              </a:rPr>
+              <a:t> == </a:t>
+            </a:r>
+            <a:r>
+              <a:rPr sz="1600" i="0" b="0">
+                <a:solidFill>
+                  <a:srgbClr val="569CD6"/>
+                </a:solidFill>
+                <a:latin typeface="Consolas"/>
+              </a:rPr>
+              <a:t>null</a:t>
+            </a:r>
+            <a:r>
+              <a:rPr sz="1600" i="0" b="0">
+                <a:solidFill>
+                  <a:srgbClr val="D4D4D4"/>
+                </a:solidFill>
+                <a:latin typeface="Consolas"/>
+              </a:rPr>
+              <a:t> || </a:t>
+            </a:r>
+            <a:r>
+              <a:rPr sz="1600" i="0" b="0">
+                <a:solidFill>
+                  <a:srgbClr val="DCDCAA"/>
+                </a:solidFill>
+                <a:latin typeface="Consolas"/>
+              </a:rPr>
+              <a:t>fechaHora.trim</a:t>
+            </a:r>
+            <a:r>
+              <a:rPr sz="1600" i="0" b="0">
+                <a:solidFill>
+                  <a:srgbClr val="D4D4D4"/>
+                </a:solidFill>
+                <a:latin typeface="Consolas"/>
+              </a:rPr>
+              <a:t>().</a:t>
+            </a:r>
+            <a:r>
+              <a:rPr sz="1600" i="0" b="0">
+                <a:solidFill>
+                  <a:srgbClr val="DCDCAA"/>
+                </a:solidFill>
+                <a:latin typeface="Consolas"/>
+              </a:rPr>
+              <a:t>isEmpty</a:t>
+            </a:r>
+            <a:r>
+              <a:rPr sz="1600" i="0" b="0">
+                <a:solidFill>
+                  <a:srgbClr val="D4D4D4"/>
+                </a:solidFill>
+                <a:latin typeface="Consolas"/>
+              </a:rPr>
+              <a:t>()) {</a:t>
+            </a:r>
+          </a:p>
+          <a:p>
+            <a:pPr>
+              <a:spcAft>
+                <a:spcPts val="342"/>
+              </a:spcAft>
+            </a:pPr>
+            <a:r>
+              <a:rPr sz="1600" i="0" b="0">
+                <a:solidFill>
+                  <a:srgbClr val="D4D4D4"/>
+                </a:solidFill>
+                <a:latin typeface="Consolas"/>
+              </a:rPr>
+              <a:t>    </a:t>
+            </a:r>
+            <a:r>
+              <a:rPr sz="1600" i="0" b="0">
+                <a:solidFill>
+                  <a:srgbClr val="569CD6"/>
+                </a:solidFill>
+                <a:latin typeface="Consolas"/>
+              </a:rPr>
+              <a:t>throw</a:t>
+            </a:r>
+            <a:r>
+              <a:rPr sz="1600" i="0" b="0">
+                <a:solidFill>
+                  <a:srgbClr val="D4D4D4"/>
+                </a:solidFill>
+                <a:latin typeface="Consolas"/>
+              </a:rPr>
+              <a:t> </a:t>
+            </a:r>
+            <a:r>
+              <a:rPr sz="1600" i="0" b="0">
+                <a:solidFill>
+                  <a:srgbClr val="569CD6"/>
+                </a:solidFill>
+                <a:latin typeface="Consolas"/>
+              </a:rPr>
+              <a:t>new</a:t>
+            </a:r>
+            <a:r>
+              <a:rPr sz="1600" i="0" b="0">
+                <a:solidFill>
+                  <a:srgbClr val="D4D4D4"/>
+                </a:solidFill>
+                <a:latin typeface="Consolas"/>
+              </a:rPr>
+              <a:t> </a:t>
+            </a:r>
+            <a:r>
+              <a:rPr sz="1600" i="0" b="0">
+                <a:solidFill>
+                  <a:srgbClr val="4EC9B0"/>
+                </a:solidFill>
+                <a:latin typeface="Consolas"/>
+              </a:rPr>
+              <a:t>IllegalArgumentException</a:t>
+            </a:r>
+            <a:r>
+              <a:rPr sz="1600" i="0" b="0">
+                <a:solidFill>
+                  <a:srgbClr val="D4D4D4"/>
+                </a:solidFill>
+                <a:latin typeface="Consolas"/>
+              </a:rPr>
+              <a:t>(</a:t>
+            </a:r>
+            <a:r>
+              <a:rPr sz="1600" i="0" b="0">
+                <a:solidFill>
+                  <a:srgbClr val="CE9178"/>
+                </a:solidFill>
+                <a:latin typeface="Consolas"/>
+              </a:rPr>
+              <a:t>"La fecha y hora de la cita son obligatorias."</a:t>
+            </a:r>
+            <a:r>
+              <a:rPr sz="1600" i="0" b="0">
+                <a:solidFill>
+                  <a:srgbClr val="D4D4D4"/>
+                </a:solidFill>
+                <a:latin typeface="Consolas"/>
+              </a:rPr>
+              <a:t>);</a:t>
+            </a:r>
+          </a:p>
+          <a:p>
+            <a:pPr>
+              <a:spcAft>
+                <a:spcPts val="342"/>
+              </a:spcAft>
+            </a:pPr>
+            <a:r>
+              <a:rPr sz="1600" i="0" b="0">
+                <a:solidFill>
+                  <a:srgbClr val="D4D4D4"/>
+                </a:solidFill>
+                <a:latin typeface="Consolas"/>
+              </a:rPr>
+              <a:t>}</a:t>
+            </a:r>
+          </a:p>
+          <a:p>
+            <a:pPr>
+              <a:spcAft>
+                <a:spcPts val="342"/>
+              </a:spcAft>
+            </a:pPr>
+            <a:r>
+              <a:rPr sz="1600" i="0" b="0">
+                <a:solidFill>
+                  <a:srgbClr val="D4D4D4"/>
+                </a:solidFill>
+                <a:latin typeface="Consolas"/>
+              </a:rPr>
+              <a:t>Mascota</a:t>
+            </a:r>
+            <a:r>
+              <a:rPr sz="1600" i="0" b="0">
+                <a:solidFill>
+                  <a:srgbClr val="D4D4D4"/>
+                </a:solidFill>
+                <a:latin typeface="Consolas"/>
+              </a:rPr>
+              <a:t> </a:t>
+            </a:r>
+            <a:r>
+              <a:rPr sz="1600" i="0" b="0">
+                <a:solidFill>
+                  <a:srgbClr val="D4D4D4"/>
+                </a:solidFill>
+                <a:latin typeface="Consolas"/>
+              </a:rPr>
+              <a:t>mascota</a:t>
+            </a:r>
+            <a:r>
+              <a:rPr sz="1600" i="0" b="0">
+                <a:solidFill>
+                  <a:srgbClr val="D4D4D4"/>
+                </a:solidFill>
+                <a:latin typeface="Consolas"/>
+              </a:rPr>
+              <a:t> = </a:t>
+            </a:r>
+            <a:r>
+              <a:rPr sz="1600" i="0" b="0">
+                <a:solidFill>
+                  <a:srgbClr val="DCDCAA"/>
+                </a:solidFill>
+                <a:latin typeface="Consolas"/>
+              </a:rPr>
+              <a:t>expedientes.get</a:t>
+            </a:r>
+            <a:r>
+              <a:rPr sz="1600" i="0" b="0">
+                <a:solidFill>
+                  <a:srgbClr val="D4D4D4"/>
+                </a:solidFill>
+                <a:latin typeface="Consolas"/>
+              </a:rPr>
+              <a:t>(</a:t>
+            </a:r>
+            <a:r>
+              <a:rPr sz="1600" i="0" b="0">
+                <a:solidFill>
+                  <a:srgbClr val="D4D4D4"/>
+                </a:solidFill>
+                <a:latin typeface="Consolas"/>
+              </a:rPr>
+              <a:t>idMascota</a:t>
+            </a:r>
+            <a:r>
+              <a:rPr sz="1600" i="0" b="0">
+                <a:solidFill>
+                  <a:srgbClr val="D4D4D4"/>
+                </a:solidFill>
+                <a:latin typeface="Consolas"/>
+              </a:rPr>
+              <a:t>);</a:t>
+            </a:r>
+          </a:p>
+          <a:p>
+            <a:pPr>
+              <a:spcAft>
+                <a:spcPts val="342"/>
+              </a:spcAft>
+            </a:pPr>
+            <a:r>
+              <a:rPr sz="1600" i="0" b="0">
+                <a:solidFill>
+                  <a:srgbClr val="569CD6"/>
+                </a:solidFill>
+                <a:latin typeface="Consolas"/>
+              </a:rPr>
+              <a:t>if</a:t>
+            </a:r>
+            <a:r>
+              <a:rPr sz="1600" i="0" b="0">
+                <a:solidFill>
+                  <a:srgbClr val="D4D4D4"/>
+                </a:solidFill>
+                <a:latin typeface="Consolas"/>
+              </a:rPr>
+              <a:t> (</a:t>
+            </a:r>
+            <a:r>
+              <a:rPr sz="1600" i="0" b="0">
+                <a:solidFill>
+                  <a:srgbClr val="D4D4D4"/>
+                </a:solidFill>
+                <a:latin typeface="Consolas"/>
+              </a:rPr>
+              <a:t>mascota</a:t>
+            </a:r>
+            <a:r>
+              <a:rPr sz="1600" i="0" b="0">
+                <a:solidFill>
+                  <a:srgbClr val="D4D4D4"/>
+                </a:solidFill>
+                <a:latin typeface="Consolas"/>
+              </a:rPr>
+              <a:t> == </a:t>
+            </a:r>
+            <a:r>
+              <a:rPr sz="1600" i="0" b="0">
+                <a:solidFill>
+                  <a:srgbClr val="569CD6"/>
+                </a:solidFill>
+                <a:latin typeface="Consolas"/>
+              </a:rPr>
+              <a:t>null</a:t>
+            </a:r>
+            <a:r>
+              <a:rPr sz="1600" i="0" b="0">
+                <a:solidFill>
+                  <a:srgbClr val="D4D4D4"/>
+                </a:solidFill>
+                <a:latin typeface="Consolas"/>
+              </a:rPr>
+              <a:t>) {</a:t>
+            </a:r>
+          </a:p>
+          <a:p>
+            <a:pPr>
+              <a:spcAft>
+                <a:spcPts val="342"/>
+              </a:spcAft>
+            </a:pPr>
+            <a:r>
+              <a:rPr sz="1600" i="0" b="0">
+                <a:solidFill>
+                  <a:srgbClr val="D4D4D4"/>
+                </a:solidFill>
+                <a:latin typeface="Consolas"/>
+              </a:rPr>
+              <a:t>    </a:t>
+            </a:r>
+            <a:r>
+              <a:rPr sz="1600" i="0" b="0">
+                <a:solidFill>
+                  <a:srgbClr val="569CD6"/>
+                </a:solidFill>
+                <a:latin typeface="Consolas"/>
+              </a:rPr>
+              <a:t>throw</a:t>
+            </a:r>
+            <a:r>
+              <a:rPr sz="1600" i="0" b="0">
+                <a:solidFill>
+                  <a:srgbClr val="D4D4D4"/>
+                </a:solidFill>
+                <a:latin typeface="Consolas"/>
+              </a:rPr>
+              <a:t> </a:t>
+            </a:r>
+            <a:r>
+              <a:rPr sz="1600" i="0" b="0">
+                <a:solidFill>
+                  <a:srgbClr val="569CD6"/>
+                </a:solidFill>
+                <a:latin typeface="Consolas"/>
+              </a:rPr>
+              <a:t>new</a:t>
+            </a:r>
+            <a:r>
+              <a:rPr sz="1600" i="0" b="0">
+                <a:solidFill>
+                  <a:srgbClr val="D4D4D4"/>
+                </a:solidFill>
+                <a:latin typeface="Consolas"/>
+              </a:rPr>
+              <a:t> </a:t>
+            </a:r>
+            <a:r>
+              <a:rPr sz="1600" i="0" b="0">
+                <a:solidFill>
+                  <a:srgbClr val="4EC9B0"/>
+                </a:solidFill>
+                <a:latin typeface="Consolas"/>
+              </a:rPr>
+              <a:t>NoSuchElementException</a:t>
+            </a:r>
+            <a:r>
+              <a:rPr sz="1600" i="0" b="0">
+                <a:solidFill>
+                  <a:srgbClr val="D4D4D4"/>
+                </a:solidFill>
+                <a:latin typeface="Consolas"/>
+              </a:rPr>
+              <a:t>(</a:t>
+            </a:r>
+            <a:r>
+              <a:rPr sz="1600" i="0" b="0">
+                <a:solidFill>
+                  <a:srgbClr val="CE9178"/>
+                </a:solidFill>
+                <a:latin typeface="Consolas"/>
+              </a:rPr>
+              <a:t>"No existe expediente con ID "</a:t>
+            </a:r>
+            <a:r>
+              <a:rPr sz="1600" i="0" b="0">
+                <a:solidFill>
+                  <a:srgbClr val="D4D4D4"/>
+                </a:solidFill>
+                <a:latin typeface="Consolas"/>
+              </a:rPr>
+              <a:t> + </a:t>
+            </a:r>
+            <a:r>
+              <a:rPr sz="1600" i="0" b="0">
+                <a:solidFill>
+                  <a:srgbClr val="D4D4D4"/>
+                </a:solidFill>
+                <a:latin typeface="Consolas"/>
+              </a:rPr>
+              <a:t>idMascota</a:t>
+            </a:r>
+            <a:r>
+              <a:rPr sz="1600" i="0" b="0">
+                <a:solidFill>
+                  <a:srgbClr val="D4D4D4"/>
+                </a:solidFill>
+                <a:latin typeface="Consolas"/>
+              </a:rPr>
+              <a:t>);</a:t>
+            </a:r>
+          </a:p>
+          <a:p>
+            <a:pPr>
+              <a:spcAft>
+                <a:spcPts val="342"/>
+              </a:spcAft>
+            </a:pPr>
+            <a:r>
+              <a:rPr sz="1600" i="0" b="0">
+                <a:solidFill>
+                  <a:srgbClr val="D4D4D4"/>
+                </a:solidFill>
+                <a:latin typeface="Consolas"/>
+              </a:rPr>
+              <a:t>}</a:t>
+            </a:r>
+          </a:p>
+          <a:p>
+            <a:pPr>
+              <a:spcAft>
+                <a:spcPts val="342"/>
+              </a:spcAft>
+            </a:pPr>
+            <a:r>
+              <a:rPr sz="1600" i="0" b="0">
+                <a:solidFill>
+                  <a:srgbClr val="569CD6"/>
+                </a:solidFill>
+                <a:latin typeface="Consolas"/>
+              </a:rPr>
+              <a:t>if</a:t>
+            </a:r>
+            <a:r>
+              <a:rPr sz="1600" i="0" b="0">
+                <a:solidFill>
+                  <a:srgbClr val="D4D4D4"/>
+                </a:solidFill>
+                <a:latin typeface="Consolas"/>
+              </a:rPr>
+              <a:t> (!</a:t>
+            </a:r>
+            <a:r>
+              <a:rPr sz="1600" i="0" b="0">
+                <a:solidFill>
+                  <a:srgbClr val="DCDCAA"/>
+                </a:solidFill>
+                <a:latin typeface="Consolas"/>
+              </a:rPr>
+              <a:t>mascota.estaActiva</a:t>
+            </a:r>
+            <a:r>
+              <a:rPr sz="1600" i="0" b="0">
+                <a:solidFill>
+                  <a:srgbClr val="D4D4D4"/>
+                </a:solidFill>
+                <a:latin typeface="Consolas"/>
+              </a:rPr>
+              <a:t>()) {</a:t>
+            </a:r>
+          </a:p>
+          <a:p>
+            <a:pPr>
+              <a:spcAft>
+                <a:spcPts val="342"/>
+              </a:spcAft>
+            </a:pPr>
+            <a:r>
+              <a:rPr sz="1600" i="0" b="0">
+                <a:solidFill>
+                  <a:srgbClr val="D4D4D4"/>
+                </a:solidFill>
+                <a:latin typeface="Consolas"/>
+              </a:rPr>
+              <a:t>    </a:t>
+            </a:r>
+            <a:r>
+              <a:rPr sz="1600" i="0" b="0">
+                <a:solidFill>
+                  <a:srgbClr val="569CD6"/>
+                </a:solidFill>
+                <a:latin typeface="Consolas"/>
+              </a:rPr>
+              <a:t>throw</a:t>
+            </a:r>
+            <a:r>
+              <a:rPr sz="1600" i="0" b="0">
+                <a:solidFill>
+                  <a:srgbClr val="D4D4D4"/>
+                </a:solidFill>
+                <a:latin typeface="Consolas"/>
+              </a:rPr>
+              <a:t> </a:t>
+            </a:r>
+            <a:r>
+              <a:rPr sz="1600" i="0" b="0">
+                <a:solidFill>
+                  <a:srgbClr val="569CD6"/>
+                </a:solidFill>
+                <a:latin typeface="Consolas"/>
+              </a:rPr>
+              <a:t>new</a:t>
+            </a:r>
+            <a:r>
+              <a:rPr sz="1600" i="0" b="0">
+                <a:solidFill>
+                  <a:srgbClr val="D4D4D4"/>
+                </a:solidFill>
+                <a:latin typeface="Consolas"/>
+              </a:rPr>
+              <a:t> </a:t>
+            </a:r>
+            <a:r>
+              <a:rPr sz="1600" i="0" b="0">
+                <a:solidFill>
+                  <a:srgbClr val="4EC9B0"/>
+                </a:solidFill>
+                <a:latin typeface="Consolas"/>
+              </a:rPr>
+              <a:t>IllegalStateException</a:t>
+            </a:r>
+            <a:r>
+              <a:rPr sz="1600" i="0" b="0">
+                <a:solidFill>
+                  <a:srgbClr val="D4D4D4"/>
+                </a:solidFill>
+                <a:latin typeface="Consolas"/>
+              </a:rPr>
+              <a:t>(</a:t>
+            </a:r>
+            <a:r>
+              <a:rPr sz="1600" i="0" b="0">
+                <a:solidFill>
+                  <a:srgbClr val="CE9178"/>
+                </a:solidFill>
+                <a:latin typeface="Consolas"/>
+              </a:rPr>
+              <a:t>"La mascota "</a:t>
+            </a:r>
+            <a:r>
+              <a:rPr sz="1600" i="0" b="0">
+                <a:solidFill>
+                  <a:srgbClr val="D4D4D4"/>
+                </a:solidFill>
+                <a:latin typeface="Consolas"/>
+              </a:rPr>
+              <a:t> + </a:t>
+            </a:r>
+            <a:r>
+              <a:rPr sz="1600" i="0" b="0">
+                <a:solidFill>
+                  <a:srgbClr val="DCDCAA"/>
+                </a:solidFill>
+                <a:latin typeface="Consolas"/>
+              </a:rPr>
+              <a:t>mascota.getNombre</a:t>
+            </a:r>
+            <a:r>
+              <a:rPr sz="1600" i="0" b="0">
+                <a:solidFill>
+                  <a:srgbClr val="D4D4D4"/>
+                </a:solidFill>
+                <a:latin typeface="Consolas"/>
+              </a:rPr>
+              <a:t>()</a:t>
+            </a:r>
+          </a:p>
+          <a:p>
+            <a:pPr>
+              <a:spcAft>
+                <a:spcPts val="342"/>
+              </a:spcAft>
+            </a:pPr>
+            <a:r>
+              <a:rPr sz="1600" i="0" b="0">
+                <a:solidFill>
+                  <a:srgbClr val="D4D4D4"/>
+                </a:solidFill>
+                <a:latin typeface="Consolas"/>
+              </a:rPr>
+              <a:t>            + </a:t>
+            </a:r>
+            <a:r>
+              <a:rPr sz="1600" i="0" b="0">
+                <a:solidFill>
+                  <a:srgbClr val="CE9178"/>
+                </a:solidFill>
+                <a:latin typeface="Consolas"/>
+              </a:rPr>
+              <a:t>" esta inactiva y no puede agendar citas."</a:t>
+            </a:r>
+            <a:r>
+              <a:rPr sz="1600" i="0" b="0">
+                <a:solidFill>
+                  <a:srgbClr val="D4D4D4"/>
+                </a:solidFill>
+                <a:latin typeface="Consolas"/>
+              </a:rPr>
+              <a:t>);</a:t>
+            </a:r>
+          </a:p>
+          <a:p>
+            <a:pPr>
+              <a:spcAft>
+                <a:spcPts val="342"/>
+              </a:spcAft>
+            </a:pPr>
+            <a:r>
+              <a:rPr sz="1600" i="0" b="0">
+                <a:solidFill>
+                  <a:srgbClr val="D4D4D4"/>
+                </a:solidFill>
+                <a:latin typeface="Consolas"/>
+              </a:rPr>
+              <a:t>}</a:t>
+            </a:r>
+          </a:p>
+        </p:txBody>
+      </p:sp>
+      <p:sp>
+        <p:nvSpPr>
+          <p:cNvPr id="13" name="TextBox 12"/>
+          <p:cNvSpPr txBox="1"/>
+          <p:nvPr/>
+        </p:nvSpPr>
+        <p:spPr>
+          <a:xfrm>
+            <a:off x="457200" y="6035040"/>
+            <a:ext cx="11277295" cy="365760"/>
+          </a:xfrm>
+          <a:prstGeom prst="rect">
+            <a:avLst/>
+          </a:prstGeom>
+          <a:noFill/>
+        </p:spPr>
+        <p:txBody>
+          <a:bodyPr wrap="square">
+            <a:spAutoFit/>
+          </a:bodyPr>
+          <a:lstStyle/>
+          <a:p>
             <a:pPr algn="ctr"/>
             <a:r>
               <a:rPr sz="1300" b="0" i="1">
@@ -16549,7 +16947,7 @@
       </p:sp>
       <p:sp>
         <p:nvSpPr>
-          <p:cNvPr id="13" name="TextBox 12"/>
+          <p:cNvPr id="14" name="TextBox 13"/>
           <p:cNvSpPr txBox="1"/>
           <p:nvPr/>
         </p:nvSpPr>
